--- a/mon/ngu_van/slide/lop10/Slide_NGUVAN10_Bai1_SucHapDanCuaTruyenKe_T1-11.pptx
+++ b/mon/ngu_van/slide/lop10/Slide_NGUVAN10_Bai1_SucHapDanCuaTruyenKe_T1-11.pptx
@@ -40,6 +40,10 @@
     <p:sldId id="288" r:id="rId40"/>
     <p:sldId id="289" r:id="rId41"/>
     <p:sldId id="290" r:id="rId42"/>
+    <p:sldId id="291" r:id="rId43"/>
+    <p:sldId id="292" r:id="rId44"/>
+    <p:sldId id="293" r:id="rId45"/>
+    <p:sldId id="294" r:id="rId46"/>
   </p:sldIdLst>
   <p:sldSz cx="12191695" cy="6858000" type="screen4x3"/>
   <p:notesSz cx="6858000" cy="9144000"/>
@@ -606,7 +610,7 @@
           <a:lstStyle/>
           <a:p>
             <a:r>
-              <a:t>Slide ĐỀ BÀI – cho HS suy nghĩ, thảo luận (không chiếu lời giải). </a:t>
+              <a:t>Slide LỜI GIẢI – GV chốt sau khi HS trình bày. </a:t>
             </a:r>
           </a:p>
         </p:txBody>
@@ -676,7 +680,7 @@
           <a:lstStyle/>
           <a:p>
             <a:r>
-              <a:t>Slide LỜI GIẢI – GV chốt sau khi HS trình bày. </a:t>
+              <a:t>Gợi Chuyện người con gái Nam Xương; dẫn vào truyện truyền kì.</a:t>
             </a:r>
           </a:p>
         </p:txBody>
@@ -746,7 +750,7 @@
           <a:lstStyle/>
           <a:p>
             <a:r>
-              <a:t>Slide ĐỀ BÀI – cho HS suy nghĩ, thảo luận (không chiếu lời giải). </a:t>
+              <a:t>Bấm vào đường link hoặc quét mã QR để mở video (cần Internet). Video do học sinh chuyển thể; GV xem trước, chọn đoạn phù hợp.</a:t>
             </a:r>
           </a:p>
         </p:txBody>
@@ -816,7 +820,7 @@
           <a:lstStyle/>
           <a:p>
             <a:r>
-              <a:t>Slide LỜI GIẢI – GV chốt sau khi HS trình bày. </a:t>
+              <a:t>Slide ĐỀ BÀI – cho HS suy nghĩ, thảo luận (không chiếu lời giải). </a:t>
             </a:r>
           </a:p>
         </p:txBody>
@@ -886,7 +890,7 @@
           <a:lstStyle/>
           <a:p>
             <a:r>
-              <a:t>Slide ĐỀ BÀI – cho HS suy nghĩ, thảo luận (không chiếu lời giải). </a:t>
+              <a:t>Slide LỜI GIẢI – GV chốt sau khi HS trình bày. </a:t>
             </a:r>
           </a:p>
         </p:txBody>
@@ -956,7 +960,7 @@
           <a:lstStyle/>
           <a:p>
             <a:r>
-              <a:t>Slide LỜI GIẢI – GV chốt sau khi HS trình bày. </a:t>
+              <a:t>Slide ĐỀ BÀI – cho HS suy nghĩ, thảo luận (không chiếu lời giải). </a:t>
             </a:r>
           </a:p>
         </p:txBody>
@@ -1026,7 +1030,7 @@
           <a:lstStyle/>
           <a:p>
             <a:r>
-              <a:t>Slide ĐỀ BÀI – cho HS suy nghĩ, thảo luận (không chiếu lời giải). </a:t>
+              <a:t>Slide LỜI GIẢI – GV chốt sau khi HS trình bày. </a:t>
             </a:r>
           </a:p>
         </p:txBody>
@@ -1096,7 +1100,7 @@
           <a:lstStyle/>
           <a:p>
             <a:r>
-              <a:t>Slide LỜI GIẢI – GV chốt sau khi HS trình bày. </a:t>
+              <a:t>Slide ĐỀ BÀI – cho HS suy nghĩ, thảo luận (không chiếu lời giải). </a:t>
             </a:r>
           </a:p>
         </p:txBody>
@@ -1166,7 +1170,7 @@
           <a:lstStyle/>
           <a:p>
             <a:r>
-              <a:t>Slide ĐỀ BÀI – cho HS suy nghĩ, thảo luận (không chiếu lời giải). </a:t>
+              <a:t>Slide LỜI GIẢI – GV chốt sau khi HS trình bày. </a:t>
             </a:r>
           </a:p>
         </p:txBody>
@@ -1236,7 +1240,7 @@
           <a:lstStyle/>
           <a:p>
             <a:r>
-              <a:t>Slide LỜI GIẢI – GV chốt sau khi HS trình bày. </a:t>
+              <a:t>Slide ĐỀ BÀI – cho HS suy nghĩ, thảo luận (không chiếu lời giải). </a:t>
             </a:r>
           </a:p>
         </p:txBody>
@@ -1376,7 +1380,7 @@
           <a:lstStyle/>
           <a:p>
             <a:r>
-              <a:t>Slide ĐỀ BÀI – cho HS suy nghĩ, thảo luận (không chiếu lời giải). </a:t>
+              <a:t>Slide LỜI GIẢI – GV chốt sau khi HS trình bày. </a:t>
             </a:r>
           </a:p>
         </p:txBody>
@@ -1446,7 +1450,7 @@
           <a:lstStyle/>
           <a:p>
             <a:r>
-              <a:t>Slide LỜI GIẢI – GV chốt sau khi HS trình bày. </a:t>
+              <a:t>Bấm vào đường link hoặc quét mã QR để mở video (cần Internet). Phim ngắn học sinh dựng; GV xem trước, chiếu đoạn cảnh cho chữ.</a:t>
             </a:r>
           </a:p>
         </p:txBody>
@@ -1611,6 +1615,286 @@
 </p:notes>
 </file>
 
+<file path=ppt/notesSlides/notesSlide24.xml><?xml version="1.0" encoding="utf-8"?>
+<p:notes xmlns:a="http://schemas.openxmlformats.org/drawingml/2006/main" xmlns:p="http://schemas.openxmlformats.org/presentationml/2006/main" xmlns:r="http://schemas.openxmlformats.org/officeDocument/2006/relationships">
+  <p:cSld>
+    <p:spTree>
+      <p:nvGrpSpPr>
+        <p:cNvPr id="1" name=""/>
+        <p:cNvGrpSpPr/>
+        <p:nvPr/>
+      </p:nvGrpSpPr>
+      <p:grpSpPr>
+        <a:xfrm>
+          <a:off x="0" y="0"/>
+          <a:ext cx="0" cy="0"/>
+          <a:chOff x="0" y="0"/>
+          <a:chExt cx="0" cy="0"/>
+        </a:xfrm>
+      </p:grpSpPr>
+      <p:sp>
+        <p:nvSpPr>
+          <p:cNvPr id="2" name="Slide Image Placeholder 1"/>
+          <p:cNvSpPr>
+            <a:spLocks noGrp="1"/>
+          </p:cNvSpPr>
+          <p:nvPr>
+            <p:ph type="sldImg" idx="2"/>
+          </p:nvPr>
+        </p:nvSpPr>
+        <p:spPr/>
+      </p:sp>
+      <p:sp>
+        <p:nvSpPr>
+          <p:cNvPr id="3" name="Notes Placeholder 2"/>
+          <p:cNvSpPr>
+            <a:spLocks noGrp="1"/>
+          </p:cNvSpPr>
+          <p:nvPr>
+            <p:ph type="body" idx="3" sz="quarter"/>
+          </p:nvPr>
+        </p:nvSpPr>
+        <p:spPr/>
+        <p:txBody>
+          <a:bodyPr/>
+          <a:lstStyle/>
+          <a:p>
+            <a:r>
+              <a:t>Slide ĐỀ BÀI – cho HS suy nghĩ, thảo luận (không chiếu lời giải). </a:t>
+            </a:r>
+          </a:p>
+        </p:txBody>
+      </p:sp>
+      <p:sp>
+        <p:nvSpPr>
+          <p:cNvPr id="4" name="Slide Number Placeholder 3"/>
+          <p:cNvSpPr>
+            <a:spLocks noGrp="1"/>
+          </p:cNvSpPr>
+          <p:nvPr>
+            <p:ph type="sldNum" idx="5" sz="quarter"/>
+          </p:nvPr>
+        </p:nvSpPr>
+        <p:spPr/>
+      </p:sp>
+    </p:spTree>
+  </p:cSld>
+  <p:clrMapOvr>
+    <a:masterClrMapping/>
+  </p:clrMapOvr>
+</p:notes>
+</file>
+
+<file path=ppt/notesSlides/notesSlide25.xml><?xml version="1.0" encoding="utf-8"?>
+<p:notes xmlns:a="http://schemas.openxmlformats.org/drawingml/2006/main" xmlns:p="http://schemas.openxmlformats.org/presentationml/2006/main" xmlns:r="http://schemas.openxmlformats.org/officeDocument/2006/relationships">
+  <p:cSld>
+    <p:spTree>
+      <p:nvGrpSpPr>
+        <p:cNvPr id="1" name=""/>
+        <p:cNvGrpSpPr/>
+        <p:nvPr/>
+      </p:nvGrpSpPr>
+      <p:grpSpPr>
+        <a:xfrm>
+          <a:off x="0" y="0"/>
+          <a:ext cx="0" cy="0"/>
+          <a:chOff x="0" y="0"/>
+          <a:chExt cx="0" cy="0"/>
+        </a:xfrm>
+      </p:grpSpPr>
+      <p:sp>
+        <p:nvSpPr>
+          <p:cNvPr id="2" name="Slide Image Placeholder 1"/>
+          <p:cNvSpPr>
+            <a:spLocks noGrp="1"/>
+          </p:cNvSpPr>
+          <p:nvPr>
+            <p:ph type="sldImg" idx="2"/>
+          </p:nvPr>
+        </p:nvSpPr>
+        <p:spPr/>
+      </p:sp>
+      <p:sp>
+        <p:nvSpPr>
+          <p:cNvPr id="3" name="Notes Placeholder 2"/>
+          <p:cNvSpPr>
+            <a:spLocks noGrp="1"/>
+          </p:cNvSpPr>
+          <p:nvPr>
+            <p:ph type="body" idx="3" sz="quarter"/>
+          </p:nvPr>
+        </p:nvSpPr>
+        <p:spPr/>
+        <p:txBody>
+          <a:bodyPr/>
+          <a:lstStyle/>
+          <a:p>
+            <a:r>
+              <a:t>Slide LỜI GIẢI – GV chốt sau khi HS trình bày. </a:t>
+            </a:r>
+          </a:p>
+        </p:txBody>
+      </p:sp>
+      <p:sp>
+        <p:nvSpPr>
+          <p:cNvPr id="4" name="Slide Number Placeholder 3"/>
+          <p:cNvSpPr>
+            <a:spLocks noGrp="1"/>
+          </p:cNvSpPr>
+          <p:nvPr>
+            <p:ph type="sldNum" idx="5" sz="quarter"/>
+          </p:nvPr>
+        </p:nvSpPr>
+        <p:spPr/>
+      </p:sp>
+    </p:spTree>
+  </p:cSld>
+  <p:clrMapOvr>
+    <a:masterClrMapping/>
+  </p:clrMapOvr>
+</p:notes>
+</file>
+
+<file path=ppt/notesSlides/notesSlide26.xml><?xml version="1.0" encoding="utf-8"?>
+<p:notes xmlns:a="http://schemas.openxmlformats.org/drawingml/2006/main" xmlns:p="http://schemas.openxmlformats.org/presentationml/2006/main" xmlns:r="http://schemas.openxmlformats.org/officeDocument/2006/relationships">
+  <p:cSld>
+    <p:spTree>
+      <p:nvGrpSpPr>
+        <p:cNvPr id="1" name=""/>
+        <p:cNvGrpSpPr/>
+        <p:nvPr/>
+      </p:nvGrpSpPr>
+      <p:grpSpPr>
+        <a:xfrm>
+          <a:off x="0" y="0"/>
+          <a:ext cx="0" cy="0"/>
+          <a:chOff x="0" y="0"/>
+          <a:chExt cx="0" cy="0"/>
+        </a:xfrm>
+      </p:grpSpPr>
+      <p:sp>
+        <p:nvSpPr>
+          <p:cNvPr id="2" name="Slide Image Placeholder 1"/>
+          <p:cNvSpPr>
+            <a:spLocks noGrp="1"/>
+          </p:cNvSpPr>
+          <p:nvPr>
+            <p:ph type="sldImg" idx="2"/>
+          </p:nvPr>
+        </p:nvSpPr>
+        <p:spPr/>
+      </p:sp>
+      <p:sp>
+        <p:nvSpPr>
+          <p:cNvPr id="3" name="Notes Placeholder 2"/>
+          <p:cNvSpPr>
+            <a:spLocks noGrp="1"/>
+          </p:cNvSpPr>
+          <p:nvPr>
+            <p:ph type="body" idx="3" sz="quarter"/>
+          </p:nvPr>
+        </p:nvSpPr>
+        <p:spPr/>
+        <p:txBody>
+          <a:bodyPr/>
+          <a:lstStyle/>
+          <a:p>
+            <a:r>
+              <a:t>Slide ĐỀ BÀI – cho HS suy nghĩ, thảo luận (không chiếu lời giải). </a:t>
+            </a:r>
+          </a:p>
+        </p:txBody>
+      </p:sp>
+      <p:sp>
+        <p:nvSpPr>
+          <p:cNvPr id="4" name="Slide Number Placeholder 3"/>
+          <p:cNvSpPr>
+            <a:spLocks noGrp="1"/>
+          </p:cNvSpPr>
+          <p:nvPr>
+            <p:ph type="sldNum" idx="5" sz="quarter"/>
+          </p:nvPr>
+        </p:nvSpPr>
+        <p:spPr/>
+      </p:sp>
+    </p:spTree>
+  </p:cSld>
+  <p:clrMapOvr>
+    <a:masterClrMapping/>
+  </p:clrMapOvr>
+</p:notes>
+</file>
+
+<file path=ppt/notesSlides/notesSlide27.xml><?xml version="1.0" encoding="utf-8"?>
+<p:notes xmlns:a="http://schemas.openxmlformats.org/drawingml/2006/main" xmlns:p="http://schemas.openxmlformats.org/presentationml/2006/main" xmlns:r="http://schemas.openxmlformats.org/officeDocument/2006/relationships">
+  <p:cSld>
+    <p:spTree>
+      <p:nvGrpSpPr>
+        <p:cNvPr id="1" name=""/>
+        <p:cNvGrpSpPr/>
+        <p:nvPr/>
+      </p:nvGrpSpPr>
+      <p:grpSpPr>
+        <a:xfrm>
+          <a:off x="0" y="0"/>
+          <a:ext cx="0" cy="0"/>
+          <a:chOff x="0" y="0"/>
+          <a:chExt cx="0" cy="0"/>
+        </a:xfrm>
+      </p:grpSpPr>
+      <p:sp>
+        <p:nvSpPr>
+          <p:cNvPr id="2" name="Slide Image Placeholder 1"/>
+          <p:cNvSpPr>
+            <a:spLocks noGrp="1"/>
+          </p:cNvSpPr>
+          <p:nvPr>
+            <p:ph type="sldImg" idx="2"/>
+          </p:nvPr>
+        </p:nvSpPr>
+        <p:spPr/>
+      </p:sp>
+      <p:sp>
+        <p:nvSpPr>
+          <p:cNvPr id="3" name="Notes Placeholder 2"/>
+          <p:cNvSpPr>
+            <a:spLocks noGrp="1"/>
+          </p:cNvSpPr>
+          <p:nvPr>
+            <p:ph type="body" idx="3" sz="quarter"/>
+          </p:nvPr>
+        </p:nvSpPr>
+        <p:spPr/>
+        <p:txBody>
+          <a:bodyPr/>
+          <a:lstStyle/>
+          <a:p>
+            <a:r>
+              <a:t>Slide LỜI GIẢI – GV chốt sau khi HS trình bày. </a:t>
+            </a:r>
+          </a:p>
+        </p:txBody>
+      </p:sp>
+      <p:sp>
+        <p:nvSpPr>
+          <p:cNvPr id="4" name="Slide Number Placeholder 3"/>
+          <p:cNvSpPr>
+            <a:spLocks noGrp="1"/>
+          </p:cNvSpPr>
+          <p:nvPr>
+            <p:ph type="sldNum" idx="5" sz="quarter"/>
+          </p:nvPr>
+        </p:nvSpPr>
+        <p:spPr/>
+      </p:sp>
+    </p:spTree>
+  </p:cSld>
+  <p:clrMapOvr>
+    <a:masterClrMapping/>
+  </p:clrMapOvr>
+</p:notes>
+</file>
+
 <file path=ppt/notesSlides/notesSlide3.xml><?xml version="1.0" encoding="utf-8"?>
 <p:notes xmlns:a="http://schemas.openxmlformats.org/drawingml/2006/main" xmlns:p="http://schemas.openxmlformats.org/presentationml/2006/main" xmlns:r="http://schemas.openxmlformats.org/officeDocument/2006/relationships">
   <p:cSld>
@@ -1656,7 +1940,7 @@
           <a:lstStyle/>
           <a:p>
             <a:r>
-              <a:t>Slide ĐỀ BÀI – cho HS suy nghĩ, thảo luận (không chiếu lời giải). </a:t>
+              <a:t>Bấm vào đường link hoặc quét mã QR để mở video (cần Internet). </a:t>
             </a:r>
           </a:p>
         </p:txBody>
@@ -1726,7 +2010,7 @@
           <a:lstStyle/>
           <a:p>
             <a:r>
-              <a:t>Slide LỜI GIẢI – GV chốt sau khi HS trình bày. </a:t>
+              <a:t>Bấm vào đường link hoặc quét mã QR để mở video (cần Internet). </a:t>
             </a:r>
           </a:p>
         </p:txBody>
@@ -2076,7 +2360,7 @@
           <a:lstStyle/>
           <a:p>
             <a:r>
-              <a:t>Gợi Chuyện người con gái Nam Xương; dẫn vào truyện truyền kì.</a:t>
+              <a:t>Slide ĐỀ BÀI – cho HS suy nghĩ, thảo luận (không chiếu lời giải). </a:t>
             </a:r>
           </a:p>
         </p:txBody>
@@ -5380,7 +5664,7 @@
                 </a:solidFill>
                 <a:latin typeface="Arial"/>
               </a:rPr>
-              <a:t>KHÁT VỌNG CỦA NGƯỜI XƯA</a:t>
+              <a:t>THẦN SÉT VÀ THẦN GIÓ</a:t>
             </a:r>
           </a:p>
         </p:txBody>
@@ -5498,7 +5782,7 @@
                 </a:solidFill>
                 <a:latin typeface="Calibri"/>
               </a:rPr>
-              <a:t>Qua chùm truyện, người xưa thể hiện quan niệm, nhận thức và khát vọng gì về thế giới tự nhiên?</a:t>
+              <a:t>Hình dạng, tính khí, công việc của thần Sét và thần Gió có gì đặc biệt? Các chi tiết ấy lí giải hiện tượng nào?</a:t>
             </a:r>
           </a:p>
         </p:txBody>
@@ -5585,7 +5869,7 @@
                 </a:solidFill>
                 <a:latin typeface="Calibri"/>
               </a:rPr>
-              <a:t>💡 Vì sao các vị thần đều vĩ đại, phi thường?</a:t>
+              <a:t>💡 Liên hệ đặc điểm của sấm sét, gió bão.</a:t>
             </a:r>
           </a:p>
         </p:txBody>
@@ -5742,7 +6026,7 @@
                 </a:solidFill>
                 <a:latin typeface="Arial"/>
               </a:rPr>
-              <a:t>KHÁT VỌNG CỦA NGƯỜI XƯA</a:t>
+              <a:t>THẦN SÉT VÀ THẦN GIÓ</a:t>
             </a:r>
           </a:p>
         </p:txBody>
@@ -5865,7 +6149,7 @@
                 </a:solidFill>
                 <a:latin typeface="Calibri"/>
               </a:rPr>
-              <a:t>Tự nhiên bí ẩn → tạo các vị thần để lí giải.</a:t>
+              <a:t>Thần Sét: mặt mũi nanh ác, nóng nảy; lưỡi búa đá; thi hành luật pháp ở trần gian.</a:t>
             </a:r>
           </a:p>
           <a:p>
@@ -5886,7 +6170,7 @@
                 </a:solidFill>
                 <a:latin typeface="Calibri"/>
               </a:rPr>
-              <a:t>Gửi gắm khát vọng khám phá, chinh phục tự nhiên.</a:t>
+              <a:t>Thần Gió: không có đầu, quạt màu nhiệm; tạo gió bão; con thần Gió hoá cây ngải gió.</a:t>
             </a:r>
           </a:p>
           <a:p>
@@ -5907,7 +6191,7 @@
                 </a:solidFill>
                 <a:latin typeface="Calibri"/>
               </a:rPr>
-              <a:t>Thái độ tôn kính, ngưỡng mộ, niềm tin.</a:t>
+              <a:t>Lí giải sấm sét, gió bão, tập tục bắt chước tiếng gà, kinh nghiệm dùng lá ngải.</a:t>
             </a:r>
           </a:p>
         </p:txBody>
@@ -5921,7 +6205,7 @@
         <p:spPr>
           <a:xfrm>
             <a:off x="731520" y="5074920"/>
-            <a:ext cx="10789920" cy="731520"/>
+            <a:ext cx="10789920" cy="1188720"/>
           </a:xfrm>
           <a:prstGeom prst="roundRect">
             <a:avLst>
@@ -5969,7 +6253,7 @@
         <p:spPr>
           <a:xfrm>
             <a:off x="914400" y="5074920"/>
-            <a:ext cx="10424160" cy="731520"/>
+            <a:ext cx="10424160" cy="1188720"/>
           </a:xfrm>
           <a:prstGeom prst="rect">
             <a:avLst/>
@@ -5994,7 +6278,7 @@
                 </a:solidFill>
                 <a:latin typeface="Calibri"/>
               </a:rPr>
-              <a:t>Thần thoại – “vẻ đẹp một đi không trở lại”.</a:t>
+              <a:t>Nhân hoá tự nhiên thành các vị thần – thế giới quan “vạn vật hữu linh”.</a:t>
             </a:r>
           </a:p>
         </p:txBody>
@@ -6013,7 +6297,7 @@
     <p:bg>
       <p:bgPr>
         <a:solidFill>
-          <a:srgbClr val="F8F9FA"/>
+          <a:srgbClr val="FFFFFF"/>
         </a:solidFill>
         <a:effectLst/>
       </p:bgPr>
@@ -6033,14 +6317,14 @@
         </p:nvSpPr>
         <p:spPr>
           <a:xfrm>
-            <a:off x="548640" y="2926080"/>
-            <a:ext cx="164592" cy="1005840"/>
+            <a:off x="457200" y="384048"/>
+            <a:ext cx="109728" cy="658368"/>
           </a:xfrm>
           <a:prstGeom prst="rect">
             <a:avLst/>
           </a:prstGeom>
           <a:solidFill>
-            <a:srgbClr val="991B1B"/>
+            <a:srgbClr val="1E40AF"/>
           </a:solidFill>
           <a:ln>
             <a:noFill/>
@@ -6071,14 +6355,67 @@
       </p:sp>
       <p:sp>
         <p:nvSpPr>
-          <p:cNvPr id="3" name="TextBox 2"/>
+          <p:cNvPr id="3" name="Rounded Rectangle 2"/>
+          <p:cNvSpPr/>
+          <p:nvPr/>
+        </p:nvSpPr>
+        <p:spPr>
+          <a:xfrm>
+            <a:off x="10253167" y="457200"/>
+            <a:ext cx="1389888" cy="457200"/>
+          </a:xfrm>
+          <a:prstGeom prst="roundRect">
+            <a:avLst/>
+          </a:prstGeom>
+          <a:solidFill>
+            <a:srgbClr val="1E40AF"/>
+          </a:solidFill>
+          <a:ln>
+            <a:noFill/>
+          </a:ln>
+          <a:effectLst/>
+        </p:spPr>
+        <p:style>
+          <a:lnRef idx="1">
+            <a:schemeClr val="accent1"/>
+          </a:lnRef>
+          <a:fillRef idx="3">
+            <a:schemeClr val="accent1"/>
+          </a:fillRef>
+          <a:effectRef idx="2">
+            <a:schemeClr val="accent1"/>
+          </a:effectRef>
+          <a:fontRef idx="minor">
+            <a:schemeClr val="lt1"/>
+          </a:fontRef>
+        </p:style>
+        <p:txBody>
+          <a:bodyPr rtlCol="0" anchor="ctr" wrap="none" tIns="0" bIns="0"/>
+          <a:lstStyle/>
+          <a:p>
+            <a:pPr algn="ctr"/>
+            <a:r>
+              <a:rPr sz="1400" b="1">
+                <a:solidFill>
+                  <a:srgbClr val="FFFFFF"/>
+                </a:solidFill>
+                <a:latin typeface="Arial"/>
+              </a:rPr>
+              <a:t>ĐỀ BÀI</a:t>
+            </a:r>
+          </a:p>
+        </p:txBody>
+      </p:sp>
+      <p:sp>
+        <p:nvSpPr>
+          <p:cNvPr id="4" name="TextBox 3"/>
           <p:cNvSpPr txBox="1"/>
           <p:nvPr/>
         </p:nvSpPr>
         <p:spPr>
           <a:xfrm>
-            <a:off x="914400" y="2743200"/>
-            <a:ext cx="10515600" cy="1371600"/>
+            <a:off x="731520" y="274320"/>
+            <a:ext cx="9582912" cy="868680"/>
           </a:xfrm>
           <a:prstGeom prst="rect">
             <a:avLst/>
@@ -6086,7 +6423,120 @@
           <a:noFill/>
         </p:spPr>
         <p:txBody>
-          <a:bodyPr wrap="square" anchor="ctr" lIns="45720" rIns="45720">
+          <a:bodyPr wrap="square" anchor="ctr">
+            <a:spAutoFit/>
+          </a:bodyPr>
+          <a:lstStyle/>
+          <a:p>
+            <a:r>
+              <a:rPr sz="3600" b="1">
+                <a:solidFill>
+                  <a:srgbClr val="1E40AF"/>
+                </a:solidFill>
+                <a:latin typeface="Arial"/>
+              </a:rPr>
+              <a:t>KHÁT VỌNG CỦA NGƯỜI XƯA</a:t>
+            </a:r>
+          </a:p>
+        </p:txBody>
+      </p:sp>
+      <p:sp>
+        <p:nvSpPr>
+          <p:cNvPr id="5" name="Rectangle 4"/>
+          <p:cNvSpPr/>
+          <p:nvPr/>
+        </p:nvSpPr>
+        <p:spPr>
+          <a:xfrm>
+            <a:off x="457200" y="1207008"/>
+            <a:ext cx="11274552" cy="22000"/>
+          </a:xfrm>
+          <a:prstGeom prst="rect">
+            <a:avLst/>
+          </a:prstGeom>
+          <a:solidFill>
+            <a:srgbClr val="E2E8F0"/>
+          </a:solidFill>
+          <a:ln>
+            <a:noFill/>
+          </a:ln>
+          <a:effectLst/>
+        </p:spPr>
+        <p:style>
+          <a:lnRef idx="1">
+            <a:schemeClr val="accent1"/>
+          </a:lnRef>
+          <a:fillRef idx="3">
+            <a:schemeClr val="accent1"/>
+          </a:fillRef>
+          <a:effectRef idx="2">
+            <a:schemeClr val="accent1"/>
+          </a:effectRef>
+          <a:fontRef idx="minor">
+            <a:schemeClr val="lt1"/>
+          </a:fontRef>
+        </p:style>
+        <p:txBody>
+          <a:bodyPr rtlCol="0" anchor="ctr"/>
+          <a:lstStyle/>
+          <a:p>
+            <a:pPr algn="ctr"/>
+          </a:p>
+        </p:txBody>
+      </p:sp>
+      <p:sp>
+        <p:nvSpPr>
+          <p:cNvPr id="6" name="TextBox 5"/>
+          <p:cNvSpPr txBox="1"/>
+          <p:nvPr/>
+        </p:nvSpPr>
+        <p:spPr>
+          <a:xfrm>
+            <a:off x="457200" y="6355080"/>
+            <a:ext cx="11274552" cy="365760"/>
+          </a:xfrm>
+          <a:prstGeom prst="rect">
+            <a:avLst/>
+          </a:prstGeom>
+          <a:noFill/>
+        </p:spPr>
+        <p:txBody>
+          <a:bodyPr wrap="none">
+            <a:spAutoFit/>
+          </a:bodyPr>
+          <a:lstStyle/>
+          <a:p>
+            <a:pPr algn="r"/>
+            <a:r>
+              <a:rPr sz="1200">
+                <a:solidFill>
+                  <a:srgbClr val="64748B"/>
+                </a:solidFill>
+                <a:latin typeface="Calibri"/>
+              </a:rPr>
+              <a:t>Ngữ văn 10 · Bài 1: Sức Hấp Dẫn Của Truyện Kể          12</a:t>
+            </a:r>
+          </a:p>
+        </p:txBody>
+      </p:sp>
+      <p:sp>
+        <p:nvSpPr>
+          <p:cNvPr id="7" name="TextBox 6"/>
+          <p:cNvSpPr txBox="1"/>
+          <p:nvPr/>
+        </p:nvSpPr>
+        <p:spPr>
+          <a:xfrm>
+            <a:off x="731520" y="1463040"/>
+            <a:ext cx="10789920" cy="3566160"/>
+          </a:xfrm>
+          <a:prstGeom prst="rect">
+            <a:avLst/>
+          </a:prstGeom>
+          <a:noFill/>
+        </p:spPr>
+        <p:txBody>
+          <a:bodyPr wrap="square" anchor="t" lIns="45720" rIns="45720">
             <a:spAutoFit/>
           </a:bodyPr>
           <a:lstStyle/>
@@ -6097,13 +6547,100 @@
               </a:spcAft>
             </a:pPr>
             <a:r>
-              <a:rPr sz="3600" b="1">
+              <a:rPr sz="2600" b="1">
+                <a:solidFill>
+                  <a:srgbClr val="1E293B"/>
+                </a:solidFill>
+                <a:latin typeface="Calibri"/>
+              </a:rPr>
+              <a:t>Qua chùm truyện, người xưa thể hiện quan niệm, nhận thức và khát vọng gì về thế giới tự nhiên?</a:t>
+            </a:r>
+          </a:p>
+        </p:txBody>
+      </p:sp>
+      <p:sp>
+        <p:nvSpPr>
+          <p:cNvPr id="8" name="Rounded Rectangle 7"/>
+          <p:cNvSpPr/>
+          <p:nvPr/>
+        </p:nvSpPr>
+        <p:spPr>
+          <a:xfrm>
+            <a:off x="731520" y="5120640"/>
+            <a:ext cx="10789920" cy="693420"/>
+          </a:xfrm>
+          <a:prstGeom prst="roundRect">
+            <a:avLst>
+              <a:gd name="adj" fmla="val 8000"/>
+            </a:avLst>
+          </a:prstGeom>
+          <a:solidFill>
+            <a:srgbClr val="EFF4FF"/>
+          </a:solidFill>
+          <a:ln w="19050">
+            <a:solidFill>
+              <a:srgbClr val="1E40AF"/>
+            </a:solidFill>
+          </a:ln>
+          <a:effectLst/>
+        </p:spPr>
+        <p:style>
+          <a:lnRef idx="1">
+            <a:schemeClr val="accent1"/>
+          </a:lnRef>
+          <a:fillRef idx="3">
+            <a:schemeClr val="accent1"/>
+          </a:fillRef>
+          <a:effectRef idx="2">
+            <a:schemeClr val="accent1"/>
+          </a:effectRef>
+          <a:fontRef idx="minor">
+            <a:schemeClr val="lt1"/>
+          </a:fontRef>
+        </p:style>
+        <p:txBody>
+          <a:bodyPr rtlCol="0" anchor="ctr"/>
+          <a:lstStyle/>
+          <a:p>
+            <a:pPr algn="ctr"/>
+          </a:p>
+        </p:txBody>
+      </p:sp>
+      <p:sp>
+        <p:nvSpPr>
+          <p:cNvPr id="9" name="TextBox 8"/>
+          <p:cNvSpPr txBox="1"/>
+          <p:nvPr/>
+        </p:nvSpPr>
+        <p:spPr>
+          <a:xfrm>
+            <a:off x="914400" y="5120640"/>
+            <a:ext cx="10424160" cy="693420"/>
+          </a:xfrm>
+          <a:prstGeom prst="rect">
+            <a:avLst/>
+          </a:prstGeom>
+          <a:noFill/>
+        </p:spPr>
+        <p:txBody>
+          <a:bodyPr wrap="square" anchor="ctr" lIns="45720" rIns="45720">
+            <a:spAutoFit/>
+          </a:bodyPr>
+          <a:lstStyle/>
+          <a:p>
+            <a:pPr algn="l">
+              <a:spcAft>
+                <a:spcPts val="400"/>
+              </a:spcAft>
+            </a:pPr>
+            <a:r>
+              <a:rPr sz="2200" b="1">
                 <a:solidFill>
                   <a:srgbClr val="1E40AF"/>
                 </a:solidFill>
                 <a:latin typeface="Calibri"/>
               </a:rPr>
-              <a:t>TIẾT 3 – 4: CHUYỆN CHỨC PHÁN SỰ ĐỀN TẢN VIÊN (Nguyễn Dữ)</a:t>
+              <a:t>💡 Vì sao các vị thần đều vĩ đại, phi thường?</a:t>
             </a:r>
           </a:p>
         </p:txBody>
@@ -6186,14 +6723,14 @@
         </p:nvSpPr>
         <p:spPr>
           <a:xfrm>
-            <a:off x="9786823" y="457200"/>
-            <a:ext cx="1856232" cy="457200"/>
+            <a:off x="9942271" y="457200"/>
+            <a:ext cx="1700784" cy="457200"/>
           </a:xfrm>
           <a:prstGeom prst="roundRect">
             <a:avLst/>
           </a:prstGeom>
           <a:solidFill>
-            <a:srgbClr val="1E40AF"/>
+            <a:srgbClr val="991B1B"/>
           </a:solidFill>
           <a:ln>
             <a:noFill/>
@@ -6226,7 +6763,7 @@
                 </a:solidFill>
                 <a:latin typeface="Arial"/>
               </a:rPr>
-              <a:t>KHỞI ĐỘNG</a:t>
+              <a:t>LỜI GIẢI</a:t>
             </a:r>
           </a:p>
         </p:txBody>
@@ -6240,7 +6777,7 @@
         <p:spPr>
           <a:xfrm>
             <a:off x="731520" y="274320"/>
-            <a:ext cx="9116568" cy="868680"/>
+            <a:ext cx="9272016" cy="868680"/>
           </a:xfrm>
           <a:prstGeom prst="rect">
             <a:avLst/>
@@ -6260,7 +6797,7 @@
                 </a:solidFill>
                 <a:latin typeface="Arial"/>
               </a:rPr>
-              <a:t>KHỞI ĐỘNG</a:t>
+              <a:t>KHÁT VỌNG CỦA NGƯỜI XƯA</a:t>
             </a:r>
           </a:p>
         </p:txBody>
@@ -6353,7 +6890,7 @@
         <p:spPr>
           <a:xfrm>
             <a:off x="731520" y="1463040"/>
-            <a:ext cx="10789920" cy="4572000"/>
+            <a:ext cx="10789920" cy="3474720"/>
           </a:xfrm>
           <a:prstGeom prst="rect">
             <a:avLst/>
@@ -6366,35 +6903,153 @@
           </a:bodyPr>
           <a:lstStyle/>
           <a:p>
-            <a:pPr algn="l">
+            <a:pPr algn="l" marL="365760" indent="-365760">
               <a:spcAft>
                 <a:spcPts val="800"/>
               </a:spcAft>
+              <a:buClr>
+                <a:srgbClr val="1E40AF"/>
+              </a:buClr>
+              <a:buFont typeface="Arial"/>
+              <a:buChar char="•"/>
             </a:pPr>
             <a:r>
-              <a:rPr sz="2600" b="1">
+              <a:rPr sz="2300">
                 <a:solidFill>
                   <a:srgbClr val="1E293B"/>
                 </a:solidFill>
                 <a:latin typeface="Calibri"/>
               </a:rPr>
-              <a:t>Hình ảnh gợi em nhớ đến tác phẩm nào của Nguyễn Dữ đã học ở THCS?</a:t>
-            </a:r>
-          </a:p>
-          <a:p>
-            <a:pPr algn="l">
+              <a:t>Tự nhiên bí ẩn → tạo các vị thần để lí giải.</a:t>
+            </a:r>
+          </a:p>
+          <a:p>
+            <a:pPr algn="l" marL="365760" indent="-365760">
               <a:spcAft>
                 <a:spcPts val="800"/>
               </a:spcAft>
+              <a:buClr>
+                <a:srgbClr val="1E40AF"/>
+              </a:buClr>
+              <a:buFont typeface="Arial"/>
+              <a:buChar char="•"/>
             </a:pPr>
             <a:r>
-              <a:rPr sz="2600" b="1">
+              <a:rPr sz="2300">
                 <a:solidFill>
                   <a:srgbClr val="1E293B"/>
                 </a:solidFill>
                 <a:latin typeface="Calibri"/>
               </a:rPr>
-              <a:t>Trong tác phẩm ấy có chi tiết kì ảo nào?</a:t>
+              <a:t>Gửi gắm khát vọng khám phá, chinh phục tự nhiên.</a:t>
+            </a:r>
+          </a:p>
+          <a:p>
+            <a:pPr algn="l" marL="365760" indent="-365760">
+              <a:spcAft>
+                <a:spcPts val="800"/>
+              </a:spcAft>
+              <a:buClr>
+                <a:srgbClr val="1E40AF"/>
+              </a:buClr>
+              <a:buFont typeface="Arial"/>
+              <a:buChar char="•"/>
+            </a:pPr>
+            <a:r>
+              <a:rPr sz="2300">
+                <a:solidFill>
+                  <a:srgbClr val="1E293B"/>
+                </a:solidFill>
+                <a:latin typeface="Calibri"/>
+              </a:rPr>
+              <a:t>Thái độ tôn kính, ngưỡng mộ, niềm tin.</a:t>
+            </a:r>
+          </a:p>
+        </p:txBody>
+      </p:sp>
+      <p:sp>
+        <p:nvSpPr>
+          <p:cNvPr id="8" name="Rounded Rectangle 7"/>
+          <p:cNvSpPr/>
+          <p:nvPr/>
+        </p:nvSpPr>
+        <p:spPr>
+          <a:xfrm>
+            <a:off x="731520" y="5074920"/>
+            <a:ext cx="10789920" cy="731520"/>
+          </a:xfrm>
+          <a:prstGeom prst="roundRect">
+            <a:avLst>
+              <a:gd name="adj" fmla="val 8000"/>
+            </a:avLst>
+          </a:prstGeom>
+          <a:solidFill>
+            <a:srgbClr val="FEF2F2"/>
+          </a:solidFill>
+          <a:ln w="19050">
+            <a:solidFill>
+              <a:srgbClr val="991B1B"/>
+            </a:solidFill>
+          </a:ln>
+          <a:effectLst/>
+        </p:spPr>
+        <p:style>
+          <a:lnRef idx="1">
+            <a:schemeClr val="accent1"/>
+          </a:lnRef>
+          <a:fillRef idx="3">
+            <a:schemeClr val="accent1"/>
+          </a:fillRef>
+          <a:effectRef idx="2">
+            <a:schemeClr val="accent1"/>
+          </a:effectRef>
+          <a:fontRef idx="minor">
+            <a:schemeClr val="lt1"/>
+          </a:fontRef>
+        </p:style>
+        <p:txBody>
+          <a:bodyPr rtlCol="0" anchor="ctr"/>
+          <a:lstStyle/>
+          <a:p>
+            <a:pPr algn="ctr"/>
+          </a:p>
+        </p:txBody>
+      </p:sp>
+      <p:sp>
+        <p:nvSpPr>
+          <p:cNvPr id="9" name="TextBox 8"/>
+          <p:cNvSpPr txBox="1"/>
+          <p:nvPr/>
+        </p:nvSpPr>
+        <p:spPr>
+          <a:xfrm>
+            <a:off x="914400" y="5074920"/>
+            <a:ext cx="10424160" cy="731520"/>
+          </a:xfrm>
+          <a:prstGeom prst="rect">
+            <a:avLst/>
+          </a:prstGeom>
+          <a:noFill/>
+        </p:spPr>
+        <p:txBody>
+          <a:bodyPr wrap="square" anchor="ctr" lIns="45720" rIns="45720">
+            <a:spAutoFit/>
+          </a:bodyPr>
+          <a:lstStyle/>
+          <a:p>
+            <a:pPr algn="l">
+              <a:spcAft>
+                <a:spcPts val="400"/>
+              </a:spcAft>
+            </a:pPr>
+            <a:r>
+              <a:rPr sz="2400" b="1">
+                <a:solidFill>
+                  <a:srgbClr val="991B1B"/>
+                </a:solidFill>
+                <a:latin typeface="Calibri"/>
+              </a:rPr>
+              <a:t>Thần thoại – “vẻ đẹp một đi không trở lại”.</a:t>
             </a:r>
           </a:p>
         </p:txBody>
@@ -6413,7 +7068,7 @@
     <p:bg>
       <p:bgPr>
         <a:solidFill>
-          <a:srgbClr val="FFFFFF"/>
+          <a:srgbClr val="F8F9FA"/>
         </a:solidFill>
         <a:effectLst/>
       </p:bgPr>
@@ -6433,14 +7088,14 @@
         </p:nvSpPr>
         <p:spPr>
           <a:xfrm>
-            <a:off x="457200" y="384048"/>
-            <a:ext cx="109728" cy="658368"/>
+            <a:off x="548640" y="2926080"/>
+            <a:ext cx="164592" cy="1005840"/>
           </a:xfrm>
           <a:prstGeom prst="rect">
             <a:avLst/>
           </a:prstGeom>
           <a:solidFill>
-            <a:srgbClr val="1E40AF"/>
+            <a:srgbClr val="991B1B"/>
           </a:solidFill>
           <a:ln>
             <a:noFill/>
@@ -6471,67 +7126,14 @@
       </p:sp>
       <p:sp>
         <p:nvSpPr>
-          <p:cNvPr id="3" name="Rounded Rectangle 2"/>
-          <p:cNvSpPr/>
-          <p:nvPr/>
-        </p:nvSpPr>
-        <p:spPr>
-          <a:xfrm>
-            <a:off x="10097719" y="457200"/>
-            <a:ext cx="1545336" cy="457200"/>
-          </a:xfrm>
-          <a:prstGeom prst="roundRect">
-            <a:avLst/>
-          </a:prstGeom>
-          <a:solidFill>
-            <a:srgbClr val="166534"/>
-          </a:solidFill>
-          <a:ln>
-            <a:noFill/>
-          </a:ln>
-          <a:effectLst/>
-        </p:spPr>
-        <p:style>
-          <a:lnRef idx="1">
-            <a:schemeClr val="accent1"/>
-          </a:lnRef>
-          <a:fillRef idx="3">
-            <a:schemeClr val="accent1"/>
-          </a:fillRef>
-          <a:effectRef idx="2">
-            <a:schemeClr val="accent1"/>
-          </a:effectRef>
-          <a:fontRef idx="minor">
-            <a:schemeClr val="lt1"/>
-          </a:fontRef>
-        </p:style>
-        <p:txBody>
-          <a:bodyPr rtlCol="0" anchor="ctr" wrap="none" tIns="0" bIns="0"/>
-          <a:lstStyle/>
-          <a:p>
-            <a:pPr algn="ctr"/>
-            <a:r>
-              <a:rPr sz="1400" b="1">
-                <a:solidFill>
-                  <a:srgbClr val="FFFFFF"/>
-                </a:solidFill>
-                <a:latin typeface="Arial"/>
-              </a:rPr>
-              <a:t>GHI NHỚ</a:t>
-            </a:r>
-          </a:p>
-        </p:txBody>
-      </p:sp>
-      <p:sp>
-        <p:nvSpPr>
-          <p:cNvPr id="4" name="TextBox 3"/>
+          <p:cNvPr id="3" name="TextBox 2"/>
           <p:cNvSpPr txBox="1"/>
           <p:nvPr/>
         </p:nvSpPr>
         <p:spPr>
           <a:xfrm>
-            <a:off x="731520" y="274320"/>
-            <a:ext cx="9427464" cy="868680"/>
+            <a:off x="914400" y="2743200"/>
+            <a:ext cx="10515600" cy="1371600"/>
           </a:xfrm>
           <a:prstGeom prst="rect">
             <a:avLst/>
@@ -6539,184 +7141,24 @@
           <a:noFill/>
         </p:spPr>
         <p:txBody>
-          <a:bodyPr wrap="square" anchor="ctr">
+          <a:bodyPr wrap="square" anchor="ctr" lIns="45720" rIns="45720">
             <a:spAutoFit/>
           </a:bodyPr>
           <a:lstStyle/>
           <a:p>
-            <a:r>
-              <a:rPr sz="3600" b="1">
-                <a:solidFill>
-                  <a:srgbClr val="1E40AF"/>
-                </a:solidFill>
-                <a:latin typeface="Arial"/>
-              </a:rPr>
-              <a:t>TRUYỆN TRUYỀN KÌ</a:t>
-            </a:r>
-          </a:p>
-        </p:txBody>
-      </p:sp>
-      <p:sp>
-        <p:nvSpPr>
-          <p:cNvPr id="5" name="Rectangle 4"/>
-          <p:cNvSpPr/>
-          <p:nvPr/>
-        </p:nvSpPr>
-        <p:spPr>
-          <a:xfrm>
-            <a:off x="457200" y="1207008"/>
-            <a:ext cx="11274552" cy="22000"/>
-          </a:xfrm>
-          <a:prstGeom prst="rect">
-            <a:avLst/>
-          </a:prstGeom>
-          <a:solidFill>
-            <a:srgbClr val="E2E8F0"/>
-          </a:solidFill>
-          <a:ln>
-            <a:noFill/>
-          </a:ln>
-          <a:effectLst/>
-        </p:spPr>
-        <p:style>
-          <a:lnRef idx="1">
-            <a:schemeClr val="accent1"/>
-          </a:lnRef>
-          <a:fillRef idx="3">
-            <a:schemeClr val="accent1"/>
-          </a:fillRef>
-          <a:effectRef idx="2">
-            <a:schemeClr val="accent1"/>
-          </a:effectRef>
-          <a:fontRef idx="minor">
-            <a:schemeClr val="lt1"/>
-          </a:fontRef>
-        </p:style>
-        <p:txBody>
-          <a:bodyPr rtlCol="0" anchor="ctr"/>
-          <a:lstStyle/>
-          <a:p>
-            <a:pPr algn="ctr"/>
-          </a:p>
-        </p:txBody>
-      </p:sp>
-      <p:sp>
-        <p:nvSpPr>
-          <p:cNvPr id="6" name="TextBox 5"/>
-          <p:cNvSpPr txBox="1"/>
-          <p:nvPr/>
-        </p:nvSpPr>
-        <p:spPr>
-          <a:xfrm>
-            <a:off x="457200" y="6355080"/>
-            <a:ext cx="11274552" cy="365760"/>
-          </a:xfrm>
-          <a:prstGeom prst="rect">
-            <a:avLst/>
-          </a:prstGeom>
-          <a:noFill/>
-        </p:spPr>
-        <p:txBody>
-          <a:bodyPr wrap="none">
-            <a:spAutoFit/>
-          </a:bodyPr>
-          <a:lstStyle/>
-          <a:p>
-            <a:pPr algn="r"/>
-            <a:r>
-              <a:rPr sz="1200">
-                <a:solidFill>
-                  <a:srgbClr val="64748B"/>
-                </a:solidFill>
-                <a:latin typeface="Calibri"/>
-              </a:rPr>
-              <a:t>Ngữ văn 10 · Bài 1: Sức Hấp Dẫn Của Truyện Kể          14</a:t>
-            </a:r>
-          </a:p>
-        </p:txBody>
-      </p:sp>
-      <p:sp>
-        <p:nvSpPr>
-          <p:cNvPr id="7" name="TextBox 6"/>
-          <p:cNvSpPr txBox="1"/>
-          <p:nvPr/>
-        </p:nvSpPr>
-        <p:spPr>
-          <a:xfrm>
-            <a:off x="731520" y="1463040"/>
-            <a:ext cx="10789920" cy="4754880"/>
-          </a:xfrm>
-          <a:prstGeom prst="rect">
-            <a:avLst/>
-          </a:prstGeom>
-          <a:noFill/>
-        </p:spPr>
-        <p:txBody>
-          <a:bodyPr wrap="square" anchor="t" lIns="45720" rIns="45720">
-            <a:spAutoFit/>
-          </a:bodyPr>
-          <a:lstStyle/>
-          <a:p>
-            <a:pPr algn="l" marL="365760" indent="-365760">
+            <a:pPr algn="l">
               <a:spcAft>
                 <a:spcPts val="800"/>
               </a:spcAft>
-              <a:buClr>
-                <a:srgbClr val="1E40AF"/>
-              </a:buClr>
-              <a:buFont typeface="Arial"/>
-              <a:buChar char="•"/>
             </a:pPr>
             <a:r>
-              <a:rPr sz="2400">
-                <a:solidFill>
-                  <a:srgbClr val="1E293B"/>
+              <a:rPr sz="3600" b="1">
+                <a:solidFill>
+                  <a:srgbClr val="1E40AF"/>
                 </a:solidFill>
                 <a:latin typeface="Calibri"/>
               </a:rPr>
-              <a:t>Thể văn xuôi tự sự thời trung đại, phản ánh hiện thực qua yếu tố hoang đường, kì ảo.</a:t>
-            </a:r>
-          </a:p>
-          <a:p>
-            <a:pPr algn="l" marL="365760" indent="-365760">
-              <a:spcAft>
-                <a:spcPts val="800"/>
-              </a:spcAft>
-              <a:buClr>
-                <a:srgbClr val="1E40AF"/>
-              </a:buClr>
-              <a:buFont typeface="Arial"/>
-              <a:buChar char="•"/>
-            </a:pPr>
-            <a:r>
-              <a:rPr sz="2400">
-                <a:solidFill>
-                  <a:srgbClr val="1E293B"/>
-                </a:solidFill>
-                <a:latin typeface="Calibri"/>
-              </a:rPr>
-              <a:t>Thế giới người và cõi âm có sự giao thoa.</a:t>
-            </a:r>
-          </a:p>
-          <a:p>
-            <a:pPr algn="l" marL="365760" indent="-365760">
-              <a:spcAft>
-                <a:spcPts val="800"/>
-              </a:spcAft>
-              <a:buClr>
-                <a:srgbClr val="1E40AF"/>
-              </a:buClr>
-              <a:buFont typeface="Arial"/>
-              <a:buChar char="•"/>
-            </a:pPr>
-            <a:r>
-              <a:rPr sz="2400">
-                <a:solidFill>
-                  <a:srgbClr val="1E293B"/>
-                </a:solidFill>
-                <a:latin typeface="Calibri"/>
-              </a:rPr>
-              <a:t>Nguyễn Dữ (thế kỉ XVI), học trò Nguyễn Bỉnh Khiêm; tác phẩm Truyền kì mạn lục – “thiên cổ kì bút”.</a:t>
+              <a:t>TIẾT 3 – 4: CHUYỆN CHỨC PHÁN SỰ ĐỀN TẢN VIÊN (Nguyễn Dữ)</a:t>
             </a:r>
           </a:p>
         </p:txBody>
@@ -6799,8 +7241,8 @@
         </p:nvSpPr>
         <p:spPr>
           <a:xfrm>
-            <a:off x="10253167" y="457200"/>
-            <a:ext cx="1389888" cy="457200"/>
+            <a:off x="9786823" y="457200"/>
+            <a:ext cx="1856232" cy="457200"/>
           </a:xfrm>
           <a:prstGeom prst="roundRect">
             <a:avLst/>
@@ -6839,7 +7281,7 @@
                 </a:solidFill>
                 <a:latin typeface="Arial"/>
               </a:rPr>
-              <a:t>ĐỀ BÀI</a:t>
+              <a:t>KHỞI ĐỘNG</a:t>
             </a:r>
           </a:p>
         </p:txBody>
@@ -6853,7 +7295,7 @@
         <p:spPr>
           <a:xfrm>
             <a:off x="731520" y="274320"/>
-            <a:ext cx="9582912" cy="868680"/>
+            <a:ext cx="9116568" cy="868680"/>
           </a:xfrm>
           <a:prstGeom prst="rect">
             <a:avLst/>
@@ -6873,7 +7315,7 @@
                 </a:solidFill>
                 <a:latin typeface="Arial"/>
               </a:rPr>
-              <a:t>NHÂN VẬT NGÔ TỬ VĂN</a:t>
+              <a:t>KHỞI ĐỘNG</a:t>
             </a:r>
           </a:p>
         </p:txBody>
@@ -6966,7 +7408,7 @@
         <p:spPr>
           <a:xfrm>
             <a:off x="731520" y="1463040"/>
-            <a:ext cx="10789920" cy="3566160"/>
+            <a:ext cx="10789920" cy="4572000"/>
           </a:xfrm>
           <a:prstGeom prst="rect">
             <a:avLst/>
@@ -6991,94 +7433,23 @@
                 </a:solidFill>
                 <a:latin typeface="Calibri"/>
               </a:rPr>
-              <a:t>Đoạn mở đầu giới thiệu và nhấn mạnh nét tính cách nào ở Tử Văn? Tính cách ấy được khắc hoạ qua những chi tiết nào?</a:t>
-            </a:r>
-          </a:p>
-        </p:txBody>
-      </p:sp>
-      <p:sp>
-        <p:nvSpPr>
-          <p:cNvPr id="8" name="Rounded Rectangle 7"/>
-          <p:cNvSpPr/>
-          <p:nvPr/>
-        </p:nvSpPr>
-        <p:spPr>
-          <a:xfrm>
-            <a:off x="731520" y="5120640"/>
-            <a:ext cx="10789920" cy="693420"/>
-          </a:xfrm>
-          <a:prstGeom prst="roundRect">
-            <a:avLst>
-              <a:gd name="adj" fmla="val 8000"/>
-            </a:avLst>
-          </a:prstGeom>
-          <a:solidFill>
-            <a:srgbClr val="EFF4FF"/>
-          </a:solidFill>
-          <a:ln w="19050">
-            <a:solidFill>
-              <a:srgbClr val="1E40AF"/>
-            </a:solidFill>
-          </a:ln>
-          <a:effectLst/>
-        </p:spPr>
-        <p:style>
-          <a:lnRef idx="1">
-            <a:schemeClr val="accent1"/>
-          </a:lnRef>
-          <a:fillRef idx="3">
-            <a:schemeClr val="accent1"/>
-          </a:fillRef>
-          <a:effectRef idx="2">
-            <a:schemeClr val="accent1"/>
-          </a:effectRef>
-          <a:fontRef idx="minor">
-            <a:schemeClr val="lt1"/>
-          </a:fontRef>
-        </p:style>
-        <p:txBody>
-          <a:bodyPr rtlCol="0" anchor="ctr"/>
-          <a:lstStyle/>
-          <a:p>
-            <a:pPr algn="ctr"/>
-          </a:p>
-        </p:txBody>
-      </p:sp>
-      <p:sp>
-        <p:nvSpPr>
-          <p:cNvPr id="9" name="TextBox 8"/>
-          <p:cNvSpPr txBox="1"/>
-          <p:nvPr/>
-        </p:nvSpPr>
-        <p:spPr>
-          <a:xfrm>
-            <a:off x="914400" y="5120640"/>
-            <a:ext cx="10424160" cy="693420"/>
-          </a:xfrm>
-          <a:prstGeom prst="rect">
-            <a:avLst/>
-          </a:prstGeom>
-          <a:noFill/>
-        </p:spPr>
-        <p:txBody>
-          <a:bodyPr wrap="square" anchor="ctr" lIns="45720" rIns="45720">
-            <a:spAutoFit/>
-          </a:bodyPr>
-          <a:lstStyle/>
+              <a:t>Hình ảnh gợi em nhớ đến tác phẩm nào của Nguyễn Dữ đã học ở THCS?</a:t>
+            </a:r>
+          </a:p>
           <a:p>
             <a:pPr algn="l">
               <a:spcAft>
-                <a:spcPts val="400"/>
+                <a:spcPts val="800"/>
               </a:spcAft>
             </a:pPr>
             <a:r>
-              <a:rPr sz="2200" b="1">
-                <a:solidFill>
-                  <a:srgbClr val="1E40AF"/>
+              <a:rPr sz="2600" b="1">
+                <a:solidFill>
+                  <a:srgbClr val="1E293B"/>
                 </a:solidFill>
                 <a:latin typeface="Calibri"/>
               </a:rPr>
-              <a:t>💡 Chú ý hành động đốt đền và thái độ trước quỷ, Diêm Vương.</a:t>
+              <a:t>Trong tác phẩm ấy có chi tiết kì ảo nào?</a:t>
             </a:r>
           </a:p>
         </p:txBody>
@@ -7161,8 +7532,8 @@
         </p:nvSpPr>
         <p:spPr>
           <a:xfrm>
-            <a:off x="9942271" y="457200"/>
-            <a:ext cx="1700784" cy="457200"/>
+            <a:off x="10408615" y="457200"/>
+            <a:ext cx="1234440" cy="457200"/>
           </a:xfrm>
           <a:prstGeom prst="roundRect">
             <a:avLst/>
@@ -7201,7 +7572,7 @@
                 </a:solidFill>
                 <a:latin typeface="Arial"/>
               </a:rPr>
-              <a:t>LỜI GIẢI</a:t>
+              <a:t>VIDEO</a:t>
             </a:r>
           </a:p>
         </p:txBody>
@@ -7215,7 +7586,7 @@
         <p:spPr>
           <a:xfrm>
             <a:off x="731520" y="274320"/>
-            <a:ext cx="9272016" cy="868680"/>
+            <a:ext cx="9738360" cy="868680"/>
           </a:xfrm>
           <a:prstGeom prst="rect">
             <a:avLst/>
@@ -7235,7 +7606,7 @@
                 </a:solidFill>
                 <a:latin typeface="Arial"/>
               </a:rPr>
-              <a:t>NHÂN VẬT NGÔ TỬ VĂN</a:t>
+              <a:t>VIDEO THAM KHẢO</a:t>
             </a:r>
           </a:p>
         </p:txBody>
@@ -7319,16 +7690,40 @@
           </a:p>
         </p:txBody>
       </p:sp>
-      <p:sp>
-        <p:nvSpPr>
-          <p:cNvPr id="7" name="TextBox 6"/>
+      <p:pic>
+        <p:nvPicPr>
+          <p:cNvPr id="7" name="Picture 6" descr="QR_video_4lhy4C12iXg.png"/>
+          <p:cNvPicPr>
+            <a:picLocks noChangeAspect="1"/>
+          </p:cNvPicPr>
+          <p:nvPr/>
+        </p:nvPicPr>
+        <p:blipFill>
+          <a:blip r:embed="rId2"/>
+          <a:stretch>
+            <a:fillRect/>
+          </a:stretch>
+        </p:blipFill>
+        <p:spPr>
+          <a:xfrm>
+            <a:off x="8412480" y="1554480"/>
+            <a:ext cx="3108960" cy="3108960"/>
+          </a:xfrm>
+          <a:prstGeom prst="rect">
+            <a:avLst/>
+          </a:prstGeom>
+        </p:spPr>
+      </p:pic>
+      <p:sp>
+        <p:nvSpPr>
+          <p:cNvPr id="8" name="TextBox 7"/>
           <p:cNvSpPr txBox="1"/>
           <p:nvPr/>
         </p:nvSpPr>
         <p:spPr>
           <a:xfrm>
-            <a:off x="731520" y="1463040"/>
-            <a:ext cx="10789920" cy="3474720"/>
+            <a:off x="731520" y="1554480"/>
+            <a:ext cx="7498079" cy="4206240"/>
           </a:xfrm>
           <a:prstGeom prst="rect">
             <a:avLst/>
@@ -7340,6 +7735,38 @@
             <a:spAutoFit/>
           </a:bodyPr>
           <a:lstStyle/>
+          <a:p>
+            <a:pPr algn="l">
+              <a:spcAft>
+                <a:spcPts val="800"/>
+              </a:spcAft>
+            </a:pPr>
+            <a:r>
+              <a:rPr sz="2600" b="1">
+                <a:solidFill>
+                  <a:srgbClr val="1E293B"/>
+                </a:solidFill>
+                <a:latin typeface="Calibri"/>
+              </a:rPr>
+              <a:t>🎬 Chuyện chức phán sự đền Tản Viên – Chuyển thể tác phẩm văn học</a:t>
+            </a:r>
+          </a:p>
+          <a:p>
+            <a:pPr algn="l">
+              <a:spcAft>
+                <a:spcPts val="800"/>
+              </a:spcAft>
+            </a:pPr>
+            <a:r>
+              <a:rPr sz="2000">
+                <a:solidFill>
+                  <a:srgbClr val="64748B"/>
+                </a:solidFill>
+                <a:latin typeface="Calibri"/>
+              </a:rPr>
+              <a:t>Kênh: Tùng Linh</a:t>
+            </a:r>
+          </a:p>
           <a:p>
             <a:pPr algn="l" marL="365760" indent="-365760">
               <a:spcAft>
@@ -7352,142 +7779,30 @@
               <a:buChar char="•"/>
             </a:pPr>
             <a:r>
-              <a:rPr sz="2300">
+              <a:rPr sz="2000">
                 <a:solidFill>
                   <a:srgbClr val="1E293B"/>
                 </a:solidFill>
                 <a:latin typeface="Calibri"/>
               </a:rPr>
-              <a:t>Khảng khái, nóng nảy, thấy gian tà không chịu được.</a:t>
-            </a:r>
-          </a:p>
-          <a:p>
-            <a:pPr algn="l" marL="365760" indent="-365760">
+              <a:t>Mở đầu Văn bản 4 (sản phẩm chuyển thể của học sinh – tham khảo)</a:t>
+            </a:r>
+          </a:p>
+          <a:p>
+            <a:pPr algn="l">
               <a:spcAft>
                 <a:spcPts val="800"/>
               </a:spcAft>
-              <a:buClr>
-                <a:srgbClr val="1E40AF"/>
-              </a:buClr>
-              <a:buFont typeface="Arial"/>
-              <a:buChar char="•"/>
             </a:pPr>
             <a:r>
-              <a:rPr sz="2300">
-                <a:solidFill>
-                  <a:srgbClr val="1E293B"/>
+              <a:rPr sz="1600">
+                <a:solidFill>
+                  <a:srgbClr val="64748B"/>
                 </a:solidFill>
                 <a:latin typeface="Calibri"/>
-              </a:rPr>
-              <a:t>Đốt đền tà của hồn tên bách hộ họ Thôi.</a:t>
-            </a:r>
-          </a:p>
-          <a:p>
-            <a:pPr algn="l" marL="365760" indent="-365760">
-              <a:spcAft>
-                <a:spcPts val="800"/>
-              </a:spcAft>
-              <a:buClr>
-                <a:srgbClr val="1E40AF"/>
-              </a:buClr>
-              <a:buFont typeface="Arial"/>
-              <a:buChar char="•"/>
-            </a:pPr>
-            <a:r>
-              <a:rPr sz="2300">
-                <a:solidFill>
-                  <a:srgbClr val="1E293B"/>
-                </a:solidFill>
-                <a:latin typeface="Calibri"/>
-              </a:rPr>
-              <a:t>Cứng cỏi, không khuất phục ở phiên toà cõi âm; đấu tranh đến cùng.</a:t>
-            </a:r>
-          </a:p>
-        </p:txBody>
-      </p:sp>
-      <p:sp>
-        <p:nvSpPr>
-          <p:cNvPr id="8" name="Rounded Rectangle 7"/>
-          <p:cNvSpPr/>
-          <p:nvPr/>
-        </p:nvSpPr>
-        <p:spPr>
-          <a:xfrm>
-            <a:off x="731520" y="5074920"/>
-            <a:ext cx="10789920" cy="731520"/>
-          </a:xfrm>
-          <a:prstGeom prst="roundRect">
-            <a:avLst>
-              <a:gd name="adj" fmla="val 8000"/>
-            </a:avLst>
-          </a:prstGeom>
-          <a:solidFill>
-            <a:srgbClr val="FEF2F2"/>
-          </a:solidFill>
-          <a:ln w="19050">
-            <a:solidFill>
-              <a:srgbClr val="991B1B"/>
-            </a:solidFill>
-          </a:ln>
-          <a:effectLst/>
-        </p:spPr>
-        <p:style>
-          <a:lnRef idx="1">
-            <a:schemeClr val="accent1"/>
-          </a:lnRef>
-          <a:fillRef idx="3">
-            <a:schemeClr val="accent1"/>
-          </a:fillRef>
-          <a:effectRef idx="2">
-            <a:schemeClr val="accent1"/>
-          </a:effectRef>
-          <a:fontRef idx="minor">
-            <a:schemeClr val="lt1"/>
-          </a:fontRef>
-        </p:style>
-        <p:txBody>
-          <a:bodyPr rtlCol="0" anchor="ctr"/>
-          <a:lstStyle/>
-          <a:p>
-            <a:pPr algn="ctr"/>
-          </a:p>
-        </p:txBody>
-      </p:sp>
-      <p:sp>
-        <p:nvSpPr>
-          <p:cNvPr id="9" name="TextBox 8"/>
-          <p:cNvSpPr txBox="1"/>
-          <p:nvPr/>
-        </p:nvSpPr>
-        <p:spPr>
-          <a:xfrm>
-            <a:off x="914400" y="5074920"/>
-            <a:ext cx="10424160" cy="731520"/>
-          </a:xfrm>
-          <a:prstGeom prst="rect">
-            <a:avLst/>
-          </a:prstGeom>
-          <a:noFill/>
-        </p:spPr>
-        <p:txBody>
-          <a:bodyPr wrap="square" anchor="ctr" lIns="45720" rIns="45720">
-            <a:spAutoFit/>
-          </a:bodyPr>
-          <a:lstStyle/>
-          <a:p>
-            <a:pPr algn="l">
-              <a:spcAft>
-                <a:spcPts val="400"/>
-              </a:spcAft>
-            </a:pPr>
-            <a:r>
-              <a:rPr sz="2400" b="1">
-                <a:solidFill>
-                  <a:srgbClr val="991B1B"/>
-                </a:solidFill>
-                <a:latin typeface="Calibri"/>
-              </a:rPr>
-              <a:t>Người trí thức cương trực, dũng cảm bảo vệ công lí.</a:t>
+                <a:hlinkClick r:id="rId3"/>
+              </a:rPr>
+              <a:t>https://www.youtube.com/watch?v=4lhy4C12iXg</a:t>
             </a:r>
           </a:p>
         </p:txBody>
@@ -7570,14 +7885,14 @@
         </p:nvSpPr>
         <p:spPr>
           <a:xfrm>
-            <a:off x="10253167" y="457200"/>
-            <a:ext cx="1389888" cy="457200"/>
+            <a:off x="10097719" y="457200"/>
+            <a:ext cx="1545336" cy="457200"/>
           </a:xfrm>
           <a:prstGeom prst="roundRect">
             <a:avLst/>
           </a:prstGeom>
           <a:solidFill>
-            <a:srgbClr val="1E40AF"/>
+            <a:srgbClr val="166534"/>
           </a:solidFill>
           <a:ln>
             <a:noFill/>
@@ -7610,7 +7925,7 @@
                 </a:solidFill>
                 <a:latin typeface="Arial"/>
               </a:rPr>
-              <a:t>ĐỀ BÀI</a:t>
+              <a:t>GHI NHỚ</a:t>
             </a:r>
           </a:p>
         </p:txBody>
@@ -7624,7 +7939,7 @@
         <p:spPr>
           <a:xfrm>
             <a:off x="731520" y="274320"/>
-            <a:ext cx="9582912" cy="868680"/>
+            <a:ext cx="9427464" cy="868680"/>
           </a:xfrm>
           <a:prstGeom prst="rect">
             <a:avLst/>
@@ -7644,7 +7959,7 @@
                 </a:solidFill>
                 <a:latin typeface="Arial"/>
               </a:rPr>
-              <a:t>YẾU TỐ KÌ ẢO VÀ CHỦ ĐỀ</a:t>
+              <a:t>TRUYỆN TRUYỀN KÌ</a:t>
             </a:r>
           </a:p>
         </p:txBody>
@@ -7737,7 +8052,7 @@
         <p:spPr>
           <a:xfrm>
             <a:off x="731520" y="1463040"/>
-            <a:ext cx="10789920" cy="3566160"/>
+            <a:ext cx="10789920" cy="4754880"/>
           </a:xfrm>
           <a:prstGeom prst="rect">
             <a:avLst/>
@@ -7750,106 +8065,66 @@
           </a:bodyPr>
           <a:lstStyle/>
           <a:p>
-            <a:pPr algn="l">
+            <a:pPr algn="l" marL="365760" indent="-365760">
               <a:spcAft>
                 <a:spcPts val="800"/>
               </a:spcAft>
+              <a:buClr>
+                <a:srgbClr val="1E40AF"/>
+              </a:buClr>
+              <a:buFont typeface="Arial"/>
+              <a:buChar char="•"/>
             </a:pPr>
             <a:r>
-              <a:rPr sz="2600" b="1">
+              <a:rPr sz="2400">
                 <a:solidFill>
                   <a:srgbClr val="1E293B"/>
                 </a:solidFill>
                 <a:latin typeface="Calibri"/>
               </a:rPr>
-              <a:t>Phân tích giá trị của một số yếu tố kì ảo trong truyện. Truyện gửi gắm thông điệp gì?</a:t>
-            </a:r>
-          </a:p>
-        </p:txBody>
-      </p:sp>
-      <p:sp>
-        <p:nvSpPr>
-          <p:cNvPr id="8" name="Rounded Rectangle 7"/>
-          <p:cNvSpPr/>
-          <p:nvPr/>
-        </p:nvSpPr>
-        <p:spPr>
-          <a:xfrm>
-            <a:off x="731520" y="5120640"/>
-            <a:ext cx="10789920" cy="693420"/>
-          </a:xfrm>
-          <a:prstGeom prst="roundRect">
-            <a:avLst>
-              <a:gd name="adj" fmla="val 8000"/>
-            </a:avLst>
-          </a:prstGeom>
-          <a:solidFill>
-            <a:srgbClr val="EFF4FF"/>
-          </a:solidFill>
-          <a:ln w="19050">
-            <a:solidFill>
-              <a:srgbClr val="1E40AF"/>
-            </a:solidFill>
-          </a:ln>
-          <a:effectLst/>
-        </p:spPr>
-        <p:style>
-          <a:lnRef idx="1">
-            <a:schemeClr val="accent1"/>
-          </a:lnRef>
-          <a:fillRef idx="3">
-            <a:schemeClr val="accent1"/>
-          </a:fillRef>
-          <a:effectRef idx="2">
-            <a:schemeClr val="accent1"/>
-          </a:effectRef>
-          <a:fontRef idx="minor">
-            <a:schemeClr val="lt1"/>
-          </a:fontRef>
-        </p:style>
-        <p:txBody>
-          <a:bodyPr rtlCol="0" anchor="ctr"/>
-          <a:lstStyle/>
-          <a:p>
-            <a:pPr algn="ctr"/>
-          </a:p>
-        </p:txBody>
-      </p:sp>
-      <p:sp>
-        <p:nvSpPr>
-          <p:cNvPr id="9" name="TextBox 8"/>
-          <p:cNvSpPr txBox="1"/>
-          <p:nvPr/>
-        </p:nvSpPr>
-        <p:spPr>
-          <a:xfrm>
-            <a:off x="914400" y="5120640"/>
-            <a:ext cx="10424160" cy="693420"/>
-          </a:xfrm>
-          <a:prstGeom prst="rect">
-            <a:avLst/>
-          </a:prstGeom>
-          <a:noFill/>
-        </p:spPr>
-        <p:txBody>
-          <a:bodyPr wrap="square" anchor="ctr" lIns="45720" rIns="45720">
-            <a:spAutoFit/>
-          </a:bodyPr>
-          <a:lstStyle/>
-          <a:p>
-            <a:pPr algn="l">
+              <a:t>Thể văn xuôi tự sự thời trung đại, phản ánh hiện thực qua yếu tố hoang đường, kì ảo.</a:t>
+            </a:r>
+          </a:p>
+          <a:p>
+            <a:pPr algn="l" marL="365760" indent="-365760">
               <a:spcAft>
-                <a:spcPts val="400"/>
+                <a:spcPts val="800"/>
               </a:spcAft>
+              <a:buClr>
+                <a:srgbClr val="1E40AF"/>
+              </a:buClr>
+              <a:buFont typeface="Arial"/>
+              <a:buChar char="•"/>
             </a:pPr>
             <a:r>
-              <a:rPr sz="2200" b="1">
-                <a:solidFill>
-                  <a:srgbClr val="1E40AF"/>
+              <a:rPr sz="2400">
+                <a:solidFill>
+                  <a:srgbClr val="1E293B"/>
                 </a:solidFill>
                 <a:latin typeface="Calibri"/>
               </a:rPr>
-              <a:t>💡 Cõi âm phản chiếu điều gì của cõi trần?</a:t>
+              <a:t>Thế giới người và cõi âm có sự giao thoa.</a:t>
+            </a:r>
+          </a:p>
+          <a:p>
+            <a:pPr algn="l" marL="365760" indent="-365760">
+              <a:spcAft>
+                <a:spcPts val="800"/>
+              </a:spcAft>
+              <a:buClr>
+                <a:srgbClr val="1E40AF"/>
+              </a:buClr>
+              <a:buFont typeface="Arial"/>
+              <a:buChar char="•"/>
+            </a:pPr>
+            <a:r>
+              <a:rPr sz="2400">
+                <a:solidFill>
+                  <a:srgbClr val="1E293B"/>
+                </a:solidFill>
+                <a:latin typeface="Calibri"/>
+              </a:rPr>
+              <a:t>Nguyễn Dữ (thế kỉ XVI), học trò Nguyễn Bỉnh Khiêm; tác phẩm Truyền kì mạn lục – “thiên cổ kì bút”.</a:t>
             </a:r>
           </a:p>
         </p:txBody>
@@ -7932,14 +8207,14 @@
         </p:nvSpPr>
         <p:spPr>
           <a:xfrm>
-            <a:off x="9942271" y="457200"/>
-            <a:ext cx="1700784" cy="457200"/>
+            <a:off x="10253167" y="457200"/>
+            <a:ext cx="1389888" cy="457200"/>
           </a:xfrm>
           <a:prstGeom prst="roundRect">
             <a:avLst/>
           </a:prstGeom>
           <a:solidFill>
-            <a:srgbClr val="991B1B"/>
+            <a:srgbClr val="1E40AF"/>
           </a:solidFill>
           <a:ln>
             <a:noFill/>
@@ -7972,7 +8247,7 @@
                 </a:solidFill>
                 <a:latin typeface="Arial"/>
               </a:rPr>
-              <a:t>LỜI GIẢI</a:t>
+              <a:t>ĐỀ BÀI</a:t>
             </a:r>
           </a:p>
         </p:txBody>
@@ -7986,7 +8261,7 @@
         <p:spPr>
           <a:xfrm>
             <a:off x="731520" y="274320"/>
-            <a:ext cx="9272016" cy="868680"/>
+            <a:ext cx="9582912" cy="868680"/>
           </a:xfrm>
           <a:prstGeom prst="rect">
             <a:avLst/>
@@ -8006,7 +8281,7 @@
                 </a:solidFill>
                 <a:latin typeface="Arial"/>
               </a:rPr>
-              <a:t>YẾU TỐ KÌ ẢO VÀ CHỦ ĐỀ</a:t>
+              <a:t>NHÂN VẬT NGÔ TỬ VĂN</a:t>
             </a:r>
           </a:p>
         </p:txBody>
@@ -8099,7 +8374,7 @@
         <p:spPr>
           <a:xfrm>
             <a:off x="731520" y="1463040"/>
-            <a:ext cx="10789920" cy="3474720"/>
+            <a:ext cx="10789920" cy="3566160"/>
           </a:xfrm>
           <a:prstGeom prst="rect">
             <a:avLst/>
@@ -8112,66 +8387,19 @@
           </a:bodyPr>
           <a:lstStyle/>
           <a:p>
-            <a:pPr algn="l" marL="365760" indent="-365760">
+            <a:pPr algn="l">
               <a:spcAft>
                 <a:spcPts val="800"/>
               </a:spcAft>
-              <a:buClr>
-                <a:srgbClr val="1E40AF"/>
-              </a:buClr>
-              <a:buFont typeface="Arial"/>
-              <a:buChar char="•"/>
             </a:pPr>
             <a:r>
-              <a:rPr sz="2300">
+              <a:rPr sz="2600" b="1">
                 <a:solidFill>
                   <a:srgbClr val="1E293B"/>
                 </a:solidFill>
                 <a:latin typeface="Calibri"/>
               </a:rPr>
-              <a:t>Hồn ma tên tướng giặc, phiên toà Diêm Vương, Tử Văn làm Phán sự đền Tản Viên.</a:t>
-            </a:r>
-          </a:p>
-          <a:p>
-            <a:pPr algn="l" marL="365760" indent="-365760">
-              <a:spcAft>
-                <a:spcPts val="800"/>
-              </a:spcAft>
-              <a:buClr>
-                <a:srgbClr val="1E40AF"/>
-              </a:buClr>
-              <a:buFont typeface="Arial"/>
-              <a:buChar char="•"/>
-            </a:pPr>
-            <a:r>
-              <a:rPr sz="2300">
-                <a:solidFill>
-                  <a:srgbClr val="1E293B"/>
-                </a:solidFill>
-                <a:latin typeface="Calibri"/>
-              </a:rPr>
-              <a:t>Cõi âm phản chiếu cõi trần: tham nhũng, cường quyền, hối lộ.</a:t>
-            </a:r>
-          </a:p>
-          <a:p>
-            <a:pPr algn="l" marL="365760" indent="-365760">
-              <a:spcAft>
-                <a:spcPts val="800"/>
-              </a:spcAft>
-              <a:buClr>
-                <a:srgbClr val="1E40AF"/>
-              </a:buClr>
-              <a:buFont typeface="Arial"/>
-              <a:buChar char="•"/>
-            </a:pPr>
-            <a:r>
-              <a:rPr sz="2300">
-                <a:solidFill>
-                  <a:srgbClr val="1E293B"/>
-                </a:solidFill>
-                <a:latin typeface="Calibri"/>
-              </a:rPr>
-              <a:t>Chính nghĩa thắng gian tà; ca ngợi người dám đấu tranh.</a:t>
+              <a:t>Đoạn mở đầu giới thiệu và nhấn mạnh nét tính cách nào ở Tử Văn? Tính cách ấy được khắc hoạ qua những chi tiết nào?</a:t>
             </a:r>
           </a:p>
         </p:txBody>
@@ -8184,8 +8412,8 @@
         </p:nvSpPr>
         <p:spPr>
           <a:xfrm>
-            <a:off x="731520" y="5074920"/>
-            <a:ext cx="10789920" cy="731520"/>
+            <a:off x="731520" y="5120640"/>
+            <a:ext cx="10789920" cy="693420"/>
           </a:xfrm>
           <a:prstGeom prst="roundRect">
             <a:avLst>
@@ -8193,11 +8421,11 @@
             </a:avLst>
           </a:prstGeom>
           <a:solidFill>
-            <a:srgbClr val="FEF2F2"/>
+            <a:srgbClr val="EFF4FF"/>
           </a:solidFill>
           <a:ln w="19050">
             <a:solidFill>
-              <a:srgbClr val="991B1B"/>
+              <a:srgbClr val="1E40AF"/>
             </a:solidFill>
           </a:ln>
           <a:effectLst/>
@@ -8232,8 +8460,8 @@
         </p:nvSpPr>
         <p:spPr>
           <a:xfrm>
-            <a:off x="914400" y="5074920"/>
-            <a:ext cx="10424160" cy="731520"/>
+            <a:off x="914400" y="5120640"/>
+            <a:ext cx="10424160" cy="693420"/>
           </a:xfrm>
           <a:prstGeom prst="rect">
             <a:avLst/>
@@ -8252,13 +8480,13 @@
               </a:spcAft>
             </a:pPr>
             <a:r>
-              <a:rPr sz="2400" b="1">
-                <a:solidFill>
-                  <a:srgbClr val="991B1B"/>
+              <a:rPr sz="2200" b="1">
+                <a:solidFill>
+                  <a:srgbClr val="1E40AF"/>
                 </a:solidFill>
                 <a:latin typeface="Calibri"/>
               </a:rPr>
-              <a:t>Giáo dục liêm chính: dũng cảm chống cái sai, cái ác.</a:t>
+              <a:t>💡 Chú ý hành động đốt đền và thái độ trước quỷ, Diêm Vương.</a:t>
             </a:r>
           </a:p>
         </p:txBody>
@@ -8277,7 +8505,7 @@
     <p:bg>
       <p:bgPr>
         <a:solidFill>
-          <a:srgbClr val="F8F9FA"/>
+          <a:srgbClr val="FFFFFF"/>
         </a:solidFill>
         <a:effectLst/>
       </p:bgPr>
@@ -8297,10 +8525,54 @@
         </p:nvSpPr>
         <p:spPr>
           <a:xfrm>
-            <a:off x="548640" y="2926080"/>
-            <a:ext cx="164592" cy="1005840"/>
-          </a:xfrm>
-          <a:prstGeom prst="rect">
+            <a:off x="457200" y="384048"/>
+            <a:ext cx="109728" cy="658368"/>
+          </a:xfrm>
+          <a:prstGeom prst="rect">
+            <a:avLst/>
+          </a:prstGeom>
+          <a:solidFill>
+            <a:srgbClr val="1E40AF"/>
+          </a:solidFill>
+          <a:ln>
+            <a:noFill/>
+          </a:ln>
+          <a:effectLst/>
+        </p:spPr>
+        <p:style>
+          <a:lnRef idx="1">
+            <a:schemeClr val="accent1"/>
+          </a:lnRef>
+          <a:fillRef idx="3">
+            <a:schemeClr val="accent1"/>
+          </a:fillRef>
+          <a:effectRef idx="2">
+            <a:schemeClr val="accent1"/>
+          </a:effectRef>
+          <a:fontRef idx="minor">
+            <a:schemeClr val="lt1"/>
+          </a:fontRef>
+        </p:style>
+        <p:txBody>
+          <a:bodyPr rtlCol="0" anchor="ctr"/>
+          <a:lstStyle/>
+          <a:p>
+            <a:pPr algn="ctr"/>
+          </a:p>
+        </p:txBody>
+      </p:sp>
+      <p:sp>
+        <p:nvSpPr>
+          <p:cNvPr id="3" name="Rounded Rectangle 2"/>
+          <p:cNvSpPr/>
+          <p:nvPr/>
+        </p:nvSpPr>
+        <p:spPr>
+          <a:xfrm>
+            <a:off x="9942271" y="457200"/>
+            <a:ext cx="1700784" cy="457200"/>
+          </a:xfrm>
+          <a:prstGeom prst="roundRect">
             <a:avLst/>
           </a:prstGeom>
           <a:solidFill>
@@ -8326,6 +8598,93 @@
           </a:fontRef>
         </p:style>
         <p:txBody>
+          <a:bodyPr rtlCol="0" anchor="ctr" wrap="none" tIns="0" bIns="0"/>
+          <a:lstStyle/>
+          <a:p>
+            <a:pPr algn="ctr"/>
+            <a:r>
+              <a:rPr sz="1400" b="1">
+                <a:solidFill>
+                  <a:srgbClr val="FFFFFF"/>
+                </a:solidFill>
+                <a:latin typeface="Arial"/>
+              </a:rPr>
+              <a:t>LỜI GIẢI</a:t>
+            </a:r>
+          </a:p>
+        </p:txBody>
+      </p:sp>
+      <p:sp>
+        <p:nvSpPr>
+          <p:cNvPr id="4" name="TextBox 3"/>
+          <p:cNvSpPr txBox="1"/>
+          <p:nvPr/>
+        </p:nvSpPr>
+        <p:spPr>
+          <a:xfrm>
+            <a:off x="731520" y="274320"/>
+            <a:ext cx="9272016" cy="868680"/>
+          </a:xfrm>
+          <a:prstGeom prst="rect">
+            <a:avLst/>
+          </a:prstGeom>
+          <a:noFill/>
+        </p:spPr>
+        <p:txBody>
+          <a:bodyPr wrap="square" anchor="ctr">
+            <a:spAutoFit/>
+          </a:bodyPr>
+          <a:lstStyle/>
+          <a:p>
+            <a:r>
+              <a:rPr sz="3600" b="1">
+                <a:solidFill>
+                  <a:srgbClr val="1E40AF"/>
+                </a:solidFill>
+                <a:latin typeface="Arial"/>
+              </a:rPr>
+              <a:t>NHÂN VẬT NGÔ TỬ VĂN</a:t>
+            </a:r>
+          </a:p>
+        </p:txBody>
+      </p:sp>
+      <p:sp>
+        <p:nvSpPr>
+          <p:cNvPr id="5" name="Rectangle 4"/>
+          <p:cNvSpPr/>
+          <p:nvPr/>
+        </p:nvSpPr>
+        <p:spPr>
+          <a:xfrm>
+            <a:off x="457200" y="1207008"/>
+            <a:ext cx="11274552" cy="22000"/>
+          </a:xfrm>
+          <a:prstGeom prst="rect">
+            <a:avLst/>
+          </a:prstGeom>
+          <a:solidFill>
+            <a:srgbClr val="E2E8F0"/>
+          </a:solidFill>
+          <a:ln>
+            <a:noFill/>
+          </a:ln>
+          <a:effectLst/>
+        </p:spPr>
+        <p:style>
+          <a:lnRef idx="1">
+            <a:schemeClr val="accent1"/>
+          </a:lnRef>
+          <a:fillRef idx="3">
+            <a:schemeClr val="accent1"/>
+          </a:fillRef>
+          <a:effectRef idx="2">
+            <a:schemeClr val="accent1"/>
+          </a:effectRef>
+          <a:fontRef idx="minor">
+            <a:schemeClr val="lt1"/>
+          </a:fontRef>
+        </p:style>
+        <p:txBody>
           <a:bodyPr rtlCol="0" anchor="ctr"/>
           <a:lstStyle/>
           <a:p>
@@ -8335,14 +8694,183 @@
       </p:sp>
       <p:sp>
         <p:nvSpPr>
-          <p:cNvPr id="3" name="TextBox 2"/>
+          <p:cNvPr id="6" name="TextBox 5"/>
           <p:cNvSpPr txBox="1"/>
           <p:nvPr/>
         </p:nvSpPr>
         <p:spPr>
           <a:xfrm>
-            <a:off x="914400" y="2743200"/>
-            <a:ext cx="10515600" cy="1371600"/>
+            <a:off x="457200" y="6355080"/>
+            <a:ext cx="11274552" cy="365760"/>
+          </a:xfrm>
+          <a:prstGeom prst="rect">
+            <a:avLst/>
+          </a:prstGeom>
+          <a:noFill/>
+        </p:spPr>
+        <p:txBody>
+          <a:bodyPr wrap="none">
+            <a:spAutoFit/>
+          </a:bodyPr>
+          <a:lstStyle/>
+          <a:p>
+            <a:pPr algn="r"/>
+            <a:r>
+              <a:rPr sz="1200">
+                <a:solidFill>
+                  <a:srgbClr val="64748B"/>
+                </a:solidFill>
+                <a:latin typeface="Calibri"/>
+              </a:rPr>
+              <a:t>Ngữ văn 10 · Bài 1: Sức Hấp Dẫn Của Truyện Kể          19</a:t>
+            </a:r>
+          </a:p>
+        </p:txBody>
+      </p:sp>
+      <p:sp>
+        <p:nvSpPr>
+          <p:cNvPr id="7" name="TextBox 6"/>
+          <p:cNvSpPr txBox="1"/>
+          <p:nvPr/>
+        </p:nvSpPr>
+        <p:spPr>
+          <a:xfrm>
+            <a:off x="731520" y="1463040"/>
+            <a:ext cx="10789920" cy="3474720"/>
+          </a:xfrm>
+          <a:prstGeom prst="rect">
+            <a:avLst/>
+          </a:prstGeom>
+          <a:noFill/>
+        </p:spPr>
+        <p:txBody>
+          <a:bodyPr wrap="square" anchor="t" lIns="45720" rIns="45720">
+            <a:spAutoFit/>
+          </a:bodyPr>
+          <a:lstStyle/>
+          <a:p>
+            <a:pPr algn="l" marL="365760" indent="-365760">
+              <a:spcAft>
+                <a:spcPts val="800"/>
+              </a:spcAft>
+              <a:buClr>
+                <a:srgbClr val="1E40AF"/>
+              </a:buClr>
+              <a:buFont typeface="Arial"/>
+              <a:buChar char="•"/>
+            </a:pPr>
+            <a:r>
+              <a:rPr sz="2300">
+                <a:solidFill>
+                  <a:srgbClr val="1E293B"/>
+                </a:solidFill>
+                <a:latin typeface="Calibri"/>
+              </a:rPr>
+              <a:t>Khảng khái, nóng nảy, thấy gian tà không chịu được.</a:t>
+            </a:r>
+          </a:p>
+          <a:p>
+            <a:pPr algn="l" marL="365760" indent="-365760">
+              <a:spcAft>
+                <a:spcPts val="800"/>
+              </a:spcAft>
+              <a:buClr>
+                <a:srgbClr val="1E40AF"/>
+              </a:buClr>
+              <a:buFont typeface="Arial"/>
+              <a:buChar char="•"/>
+            </a:pPr>
+            <a:r>
+              <a:rPr sz="2300">
+                <a:solidFill>
+                  <a:srgbClr val="1E293B"/>
+                </a:solidFill>
+                <a:latin typeface="Calibri"/>
+              </a:rPr>
+              <a:t>Đốt đền tà của hồn tên bách hộ họ Thôi.</a:t>
+            </a:r>
+          </a:p>
+          <a:p>
+            <a:pPr algn="l" marL="365760" indent="-365760">
+              <a:spcAft>
+                <a:spcPts val="800"/>
+              </a:spcAft>
+              <a:buClr>
+                <a:srgbClr val="1E40AF"/>
+              </a:buClr>
+              <a:buFont typeface="Arial"/>
+              <a:buChar char="•"/>
+            </a:pPr>
+            <a:r>
+              <a:rPr sz="2300">
+                <a:solidFill>
+                  <a:srgbClr val="1E293B"/>
+                </a:solidFill>
+                <a:latin typeface="Calibri"/>
+              </a:rPr>
+              <a:t>Cứng cỏi, không khuất phục ở phiên toà cõi âm; đấu tranh đến cùng.</a:t>
+            </a:r>
+          </a:p>
+        </p:txBody>
+      </p:sp>
+      <p:sp>
+        <p:nvSpPr>
+          <p:cNvPr id="8" name="Rounded Rectangle 7"/>
+          <p:cNvSpPr/>
+          <p:nvPr/>
+        </p:nvSpPr>
+        <p:spPr>
+          <a:xfrm>
+            <a:off x="731520" y="5074920"/>
+            <a:ext cx="10789920" cy="731520"/>
+          </a:xfrm>
+          <a:prstGeom prst="roundRect">
+            <a:avLst>
+              <a:gd name="adj" fmla="val 8000"/>
+            </a:avLst>
+          </a:prstGeom>
+          <a:solidFill>
+            <a:srgbClr val="FEF2F2"/>
+          </a:solidFill>
+          <a:ln w="19050">
+            <a:solidFill>
+              <a:srgbClr val="991B1B"/>
+            </a:solidFill>
+          </a:ln>
+          <a:effectLst/>
+        </p:spPr>
+        <p:style>
+          <a:lnRef idx="1">
+            <a:schemeClr val="accent1"/>
+          </a:lnRef>
+          <a:fillRef idx="3">
+            <a:schemeClr val="accent1"/>
+          </a:fillRef>
+          <a:effectRef idx="2">
+            <a:schemeClr val="accent1"/>
+          </a:effectRef>
+          <a:fontRef idx="minor">
+            <a:schemeClr val="lt1"/>
+          </a:fontRef>
+        </p:style>
+        <p:txBody>
+          <a:bodyPr rtlCol="0" anchor="ctr"/>
+          <a:lstStyle/>
+          <a:p>
+            <a:pPr algn="ctr"/>
+          </a:p>
+        </p:txBody>
+      </p:sp>
+      <p:sp>
+        <p:nvSpPr>
+          <p:cNvPr id="9" name="TextBox 8"/>
+          <p:cNvSpPr txBox="1"/>
+          <p:nvPr/>
+        </p:nvSpPr>
+        <p:spPr>
+          <a:xfrm>
+            <a:off x="914400" y="5074920"/>
+            <a:ext cx="10424160" cy="731520"/>
           </a:xfrm>
           <a:prstGeom prst="rect">
             <a:avLst/>
@@ -8357,17 +8885,17 @@
           <a:p>
             <a:pPr algn="l">
               <a:spcAft>
-                <a:spcPts val="800"/>
+                <a:spcPts val="400"/>
               </a:spcAft>
             </a:pPr>
             <a:r>
-              <a:rPr sz="3600" b="1">
-                <a:solidFill>
-                  <a:srgbClr val="1E40AF"/>
+              <a:rPr sz="2400" b="1">
+                <a:solidFill>
+                  <a:srgbClr val="991B1B"/>
                 </a:solidFill>
                 <a:latin typeface="Calibri"/>
               </a:rPr>
-              <a:t>TIẾT 5 – 7: CHỮ NGƯỜI TỬ TÙ (Nguyễn Tuân)</a:t>
+              <a:t>Người trí thức cương trực, dũng cảm bảo vệ công lí.</a:t>
             </a:r>
           </a:p>
         </p:txBody>
@@ -8835,14 +9363,14 @@
         </p:nvSpPr>
         <p:spPr>
           <a:xfrm>
-            <a:off x="10097719" y="457200"/>
-            <a:ext cx="1545336" cy="457200"/>
+            <a:off x="10253167" y="457200"/>
+            <a:ext cx="1389888" cy="457200"/>
           </a:xfrm>
           <a:prstGeom prst="roundRect">
             <a:avLst/>
           </a:prstGeom>
           <a:solidFill>
-            <a:srgbClr val="166534"/>
+            <a:srgbClr val="1E40AF"/>
           </a:solidFill>
           <a:ln>
             <a:noFill/>
@@ -8875,7 +9403,7 @@
                 </a:solidFill>
                 <a:latin typeface="Arial"/>
               </a:rPr>
-              <a:t>GHI NHỚ</a:t>
+              <a:t>ĐỀ BÀI</a:t>
             </a:r>
           </a:p>
         </p:txBody>
@@ -8889,7 +9417,7 @@
         <p:spPr>
           <a:xfrm>
             <a:off x="731520" y="274320"/>
-            <a:ext cx="9427464" cy="868680"/>
+            <a:ext cx="9582912" cy="868680"/>
           </a:xfrm>
           <a:prstGeom prst="rect">
             <a:avLst/>
@@ -8909,7 +9437,7 @@
                 </a:solidFill>
                 <a:latin typeface="Arial"/>
               </a:rPr>
-              <a:t>TÁC GIẢ NGUYỄN TUÂN</a:t>
+              <a:t>YẾU TỐ KÌ ẢO VÀ CHỦ ĐỀ</a:t>
             </a:r>
           </a:p>
         </p:txBody>
@@ -9002,7 +9530,7 @@
         <p:spPr>
           <a:xfrm>
             <a:off x="731520" y="1463040"/>
-            <a:ext cx="10789920" cy="4754880"/>
+            <a:ext cx="10789920" cy="3566160"/>
           </a:xfrm>
           <a:prstGeom prst="rect">
             <a:avLst/>
@@ -9015,66 +9543,106 @@
           </a:bodyPr>
           <a:lstStyle/>
           <a:p>
-            <a:pPr algn="l" marL="365760" indent="-365760">
+            <a:pPr algn="l">
               <a:spcAft>
                 <a:spcPts val="800"/>
               </a:spcAft>
-              <a:buClr>
-                <a:srgbClr val="1E40AF"/>
-              </a:buClr>
-              <a:buFont typeface="Arial"/>
-              <a:buChar char="•"/>
             </a:pPr>
             <a:r>
-              <a:rPr sz="2400">
+              <a:rPr sz="2600" b="1">
                 <a:solidFill>
                   <a:srgbClr val="1E293B"/>
                 </a:solidFill>
                 <a:latin typeface="Calibri"/>
               </a:rPr>
-              <a:t>Nguyễn Tuân (1910 – 1987), quê Hà Nội; sở trường truyện ngắn, tuỳ bút.</a:t>
-            </a:r>
-          </a:p>
-          <a:p>
-            <a:pPr algn="l" marL="365760" indent="-365760">
+              <a:t>Phân tích giá trị của một số yếu tố kì ảo trong truyện. Truyện gửi gắm thông điệp gì?</a:t>
+            </a:r>
+          </a:p>
+        </p:txBody>
+      </p:sp>
+      <p:sp>
+        <p:nvSpPr>
+          <p:cNvPr id="8" name="Rounded Rectangle 7"/>
+          <p:cNvSpPr/>
+          <p:nvPr/>
+        </p:nvSpPr>
+        <p:spPr>
+          <a:xfrm>
+            <a:off x="731520" y="5120640"/>
+            <a:ext cx="10789920" cy="693420"/>
+          </a:xfrm>
+          <a:prstGeom prst="roundRect">
+            <a:avLst>
+              <a:gd name="adj" fmla="val 8000"/>
+            </a:avLst>
+          </a:prstGeom>
+          <a:solidFill>
+            <a:srgbClr val="EFF4FF"/>
+          </a:solidFill>
+          <a:ln w="19050">
+            <a:solidFill>
+              <a:srgbClr val="1E40AF"/>
+            </a:solidFill>
+          </a:ln>
+          <a:effectLst/>
+        </p:spPr>
+        <p:style>
+          <a:lnRef idx="1">
+            <a:schemeClr val="accent1"/>
+          </a:lnRef>
+          <a:fillRef idx="3">
+            <a:schemeClr val="accent1"/>
+          </a:fillRef>
+          <a:effectRef idx="2">
+            <a:schemeClr val="accent1"/>
+          </a:effectRef>
+          <a:fontRef idx="minor">
+            <a:schemeClr val="lt1"/>
+          </a:fontRef>
+        </p:style>
+        <p:txBody>
+          <a:bodyPr rtlCol="0" anchor="ctr"/>
+          <a:lstStyle/>
+          <a:p>
+            <a:pPr algn="ctr"/>
+          </a:p>
+        </p:txBody>
+      </p:sp>
+      <p:sp>
+        <p:nvSpPr>
+          <p:cNvPr id="9" name="TextBox 8"/>
+          <p:cNvSpPr txBox="1"/>
+          <p:nvPr/>
+        </p:nvSpPr>
+        <p:spPr>
+          <a:xfrm>
+            <a:off x="914400" y="5120640"/>
+            <a:ext cx="10424160" cy="693420"/>
+          </a:xfrm>
+          <a:prstGeom prst="rect">
+            <a:avLst/>
+          </a:prstGeom>
+          <a:noFill/>
+        </p:spPr>
+        <p:txBody>
+          <a:bodyPr wrap="square" anchor="ctr" lIns="45720" rIns="45720">
+            <a:spAutoFit/>
+          </a:bodyPr>
+          <a:lstStyle/>
+          <a:p>
+            <a:pPr algn="l">
               <a:spcAft>
-                <a:spcPts val="800"/>
+                <a:spcPts val="400"/>
               </a:spcAft>
-              <a:buClr>
-                <a:srgbClr val="1E40AF"/>
-              </a:buClr>
-              <a:buFont typeface="Arial"/>
-              <a:buChar char="•"/>
             </a:pPr>
             <a:r>
-              <a:rPr sz="2400">
-                <a:solidFill>
-                  <a:srgbClr val="1E293B"/>
+              <a:rPr sz="2200" b="1">
+                <a:solidFill>
+                  <a:srgbClr val="1E40AF"/>
                 </a:solidFill>
                 <a:latin typeface="Calibri"/>
               </a:rPr>
-              <a:t>Phong cách tài hoa, uyên bác; suốt đời đi tìm và tôn vinh cái đẹp.</a:t>
-            </a:r>
-          </a:p>
-          <a:p>
-            <a:pPr algn="l" marL="365760" indent="-365760">
-              <a:spcAft>
-                <a:spcPts val="800"/>
-              </a:spcAft>
-              <a:buClr>
-                <a:srgbClr val="1E40AF"/>
-              </a:buClr>
-              <a:buFont typeface="Arial"/>
-              <a:buChar char="•"/>
-            </a:pPr>
-            <a:r>
-              <a:rPr sz="2400">
-                <a:solidFill>
-                  <a:srgbClr val="1E293B"/>
-                </a:solidFill>
-                <a:latin typeface="Calibri"/>
-              </a:rPr>
-              <a:t>Chữ người tử tù in trong tập Vang bóng một thời (1940).</a:t>
+              <a:t>💡 Cõi âm phản chiếu điều gì của cõi trần?</a:t>
             </a:r>
           </a:p>
         </p:txBody>
@@ -9157,14 +9725,14 @@
         </p:nvSpPr>
         <p:spPr>
           <a:xfrm>
-            <a:off x="10253167" y="457200"/>
-            <a:ext cx="1389888" cy="457200"/>
+            <a:off x="9942271" y="457200"/>
+            <a:ext cx="1700784" cy="457200"/>
           </a:xfrm>
           <a:prstGeom prst="roundRect">
             <a:avLst/>
           </a:prstGeom>
           <a:solidFill>
-            <a:srgbClr val="1E40AF"/>
+            <a:srgbClr val="991B1B"/>
           </a:solidFill>
           <a:ln>
             <a:noFill/>
@@ -9197,7 +9765,7 @@
                 </a:solidFill>
                 <a:latin typeface="Arial"/>
               </a:rPr>
-              <a:t>ĐỀ BÀI</a:t>
+              <a:t>LỜI GIẢI</a:t>
             </a:r>
           </a:p>
         </p:txBody>
@@ -9211,7 +9779,7 @@
         <p:spPr>
           <a:xfrm>
             <a:off x="731520" y="274320"/>
-            <a:ext cx="9582912" cy="868680"/>
+            <a:ext cx="9272016" cy="868680"/>
           </a:xfrm>
           <a:prstGeom prst="rect">
             <a:avLst/>
@@ -9231,7 +9799,7 @@
                 </a:solidFill>
                 <a:latin typeface="Arial"/>
               </a:rPr>
-              <a:t>NHÂN VẬT HUẤN CAO</a:t>
+              <a:t>YẾU TỐ KÌ ẢO VÀ CHỦ ĐỀ</a:t>
             </a:r>
           </a:p>
         </p:txBody>
@@ -9324,7 +9892,7 @@
         <p:spPr>
           <a:xfrm>
             <a:off x="731520" y="1463040"/>
-            <a:ext cx="10789920" cy="3566160"/>
+            <a:ext cx="10789920" cy="3474720"/>
           </a:xfrm>
           <a:prstGeom prst="rect">
             <a:avLst/>
@@ -9337,19 +9905,66 @@
           </a:bodyPr>
           <a:lstStyle/>
           <a:p>
-            <a:pPr algn="l">
+            <a:pPr algn="l" marL="365760" indent="-365760">
               <a:spcAft>
                 <a:spcPts val="800"/>
               </a:spcAft>
+              <a:buClr>
+                <a:srgbClr val="1E40AF"/>
+              </a:buClr>
+              <a:buFont typeface="Arial"/>
+              <a:buChar char="•"/>
             </a:pPr>
             <a:r>
-              <a:rPr sz="2600" b="1">
+              <a:rPr sz="2300">
                 <a:solidFill>
                   <a:srgbClr val="1E293B"/>
                 </a:solidFill>
                 <a:latin typeface="Calibri"/>
               </a:rPr>
-              <a:t>Nhân vật Huấn Cao được khắc hoạ với những vẻ đẹp nào?</a:t>
+              <a:t>Hồn ma tên tướng giặc, phiên toà Diêm Vương, Tử Văn làm Phán sự đền Tản Viên.</a:t>
+            </a:r>
+          </a:p>
+          <a:p>
+            <a:pPr algn="l" marL="365760" indent="-365760">
+              <a:spcAft>
+                <a:spcPts val="800"/>
+              </a:spcAft>
+              <a:buClr>
+                <a:srgbClr val="1E40AF"/>
+              </a:buClr>
+              <a:buFont typeface="Arial"/>
+              <a:buChar char="•"/>
+            </a:pPr>
+            <a:r>
+              <a:rPr sz="2300">
+                <a:solidFill>
+                  <a:srgbClr val="1E293B"/>
+                </a:solidFill>
+                <a:latin typeface="Calibri"/>
+              </a:rPr>
+              <a:t>Cõi âm phản chiếu cõi trần: tham nhũng, cường quyền, hối lộ.</a:t>
+            </a:r>
+          </a:p>
+          <a:p>
+            <a:pPr algn="l" marL="365760" indent="-365760">
+              <a:spcAft>
+                <a:spcPts val="800"/>
+              </a:spcAft>
+              <a:buClr>
+                <a:srgbClr val="1E40AF"/>
+              </a:buClr>
+              <a:buFont typeface="Arial"/>
+              <a:buChar char="•"/>
+            </a:pPr>
+            <a:r>
+              <a:rPr sz="2300">
+                <a:solidFill>
+                  <a:srgbClr val="1E293B"/>
+                </a:solidFill>
+                <a:latin typeface="Calibri"/>
+              </a:rPr>
+              <a:t>Chính nghĩa thắng gian tà; ca ngợi người dám đấu tranh.</a:t>
             </a:r>
           </a:p>
         </p:txBody>
@@ -9362,8 +9977,8 @@
         </p:nvSpPr>
         <p:spPr>
           <a:xfrm>
-            <a:off x="731520" y="5120640"/>
-            <a:ext cx="10789920" cy="693420"/>
+            <a:off x="731520" y="5074920"/>
+            <a:ext cx="10789920" cy="731520"/>
           </a:xfrm>
           <a:prstGeom prst="roundRect">
             <a:avLst>
@@ -9371,11 +9986,11 @@
             </a:avLst>
           </a:prstGeom>
           <a:solidFill>
-            <a:srgbClr val="EFF4FF"/>
+            <a:srgbClr val="FEF2F2"/>
           </a:solidFill>
           <a:ln w="19050">
             <a:solidFill>
-              <a:srgbClr val="1E40AF"/>
+              <a:srgbClr val="991B1B"/>
             </a:solidFill>
           </a:ln>
           <a:effectLst/>
@@ -9410,8 +10025,8 @@
         </p:nvSpPr>
         <p:spPr>
           <a:xfrm>
-            <a:off x="914400" y="5120640"/>
-            <a:ext cx="10424160" cy="693420"/>
+            <a:off x="914400" y="5074920"/>
+            <a:ext cx="10424160" cy="731520"/>
           </a:xfrm>
           <a:prstGeom prst="rect">
             <a:avLst/>
@@ -9430,13 +10045,13 @@
               </a:spcAft>
             </a:pPr>
             <a:r>
-              <a:rPr sz="2200" b="1">
-                <a:solidFill>
-                  <a:srgbClr val="1E40AF"/>
+              <a:rPr sz="2400" b="1">
+                <a:solidFill>
+                  <a:srgbClr val="991B1B"/>
                 </a:solidFill>
                 <a:latin typeface="Calibri"/>
               </a:rPr>
-              <a:t>💡 Tài hoa – khí phách – thiên lương.</a:t>
+              <a:t>Giáo dục liêm chính: dũng cảm chống cái sai, cái ác.</a:t>
             </a:r>
           </a:p>
         </p:txBody>
@@ -9455,7 +10070,7 @@
     <p:bg>
       <p:bgPr>
         <a:solidFill>
-          <a:srgbClr val="FFFFFF"/>
+          <a:srgbClr val="F8F9FA"/>
         </a:solidFill>
         <a:effectLst/>
       </p:bgPr>
@@ -9475,54 +10090,10 @@
         </p:nvSpPr>
         <p:spPr>
           <a:xfrm>
-            <a:off x="457200" y="384048"/>
-            <a:ext cx="109728" cy="658368"/>
-          </a:xfrm>
-          <a:prstGeom prst="rect">
-            <a:avLst/>
-          </a:prstGeom>
-          <a:solidFill>
-            <a:srgbClr val="1E40AF"/>
-          </a:solidFill>
-          <a:ln>
-            <a:noFill/>
-          </a:ln>
-          <a:effectLst/>
-        </p:spPr>
-        <p:style>
-          <a:lnRef idx="1">
-            <a:schemeClr val="accent1"/>
-          </a:lnRef>
-          <a:fillRef idx="3">
-            <a:schemeClr val="accent1"/>
-          </a:fillRef>
-          <a:effectRef idx="2">
-            <a:schemeClr val="accent1"/>
-          </a:effectRef>
-          <a:fontRef idx="minor">
-            <a:schemeClr val="lt1"/>
-          </a:fontRef>
-        </p:style>
-        <p:txBody>
-          <a:bodyPr rtlCol="0" anchor="ctr"/>
-          <a:lstStyle/>
-          <a:p>
-            <a:pPr algn="ctr"/>
-          </a:p>
-        </p:txBody>
-      </p:sp>
-      <p:sp>
-        <p:nvSpPr>
-          <p:cNvPr id="3" name="Rounded Rectangle 2"/>
-          <p:cNvSpPr/>
-          <p:nvPr/>
-        </p:nvSpPr>
-        <p:spPr>
-          <a:xfrm>
-            <a:off x="9942271" y="457200"/>
-            <a:ext cx="1700784" cy="457200"/>
-          </a:xfrm>
-          <a:prstGeom prst="roundRect">
+            <a:off x="548640" y="2926080"/>
+            <a:ext cx="164592" cy="1005840"/>
+          </a:xfrm>
+          <a:prstGeom prst="rect">
             <a:avLst/>
           </a:prstGeom>
           <a:solidFill>
@@ -9548,32 +10119,23 @@
           </a:fontRef>
         </p:style>
         <p:txBody>
-          <a:bodyPr rtlCol="0" anchor="ctr" wrap="none" tIns="0" bIns="0"/>
+          <a:bodyPr rtlCol="0" anchor="ctr"/>
           <a:lstStyle/>
           <a:p>
             <a:pPr algn="ctr"/>
-            <a:r>
-              <a:rPr sz="1400" b="1">
-                <a:solidFill>
-                  <a:srgbClr val="FFFFFF"/>
-                </a:solidFill>
-                <a:latin typeface="Arial"/>
-              </a:rPr>
-              <a:t>LỜI GIẢI</a:t>
-            </a:r>
-          </a:p>
-        </p:txBody>
-      </p:sp>
-      <p:sp>
-        <p:nvSpPr>
-          <p:cNvPr id="4" name="TextBox 3"/>
+          </a:p>
+        </p:txBody>
+      </p:sp>
+      <p:sp>
+        <p:nvSpPr>
+          <p:cNvPr id="3" name="TextBox 2"/>
           <p:cNvSpPr txBox="1"/>
           <p:nvPr/>
         </p:nvSpPr>
         <p:spPr>
           <a:xfrm>
-            <a:off x="731520" y="274320"/>
-            <a:ext cx="9272016" cy="868680"/>
+            <a:off x="914400" y="2743200"/>
+            <a:ext cx="10515600" cy="1371600"/>
           </a:xfrm>
           <a:prstGeom prst="rect">
             <a:avLst/>
@@ -9581,271 +10143,24 @@
           <a:noFill/>
         </p:spPr>
         <p:txBody>
-          <a:bodyPr wrap="square" anchor="ctr">
+          <a:bodyPr wrap="square" anchor="ctr" lIns="45720" rIns="45720">
             <a:spAutoFit/>
           </a:bodyPr>
           <a:lstStyle/>
           <a:p>
-            <a:r>
-              <a:rPr sz="3600" b="1">
-                <a:solidFill>
-                  <a:srgbClr val="1E40AF"/>
-                </a:solidFill>
-                <a:latin typeface="Arial"/>
-              </a:rPr>
-              <a:t>NHÂN VẬT HUẤN CAO</a:t>
-            </a:r>
-          </a:p>
-        </p:txBody>
-      </p:sp>
-      <p:sp>
-        <p:nvSpPr>
-          <p:cNvPr id="5" name="Rectangle 4"/>
-          <p:cNvSpPr/>
-          <p:nvPr/>
-        </p:nvSpPr>
-        <p:spPr>
-          <a:xfrm>
-            <a:off x="457200" y="1207008"/>
-            <a:ext cx="11274552" cy="22000"/>
-          </a:xfrm>
-          <a:prstGeom prst="rect">
-            <a:avLst/>
-          </a:prstGeom>
-          <a:solidFill>
-            <a:srgbClr val="E2E8F0"/>
-          </a:solidFill>
-          <a:ln>
-            <a:noFill/>
-          </a:ln>
-          <a:effectLst/>
-        </p:spPr>
-        <p:style>
-          <a:lnRef idx="1">
-            <a:schemeClr val="accent1"/>
-          </a:lnRef>
-          <a:fillRef idx="3">
-            <a:schemeClr val="accent1"/>
-          </a:fillRef>
-          <a:effectRef idx="2">
-            <a:schemeClr val="accent1"/>
-          </a:effectRef>
-          <a:fontRef idx="minor">
-            <a:schemeClr val="lt1"/>
-          </a:fontRef>
-        </p:style>
-        <p:txBody>
-          <a:bodyPr rtlCol="0" anchor="ctr"/>
-          <a:lstStyle/>
-          <a:p>
-            <a:pPr algn="ctr"/>
-          </a:p>
-        </p:txBody>
-      </p:sp>
-      <p:sp>
-        <p:nvSpPr>
-          <p:cNvPr id="6" name="TextBox 5"/>
-          <p:cNvSpPr txBox="1"/>
-          <p:nvPr/>
-        </p:nvSpPr>
-        <p:spPr>
-          <a:xfrm>
-            <a:off x="457200" y="6355080"/>
-            <a:ext cx="11274552" cy="365760"/>
-          </a:xfrm>
-          <a:prstGeom prst="rect">
-            <a:avLst/>
-          </a:prstGeom>
-          <a:noFill/>
-        </p:spPr>
-        <p:txBody>
-          <a:bodyPr wrap="none">
-            <a:spAutoFit/>
-          </a:bodyPr>
-          <a:lstStyle/>
-          <a:p>
-            <a:pPr algn="r"/>
-            <a:r>
-              <a:rPr sz="1200">
-                <a:solidFill>
-                  <a:srgbClr val="64748B"/>
-                </a:solidFill>
-                <a:latin typeface="Calibri"/>
-              </a:rPr>
-              <a:t>Ngữ văn 10 · Bài 1: Sức Hấp Dẫn Của Truyện Kể          22</a:t>
-            </a:r>
-          </a:p>
-        </p:txBody>
-      </p:sp>
-      <p:sp>
-        <p:nvSpPr>
-          <p:cNvPr id="7" name="TextBox 6"/>
-          <p:cNvSpPr txBox="1"/>
-          <p:nvPr/>
-        </p:nvSpPr>
-        <p:spPr>
-          <a:xfrm>
-            <a:off x="731520" y="1463040"/>
-            <a:ext cx="10789920" cy="3474720"/>
-          </a:xfrm>
-          <a:prstGeom prst="rect">
-            <a:avLst/>
-          </a:prstGeom>
-          <a:noFill/>
-        </p:spPr>
-        <p:txBody>
-          <a:bodyPr wrap="square" anchor="t" lIns="45720" rIns="45720">
-            <a:spAutoFit/>
-          </a:bodyPr>
-          <a:lstStyle/>
-          <a:p>
-            <a:pPr algn="l" marL="365760" indent="-365760">
+            <a:pPr algn="l">
               <a:spcAft>
                 <a:spcPts val="800"/>
               </a:spcAft>
-              <a:buClr>
-                <a:srgbClr val="1E40AF"/>
-              </a:buClr>
-              <a:buFont typeface="Arial"/>
-              <a:buChar char="•"/>
             </a:pPr>
             <a:r>
-              <a:rPr sz="2300">
-                <a:solidFill>
-                  <a:srgbClr val="1E293B"/>
+              <a:rPr sz="3600" b="1">
+                <a:solidFill>
+                  <a:srgbClr val="1E40AF"/>
                 </a:solidFill>
                 <a:latin typeface="Calibri"/>
               </a:rPr>
-              <a:t>Tài viết chữ đẹp nổi tiếng.</a:t>
-            </a:r>
-          </a:p>
-          <a:p>
-            <a:pPr algn="l" marL="365760" indent="-365760">
-              <a:spcAft>
-                <a:spcPts val="800"/>
-              </a:spcAft>
-              <a:buClr>
-                <a:srgbClr val="1E40AF"/>
-              </a:buClr>
-              <a:buFont typeface="Arial"/>
-              <a:buChar char="•"/>
-            </a:pPr>
-            <a:r>
-              <a:rPr sz="2300">
-                <a:solidFill>
-                  <a:srgbClr val="1E293B"/>
-                </a:solidFill>
-                <a:latin typeface="Calibri"/>
-              </a:rPr>
-              <a:t>Khí phách hiên ngang: dỡ gông, thản nhiên trước cái chết.</a:t>
-            </a:r>
-          </a:p>
-          <a:p>
-            <a:pPr algn="l" marL="365760" indent="-365760">
-              <a:spcAft>
-                <a:spcPts val="800"/>
-              </a:spcAft>
-              <a:buClr>
-                <a:srgbClr val="1E40AF"/>
-              </a:buClr>
-              <a:buFont typeface="Arial"/>
-              <a:buChar char="•"/>
-            </a:pPr>
-            <a:r>
-              <a:rPr sz="2300">
-                <a:solidFill>
-                  <a:srgbClr val="1E293B"/>
-                </a:solidFill>
-                <a:latin typeface="Calibri"/>
-              </a:rPr>
-              <a:t>Thiên lương trong sáng: chỉ cho chữ người biết quý cái đẹp.</a:t>
-            </a:r>
-          </a:p>
-        </p:txBody>
-      </p:sp>
-      <p:sp>
-        <p:nvSpPr>
-          <p:cNvPr id="8" name="Rounded Rectangle 7"/>
-          <p:cNvSpPr/>
-          <p:nvPr/>
-        </p:nvSpPr>
-        <p:spPr>
-          <a:xfrm>
-            <a:off x="731520" y="5074920"/>
-            <a:ext cx="10789920" cy="731520"/>
-          </a:xfrm>
-          <a:prstGeom prst="roundRect">
-            <a:avLst>
-              <a:gd name="adj" fmla="val 8000"/>
-            </a:avLst>
-          </a:prstGeom>
-          <a:solidFill>
-            <a:srgbClr val="FEF2F2"/>
-          </a:solidFill>
-          <a:ln w="19050">
-            <a:solidFill>
-              <a:srgbClr val="991B1B"/>
-            </a:solidFill>
-          </a:ln>
-          <a:effectLst/>
-        </p:spPr>
-        <p:style>
-          <a:lnRef idx="1">
-            <a:schemeClr val="accent1"/>
-          </a:lnRef>
-          <a:fillRef idx="3">
-            <a:schemeClr val="accent1"/>
-          </a:fillRef>
-          <a:effectRef idx="2">
-            <a:schemeClr val="accent1"/>
-          </a:effectRef>
-          <a:fontRef idx="minor">
-            <a:schemeClr val="lt1"/>
-          </a:fontRef>
-        </p:style>
-        <p:txBody>
-          <a:bodyPr rtlCol="0" anchor="ctr"/>
-          <a:lstStyle/>
-          <a:p>
-            <a:pPr algn="ctr"/>
-          </a:p>
-        </p:txBody>
-      </p:sp>
-      <p:sp>
-        <p:nvSpPr>
-          <p:cNvPr id="9" name="TextBox 8"/>
-          <p:cNvSpPr txBox="1"/>
-          <p:nvPr/>
-        </p:nvSpPr>
-        <p:spPr>
-          <a:xfrm>
-            <a:off x="914400" y="5074920"/>
-            <a:ext cx="10424160" cy="731520"/>
-          </a:xfrm>
-          <a:prstGeom prst="rect">
-            <a:avLst/>
-          </a:prstGeom>
-          <a:noFill/>
-        </p:spPr>
-        <p:txBody>
-          <a:bodyPr wrap="square" anchor="ctr" lIns="45720" rIns="45720">
-            <a:spAutoFit/>
-          </a:bodyPr>
-          <a:lstStyle/>
-          <a:p>
-            <a:pPr algn="l">
-              <a:spcAft>
-                <a:spcPts val="400"/>
-              </a:spcAft>
-            </a:pPr>
-            <a:r>
-              <a:rPr sz="2400" b="1">
-                <a:solidFill>
-                  <a:srgbClr val="991B1B"/>
-                </a:solidFill>
-                <a:latin typeface="Calibri"/>
-              </a:rPr>
-              <a:t>Hình tượng con người tài hoa, khí phách, thiên lương.</a:t>
+              <a:t>TIẾT 5 – 7: CHỮ NGƯỜI TỬ TÙ (Nguyễn Tuân)</a:t>
             </a:r>
           </a:p>
         </p:txBody>
@@ -9928,14 +10243,14 @@
         </p:nvSpPr>
         <p:spPr>
           <a:xfrm>
-            <a:off x="10253167" y="457200"/>
-            <a:ext cx="1389888" cy="457200"/>
+            <a:off x="10097719" y="457200"/>
+            <a:ext cx="1545336" cy="457200"/>
           </a:xfrm>
           <a:prstGeom prst="roundRect">
             <a:avLst/>
           </a:prstGeom>
           <a:solidFill>
-            <a:srgbClr val="1E40AF"/>
+            <a:srgbClr val="166534"/>
           </a:solidFill>
           <a:ln>
             <a:noFill/>
@@ -9968,7 +10283,7 @@
                 </a:solidFill>
                 <a:latin typeface="Arial"/>
               </a:rPr>
-              <a:t>ĐỀ BÀI</a:t>
+              <a:t>GHI NHỚ</a:t>
             </a:r>
           </a:p>
         </p:txBody>
@@ -9982,7 +10297,7 @@
         <p:spPr>
           <a:xfrm>
             <a:off x="731520" y="274320"/>
-            <a:ext cx="9582912" cy="868680"/>
+            <a:ext cx="9427464" cy="868680"/>
           </a:xfrm>
           <a:prstGeom prst="rect">
             <a:avLst/>
@@ -10002,7 +10317,7 @@
                 </a:solidFill>
                 <a:latin typeface="Arial"/>
               </a:rPr>
-              <a:t>NHÂN VẬT QUẢN NGỤC</a:t>
+              <a:t>TÁC GIẢ NGUYỄN TUÂN</a:t>
             </a:r>
           </a:p>
         </p:txBody>
@@ -10095,7 +10410,7 @@
         <p:spPr>
           <a:xfrm>
             <a:off x="731520" y="1463040"/>
-            <a:ext cx="10789920" cy="3566160"/>
+            <a:ext cx="10789920" cy="4754880"/>
           </a:xfrm>
           <a:prstGeom prst="rect">
             <a:avLst/>
@@ -10108,106 +10423,66 @@
           </a:bodyPr>
           <a:lstStyle/>
           <a:p>
-            <a:pPr algn="l">
+            <a:pPr algn="l" marL="365760" indent="-365760">
               <a:spcAft>
                 <a:spcPts val="800"/>
               </a:spcAft>
+              <a:buClr>
+                <a:srgbClr val="1E40AF"/>
+              </a:buClr>
+              <a:buFont typeface="Arial"/>
+              <a:buChar char="•"/>
             </a:pPr>
             <a:r>
-              <a:rPr sz="2600" b="1">
+              <a:rPr sz="2400">
                 <a:solidFill>
                   <a:srgbClr val="1E293B"/>
                 </a:solidFill>
                 <a:latin typeface="Calibri"/>
               </a:rPr>
-              <a:t>Vì sao nói quản ngục là “một thanh âm trong trẻo chen vào giữa bản đàn mà nhạc luật đều hỗn loạn xô bồ”?</a:t>
-            </a:r>
-          </a:p>
-        </p:txBody>
-      </p:sp>
-      <p:sp>
-        <p:nvSpPr>
-          <p:cNvPr id="8" name="Rounded Rectangle 7"/>
-          <p:cNvSpPr/>
-          <p:nvPr/>
-        </p:nvSpPr>
-        <p:spPr>
-          <a:xfrm>
-            <a:off x="731520" y="5120640"/>
-            <a:ext cx="10789920" cy="693420"/>
-          </a:xfrm>
-          <a:prstGeom prst="roundRect">
-            <a:avLst>
-              <a:gd name="adj" fmla="val 8000"/>
-            </a:avLst>
-          </a:prstGeom>
-          <a:solidFill>
-            <a:srgbClr val="EFF4FF"/>
-          </a:solidFill>
-          <a:ln w="19050">
-            <a:solidFill>
-              <a:srgbClr val="1E40AF"/>
-            </a:solidFill>
-          </a:ln>
-          <a:effectLst/>
-        </p:spPr>
-        <p:style>
-          <a:lnRef idx="1">
-            <a:schemeClr val="accent1"/>
-          </a:lnRef>
-          <a:fillRef idx="3">
-            <a:schemeClr val="accent1"/>
-          </a:fillRef>
-          <a:effectRef idx="2">
-            <a:schemeClr val="accent1"/>
-          </a:effectRef>
-          <a:fontRef idx="minor">
-            <a:schemeClr val="lt1"/>
-          </a:fontRef>
-        </p:style>
-        <p:txBody>
-          <a:bodyPr rtlCol="0" anchor="ctr"/>
-          <a:lstStyle/>
-          <a:p>
-            <a:pPr algn="ctr"/>
-          </a:p>
-        </p:txBody>
-      </p:sp>
-      <p:sp>
-        <p:nvSpPr>
-          <p:cNvPr id="9" name="TextBox 8"/>
-          <p:cNvSpPr txBox="1"/>
-          <p:nvPr/>
-        </p:nvSpPr>
-        <p:spPr>
-          <a:xfrm>
-            <a:off x="914400" y="5120640"/>
-            <a:ext cx="10424160" cy="693420"/>
-          </a:xfrm>
-          <a:prstGeom prst="rect">
-            <a:avLst/>
-          </a:prstGeom>
-          <a:noFill/>
-        </p:spPr>
-        <p:txBody>
-          <a:bodyPr wrap="square" anchor="ctr" lIns="45720" rIns="45720">
-            <a:spAutoFit/>
-          </a:bodyPr>
-          <a:lstStyle/>
-          <a:p>
-            <a:pPr algn="l">
+              <a:t>Nguyễn Tuân (1910 – 1987), quê Hà Nội; sở trường truyện ngắn, tuỳ bút.</a:t>
+            </a:r>
+          </a:p>
+          <a:p>
+            <a:pPr algn="l" marL="365760" indent="-365760">
               <a:spcAft>
-                <a:spcPts val="400"/>
+                <a:spcPts val="800"/>
               </a:spcAft>
+              <a:buClr>
+                <a:srgbClr val="1E40AF"/>
+              </a:buClr>
+              <a:buFont typeface="Arial"/>
+              <a:buChar char="•"/>
             </a:pPr>
             <a:r>
-              <a:rPr sz="2200" b="1">
-                <a:solidFill>
-                  <a:srgbClr val="1E40AF"/>
+              <a:rPr sz="2400">
+                <a:solidFill>
+                  <a:srgbClr val="1E293B"/>
                 </a:solidFill>
                 <a:latin typeface="Calibri"/>
               </a:rPr>
-              <a:t>💡 Quản ngục làm nghề gì, nhưng tâm hồn ra sao?</a:t>
+              <a:t>Phong cách tài hoa, uyên bác; suốt đời đi tìm và tôn vinh cái đẹp.</a:t>
+            </a:r>
+          </a:p>
+          <a:p>
+            <a:pPr algn="l" marL="365760" indent="-365760">
+              <a:spcAft>
+                <a:spcPts val="800"/>
+              </a:spcAft>
+              <a:buClr>
+                <a:srgbClr val="1E40AF"/>
+              </a:buClr>
+              <a:buFont typeface="Arial"/>
+              <a:buChar char="•"/>
+            </a:pPr>
+            <a:r>
+              <a:rPr sz="2400">
+                <a:solidFill>
+                  <a:srgbClr val="1E293B"/>
+                </a:solidFill>
+                <a:latin typeface="Calibri"/>
+              </a:rPr>
+              <a:t>Chữ người tử tù in trong tập Vang bóng một thời (1940).</a:t>
             </a:r>
           </a:p>
         </p:txBody>
@@ -10290,14 +10565,14 @@
         </p:nvSpPr>
         <p:spPr>
           <a:xfrm>
-            <a:off x="9942271" y="457200"/>
-            <a:ext cx="1700784" cy="457200"/>
+            <a:off x="10253167" y="457200"/>
+            <a:ext cx="1389888" cy="457200"/>
           </a:xfrm>
           <a:prstGeom prst="roundRect">
             <a:avLst/>
           </a:prstGeom>
           <a:solidFill>
-            <a:srgbClr val="991B1B"/>
+            <a:srgbClr val="1E40AF"/>
           </a:solidFill>
           <a:ln>
             <a:noFill/>
@@ -10330,7 +10605,7 @@
                 </a:solidFill>
                 <a:latin typeface="Arial"/>
               </a:rPr>
-              <a:t>LỜI GIẢI</a:t>
+              <a:t>ĐỀ BÀI</a:t>
             </a:r>
           </a:p>
         </p:txBody>
@@ -10344,7 +10619,7 @@
         <p:spPr>
           <a:xfrm>
             <a:off x="731520" y="274320"/>
-            <a:ext cx="9272016" cy="868680"/>
+            <a:ext cx="9582912" cy="868680"/>
           </a:xfrm>
           <a:prstGeom prst="rect">
             <a:avLst/>
@@ -10364,7 +10639,7 @@
                 </a:solidFill>
                 <a:latin typeface="Arial"/>
               </a:rPr>
-              <a:t>NHÂN VẬT QUẢN NGỤC</a:t>
+              <a:t>NHÂN VẬT HUẤN CAO</a:t>
             </a:r>
           </a:p>
         </p:txBody>
@@ -10457,7 +10732,7 @@
         <p:spPr>
           <a:xfrm>
             <a:off x="731520" y="1463040"/>
-            <a:ext cx="10789920" cy="3474720"/>
+            <a:ext cx="10789920" cy="3566160"/>
           </a:xfrm>
           <a:prstGeom prst="rect">
             <a:avLst/>
@@ -10470,66 +10745,19 @@
           </a:bodyPr>
           <a:lstStyle/>
           <a:p>
-            <a:pPr algn="l" marL="365760" indent="-365760">
+            <a:pPr algn="l">
               <a:spcAft>
                 <a:spcPts val="800"/>
               </a:spcAft>
-              <a:buClr>
-                <a:srgbClr val="1E40AF"/>
-              </a:buClr>
-              <a:buFont typeface="Arial"/>
-              <a:buChar char="•"/>
             </a:pPr>
             <a:r>
-              <a:rPr sz="2300">
+              <a:rPr sz="2600" b="1">
                 <a:solidFill>
                   <a:srgbClr val="1E293B"/>
                 </a:solidFill>
                 <a:latin typeface="Calibri"/>
               </a:rPr>
-              <a:t>Sống giữa nhà ngục tàn bạo nhưng giữ thiên lương.</a:t>
-            </a:r>
-          </a:p>
-          <a:p>
-            <a:pPr algn="l" marL="365760" indent="-365760">
-              <a:spcAft>
-                <a:spcPts val="800"/>
-              </a:spcAft>
-              <a:buClr>
-                <a:srgbClr val="1E40AF"/>
-              </a:buClr>
-              <a:buFont typeface="Arial"/>
-              <a:buChar char="•"/>
-            </a:pPr>
-            <a:r>
-              <a:rPr sz="2300">
-                <a:solidFill>
-                  <a:srgbClr val="1E293B"/>
-                </a:solidFill>
-                <a:latin typeface="Calibri"/>
-              </a:rPr>
-              <a:t>Biệt nhỡn liên tài, kính trọng Huấn Cao, liều mình xin chữ.</a:t>
-            </a:r>
-          </a:p>
-          <a:p>
-            <a:pPr algn="l" marL="365760" indent="-365760">
-              <a:spcAft>
-                <a:spcPts val="800"/>
-              </a:spcAft>
-              <a:buClr>
-                <a:srgbClr val="1E40AF"/>
-              </a:buClr>
-              <a:buFont typeface="Arial"/>
-              <a:buChar char="•"/>
-            </a:pPr>
-            <a:r>
-              <a:rPr sz="2300">
-                <a:solidFill>
-                  <a:srgbClr val="1E293B"/>
-                </a:solidFill>
-                <a:latin typeface="Calibri"/>
-              </a:rPr>
-              <a:t>Biết quý cái đẹp, cái thiện.</a:t>
+              <a:t>Nhân vật Huấn Cao được khắc hoạ với những vẻ đẹp nào?</a:t>
             </a:r>
           </a:p>
         </p:txBody>
@@ -10542,8 +10770,8 @@
         </p:nvSpPr>
         <p:spPr>
           <a:xfrm>
-            <a:off x="731520" y="5074920"/>
-            <a:ext cx="10789920" cy="731520"/>
+            <a:off x="731520" y="5120640"/>
+            <a:ext cx="10789920" cy="693420"/>
           </a:xfrm>
           <a:prstGeom prst="roundRect">
             <a:avLst>
@@ -10551,11 +10779,11 @@
             </a:avLst>
           </a:prstGeom>
           <a:solidFill>
-            <a:srgbClr val="FEF2F2"/>
+            <a:srgbClr val="EFF4FF"/>
           </a:solidFill>
           <a:ln w="19050">
             <a:solidFill>
-              <a:srgbClr val="991B1B"/>
+              <a:srgbClr val="1E40AF"/>
             </a:solidFill>
           </a:ln>
           <a:effectLst/>
@@ -10590,8 +10818,8 @@
         </p:nvSpPr>
         <p:spPr>
           <a:xfrm>
-            <a:off x="914400" y="5074920"/>
-            <a:ext cx="10424160" cy="731520"/>
+            <a:off x="914400" y="5120640"/>
+            <a:ext cx="10424160" cy="693420"/>
           </a:xfrm>
           <a:prstGeom prst="rect">
             <a:avLst/>
@@ -10610,13 +10838,13 @@
               </a:spcAft>
             </a:pPr>
             <a:r>
-              <a:rPr sz="2400" b="1">
-                <a:solidFill>
-                  <a:srgbClr val="991B1B"/>
+              <a:rPr sz="2200" b="1">
+                <a:solidFill>
+                  <a:srgbClr val="1E40AF"/>
                 </a:solidFill>
                 <a:latin typeface="Calibri"/>
               </a:rPr>
-              <a:t>Cái đẹp có thể nảy nở ngay nơi tăm tối.</a:t>
+              <a:t>💡 Tài hoa – khí phách – thiên lương.</a:t>
             </a:r>
           </a:p>
         </p:txBody>
@@ -10699,14 +10927,14 @@
         </p:nvSpPr>
         <p:spPr>
           <a:xfrm>
-            <a:off x="10253167" y="457200"/>
-            <a:ext cx="1389888" cy="457200"/>
+            <a:off x="9942271" y="457200"/>
+            <a:ext cx="1700784" cy="457200"/>
           </a:xfrm>
           <a:prstGeom prst="roundRect">
             <a:avLst/>
           </a:prstGeom>
           <a:solidFill>
-            <a:srgbClr val="1E40AF"/>
+            <a:srgbClr val="991B1B"/>
           </a:solidFill>
           <a:ln>
             <a:noFill/>
@@ -10739,7 +10967,7 @@
                 </a:solidFill>
                 <a:latin typeface="Arial"/>
               </a:rPr>
-              <a:t>ĐỀ BÀI</a:t>
+              <a:t>LỜI GIẢI</a:t>
             </a:r>
           </a:p>
         </p:txBody>
@@ -10753,7 +10981,7 @@
         <p:spPr>
           <a:xfrm>
             <a:off x="731520" y="274320"/>
-            <a:ext cx="9582912" cy="868680"/>
+            <a:ext cx="9272016" cy="868680"/>
           </a:xfrm>
           <a:prstGeom prst="rect">
             <a:avLst/>
@@ -10773,7 +11001,7 @@
                 </a:solidFill>
                 <a:latin typeface="Arial"/>
               </a:rPr>
-              <a:t>CẢNH CHO CHỮ</a:t>
+              <a:t>NHÂN VẬT HUẤN CAO</a:t>
             </a:r>
           </a:p>
         </p:txBody>
@@ -10866,7 +11094,7 @@
         <p:spPr>
           <a:xfrm>
             <a:off x="731520" y="1463040"/>
-            <a:ext cx="10789920" cy="3566160"/>
+            <a:ext cx="10789920" cy="3474720"/>
           </a:xfrm>
           <a:prstGeom prst="rect">
             <a:avLst/>
@@ -10879,19 +11107,66 @@
           </a:bodyPr>
           <a:lstStyle/>
           <a:p>
-            <a:pPr algn="l">
+            <a:pPr algn="l" marL="365760" indent="-365760">
               <a:spcAft>
                 <a:spcPts val="800"/>
               </a:spcAft>
+              <a:buClr>
+                <a:srgbClr val="1E40AF"/>
+              </a:buClr>
+              <a:buFont typeface="Arial"/>
+              <a:buChar char="•"/>
             </a:pPr>
             <a:r>
-              <a:rPr sz="2600" b="1">
+              <a:rPr sz="2300">
                 <a:solidFill>
                   <a:srgbClr val="1E293B"/>
                 </a:solidFill>
                 <a:latin typeface="Calibri"/>
               </a:rPr>
-              <a:t>Vì sao cảnh cho chữ được xem là “cảnh tượng xưa nay chưa từng có”?</a:t>
+              <a:t>Tài viết chữ đẹp nổi tiếng.</a:t>
+            </a:r>
+          </a:p>
+          <a:p>
+            <a:pPr algn="l" marL="365760" indent="-365760">
+              <a:spcAft>
+                <a:spcPts val="800"/>
+              </a:spcAft>
+              <a:buClr>
+                <a:srgbClr val="1E40AF"/>
+              </a:buClr>
+              <a:buFont typeface="Arial"/>
+              <a:buChar char="•"/>
+            </a:pPr>
+            <a:r>
+              <a:rPr sz="2300">
+                <a:solidFill>
+                  <a:srgbClr val="1E293B"/>
+                </a:solidFill>
+                <a:latin typeface="Calibri"/>
+              </a:rPr>
+              <a:t>Khí phách hiên ngang: dỡ gông, thản nhiên trước cái chết.</a:t>
+            </a:r>
+          </a:p>
+          <a:p>
+            <a:pPr algn="l" marL="365760" indent="-365760">
+              <a:spcAft>
+                <a:spcPts val="800"/>
+              </a:spcAft>
+              <a:buClr>
+                <a:srgbClr val="1E40AF"/>
+              </a:buClr>
+              <a:buFont typeface="Arial"/>
+              <a:buChar char="•"/>
+            </a:pPr>
+            <a:r>
+              <a:rPr sz="2300">
+                <a:solidFill>
+                  <a:srgbClr val="1E293B"/>
+                </a:solidFill>
+                <a:latin typeface="Calibri"/>
+              </a:rPr>
+              <a:t>Thiên lương trong sáng: chỉ cho chữ người biết quý cái đẹp.</a:t>
             </a:r>
           </a:p>
         </p:txBody>
@@ -10904,8 +11179,8 @@
         </p:nvSpPr>
         <p:spPr>
           <a:xfrm>
-            <a:off x="731520" y="5120640"/>
-            <a:ext cx="10789920" cy="693420"/>
+            <a:off x="731520" y="5074920"/>
+            <a:ext cx="10789920" cy="731520"/>
           </a:xfrm>
           <a:prstGeom prst="roundRect">
             <a:avLst>
@@ -10913,11 +11188,11 @@
             </a:avLst>
           </a:prstGeom>
           <a:solidFill>
-            <a:srgbClr val="EFF4FF"/>
+            <a:srgbClr val="FEF2F2"/>
           </a:solidFill>
           <a:ln w="19050">
             <a:solidFill>
-              <a:srgbClr val="1E40AF"/>
+              <a:srgbClr val="991B1B"/>
             </a:solidFill>
           </a:ln>
           <a:effectLst/>
@@ -10952,8 +11227,8 @@
         </p:nvSpPr>
         <p:spPr>
           <a:xfrm>
-            <a:off x="914400" y="5120640"/>
-            <a:ext cx="10424160" cy="693420"/>
+            <a:off x="914400" y="5074920"/>
+            <a:ext cx="10424160" cy="731520"/>
           </a:xfrm>
           <a:prstGeom prst="rect">
             <a:avLst/>
@@ -10972,13 +11247,13 @@
               </a:spcAft>
             </a:pPr>
             <a:r>
-              <a:rPr sz="2200" b="1">
-                <a:solidFill>
-                  <a:srgbClr val="1E40AF"/>
+              <a:rPr sz="2400" b="1">
+                <a:solidFill>
+                  <a:srgbClr val="991B1B"/>
                 </a:solidFill>
                 <a:latin typeface="Calibri"/>
               </a:rPr>
-              <a:t>💡 Chú ý không gian, tư thế các nhân vật.</a:t>
+              <a:t>Hình tượng con người tài hoa, khí phách, thiên lương.</a:t>
             </a:r>
           </a:p>
         </p:txBody>
@@ -11061,14 +11336,14 @@
         </p:nvSpPr>
         <p:spPr>
           <a:xfrm>
-            <a:off x="9942271" y="457200"/>
-            <a:ext cx="1700784" cy="457200"/>
+            <a:off x="10253167" y="457200"/>
+            <a:ext cx="1389888" cy="457200"/>
           </a:xfrm>
           <a:prstGeom prst="roundRect">
             <a:avLst/>
           </a:prstGeom>
           <a:solidFill>
-            <a:srgbClr val="991B1B"/>
+            <a:srgbClr val="1E40AF"/>
           </a:solidFill>
           <a:ln>
             <a:noFill/>
@@ -11101,7 +11376,7 @@
                 </a:solidFill>
                 <a:latin typeface="Arial"/>
               </a:rPr>
-              <a:t>LỜI GIẢI</a:t>
+              <a:t>ĐỀ BÀI</a:t>
             </a:r>
           </a:p>
         </p:txBody>
@@ -11115,7 +11390,7 @@
         <p:spPr>
           <a:xfrm>
             <a:off x="731520" y="274320"/>
-            <a:ext cx="9272016" cy="868680"/>
+            <a:ext cx="9582912" cy="868680"/>
           </a:xfrm>
           <a:prstGeom prst="rect">
             <a:avLst/>
@@ -11135,7 +11410,7 @@
                 </a:solidFill>
                 <a:latin typeface="Arial"/>
               </a:rPr>
-              <a:t>CẢNH CHO CHỮ</a:t>
+              <a:t>NHÂN VẬT QUẢN NGỤC</a:t>
             </a:r>
           </a:p>
         </p:txBody>
@@ -11228,7 +11503,7 @@
         <p:spPr>
           <a:xfrm>
             <a:off x="731520" y="1463040"/>
-            <a:ext cx="10789920" cy="3474720"/>
+            <a:ext cx="10789920" cy="3566160"/>
           </a:xfrm>
           <a:prstGeom prst="rect">
             <a:avLst/>
@@ -11241,66 +11516,19 @@
           </a:bodyPr>
           <a:lstStyle/>
           <a:p>
-            <a:pPr algn="l" marL="365760" indent="-365760">
+            <a:pPr algn="l">
               <a:spcAft>
                 <a:spcPts val="800"/>
               </a:spcAft>
-              <a:buClr>
-                <a:srgbClr val="1E40AF"/>
-              </a:buClr>
-              <a:buFont typeface="Arial"/>
-              <a:buChar char="•"/>
             </a:pPr>
             <a:r>
-              <a:rPr sz="2300">
+              <a:rPr sz="2600" b="1">
                 <a:solidFill>
                   <a:srgbClr val="1E293B"/>
                 </a:solidFill>
                 <a:latin typeface="Calibri"/>
               </a:rPr>
-              <a:t>Diễn ra trong nhà ngục tối tăm, bẩn thỉu.</a:t>
-            </a:r>
-          </a:p>
-          <a:p>
-            <a:pPr algn="l" marL="365760" indent="-365760">
-              <a:spcAft>
-                <a:spcPts val="800"/>
-              </a:spcAft>
-              <a:buClr>
-                <a:srgbClr val="1E40AF"/>
-              </a:buClr>
-              <a:buFont typeface="Arial"/>
-              <a:buChar char="•"/>
-            </a:pPr>
-            <a:r>
-              <a:rPr sz="2300">
-                <a:solidFill>
-                  <a:srgbClr val="1E293B"/>
-                </a:solidFill>
-                <a:latin typeface="Calibri"/>
-              </a:rPr>
-              <a:t>Tử tù đường hoàng cho chữ; quản ngục khúm núm nhận chữ – trật tự đảo ngược.</a:t>
-            </a:r>
-          </a:p>
-          <a:p>
-            <a:pPr algn="l" marL="365760" indent="-365760">
-              <a:spcAft>
-                <a:spcPts val="800"/>
-              </a:spcAft>
-              <a:buClr>
-                <a:srgbClr val="1E40AF"/>
-              </a:buClr>
-              <a:buFont typeface="Arial"/>
-              <a:buChar char="•"/>
-            </a:pPr>
-            <a:r>
-              <a:rPr sz="2300">
-                <a:solidFill>
-                  <a:srgbClr val="1E293B"/>
-                </a:solidFill>
-                <a:latin typeface="Calibri"/>
-              </a:rPr>
-              <a:t>Lời khuyên: giữ thiên lương, tránh xa chốn ô uế.</a:t>
+              <a:t>Vì sao nói quản ngục là “một thanh âm trong trẻo chen vào giữa bản đàn mà nhạc luật đều hỗn loạn xô bồ”?</a:t>
             </a:r>
           </a:p>
         </p:txBody>
@@ -11313,8 +11541,8 @@
         </p:nvSpPr>
         <p:spPr>
           <a:xfrm>
-            <a:off x="731520" y="5074920"/>
-            <a:ext cx="10789920" cy="731520"/>
+            <a:off x="731520" y="5120640"/>
+            <a:ext cx="10789920" cy="693420"/>
           </a:xfrm>
           <a:prstGeom prst="roundRect">
             <a:avLst>
@@ -11322,11 +11550,11 @@
             </a:avLst>
           </a:prstGeom>
           <a:solidFill>
-            <a:srgbClr val="FEF2F2"/>
+            <a:srgbClr val="EFF4FF"/>
           </a:solidFill>
           <a:ln w="19050">
             <a:solidFill>
-              <a:srgbClr val="991B1B"/>
+              <a:srgbClr val="1E40AF"/>
             </a:solidFill>
           </a:ln>
           <a:effectLst/>
@@ -11361,8 +11589,8 @@
         </p:nvSpPr>
         <p:spPr>
           <a:xfrm>
-            <a:off x="914400" y="5074920"/>
-            <a:ext cx="10424160" cy="731520"/>
+            <a:off x="914400" y="5120640"/>
+            <a:ext cx="10424160" cy="693420"/>
           </a:xfrm>
           <a:prstGeom prst="rect">
             <a:avLst/>
@@ -11381,13 +11609,13 @@
               </a:spcAft>
             </a:pPr>
             <a:r>
-              <a:rPr sz="2400" b="1">
-                <a:solidFill>
-                  <a:srgbClr val="991B1B"/>
+              <a:rPr sz="2200" b="1">
+                <a:solidFill>
+                  <a:srgbClr val="1E40AF"/>
                 </a:solidFill>
                 <a:latin typeface="Calibri"/>
               </a:rPr>
-              <a:t>Cái đẹp, cái thiện chiến thắng cái xấu, cái ác.</a:t>
+              <a:t>💡 Quản ngục làm nghề gì, nhưng tâm hồn ra sao?</a:t>
             </a:r>
           </a:p>
         </p:txBody>
@@ -11406,7 +11634,7 @@
     <p:bg>
       <p:bgPr>
         <a:solidFill>
-          <a:srgbClr val="F8F9FA"/>
+          <a:srgbClr val="FFFFFF"/>
         </a:solidFill>
         <a:effectLst/>
       </p:bgPr>
@@ -11426,10 +11654,54 @@
         </p:nvSpPr>
         <p:spPr>
           <a:xfrm>
-            <a:off x="548640" y="2926080"/>
-            <a:ext cx="164592" cy="1005840"/>
-          </a:xfrm>
-          <a:prstGeom prst="rect">
+            <a:off x="457200" y="384048"/>
+            <a:ext cx="109728" cy="658368"/>
+          </a:xfrm>
+          <a:prstGeom prst="rect">
+            <a:avLst/>
+          </a:prstGeom>
+          <a:solidFill>
+            <a:srgbClr val="1E40AF"/>
+          </a:solidFill>
+          <a:ln>
+            <a:noFill/>
+          </a:ln>
+          <a:effectLst/>
+        </p:spPr>
+        <p:style>
+          <a:lnRef idx="1">
+            <a:schemeClr val="accent1"/>
+          </a:lnRef>
+          <a:fillRef idx="3">
+            <a:schemeClr val="accent1"/>
+          </a:fillRef>
+          <a:effectRef idx="2">
+            <a:schemeClr val="accent1"/>
+          </a:effectRef>
+          <a:fontRef idx="minor">
+            <a:schemeClr val="lt1"/>
+          </a:fontRef>
+        </p:style>
+        <p:txBody>
+          <a:bodyPr rtlCol="0" anchor="ctr"/>
+          <a:lstStyle/>
+          <a:p>
+            <a:pPr algn="ctr"/>
+          </a:p>
+        </p:txBody>
+      </p:sp>
+      <p:sp>
+        <p:nvSpPr>
+          <p:cNvPr id="3" name="Rounded Rectangle 2"/>
+          <p:cNvSpPr/>
+          <p:nvPr/>
+        </p:nvSpPr>
+        <p:spPr>
+          <a:xfrm>
+            <a:off x="9942271" y="457200"/>
+            <a:ext cx="1700784" cy="457200"/>
+          </a:xfrm>
+          <a:prstGeom prst="roundRect">
             <a:avLst/>
           </a:prstGeom>
           <a:solidFill>
@@ -11455,6 +11727,93 @@
           </a:fontRef>
         </p:style>
         <p:txBody>
+          <a:bodyPr rtlCol="0" anchor="ctr" wrap="none" tIns="0" bIns="0"/>
+          <a:lstStyle/>
+          <a:p>
+            <a:pPr algn="ctr"/>
+            <a:r>
+              <a:rPr sz="1400" b="1">
+                <a:solidFill>
+                  <a:srgbClr val="FFFFFF"/>
+                </a:solidFill>
+                <a:latin typeface="Arial"/>
+              </a:rPr>
+              <a:t>LỜI GIẢI</a:t>
+            </a:r>
+          </a:p>
+        </p:txBody>
+      </p:sp>
+      <p:sp>
+        <p:nvSpPr>
+          <p:cNvPr id="4" name="TextBox 3"/>
+          <p:cNvSpPr txBox="1"/>
+          <p:nvPr/>
+        </p:nvSpPr>
+        <p:spPr>
+          <a:xfrm>
+            <a:off x="731520" y="274320"/>
+            <a:ext cx="9272016" cy="868680"/>
+          </a:xfrm>
+          <a:prstGeom prst="rect">
+            <a:avLst/>
+          </a:prstGeom>
+          <a:noFill/>
+        </p:spPr>
+        <p:txBody>
+          <a:bodyPr wrap="square" anchor="ctr">
+            <a:spAutoFit/>
+          </a:bodyPr>
+          <a:lstStyle/>
+          <a:p>
+            <a:r>
+              <a:rPr sz="3600" b="1">
+                <a:solidFill>
+                  <a:srgbClr val="1E40AF"/>
+                </a:solidFill>
+                <a:latin typeface="Arial"/>
+              </a:rPr>
+              <a:t>NHÂN VẬT QUẢN NGỤC</a:t>
+            </a:r>
+          </a:p>
+        </p:txBody>
+      </p:sp>
+      <p:sp>
+        <p:nvSpPr>
+          <p:cNvPr id="5" name="Rectangle 4"/>
+          <p:cNvSpPr/>
+          <p:nvPr/>
+        </p:nvSpPr>
+        <p:spPr>
+          <a:xfrm>
+            <a:off x="457200" y="1207008"/>
+            <a:ext cx="11274552" cy="22000"/>
+          </a:xfrm>
+          <a:prstGeom prst="rect">
+            <a:avLst/>
+          </a:prstGeom>
+          <a:solidFill>
+            <a:srgbClr val="E2E8F0"/>
+          </a:solidFill>
+          <a:ln>
+            <a:noFill/>
+          </a:ln>
+          <a:effectLst/>
+        </p:spPr>
+        <p:style>
+          <a:lnRef idx="1">
+            <a:schemeClr val="accent1"/>
+          </a:lnRef>
+          <a:fillRef idx="3">
+            <a:schemeClr val="accent1"/>
+          </a:fillRef>
+          <a:effectRef idx="2">
+            <a:schemeClr val="accent1"/>
+          </a:effectRef>
+          <a:fontRef idx="minor">
+            <a:schemeClr val="lt1"/>
+          </a:fontRef>
+        </p:style>
+        <p:txBody>
           <a:bodyPr rtlCol="0" anchor="ctr"/>
           <a:lstStyle/>
           <a:p>
@@ -11464,14 +11823,183 @@
       </p:sp>
       <p:sp>
         <p:nvSpPr>
-          <p:cNvPr id="3" name="TextBox 2"/>
+          <p:cNvPr id="6" name="TextBox 5"/>
           <p:cNvSpPr txBox="1"/>
           <p:nvPr/>
         </p:nvSpPr>
         <p:spPr>
           <a:xfrm>
-            <a:off x="914400" y="2743200"/>
-            <a:ext cx="10515600" cy="1371600"/>
+            <a:off x="457200" y="6355080"/>
+            <a:ext cx="11274552" cy="365760"/>
+          </a:xfrm>
+          <a:prstGeom prst="rect">
+            <a:avLst/>
+          </a:prstGeom>
+          <a:noFill/>
+        </p:spPr>
+        <p:txBody>
+          <a:bodyPr wrap="none">
+            <a:spAutoFit/>
+          </a:bodyPr>
+          <a:lstStyle/>
+          <a:p>
+            <a:pPr algn="r"/>
+            <a:r>
+              <a:rPr sz="1200">
+                <a:solidFill>
+                  <a:srgbClr val="64748B"/>
+                </a:solidFill>
+                <a:latin typeface="Calibri"/>
+              </a:rPr>
+              <a:t>Ngữ văn 10 · Bài 1: Sức Hấp Dẫn Của Truyện Kể          27</a:t>
+            </a:r>
+          </a:p>
+        </p:txBody>
+      </p:sp>
+      <p:sp>
+        <p:nvSpPr>
+          <p:cNvPr id="7" name="TextBox 6"/>
+          <p:cNvSpPr txBox="1"/>
+          <p:nvPr/>
+        </p:nvSpPr>
+        <p:spPr>
+          <a:xfrm>
+            <a:off x="731520" y="1463040"/>
+            <a:ext cx="10789920" cy="3474720"/>
+          </a:xfrm>
+          <a:prstGeom prst="rect">
+            <a:avLst/>
+          </a:prstGeom>
+          <a:noFill/>
+        </p:spPr>
+        <p:txBody>
+          <a:bodyPr wrap="square" anchor="t" lIns="45720" rIns="45720">
+            <a:spAutoFit/>
+          </a:bodyPr>
+          <a:lstStyle/>
+          <a:p>
+            <a:pPr algn="l" marL="365760" indent="-365760">
+              <a:spcAft>
+                <a:spcPts val="800"/>
+              </a:spcAft>
+              <a:buClr>
+                <a:srgbClr val="1E40AF"/>
+              </a:buClr>
+              <a:buFont typeface="Arial"/>
+              <a:buChar char="•"/>
+            </a:pPr>
+            <a:r>
+              <a:rPr sz="2300">
+                <a:solidFill>
+                  <a:srgbClr val="1E293B"/>
+                </a:solidFill>
+                <a:latin typeface="Calibri"/>
+              </a:rPr>
+              <a:t>Sống giữa nhà ngục tàn bạo nhưng giữ thiên lương.</a:t>
+            </a:r>
+          </a:p>
+          <a:p>
+            <a:pPr algn="l" marL="365760" indent="-365760">
+              <a:spcAft>
+                <a:spcPts val="800"/>
+              </a:spcAft>
+              <a:buClr>
+                <a:srgbClr val="1E40AF"/>
+              </a:buClr>
+              <a:buFont typeface="Arial"/>
+              <a:buChar char="•"/>
+            </a:pPr>
+            <a:r>
+              <a:rPr sz="2300">
+                <a:solidFill>
+                  <a:srgbClr val="1E293B"/>
+                </a:solidFill>
+                <a:latin typeface="Calibri"/>
+              </a:rPr>
+              <a:t>Biệt nhỡn liên tài, kính trọng Huấn Cao, liều mình xin chữ.</a:t>
+            </a:r>
+          </a:p>
+          <a:p>
+            <a:pPr algn="l" marL="365760" indent="-365760">
+              <a:spcAft>
+                <a:spcPts val="800"/>
+              </a:spcAft>
+              <a:buClr>
+                <a:srgbClr val="1E40AF"/>
+              </a:buClr>
+              <a:buFont typeface="Arial"/>
+              <a:buChar char="•"/>
+            </a:pPr>
+            <a:r>
+              <a:rPr sz="2300">
+                <a:solidFill>
+                  <a:srgbClr val="1E293B"/>
+                </a:solidFill>
+                <a:latin typeface="Calibri"/>
+              </a:rPr>
+              <a:t>Biết quý cái đẹp, cái thiện.</a:t>
+            </a:r>
+          </a:p>
+        </p:txBody>
+      </p:sp>
+      <p:sp>
+        <p:nvSpPr>
+          <p:cNvPr id="8" name="Rounded Rectangle 7"/>
+          <p:cNvSpPr/>
+          <p:nvPr/>
+        </p:nvSpPr>
+        <p:spPr>
+          <a:xfrm>
+            <a:off x="731520" y="5074920"/>
+            <a:ext cx="10789920" cy="731520"/>
+          </a:xfrm>
+          <a:prstGeom prst="roundRect">
+            <a:avLst>
+              <a:gd name="adj" fmla="val 8000"/>
+            </a:avLst>
+          </a:prstGeom>
+          <a:solidFill>
+            <a:srgbClr val="FEF2F2"/>
+          </a:solidFill>
+          <a:ln w="19050">
+            <a:solidFill>
+              <a:srgbClr val="991B1B"/>
+            </a:solidFill>
+          </a:ln>
+          <a:effectLst/>
+        </p:spPr>
+        <p:style>
+          <a:lnRef idx="1">
+            <a:schemeClr val="accent1"/>
+          </a:lnRef>
+          <a:fillRef idx="3">
+            <a:schemeClr val="accent1"/>
+          </a:fillRef>
+          <a:effectRef idx="2">
+            <a:schemeClr val="accent1"/>
+          </a:effectRef>
+          <a:fontRef idx="minor">
+            <a:schemeClr val="lt1"/>
+          </a:fontRef>
+        </p:style>
+        <p:txBody>
+          <a:bodyPr rtlCol="0" anchor="ctr"/>
+          <a:lstStyle/>
+          <a:p>
+            <a:pPr algn="ctr"/>
+          </a:p>
+        </p:txBody>
+      </p:sp>
+      <p:sp>
+        <p:nvSpPr>
+          <p:cNvPr id="9" name="TextBox 8"/>
+          <p:cNvSpPr txBox="1"/>
+          <p:nvPr/>
+        </p:nvSpPr>
+        <p:spPr>
+          <a:xfrm>
+            <a:off x="914400" y="5074920"/>
+            <a:ext cx="10424160" cy="731520"/>
           </a:xfrm>
           <a:prstGeom prst="rect">
             <a:avLst/>
@@ -11486,17 +12014,17 @@
           <a:p>
             <a:pPr algn="l">
               <a:spcAft>
-                <a:spcPts val="800"/>
+                <a:spcPts val="400"/>
               </a:spcAft>
             </a:pPr>
             <a:r>
-              <a:rPr sz="3600" b="1">
-                <a:solidFill>
-                  <a:srgbClr val="1E40AF"/>
+              <a:rPr sz="2400" b="1">
+                <a:solidFill>
+                  <a:srgbClr val="991B1B"/>
                 </a:solidFill>
                 <a:latin typeface="Calibri"/>
               </a:rPr>
-              <a:t>TIẾT 8: THỰC HÀNH TIẾNG VIỆT – TỪ HÁN VIỆT</a:t>
+              <a:t>Cái đẹp có thể nảy nở ngay nơi tăm tối.</a:t>
             </a:r>
           </a:p>
         </p:txBody>
@@ -11579,14 +12107,14 @@
         </p:nvSpPr>
         <p:spPr>
           <a:xfrm>
-            <a:off x="10253167" y="457200"/>
-            <a:ext cx="1389888" cy="457200"/>
+            <a:off x="10408615" y="457200"/>
+            <a:ext cx="1234440" cy="457200"/>
           </a:xfrm>
           <a:prstGeom prst="roundRect">
             <a:avLst/>
           </a:prstGeom>
           <a:solidFill>
-            <a:srgbClr val="1E40AF"/>
+            <a:srgbClr val="991B1B"/>
           </a:solidFill>
           <a:ln>
             <a:noFill/>
@@ -11619,7 +12147,7 @@
                 </a:solidFill>
                 <a:latin typeface="Arial"/>
               </a:rPr>
-              <a:t>ĐỀ BÀI</a:t>
+              <a:t>VIDEO</a:t>
             </a:r>
           </a:p>
         </p:txBody>
@@ -11633,7 +12161,7 @@
         <p:spPr>
           <a:xfrm>
             <a:off x="731520" y="274320"/>
-            <a:ext cx="9582912" cy="868680"/>
+            <a:ext cx="9738360" cy="868680"/>
           </a:xfrm>
           <a:prstGeom prst="rect">
             <a:avLst/>
@@ -11653,7 +12181,7 @@
                 </a:solidFill>
                 <a:latin typeface="Arial"/>
               </a:rPr>
-              <a:t>NGHĨA CỦA TỪ HÁN VIỆT</a:t>
+              <a:t>VIDEO THAM KHẢO</a:t>
             </a:r>
           </a:p>
         </p:txBody>
@@ -11737,16 +12265,40 @@
           </a:p>
         </p:txBody>
       </p:sp>
-      <p:sp>
-        <p:nvSpPr>
-          <p:cNvPr id="7" name="TextBox 6"/>
+      <p:pic>
+        <p:nvPicPr>
+          <p:cNvPr id="7" name="Picture 6" descr="QR_video_c0y19m_qMqg.png"/>
+          <p:cNvPicPr>
+            <a:picLocks noChangeAspect="1"/>
+          </p:cNvPicPr>
+          <p:nvPr/>
+        </p:nvPicPr>
+        <p:blipFill>
+          <a:blip r:embed="rId2"/>
+          <a:stretch>
+            <a:fillRect/>
+          </a:stretch>
+        </p:blipFill>
+        <p:spPr>
+          <a:xfrm>
+            <a:off x="8412480" y="1554480"/>
+            <a:ext cx="3108960" cy="3108960"/>
+          </a:xfrm>
+          <a:prstGeom prst="rect">
+            <a:avLst/>
+          </a:prstGeom>
+        </p:spPr>
+      </p:pic>
+      <p:sp>
+        <p:nvSpPr>
+          <p:cNvPr id="8" name="TextBox 7"/>
           <p:cNvSpPr txBox="1"/>
           <p:nvPr/>
         </p:nvSpPr>
         <p:spPr>
           <a:xfrm>
-            <a:off x="731520" y="1463040"/>
-            <a:ext cx="10789920" cy="3566160"/>
+            <a:off x="731520" y="1554480"/>
+            <a:ext cx="7498079" cy="4206240"/>
           </a:xfrm>
           <a:prstGeom prst="rect">
             <a:avLst/>
@@ -11771,94 +12323,61 @@
                 </a:solidFill>
                 <a:latin typeface="Calibri"/>
               </a:rPr>
-              <a:t>Giải nghĩa các từ: tiên triều, hàn sĩ, khoan dung, hiếu sinh (Chuyện chức Phán sự đền Tản Viên).</a:t>
-            </a:r>
-          </a:p>
-        </p:txBody>
-      </p:sp>
-      <p:sp>
-        <p:nvSpPr>
-          <p:cNvPr id="8" name="Rounded Rectangle 7"/>
-          <p:cNvSpPr/>
-          <p:nvPr/>
-        </p:nvSpPr>
-        <p:spPr>
-          <a:xfrm>
-            <a:off x="731520" y="5120640"/>
-            <a:ext cx="10789920" cy="693420"/>
-          </a:xfrm>
-          <a:prstGeom prst="roundRect">
-            <a:avLst>
-              <a:gd name="adj" fmla="val 8000"/>
-            </a:avLst>
-          </a:prstGeom>
-          <a:solidFill>
-            <a:srgbClr val="EFF4FF"/>
-          </a:solidFill>
-          <a:ln w="19050">
-            <a:solidFill>
-              <a:srgbClr val="1E40AF"/>
-            </a:solidFill>
-          </a:ln>
-          <a:effectLst/>
-        </p:spPr>
-        <p:style>
-          <a:lnRef idx="1">
-            <a:schemeClr val="accent1"/>
-          </a:lnRef>
-          <a:fillRef idx="3">
-            <a:schemeClr val="accent1"/>
-          </a:fillRef>
-          <a:effectRef idx="2">
-            <a:schemeClr val="accent1"/>
-          </a:effectRef>
-          <a:fontRef idx="minor">
-            <a:schemeClr val="lt1"/>
-          </a:fontRef>
-        </p:style>
-        <p:txBody>
-          <a:bodyPr rtlCol="0" anchor="ctr"/>
-          <a:lstStyle/>
-          <a:p>
-            <a:pPr algn="ctr"/>
-          </a:p>
-        </p:txBody>
-      </p:sp>
-      <p:sp>
-        <p:nvSpPr>
-          <p:cNvPr id="9" name="TextBox 8"/>
-          <p:cNvSpPr txBox="1"/>
-          <p:nvPr/>
-        </p:nvSpPr>
-        <p:spPr>
-          <a:xfrm>
-            <a:off x="914400" y="5120640"/>
-            <a:ext cx="10424160" cy="693420"/>
-          </a:xfrm>
-          <a:prstGeom prst="rect">
-            <a:avLst/>
-          </a:prstGeom>
-          <a:noFill/>
-        </p:spPr>
-        <p:txBody>
-          <a:bodyPr wrap="square" anchor="ctr" lIns="45720" rIns="45720">
-            <a:spAutoFit/>
-          </a:bodyPr>
-          <a:lstStyle/>
+              <a:t>🎬 [Phim ngắn] Chữ người tử tù</a:t>
+            </a:r>
+          </a:p>
           <a:p>
             <a:pPr algn="l">
               <a:spcAft>
-                <a:spcPts val="400"/>
+                <a:spcPts val="800"/>
               </a:spcAft>
             </a:pPr>
             <a:r>
-              <a:rPr sz="2200" b="1">
-                <a:solidFill>
-                  <a:srgbClr val="1E40AF"/>
+              <a:rPr sz="2000">
+                <a:solidFill>
+                  <a:srgbClr val="64748B"/>
                 </a:solidFill>
                 <a:latin typeface="Calibri"/>
               </a:rPr>
-              <a:t>💡 Tách nghĩa từng yếu tố Hán Việt.</a:t>
+              <a:t>Kênh: Alex Victor</a:t>
+            </a:r>
+          </a:p>
+          <a:p>
+            <a:pPr algn="l" marL="365760" indent="-365760">
+              <a:spcAft>
+                <a:spcPts val="800"/>
+              </a:spcAft>
+              <a:buClr>
+                <a:srgbClr val="1E40AF"/>
+              </a:buClr>
+              <a:buFont typeface="Arial"/>
+              <a:buChar char="•"/>
+            </a:pPr>
+            <a:r>
+              <a:rPr sz="2000">
+                <a:solidFill>
+                  <a:srgbClr val="1E293B"/>
+                </a:solidFill>
+                <a:latin typeface="Calibri"/>
+              </a:rPr>
+              <a:t>Phân tích cảnh cho chữ (phim ngắn do học sinh dựng – tham khảo)</a:t>
+            </a:r>
+          </a:p>
+          <a:p>
+            <a:pPr algn="l">
+              <a:spcAft>
+                <a:spcPts val="800"/>
+              </a:spcAft>
+            </a:pPr>
+            <a:r>
+              <a:rPr sz="1600">
+                <a:solidFill>
+                  <a:srgbClr val="64748B"/>
+                </a:solidFill>
+                <a:latin typeface="Calibri"/>
+                <a:hlinkClick r:id="rId3"/>
+              </a:rPr>
+              <a:t>https://www.youtube.com/watch?v=c0y19m_qMqg</a:t>
             </a:r>
           </a:p>
         </p:txBody>
@@ -11941,14 +12460,14 @@
         </p:nvSpPr>
         <p:spPr>
           <a:xfrm>
-            <a:off x="9942271" y="457200"/>
-            <a:ext cx="1700784" cy="457200"/>
+            <a:off x="10253167" y="457200"/>
+            <a:ext cx="1389888" cy="457200"/>
           </a:xfrm>
           <a:prstGeom prst="roundRect">
             <a:avLst/>
           </a:prstGeom>
           <a:solidFill>
-            <a:srgbClr val="991B1B"/>
+            <a:srgbClr val="1E40AF"/>
           </a:solidFill>
           <a:ln>
             <a:noFill/>
@@ -11981,7 +12500,7 @@
                 </a:solidFill>
                 <a:latin typeface="Arial"/>
               </a:rPr>
-              <a:t>LỜI GIẢI</a:t>
+              <a:t>ĐỀ BÀI</a:t>
             </a:r>
           </a:p>
         </p:txBody>
@@ -11995,7 +12514,7 @@
         <p:spPr>
           <a:xfrm>
             <a:off x="731520" y="274320"/>
-            <a:ext cx="9272016" cy="868680"/>
+            <a:ext cx="9582912" cy="868680"/>
           </a:xfrm>
           <a:prstGeom prst="rect">
             <a:avLst/>
@@ -12015,7 +12534,7 @@
                 </a:solidFill>
                 <a:latin typeface="Arial"/>
               </a:rPr>
-              <a:t>NGHĨA CỦA TỪ HÁN VIỆT</a:t>
+              <a:t>CẢNH CHO CHỮ</a:t>
             </a:r>
           </a:p>
         </p:txBody>
@@ -12108,7 +12627,7 @@
         <p:spPr>
           <a:xfrm>
             <a:off x="731520" y="1463040"/>
-            <a:ext cx="10789920" cy="3474720"/>
+            <a:ext cx="10789920" cy="3566160"/>
           </a:xfrm>
           <a:prstGeom prst="rect">
             <a:avLst/>
@@ -12121,87 +12640,19 @@
           </a:bodyPr>
           <a:lstStyle/>
           <a:p>
-            <a:pPr algn="l" marL="365760" indent="-365760">
+            <a:pPr algn="l">
               <a:spcAft>
                 <a:spcPts val="800"/>
               </a:spcAft>
-              <a:buClr>
-                <a:srgbClr val="1E40AF"/>
-              </a:buClr>
-              <a:buFont typeface="Arial"/>
-              <a:buChar char="•"/>
             </a:pPr>
             <a:r>
-              <a:rPr sz="2300">
+              <a:rPr sz="2600" b="1">
                 <a:solidFill>
                   <a:srgbClr val="1E293B"/>
                 </a:solidFill>
                 <a:latin typeface="Calibri"/>
               </a:rPr>
-              <a:t>Tiên triều: triều vua trước.</a:t>
-            </a:r>
-          </a:p>
-          <a:p>
-            <a:pPr algn="l" marL="365760" indent="-365760">
-              <a:spcAft>
-                <a:spcPts val="800"/>
-              </a:spcAft>
-              <a:buClr>
-                <a:srgbClr val="1E40AF"/>
-              </a:buClr>
-              <a:buFont typeface="Arial"/>
-              <a:buChar char="•"/>
-            </a:pPr>
-            <a:r>
-              <a:rPr sz="2300">
-                <a:solidFill>
-                  <a:srgbClr val="1E293B"/>
-                </a:solidFill>
-                <a:latin typeface="Calibri"/>
-              </a:rPr>
-              <a:t>Hàn sĩ: học trò nghèo.</a:t>
-            </a:r>
-          </a:p>
-          <a:p>
-            <a:pPr algn="l" marL="365760" indent="-365760">
-              <a:spcAft>
-                <a:spcPts val="800"/>
-              </a:spcAft>
-              <a:buClr>
-                <a:srgbClr val="1E40AF"/>
-              </a:buClr>
-              <a:buFont typeface="Arial"/>
-              <a:buChar char="•"/>
-            </a:pPr>
-            <a:r>
-              <a:rPr sz="2300">
-                <a:solidFill>
-                  <a:srgbClr val="1E293B"/>
-                </a:solidFill>
-                <a:latin typeface="Calibri"/>
-              </a:rPr>
-              <a:t>Khoan dung: rộng lượng tha thứ.</a:t>
-            </a:r>
-          </a:p>
-          <a:p>
-            <a:pPr algn="l" marL="365760" indent="-365760">
-              <a:spcAft>
-                <a:spcPts val="800"/>
-              </a:spcAft>
-              <a:buClr>
-                <a:srgbClr val="1E40AF"/>
-              </a:buClr>
-              <a:buFont typeface="Arial"/>
-              <a:buChar char="•"/>
-            </a:pPr>
-            <a:r>
-              <a:rPr sz="2300">
-                <a:solidFill>
-                  <a:srgbClr val="1E293B"/>
-                </a:solidFill>
-                <a:latin typeface="Calibri"/>
-              </a:rPr>
-              <a:t>Hiếu sinh: quý trọng sự sống.</a:t>
+              <a:t>Vì sao cảnh cho chữ được xem là “cảnh tượng xưa nay chưa từng có”?</a:t>
             </a:r>
           </a:p>
         </p:txBody>
@@ -12214,8 +12665,8 @@
         </p:nvSpPr>
         <p:spPr>
           <a:xfrm>
-            <a:off x="731520" y="5074920"/>
-            <a:ext cx="10789920" cy="731520"/>
+            <a:off x="731520" y="5120640"/>
+            <a:ext cx="10789920" cy="693420"/>
           </a:xfrm>
           <a:prstGeom prst="roundRect">
             <a:avLst>
@@ -12223,11 +12674,11 @@
             </a:avLst>
           </a:prstGeom>
           <a:solidFill>
-            <a:srgbClr val="FEF2F2"/>
+            <a:srgbClr val="EFF4FF"/>
           </a:solidFill>
           <a:ln w="19050">
             <a:solidFill>
-              <a:srgbClr val="991B1B"/>
+              <a:srgbClr val="1E40AF"/>
             </a:solidFill>
           </a:ln>
           <a:effectLst/>
@@ -12262,8 +12713,8 @@
         </p:nvSpPr>
         <p:spPr>
           <a:xfrm>
-            <a:off x="914400" y="5074920"/>
-            <a:ext cx="10424160" cy="731520"/>
+            <a:off x="914400" y="5120640"/>
+            <a:ext cx="10424160" cy="693420"/>
           </a:xfrm>
           <a:prstGeom prst="rect">
             <a:avLst/>
@@ -12282,13 +12733,13 @@
               </a:spcAft>
             </a:pPr>
             <a:r>
-              <a:rPr sz="2400" b="1">
-                <a:solidFill>
-                  <a:srgbClr val="991B1B"/>
+              <a:rPr sz="2200" b="1">
+                <a:solidFill>
+                  <a:srgbClr val="1E40AF"/>
                 </a:solidFill>
                 <a:latin typeface="Calibri"/>
               </a:rPr>
-              <a:t>Dùng từ Hán Việt đúng nghĩa, đúng sắc thái.</a:t>
+              <a:t>💡 Chú ý không gian, tư thế các nhân vật.</a:t>
             </a:r>
           </a:p>
         </p:txBody>
@@ -12480,14 +12931,14 @@
         </p:nvSpPr>
         <p:spPr>
           <a:xfrm>
-            <a:off x="10253167" y="457200"/>
-            <a:ext cx="1389888" cy="457200"/>
+            <a:off x="9942271" y="457200"/>
+            <a:ext cx="1700784" cy="457200"/>
           </a:xfrm>
           <a:prstGeom prst="roundRect">
             <a:avLst/>
           </a:prstGeom>
           <a:solidFill>
-            <a:srgbClr val="1E40AF"/>
+            <a:srgbClr val="991B1B"/>
           </a:solidFill>
           <a:ln>
             <a:noFill/>
@@ -12520,7 +12971,7 @@
                 </a:solidFill>
                 <a:latin typeface="Arial"/>
               </a:rPr>
-              <a:t>ĐỀ BÀI</a:t>
+              <a:t>LỜI GIẢI</a:t>
             </a:r>
           </a:p>
         </p:txBody>
@@ -12534,7 +12985,7 @@
         <p:spPr>
           <a:xfrm>
             <a:off x="731520" y="274320"/>
-            <a:ext cx="9582912" cy="868680"/>
+            <a:ext cx="9272016" cy="868680"/>
           </a:xfrm>
           <a:prstGeom prst="rect">
             <a:avLst/>
@@ -12554,7 +13005,7 @@
                 </a:solidFill>
                 <a:latin typeface="Arial"/>
               </a:rPr>
-              <a:t>SỬA LỖI DÙNG TỪ HÁN VIỆT</a:t>
+              <a:t>CẢNH CHO CHỮ</a:t>
             </a:r>
           </a:p>
         </p:txBody>
@@ -12647,7 +13098,7 @@
         <p:spPr>
           <a:xfrm>
             <a:off x="731520" y="1463040"/>
-            <a:ext cx="10789920" cy="3566160"/>
+            <a:ext cx="10789920" cy="3474720"/>
           </a:xfrm>
           <a:prstGeom prst="rect">
             <a:avLst/>
@@ -12660,19 +13111,66 @@
           </a:bodyPr>
           <a:lstStyle/>
           <a:p>
-            <a:pPr algn="l">
+            <a:pPr algn="l" marL="365760" indent="-365760">
               <a:spcAft>
                 <a:spcPts val="800"/>
               </a:spcAft>
+              <a:buClr>
+                <a:srgbClr val="1E40AF"/>
+              </a:buClr>
+              <a:buFont typeface="Arial"/>
+              <a:buChar char="•"/>
             </a:pPr>
             <a:r>
-              <a:rPr sz="2600" b="1">
+              <a:rPr sz="2300">
                 <a:solidFill>
                   <a:srgbClr val="1E293B"/>
                 </a:solidFill>
                 <a:latin typeface="Calibri"/>
               </a:rPr>
-              <a:t>Tìm và sửa lỗi dùng từ: “Anh ấy luôn bàng quang trước việc chung.”; “Tiếng Anh là yếu điểm của em.”</a:t>
+              <a:t>Diễn ra trong nhà ngục tối tăm, bẩn thỉu.</a:t>
+            </a:r>
+          </a:p>
+          <a:p>
+            <a:pPr algn="l" marL="365760" indent="-365760">
+              <a:spcAft>
+                <a:spcPts val="800"/>
+              </a:spcAft>
+              <a:buClr>
+                <a:srgbClr val="1E40AF"/>
+              </a:buClr>
+              <a:buFont typeface="Arial"/>
+              <a:buChar char="•"/>
+            </a:pPr>
+            <a:r>
+              <a:rPr sz="2300">
+                <a:solidFill>
+                  <a:srgbClr val="1E293B"/>
+                </a:solidFill>
+                <a:latin typeface="Calibri"/>
+              </a:rPr>
+              <a:t>Tử tù đường hoàng cho chữ; quản ngục khúm núm nhận chữ – trật tự đảo ngược.</a:t>
+            </a:r>
+          </a:p>
+          <a:p>
+            <a:pPr algn="l" marL="365760" indent="-365760">
+              <a:spcAft>
+                <a:spcPts val="800"/>
+              </a:spcAft>
+              <a:buClr>
+                <a:srgbClr val="1E40AF"/>
+              </a:buClr>
+              <a:buFont typeface="Arial"/>
+              <a:buChar char="•"/>
+            </a:pPr>
+            <a:r>
+              <a:rPr sz="2300">
+                <a:solidFill>
+                  <a:srgbClr val="1E293B"/>
+                </a:solidFill>
+                <a:latin typeface="Calibri"/>
+              </a:rPr>
+              <a:t>Lời khuyên: giữ thiên lương, tránh xa chốn ô uế.</a:t>
             </a:r>
           </a:p>
         </p:txBody>
@@ -12685,8 +13183,8 @@
         </p:nvSpPr>
         <p:spPr>
           <a:xfrm>
-            <a:off x="731520" y="5120640"/>
-            <a:ext cx="10789920" cy="693420"/>
+            <a:off x="731520" y="5074920"/>
+            <a:ext cx="10789920" cy="731520"/>
           </a:xfrm>
           <a:prstGeom prst="roundRect">
             <a:avLst>
@@ -12694,11 +13192,11 @@
             </a:avLst>
           </a:prstGeom>
           <a:solidFill>
-            <a:srgbClr val="EFF4FF"/>
+            <a:srgbClr val="FEF2F2"/>
           </a:solidFill>
           <a:ln w="19050">
             <a:solidFill>
-              <a:srgbClr val="1E40AF"/>
+              <a:srgbClr val="991B1B"/>
             </a:solidFill>
           </a:ln>
           <a:effectLst/>
@@ -12733,8 +13231,8 @@
         </p:nvSpPr>
         <p:spPr>
           <a:xfrm>
-            <a:off x="914400" y="5120640"/>
-            <a:ext cx="10424160" cy="693420"/>
+            <a:off x="914400" y="5074920"/>
+            <a:ext cx="10424160" cy="731520"/>
           </a:xfrm>
           <a:prstGeom prst="rect">
             <a:avLst/>
@@ -12753,13 +13251,13 @@
               </a:spcAft>
             </a:pPr>
             <a:r>
-              <a:rPr sz="2200" b="1">
-                <a:solidFill>
-                  <a:srgbClr val="1E40AF"/>
+              <a:rPr sz="2400" b="1">
+                <a:solidFill>
+                  <a:srgbClr val="991B1B"/>
                 </a:solidFill>
                 <a:latin typeface="Calibri"/>
               </a:rPr>
-              <a:t>💡 Chú ý các từ gần âm.</a:t>
+              <a:t>Cái đẹp, cái thiện chiến thắng cái xấu, cái ác.</a:t>
             </a:r>
           </a:p>
         </p:txBody>
@@ -12773,6 +13271,115 @@
 </file>
 
 <file path=ppt/slides/slide31.xml><?xml version="1.0" encoding="utf-8"?>
+<p:sld xmlns:a="http://schemas.openxmlformats.org/drawingml/2006/main" xmlns:p="http://schemas.openxmlformats.org/presentationml/2006/main" xmlns:r="http://schemas.openxmlformats.org/officeDocument/2006/relationships">
+  <p:cSld>
+    <p:bg>
+      <p:bgPr>
+        <a:solidFill>
+          <a:srgbClr val="F8F9FA"/>
+        </a:solidFill>
+        <a:effectLst/>
+      </p:bgPr>
+    </p:bg>
+    <p:spTree>
+      <p:nvGrpSpPr>
+        <p:cNvPr id="1" name=""/>
+        <p:cNvGrpSpPr/>
+        <p:nvPr/>
+      </p:nvGrpSpPr>
+      <p:grpSpPr/>
+      <p:sp>
+        <p:nvSpPr>
+          <p:cNvPr id="2" name="Rectangle 1"/>
+          <p:cNvSpPr/>
+          <p:nvPr/>
+        </p:nvSpPr>
+        <p:spPr>
+          <a:xfrm>
+            <a:off x="548640" y="2926080"/>
+            <a:ext cx="164592" cy="1005840"/>
+          </a:xfrm>
+          <a:prstGeom prst="rect">
+            <a:avLst/>
+          </a:prstGeom>
+          <a:solidFill>
+            <a:srgbClr val="991B1B"/>
+          </a:solidFill>
+          <a:ln>
+            <a:noFill/>
+          </a:ln>
+          <a:effectLst/>
+        </p:spPr>
+        <p:style>
+          <a:lnRef idx="1">
+            <a:schemeClr val="accent1"/>
+          </a:lnRef>
+          <a:fillRef idx="3">
+            <a:schemeClr val="accent1"/>
+          </a:fillRef>
+          <a:effectRef idx="2">
+            <a:schemeClr val="accent1"/>
+          </a:effectRef>
+          <a:fontRef idx="minor">
+            <a:schemeClr val="lt1"/>
+          </a:fontRef>
+        </p:style>
+        <p:txBody>
+          <a:bodyPr rtlCol="0" anchor="ctr"/>
+          <a:lstStyle/>
+          <a:p>
+            <a:pPr algn="ctr"/>
+          </a:p>
+        </p:txBody>
+      </p:sp>
+      <p:sp>
+        <p:nvSpPr>
+          <p:cNvPr id="3" name="TextBox 2"/>
+          <p:cNvSpPr txBox="1"/>
+          <p:nvPr/>
+        </p:nvSpPr>
+        <p:spPr>
+          <a:xfrm>
+            <a:off x="914400" y="2743200"/>
+            <a:ext cx="10515600" cy="1371600"/>
+          </a:xfrm>
+          <a:prstGeom prst="rect">
+            <a:avLst/>
+          </a:prstGeom>
+          <a:noFill/>
+        </p:spPr>
+        <p:txBody>
+          <a:bodyPr wrap="square" anchor="ctr" lIns="45720" rIns="45720">
+            <a:spAutoFit/>
+          </a:bodyPr>
+          <a:lstStyle/>
+          <a:p>
+            <a:pPr algn="l">
+              <a:spcAft>
+                <a:spcPts val="800"/>
+              </a:spcAft>
+            </a:pPr>
+            <a:r>
+              <a:rPr sz="3600" b="1">
+                <a:solidFill>
+                  <a:srgbClr val="1E40AF"/>
+                </a:solidFill>
+                <a:latin typeface="Calibri"/>
+              </a:rPr>
+              <a:t>TIẾT 8: THỰC HÀNH TIẾNG VIỆT – TỪ HÁN VIỆT</a:t>
+            </a:r>
+          </a:p>
+        </p:txBody>
+      </p:sp>
+    </p:spTree>
+  </p:cSld>
+  <p:clrMapOvr>
+    <a:masterClrMapping/>
+  </p:clrMapOvr>
+</p:sld>
+</file>
+
+<file path=ppt/slides/slide32.xml><?xml version="1.0" encoding="utf-8"?>
 <p:sld xmlns:a="http://schemas.openxmlformats.org/drawingml/2006/main" xmlns:p="http://schemas.openxmlformats.org/presentationml/2006/main" xmlns:r="http://schemas.openxmlformats.org/officeDocument/2006/relationships">
   <p:cSld>
     <p:bg>
@@ -12842,14 +13449,14 @@
         </p:nvSpPr>
         <p:spPr>
           <a:xfrm>
-            <a:off x="9942271" y="457200"/>
-            <a:ext cx="1700784" cy="457200"/>
+            <a:off x="10253167" y="457200"/>
+            <a:ext cx="1389888" cy="457200"/>
           </a:xfrm>
           <a:prstGeom prst="roundRect">
             <a:avLst/>
           </a:prstGeom>
           <a:solidFill>
-            <a:srgbClr val="991B1B"/>
+            <a:srgbClr val="1E40AF"/>
           </a:solidFill>
           <a:ln>
             <a:noFill/>
@@ -12882,7 +13489,7 @@
                 </a:solidFill>
                 <a:latin typeface="Arial"/>
               </a:rPr>
-              <a:t>LỜI GIẢI</a:t>
+              <a:t>ĐỀ BÀI</a:t>
             </a:r>
           </a:p>
         </p:txBody>
@@ -12896,7 +13503,7 @@
         <p:spPr>
           <a:xfrm>
             <a:off x="731520" y="274320"/>
-            <a:ext cx="9272016" cy="868680"/>
+            <a:ext cx="9582912" cy="868680"/>
           </a:xfrm>
           <a:prstGeom prst="rect">
             <a:avLst/>
@@ -12916,7 +13523,7 @@
                 </a:solidFill>
                 <a:latin typeface="Arial"/>
               </a:rPr>
-              <a:t>SỬA LỖI DÙNG TỪ HÁN VIỆT</a:t>
+              <a:t>NGHĨA CỦA TỪ HÁN VIỆT</a:t>
             </a:r>
           </a:p>
         </p:txBody>
@@ -12995,7 +13602,7 @@
                 </a:solidFill>
                 <a:latin typeface="Calibri"/>
               </a:rPr>
-              <a:t>Ngữ văn 10 · Bài 1: Sức Hấp Dẫn Của Truyện Kể          31</a:t>
+              <a:t>Ngữ văn 10 · Bài 1: Sức Hấp Dẫn Của Truyện Kể          32</a:t>
             </a:r>
           </a:p>
         </p:txBody>
@@ -13009,7 +13616,7 @@
         <p:spPr>
           <a:xfrm>
             <a:off x="731520" y="1463040"/>
-            <a:ext cx="10789920" cy="3474720"/>
+            <a:ext cx="10789920" cy="3566160"/>
           </a:xfrm>
           <a:prstGeom prst="rect">
             <a:avLst/>
@@ -13022,45 +13629,19 @@
           </a:bodyPr>
           <a:lstStyle/>
           <a:p>
-            <a:pPr algn="l" marL="365760" indent="-365760">
+            <a:pPr algn="l">
               <a:spcAft>
                 <a:spcPts val="800"/>
               </a:spcAft>
-              <a:buClr>
-                <a:srgbClr val="1E40AF"/>
-              </a:buClr>
-              <a:buFont typeface="Arial"/>
-              <a:buChar char="•"/>
             </a:pPr>
             <a:r>
-              <a:rPr sz="2300">
+              <a:rPr sz="2600" b="1">
                 <a:solidFill>
                   <a:srgbClr val="1E293B"/>
                 </a:solidFill>
                 <a:latin typeface="Calibri"/>
               </a:rPr>
-              <a:t>“bàng quang” → “bàng quan” (thờ ơ, đứng ngoài).</a:t>
-            </a:r>
-          </a:p>
-          <a:p>
-            <a:pPr algn="l" marL="365760" indent="-365760">
-              <a:spcAft>
-                <a:spcPts val="800"/>
-              </a:spcAft>
-              <a:buClr>
-                <a:srgbClr val="1E40AF"/>
-              </a:buClr>
-              <a:buFont typeface="Arial"/>
-              <a:buChar char="•"/>
-            </a:pPr>
-            <a:r>
-              <a:rPr sz="2300">
-                <a:solidFill>
-                  <a:srgbClr val="1E293B"/>
-                </a:solidFill>
-                <a:latin typeface="Calibri"/>
-              </a:rPr>
-              <a:t>“yếu điểm” (điểm quan trọng) → “điểm yếu”.</a:t>
+              <a:t>Giải nghĩa các từ: tiên triều, hàn sĩ, khoan dung, hiếu sinh (Chuyện chức Phán sự đền Tản Viên).</a:t>
             </a:r>
           </a:p>
         </p:txBody>
@@ -13073,8 +13654,8 @@
         </p:nvSpPr>
         <p:spPr>
           <a:xfrm>
-            <a:off x="731520" y="5074920"/>
-            <a:ext cx="10789920" cy="731520"/>
+            <a:off x="731520" y="5120640"/>
+            <a:ext cx="10789920" cy="693420"/>
           </a:xfrm>
           <a:prstGeom prst="roundRect">
             <a:avLst>
@@ -13082,11 +13663,11 @@
             </a:avLst>
           </a:prstGeom>
           <a:solidFill>
-            <a:srgbClr val="FEF2F2"/>
+            <a:srgbClr val="EFF4FF"/>
           </a:solidFill>
           <a:ln w="19050">
             <a:solidFill>
-              <a:srgbClr val="991B1B"/>
+              <a:srgbClr val="1E40AF"/>
             </a:solidFill>
           </a:ln>
           <a:effectLst/>
@@ -13121,8 +13702,8 @@
         </p:nvSpPr>
         <p:spPr>
           <a:xfrm>
-            <a:off x="914400" y="5074920"/>
-            <a:ext cx="10424160" cy="731520"/>
+            <a:off x="914400" y="5120640"/>
+            <a:ext cx="10424160" cy="693420"/>
           </a:xfrm>
           <a:prstGeom prst="rect">
             <a:avLst/>
@@ -13141,122 +13722,13 @@
               </a:spcAft>
             </a:pPr>
             <a:r>
-              <a:rPr sz="2400" b="1">
-                <a:solidFill>
-                  <a:srgbClr val="991B1B"/>
+              <a:rPr sz="2200" b="1">
+                <a:solidFill>
+                  <a:srgbClr val="1E40AF"/>
                 </a:solidFill>
                 <a:latin typeface="Calibri"/>
               </a:rPr>
-              <a:t>Hiểu đúng nghĩa từng yếu tố để tránh lỗi.</a:t>
-            </a:r>
-          </a:p>
-        </p:txBody>
-      </p:sp>
-    </p:spTree>
-  </p:cSld>
-  <p:clrMapOvr>
-    <a:masterClrMapping/>
-  </p:clrMapOvr>
-</p:sld>
-</file>
-
-<file path=ppt/slides/slide32.xml><?xml version="1.0" encoding="utf-8"?>
-<p:sld xmlns:a="http://schemas.openxmlformats.org/drawingml/2006/main" xmlns:p="http://schemas.openxmlformats.org/presentationml/2006/main" xmlns:r="http://schemas.openxmlformats.org/officeDocument/2006/relationships">
-  <p:cSld>
-    <p:bg>
-      <p:bgPr>
-        <a:solidFill>
-          <a:srgbClr val="F8F9FA"/>
-        </a:solidFill>
-        <a:effectLst/>
-      </p:bgPr>
-    </p:bg>
-    <p:spTree>
-      <p:nvGrpSpPr>
-        <p:cNvPr id="1" name=""/>
-        <p:cNvGrpSpPr/>
-        <p:nvPr/>
-      </p:nvGrpSpPr>
-      <p:grpSpPr/>
-      <p:sp>
-        <p:nvSpPr>
-          <p:cNvPr id="2" name="Rectangle 1"/>
-          <p:cNvSpPr/>
-          <p:nvPr/>
-        </p:nvSpPr>
-        <p:spPr>
-          <a:xfrm>
-            <a:off x="548640" y="2926080"/>
-            <a:ext cx="164592" cy="1005840"/>
-          </a:xfrm>
-          <a:prstGeom prst="rect">
-            <a:avLst/>
-          </a:prstGeom>
-          <a:solidFill>
-            <a:srgbClr val="991B1B"/>
-          </a:solidFill>
-          <a:ln>
-            <a:noFill/>
-          </a:ln>
-          <a:effectLst/>
-        </p:spPr>
-        <p:style>
-          <a:lnRef idx="1">
-            <a:schemeClr val="accent1"/>
-          </a:lnRef>
-          <a:fillRef idx="3">
-            <a:schemeClr val="accent1"/>
-          </a:fillRef>
-          <a:effectRef idx="2">
-            <a:schemeClr val="accent1"/>
-          </a:effectRef>
-          <a:fontRef idx="minor">
-            <a:schemeClr val="lt1"/>
-          </a:fontRef>
-        </p:style>
-        <p:txBody>
-          <a:bodyPr rtlCol="0" anchor="ctr"/>
-          <a:lstStyle/>
-          <a:p>
-            <a:pPr algn="ctr"/>
-          </a:p>
-        </p:txBody>
-      </p:sp>
-      <p:sp>
-        <p:nvSpPr>
-          <p:cNvPr id="3" name="TextBox 2"/>
-          <p:cNvSpPr txBox="1"/>
-          <p:nvPr/>
-        </p:nvSpPr>
-        <p:spPr>
-          <a:xfrm>
-            <a:off x="914400" y="2743200"/>
-            <a:ext cx="10515600" cy="1371600"/>
-          </a:xfrm>
-          <a:prstGeom prst="rect">
-            <a:avLst/>
-          </a:prstGeom>
-          <a:noFill/>
-        </p:spPr>
-        <p:txBody>
-          <a:bodyPr wrap="square" anchor="ctr" lIns="45720" rIns="45720">
-            <a:spAutoFit/>
-          </a:bodyPr>
-          <a:lstStyle/>
-          <a:p>
-            <a:pPr algn="l">
-              <a:spcAft>
-                <a:spcPts val="800"/>
-              </a:spcAft>
-            </a:pPr>
-            <a:r>
-              <a:rPr sz="3600" b="1">
-                <a:solidFill>
-                  <a:srgbClr val="1E40AF"/>
-                </a:solidFill>
-                <a:latin typeface="Calibri"/>
-              </a:rPr>
-              <a:t>TIẾT 9 – 11: VIẾT – NÓI VÀ NGHE</a:t>
+              <a:t>💡 Tách nghĩa từng yếu tố Hán Việt.</a:t>
             </a:r>
           </a:p>
         </p:txBody>
@@ -13339,14 +13811,14 @@
         </p:nvSpPr>
         <p:spPr>
           <a:xfrm>
-            <a:off x="10097719" y="457200"/>
-            <a:ext cx="1545336" cy="457200"/>
+            <a:off x="9942271" y="457200"/>
+            <a:ext cx="1700784" cy="457200"/>
           </a:xfrm>
           <a:prstGeom prst="roundRect">
             <a:avLst/>
           </a:prstGeom>
           <a:solidFill>
-            <a:srgbClr val="166534"/>
+            <a:srgbClr val="991B1B"/>
           </a:solidFill>
           <a:ln>
             <a:noFill/>
@@ -13379,7 +13851,7 @@
                 </a:solidFill>
                 <a:latin typeface="Arial"/>
               </a:rPr>
-              <a:t>GHI NHỚ</a:t>
+              <a:t>LỜI GIẢI</a:t>
             </a:r>
           </a:p>
         </p:txBody>
@@ -13393,7 +13865,7 @@
         <p:spPr>
           <a:xfrm>
             <a:off x="731520" y="274320"/>
-            <a:ext cx="9427464" cy="868680"/>
+            <a:ext cx="9272016" cy="868680"/>
           </a:xfrm>
           <a:prstGeom prst="rect">
             <a:avLst/>
@@ -13413,7 +13885,7 @@
                 </a:solidFill>
                 <a:latin typeface="Arial"/>
               </a:rPr>
-              <a:t>VIẾT BÀI NGHỊ LUẬN PHÂN TÍCH TRUYỆN</a:t>
+              <a:t>NGHĨA CỦA TỪ HÁN VIỆT</a:t>
             </a:r>
           </a:p>
         </p:txBody>
@@ -13506,7 +13978,7 @@
         <p:spPr>
           <a:xfrm>
             <a:off x="731520" y="1463040"/>
-            <a:ext cx="10789920" cy="4754880"/>
+            <a:ext cx="10789920" cy="3474720"/>
           </a:xfrm>
           <a:prstGeom prst="rect">
             <a:avLst/>
@@ -13530,13 +14002,13 @@
               <a:buChar char="•"/>
             </a:pPr>
             <a:r>
-              <a:rPr sz="2400">
+              <a:rPr sz="2300">
                 <a:solidFill>
                   <a:srgbClr val="1E293B"/>
                 </a:solidFill>
                 <a:latin typeface="Calibri"/>
               </a:rPr>
-              <a:t>Giới thiệu tác phẩm, nêu chủ đề và nét đặc sắc nghệ thuật sẽ phân tích.</a:t>
+              <a:t>Tiên triều: triều vua trước.</a:t>
             </a:r>
           </a:p>
           <a:p>
@@ -13551,13 +14023,13 @@
               <a:buChar char="•"/>
             </a:pPr>
             <a:r>
-              <a:rPr sz="2400">
+              <a:rPr sz="2300">
                 <a:solidFill>
                   <a:srgbClr val="1E293B"/>
                 </a:solidFill>
                 <a:latin typeface="Calibri"/>
               </a:rPr>
-              <a:t>Phân tích chủ đề: căn cứ xác định (nhan đề, nhân vật, chi tiết).</a:t>
+              <a:t>Hàn sĩ: học trò nghèo.</a:t>
             </a:r>
           </a:p>
           <a:p>
@@ -13572,13 +14044,13 @@
               <a:buChar char="•"/>
             </a:pPr>
             <a:r>
-              <a:rPr sz="2400">
+              <a:rPr sz="2300">
                 <a:solidFill>
                   <a:srgbClr val="1E293B"/>
                 </a:solidFill>
                 <a:latin typeface="Calibri"/>
               </a:rPr>
-              <a:t>Phân tích nét đặc sắc về hình thức: cốt truyện, nhân vật, chi tiết kì ảo, lời kể.</a:t>
+              <a:t>Khoan dung: rộng lượng tha thứ.</a:t>
             </a:r>
           </a:p>
           <a:p>
@@ -13593,13 +14065,100 @@
               <a:buChar char="•"/>
             </a:pPr>
             <a:r>
-              <a:rPr sz="2400">
+              <a:rPr sz="2300">
                 <a:solidFill>
                   <a:srgbClr val="1E293B"/>
                 </a:solidFill>
                 <a:latin typeface="Calibri"/>
               </a:rPr>
-              <a:t>Đánh giá giá trị tác phẩm; lí lẽ và bằng chứng thuyết phục.</a:t>
+              <a:t>Hiếu sinh: quý trọng sự sống.</a:t>
+            </a:r>
+          </a:p>
+        </p:txBody>
+      </p:sp>
+      <p:sp>
+        <p:nvSpPr>
+          <p:cNvPr id="8" name="Rounded Rectangle 7"/>
+          <p:cNvSpPr/>
+          <p:nvPr/>
+        </p:nvSpPr>
+        <p:spPr>
+          <a:xfrm>
+            <a:off x="731520" y="5074920"/>
+            <a:ext cx="10789920" cy="731520"/>
+          </a:xfrm>
+          <a:prstGeom prst="roundRect">
+            <a:avLst>
+              <a:gd name="adj" fmla="val 8000"/>
+            </a:avLst>
+          </a:prstGeom>
+          <a:solidFill>
+            <a:srgbClr val="FEF2F2"/>
+          </a:solidFill>
+          <a:ln w="19050">
+            <a:solidFill>
+              <a:srgbClr val="991B1B"/>
+            </a:solidFill>
+          </a:ln>
+          <a:effectLst/>
+        </p:spPr>
+        <p:style>
+          <a:lnRef idx="1">
+            <a:schemeClr val="accent1"/>
+          </a:lnRef>
+          <a:fillRef idx="3">
+            <a:schemeClr val="accent1"/>
+          </a:fillRef>
+          <a:effectRef idx="2">
+            <a:schemeClr val="accent1"/>
+          </a:effectRef>
+          <a:fontRef idx="minor">
+            <a:schemeClr val="lt1"/>
+          </a:fontRef>
+        </p:style>
+        <p:txBody>
+          <a:bodyPr rtlCol="0" anchor="ctr"/>
+          <a:lstStyle/>
+          <a:p>
+            <a:pPr algn="ctr"/>
+          </a:p>
+        </p:txBody>
+      </p:sp>
+      <p:sp>
+        <p:nvSpPr>
+          <p:cNvPr id="9" name="TextBox 8"/>
+          <p:cNvSpPr txBox="1"/>
+          <p:nvPr/>
+        </p:nvSpPr>
+        <p:spPr>
+          <a:xfrm>
+            <a:off x="914400" y="5074920"/>
+            <a:ext cx="10424160" cy="731520"/>
+          </a:xfrm>
+          <a:prstGeom prst="rect">
+            <a:avLst/>
+          </a:prstGeom>
+          <a:noFill/>
+        </p:spPr>
+        <p:txBody>
+          <a:bodyPr wrap="square" anchor="ctr" lIns="45720" rIns="45720">
+            <a:spAutoFit/>
+          </a:bodyPr>
+          <a:lstStyle/>
+          <a:p>
+            <a:pPr algn="l">
+              <a:spcAft>
+                <a:spcPts val="400"/>
+              </a:spcAft>
+            </a:pPr>
+            <a:r>
+              <a:rPr sz="2400" b="1">
+                <a:solidFill>
+                  <a:srgbClr val="991B1B"/>
+                </a:solidFill>
+                <a:latin typeface="Calibri"/>
+              </a:rPr>
+              <a:t>Dùng từ Hán Việt đúng nghĩa, đúng sắc thái.</a:t>
             </a:r>
           </a:p>
         </p:txBody>
@@ -13682,14 +14241,14 @@
         </p:nvSpPr>
         <p:spPr>
           <a:xfrm>
-            <a:off x="10097719" y="457200"/>
-            <a:ext cx="1545336" cy="457200"/>
+            <a:off x="10253167" y="457200"/>
+            <a:ext cx="1389888" cy="457200"/>
           </a:xfrm>
           <a:prstGeom prst="roundRect">
             <a:avLst/>
           </a:prstGeom>
           <a:solidFill>
-            <a:srgbClr val="166534"/>
+            <a:srgbClr val="1E40AF"/>
           </a:solidFill>
           <a:ln>
             <a:noFill/>
@@ -13722,7 +14281,7 @@
                 </a:solidFill>
                 <a:latin typeface="Arial"/>
               </a:rPr>
-              <a:t>CỦNG CỐ</a:t>
+              <a:t>ĐỀ BÀI</a:t>
             </a:r>
           </a:p>
         </p:txBody>
@@ -13736,7 +14295,7 @@
         <p:spPr>
           <a:xfrm>
             <a:off x="731520" y="274320"/>
-            <a:ext cx="9427464" cy="868680"/>
+            <a:ext cx="9582912" cy="868680"/>
           </a:xfrm>
           <a:prstGeom prst="rect">
             <a:avLst/>
@@ -13756,7 +14315,7 @@
                 </a:solidFill>
                 <a:latin typeface="Arial"/>
               </a:rPr>
-              <a:t>SƠ ĐỒ TƯ DUY</a:t>
+              <a:t>SỬA LỖI DÙNG TỪ HÁN VIỆT</a:t>
             </a:r>
           </a:p>
         </p:txBody>
@@ -13840,30 +14399,132 @@
           </a:p>
         </p:txBody>
       </p:sp>
-      <p:pic>
-        <p:nvPicPr>
-          <p:cNvPr id="7" name="Picture 6" descr="SoDoTuDuy_NGUVAN10_Bai1_SucHapDanCuaTruyenKe_T1-11.png"/>
-          <p:cNvPicPr>
-            <a:picLocks noChangeAspect="1"/>
-          </p:cNvPicPr>
-          <p:nvPr/>
-        </p:nvPicPr>
-        <p:blipFill>
-          <a:blip r:embed="rId2"/>
-          <a:stretch>
-            <a:fillRect/>
-          </a:stretch>
-        </p:blipFill>
-        <p:spPr>
-          <a:xfrm>
-            <a:off x="1788855" y="1371600"/>
-            <a:ext cx="8675250" cy="4846320"/>
-          </a:xfrm>
-          <a:prstGeom prst="rect">
-            <a:avLst/>
-          </a:prstGeom>
-        </p:spPr>
-      </p:pic>
+      <p:sp>
+        <p:nvSpPr>
+          <p:cNvPr id="7" name="TextBox 6"/>
+          <p:cNvSpPr txBox="1"/>
+          <p:nvPr/>
+        </p:nvSpPr>
+        <p:spPr>
+          <a:xfrm>
+            <a:off x="731520" y="1463040"/>
+            <a:ext cx="10789920" cy="3566160"/>
+          </a:xfrm>
+          <a:prstGeom prst="rect">
+            <a:avLst/>
+          </a:prstGeom>
+          <a:noFill/>
+        </p:spPr>
+        <p:txBody>
+          <a:bodyPr wrap="square" anchor="t" lIns="45720" rIns="45720">
+            <a:spAutoFit/>
+          </a:bodyPr>
+          <a:lstStyle/>
+          <a:p>
+            <a:pPr algn="l">
+              <a:spcAft>
+                <a:spcPts val="800"/>
+              </a:spcAft>
+            </a:pPr>
+            <a:r>
+              <a:rPr sz="2600" b="1">
+                <a:solidFill>
+                  <a:srgbClr val="1E293B"/>
+                </a:solidFill>
+                <a:latin typeface="Calibri"/>
+              </a:rPr>
+              <a:t>Tìm và sửa lỗi dùng từ: “Anh ấy luôn bàng quang trước việc chung.”; “Tiếng Anh là yếu điểm của em.”</a:t>
+            </a:r>
+          </a:p>
+        </p:txBody>
+      </p:sp>
+      <p:sp>
+        <p:nvSpPr>
+          <p:cNvPr id="8" name="Rounded Rectangle 7"/>
+          <p:cNvSpPr/>
+          <p:nvPr/>
+        </p:nvSpPr>
+        <p:spPr>
+          <a:xfrm>
+            <a:off x="731520" y="5120640"/>
+            <a:ext cx="10789920" cy="693420"/>
+          </a:xfrm>
+          <a:prstGeom prst="roundRect">
+            <a:avLst>
+              <a:gd name="adj" fmla="val 8000"/>
+            </a:avLst>
+          </a:prstGeom>
+          <a:solidFill>
+            <a:srgbClr val="EFF4FF"/>
+          </a:solidFill>
+          <a:ln w="19050">
+            <a:solidFill>
+              <a:srgbClr val="1E40AF"/>
+            </a:solidFill>
+          </a:ln>
+          <a:effectLst/>
+        </p:spPr>
+        <p:style>
+          <a:lnRef idx="1">
+            <a:schemeClr val="accent1"/>
+          </a:lnRef>
+          <a:fillRef idx="3">
+            <a:schemeClr val="accent1"/>
+          </a:fillRef>
+          <a:effectRef idx="2">
+            <a:schemeClr val="accent1"/>
+          </a:effectRef>
+          <a:fontRef idx="minor">
+            <a:schemeClr val="lt1"/>
+          </a:fontRef>
+        </p:style>
+        <p:txBody>
+          <a:bodyPr rtlCol="0" anchor="ctr"/>
+          <a:lstStyle/>
+          <a:p>
+            <a:pPr algn="ctr"/>
+          </a:p>
+        </p:txBody>
+      </p:sp>
+      <p:sp>
+        <p:nvSpPr>
+          <p:cNvPr id="9" name="TextBox 8"/>
+          <p:cNvSpPr txBox="1"/>
+          <p:nvPr/>
+        </p:nvSpPr>
+        <p:spPr>
+          <a:xfrm>
+            <a:off x="914400" y="5120640"/>
+            <a:ext cx="10424160" cy="693420"/>
+          </a:xfrm>
+          <a:prstGeom prst="rect">
+            <a:avLst/>
+          </a:prstGeom>
+          <a:noFill/>
+        </p:spPr>
+        <p:txBody>
+          <a:bodyPr wrap="square" anchor="ctr" lIns="45720" rIns="45720">
+            <a:spAutoFit/>
+          </a:bodyPr>
+          <a:lstStyle/>
+          <a:p>
+            <a:pPr algn="l">
+              <a:spcAft>
+                <a:spcPts val="400"/>
+              </a:spcAft>
+            </a:pPr>
+            <a:r>
+              <a:rPr sz="2200" b="1">
+                <a:solidFill>
+                  <a:srgbClr val="1E40AF"/>
+                </a:solidFill>
+                <a:latin typeface="Calibri"/>
+              </a:rPr>
+              <a:t>💡 Chú ý các từ gần âm.</a:t>
+            </a:r>
+          </a:p>
+        </p:txBody>
+      </p:sp>
     </p:spTree>
   </p:cSld>
   <p:clrMapOvr>
@@ -13942,8 +14603,8 @@
         </p:nvSpPr>
         <p:spPr>
           <a:xfrm>
-            <a:off x="10097719" y="457200"/>
-            <a:ext cx="1545336" cy="457200"/>
+            <a:off x="9942271" y="457200"/>
+            <a:ext cx="1700784" cy="457200"/>
           </a:xfrm>
           <a:prstGeom prst="roundRect">
             <a:avLst/>
@@ -13982,7 +14643,7 @@
                 </a:solidFill>
                 <a:latin typeface="Arial"/>
               </a:rPr>
-              <a:t>CỦNG CỐ</a:t>
+              <a:t>LỜI GIẢI</a:t>
             </a:r>
           </a:p>
         </p:txBody>
@@ -13996,7 +14657,7 @@
         <p:spPr>
           <a:xfrm>
             <a:off x="731520" y="274320"/>
-            <a:ext cx="9427464" cy="868680"/>
+            <a:ext cx="9272016" cy="868680"/>
           </a:xfrm>
           <a:prstGeom prst="rect">
             <a:avLst/>
@@ -14016,7 +14677,7 @@
                 </a:solidFill>
                 <a:latin typeface="Arial"/>
               </a:rPr>
-              <a:t>BÀI TẬP CỦA BẠN</a:t>
+              <a:t>SỬA LỖI DÙNG TỪ HÁN VIỆT</a:t>
             </a:r>
           </a:p>
         </p:txBody>
@@ -14096,6 +14757,1106 @@
                 <a:latin typeface="Calibri"/>
               </a:rPr>
               <a:t>Ngữ văn 10 · Bài 1: Sức Hấp Dẫn Của Truyện Kể          35</a:t>
+            </a:r>
+          </a:p>
+        </p:txBody>
+      </p:sp>
+      <p:sp>
+        <p:nvSpPr>
+          <p:cNvPr id="7" name="TextBox 6"/>
+          <p:cNvSpPr txBox="1"/>
+          <p:nvPr/>
+        </p:nvSpPr>
+        <p:spPr>
+          <a:xfrm>
+            <a:off x="731520" y="1463040"/>
+            <a:ext cx="10789920" cy="3474720"/>
+          </a:xfrm>
+          <a:prstGeom prst="rect">
+            <a:avLst/>
+          </a:prstGeom>
+          <a:noFill/>
+        </p:spPr>
+        <p:txBody>
+          <a:bodyPr wrap="square" anchor="t" lIns="45720" rIns="45720">
+            <a:spAutoFit/>
+          </a:bodyPr>
+          <a:lstStyle/>
+          <a:p>
+            <a:pPr algn="l" marL="365760" indent="-365760">
+              <a:spcAft>
+                <a:spcPts val="800"/>
+              </a:spcAft>
+              <a:buClr>
+                <a:srgbClr val="1E40AF"/>
+              </a:buClr>
+              <a:buFont typeface="Arial"/>
+              <a:buChar char="•"/>
+            </a:pPr>
+            <a:r>
+              <a:rPr sz="2300">
+                <a:solidFill>
+                  <a:srgbClr val="1E293B"/>
+                </a:solidFill>
+                <a:latin typeface="Calibri"/>
+              </a:rPr>
+              <a:t>“bàng quang” → “bàng quan” (thờ ơ, đứng ngoài).</a:t>
+            </a:r>
+          </a:p>
+          <a:p>
+            <a:pPr algn="l" marL="365760" indent="-365760">
+              <a:spcAft>
+                <a:spcPts val="800"/>
+              </a:spcAft>
+              <a:buClr>
+                <a:srgbClr val="1E40AF"/>
+              </a:buClr>
+              <a:buFont typeface="Arial"/>
+              <a:buChar char="•"/>
+            </a:pPr>
+            <a:r>
+              <a:rPr sz="2300">
+                <a:solidFill>
+                  <a:srgbClr val="1E293B"/>
+                </a:solidFill>
+                <a:latin typeface="Calibri"/>
+              </a:rPr>
+              <a:t>“yếu điểm” (điểm quan trọng) → “điểm yếu”.</a:t>
+            </a:r>
+          </a:p>
+        </p:txBody>
+      </p:sp>
+      <p:sp>
+        <p:nvSpPr>
+          <p:cNvPr id="8" name="Rounded Rectangle 7"/>
+          <p:cNvSpPr/>
+          <p:nvPr/>
+        </p:nvSpPr>
+        <p:spPr>
+          <a:xfrm>
+            <a:off x="731520" y="5074920"/>
+            <a:ext cx="10789920" cy="731520"/>
+          </a:xfrm>
+          <a:prstGeom prst="roundRect">
+            <a:avLst>
+              <a:gd name="adj" fmla="val 8000"/>
+            </a:avLst>
+          </a:prstGeom>
+          <a:solidFill>
+            <a:srgbClr val="FEF2F2"/>
+          </a:solidFill>
+          <a:ln w="19050">
+            <a:solidFill>
+              <a:srgbClr val="991B1B"/>
+            </a:solidFill>
+          </a:ln>
+          <a:effectLst/>
+        </p:spPr>
+        <p:style>
+          <a:lnRef idx="1">
+            <a:schemeClr val="accent1"/>
+          </a:lnRef>
+          <a:fillRef idx="3">
+            <a:schemeClr val="accent1"/>
+          </a:fillRef>
+          <a:effectRef idx="2">
+            <a:schemeClr val="accent1"/>
+          </a:effectRef>
+          <a:fontRef idx="minor">
+            <a:schemeClr val="lt1"/>
+          </a:fontRef>
+        </p:style>
+        <p:txBody>
+          <a:bodyPr rtlCol="0" anchor="ctr"/>
+          <a:lstStyle/>
+          <a:p>
+            <a:pPr algn="ctr"/>
+          </a:p>
+        </p:txBody>
+      </p:sp>
+      <p:sp>
+        <p:nvSpPr>
+          <p:cNvPr id="9" name="TextBox 8"/>
+          <p:cNvSpPr txBox="1"/>
+          <p:nvPr/>
+        </p:nvSpPr>
+        <p:spPr>
+          <a:xfrm>
+            <a:off x="914400" y="5074920"/>
+            <a:ext cx="10424160" cy="731520"/>
+          </a:xfrm>
+          <a:prstGeom prst="rect">
+            <a:avLst/>
+          </a:prstGeom>
+          <a:noFill/>
+        </p:spPr>
+        <p:txBody>
+          <a:bodyPr wrap="square" anchor="ctr" lIns="45720" rIns="45720">
+            <a:spAutoFit/>
+          </a:bodyPr>
+          <a:lstStyle/>
+          <a:p>
+            <a:pPr algn="l">
+              <a:spcAft>
+                <a:spcPts val="400"/>
+              </a:spcAft>
+            </a:pPr>
+            <a:r>
+              <a:rPr sz="2400" b="1">
+                <a:solidFill>
+                  <a:srgbClr val="991B1B"/>
+                </a:solidFill>
+                <a:latin typeface="Calibri"/>
+              </a:rPr>
+              <a:t>Hiểu đúng nghĩa từng yếu tố để tránh lỗi.</a:t>
+            </a:r>
+          </a:p>
+        </p:txBody>
+      </p:sp>
+    </p:spTree>
+  </p:cSld>
+  <p:clrMapOvr>
+    <a:masterClrMapping/>
+  </p:clrMapOvr>
+</p:sld>
+</file>
+
+<file path=ppt/slides/slide36.xml><?xml version="1.0" encoding="utf-8"?>
+<p:sld xmlns:a="http://schemas.openxmlformats.org/drawingml/2006/main" xmlns:p="http://schemas.openxmlformats.org/presentationml/2006/main" xmlns:r="http://schemas.openxmlformats.org/officeDocument/2006/relationships">
+  <p:cSld>
+    <p:bg>
+      <p:bgPr>
+        <a:solidFill>
+          <a:srgbClr val="F8F9FA"/>
+        </a:solidFill>
+        <a:effectLst/>
+      </p:bgPr>
+    </p:bg>
+    <p:spTree>
+      <p:nvGrpSpPr>
+        <p:cNvPr id="1" name=""/>
+        <p:cNvGrpSpPr/>
+        <p:nvPr/>
+      </p:nvGrpSpPr>
+      <p:grpSpPr/>
+      <p:sp>
+        <p:nvSpPr>
+          <p:cNvPr id="2" name="Rectangle 1"/>
+          <p:cNvSpPr/>
+          <p:nvPr/>
+        </p:nvSpPr>
+        <p:spPr>
+          <a:xfrm>
+            <a:off x="548640" y="2926080"/>
+            <a:ext cx="164592" cy="1005840"/>
+          </a:xfrm>
+          <a:prstGeom prst="rect">
+            <a:avLst/>
+          </a:prstGeom>
+          <a:solidFill>
+            <a:srgbClr val="991B1B"/>
+          </a:solidFill>
+          <a:ln>
+            <a:noFill/>
+          </a:ln>
+          <a:effectLst/>
+        </p:spPr>
+        <p:style>
+          <a:lnRef idx="1">
+            <a:schemeClr val="accent1"/>
+          </a:lnRef>
+          <a:fillRef idx="3">
+            <a:schemeClr val="accent1"/>
+          </a:fillRef>
+          <a:effectRef idx="2">
+            <a:schemeClr val="accent1"/>
+          </a:effectRef>
+          <a:fontRef idx="minor">
+            <a:schemeClr val="lt1"/>
+          </a:fontRef>
+        </p:style>
+        <p:txBody>
+          <a:bodyPr rtlCol="0" anchor="ctr"/>
+          <a:lstStyle/>
+          <a:p>
+            <a:pPr algn="ctr"/>
+          </a:p>
+        </p:txBody>
+      </p:sp>
+      <p:sp>
+        <p:nvSpPr>
+          <p:cNvPr id="3" name="TextBox 2"/>
+          <p:cNvSpPr txBox="1"/>
+          <p:nvPr/>
+        </p:nvSpPr>
+        <p:spPr>
+          <a:xfrm>
+            <a:off x="914400" y="2743200"/>
+            <a:ext cx="10515600" cy="1371600"/>
+          </a:xfrm>
+          <a:prstGeom prst="rect">
+            <a:avLst/>
+          </a:prstGeom>
+          <a:noFill/>
+        </p:spPr>
+        <p:txBody>
+          <a:bodyPr wrap="square" anchor="ctr" lIns="45720" rIns="45720">
+            <a:spAutoFit/>
+          </a:bodyPr>
+          <a:lstStyle/>
+          <a:p>
+            <a:pPr algn="l">
+              <a:spcAft>
+                <a:spcPts val="800"/>
+              </a:spcAft>
+            </a:pPr>
+            <a:r>
+              <a:rPr sz="3600" b="1">
+                <a:solidFill>
+                  <a:srgbClr val="1E40AF"/>
+                </a:solidFill>
+                <a:latin typeface="Calibri"/>
+              </a:rPr>
+              <a:t>TIẾT 9 – 11: VIẾT – NÓI VÀ NGHE</a:t>
+            </a:r>
+          </a:p>
+        </p:txBody>
+      </p:sp>
+    </p:spTree>
+  </p:cSld>
+  <p:clrMapOvr>
+    <a:masterClrMapping/>
+  </p:clrMapOvr>
+</p:sld>
+</file>
+
+<file path=ppt/slides/slide37.xml><?xml version="1.0" encoding="utf-8"?>
+<p:sld xmlns:a="http://schemas.openxmlformats.org/drawingml/2006/main" xmlns:p="http://schemas.openxmlformats.org/presentationml/2006/main" xmlns:r="http://schemas.openxmlformats.org/officeDocument/2006/relationships">
+  <p:cSld>
+    <p:bg>
+      <p:bgPr>
+        <a:solidFill>
+          <a:srgbClr val="FFFFFF"/>
+        </a:solidFill>
+        <a:effectLst/>
+      </p:bgPr>
+    </p:bg>
+    <p:spTree>
+      <p:nvGrpSpPr>
+        <p:cNvPr id="1" name=""/>
+        <p:cNvGrpSpPr/>
+        <p:nvPr/>
+      </p:nvGrpSpPr>
+      <p:grpSpPr/>
+      <p:sp>
+        <p:nvSpPr>
+          <p:cNvPr id="2" name="Rectangle 1"/>
+          <p:cNvSpPr/>
+          <p:nvPr/>
+        </p:nvSpPr>
+        <p:spPr>
+          <a:xfrm>
+            <a:off x="457200" y="384048"/>
+            <a:ext cx="109728" cy="658368"/>
+          </a:xfrm>
+          <a:prstGeom prst="rect">
+            <a:avLst/>
+          </a:prstGeom>
+          <a:solidFill>
+            <a:srgbClr val="1E40AF"/>
+          </a:solidFill>
+          <a:ln>
+            <a:noFill/>
+          </a:ln>
+          <a:effectLst/>
+        </p:spPr>
+        <p:style>
+          <a:lnRef idx="1">
+            <a:schemeClr val="accent1"/>
+          </a:lnRef>
+          <a:fillRef idx="3">
+            <a:schemeClr val="accent1"/>
+          </a:fillRef>
+          <a:effectRef idx="2">
+            <a:schemeClr val="accent1"/>
+          </a:effectRef>
+          <a:fontRef idx="minor">
+            <a:schemeClr val="lt1"/>
+          </a:fontRef>
+        </p:style>
+        <p:txBody>
+          <a:bodyPr rtlCol="0" anchor="ctr"/>
+          <a:lstStyle/>
+          <a:p>
+            <a:pPr algn="ctr"/>
+          </a:p>
+        </p:txBody>
+      </p:sp>
+      <p:sp>
+        <p:nvSpPr>
+          <p:cNvPr id="3" name="Rounded Rectangle 2"/>
+          <p:cNvSpPr/>
+          <p:nvPr/>
+        </p:nvSpPr>
+        <p:spPr>
+          <a:xfrm>
+            <a:off x="10097719" y="457200"/>
+            <a:ext cx="1545336" cy="457200"/>
+          </a:xfrm>
+          <a:prstGeom prst="roundRect">
+            <a:avLst/>
+          </a:prstGeom>
+          <a:solidFill>
+            <a:srgbClr val="166534"/>
+          </a:solidFill>
+          <a:ln>
+            <a:noFill/>
+          </a:ln>
+          <a:effectLst/>
+        </p:spPr>
+        <p:style>
+          <a:lnRef idx="1">
+            <a:schemeClr val="accent1"/>
+          </a:lnRef>
+          <a:fillRef idx="3">
+            <a:schemeClr val="accent1"/>
+          </a:fillRef>
+          <a:effectRef idx="2">
+            <a:schemeClr val="accent1"/>
+          </a:effectRef>
+          <a:fontRef idx="minor">
+            <a:schemeClr val="lt1"/>
+          </a:fontRef>
+        </p:style>
+        <p:txBody>
+          <a:bodyPr rtlCol="0" anchor="ctr" wrap="none" tIns="0" bIns="0"/>
+          <a:lstStyle/>
+          <a:p>
+            <a:pPr algn="ctr"/>
+            <a:r>
+              <a:rPr sz="1400" b="1">
+                <a:solidFill>
+                  <a:srgbClr val="FFFFFF"/>
+                </a:solidFill>
+                <a:latin typeface="Arial"/>
+              </a:rPr>
+              <a:t>GHI NHỚ</a:t>
+            </a:r>
+          </a:p>
+        </p:txBody>
+      </p:sp>
+      <p:sp>
+        <p:nvSpPr>
+          <p:cNvPr id="4" name="TextBox 3"/>
+          <p:cNvSpPr txBox="1"/>
+          <p:nvPr/>
+        </p:nvSpPr>
+        <p:spPr>
+          <a:xfrm>
+            <a:off x="731520" y="274320"/>
+            <a:ext cx="9427464" cy="868680"/>
+          </a:xfrm>
+          <a:prstGeom prst="rect">
+            <a:avLst/>
+          </a:prstGeom>
+          <a:noFill/>
+        </p:spPr>
+        <p:txBody>
+          <a:bodyPr wrap="square" anchor="ctr">
+            <a:spAutoFit/>
+          </a:bodyPr>
+          <a:lstStyle/>
+          <a:p>
+            <a:r>
+              <a:rPr sz="3600" b="1">
+                <a:solidFill>
+                  <a:srgbClr val="1E40AF"/>
+                </a:solidFill>
+                <a:latin typeface="Arial"/>
+              </a:rPr>
+              <a:t>VIẾT BÀI NGHỊ LUẬN PHÂN TÍCH TRUYỆN</a:t>
+            </a:r>
+          </a:p>
+        </p:txBody>
+      </p:sp>
+      <p:sp>
+        <p:nvSpPr>
+          <p:cNvPr id="5" name="Rectangle 4"/>
+          <p:cNvSpPr/>
+          <p:nvPr/>
+        </p:nvSpPr>
+        <p:spPr>
+          <a:xfrm>
+            <a:off x="457200" y="1207008"/>
+            <a:ext cx="11274552" cy="22000"/>
+          </a:xfrm>
+          <a:prstGeom prst="rect">
+            <a:avLst/>
+          </a:prstGeom>
+          <a:solidFill>
+            <a:srgbClr val="E2E8F0"/>
+          </a:solidFill>
+          <a:ln>
+            <a:noFill/>
+          </a:ln>
+          <a:effectLst/>
+        </p:spPr>
+        <p:style>
+          <a:lnRef idx="1">
+            <a:schemeClr val="accent1"/>
+          </a:lnRef>
+          <a:fillRef idx="3">
+            <a:schemeClr val="accent1"/>
+          </a:fillRef>
+          <a:effectRef idx="2">
+            <a:schemeClr val="accent1"/>
+          </a:effectRef>
+          <a:fontRef idx="minor">
+            <a:schemeClr val="lt1"/>
+          </a:fontRef>
+        </p:style>
+        <p:txBody>
+          <a:bodyPr rtlCol="0" anchor="ctr"/>
+          <a:lstStyle/>
+          <a:p>
+            <a:pPr algn="ctr"/>
+          </a:p>
+        </p:txBody>
+      </p:sp>
+      <p:sp>
+        <p:nvSpPr>
+          <p:cNvPr id="6" name="TextBox 5"/>
+          <p:cNvSpPr txBox="1"/>
+          <p:nvPr/>
+        </p:nvSpPr>
+        <p:spPr>
+          <a:xfrm>
+            <a:off x="457200" y="6355080"/>
+            <a:ext cx="11274552" cy="365760"/>
+          </a:xfrm>
+          <a:prstGeom prst="rect">
+            <a:avLst/>
+          </a:prstGeom>
+          <a:noFill/>
+        </p:spPr>
+        <p:txBody>
+          <a:bodyPr wrap="none">
+            <a:spAutoFit/>
+          </a:bodyPr>
+          <a:lstStyle/>
+          <a:p>
+            <a:pPr algn="r"/>
+            <a:r>
+              <a:rPr sz="1200">
+                <a:solidFill>
+                  <a:srgbClr val="64748B"/>
+                </a:solidFill>
+                <a:latin typeface="Calibri"/>
+              </a:rPr>
+              <a:t>Ngữ văn 10 · Bài 1: Sức Hấp Dẫn Của Truyện Kể          37</a:t>
+            </a:r>
+          </a:p>
+        </p:txBody>
+      </p:sp>
+      <p:sp>
+        <p:nvSpPr>
+          <p:cNvPr id="7" name="TextBox 6"/>
+          <p:cNvSpPr txBox="1"/>
+          <p:nvPr/>
+        </p:nvSpPr>
+        <p:spPr>
+          <a:xfrm>
+            <a:off x="731520" y="1463040"/>
+            <a:ext cx="10789920" cy="4754880"/>
+          </a:xfrm>
+          <a:prstGeom prst="rect">
+            <a:avLst/>
+          </a:prstGeom>
+          <a:noFill/>
+        </p:spPr>
+        <p:txBody>
+          <a:bodyPr wrap="square" anchor="t" lIns="45720" rIns="45720">
+            <a:spAutoFit/>
+          </a:bodyPr>
+          <a:lstStyle/>
+          <a:p>
+            <a:pPr algn="l" marL="365760" indent="-365760">
+              <a:spcAft>
+                <a:spcPts val="800"/>
+              </a:spcAft>
+              <a:buClr>
+                <a:srgbClr val="1E40AF"/>
+              </a:buClr>
+              <a:buFont typeface="Arial"/>
+              <a:buChar char="•"/>
+            </a:pPr>
+            <a:r>
+              <a:rPr sz="2400">
+                <a:solidFill>
+                  <a:srgbClr val="1E293B"/>
+                </a:solidFill>
+                <a:latin typeface="Calibri"/>
+              </a:rPr>
+              <a:t>Giới thiệu tác phẩm, nêu chủ đề và nét đặc sắc nghệ thuật sẽ phân tích.</a:t>
+            </a:r>
+          </a:p>
+          <a:p>
+            <a:pPr algn="l" marL="365760" indent="-365760">
+              <a:spcAft>
+                <a:spcPts val="800"/>
+              </a:spcAft>
+              <a:buClr>
+                <a:srgbClr val="1E40AF"/>
+              </a:buClr>
+              <a:buFont typeface="Arial"/>
+              <a:buChar char="•"/>
+            </a:pPr>
+            <a:r>
+              <a:rPr sz="2400">
+                <a:solidFill>
+                  <a:srgbClr val="1E293B"/>
+                </a:solidFill>
+                <a:latin typeface="Calibri"/>
+              </a:rPr>
+              <a:t>Phân tích chủ đề: căn cứ xác định (nhan đề, nhân vật, chi tiết).</a:t>
+            </a:r>
+          </a:p>
+          <a:p>
+            <a:pPr algn="l" marL="365760" indent="-365760">
+              <a:spcAft>
+                <a:spcPts val="800"/>
+              </a:spcAft>
+              <a:buClr>
+                <a:srgbClr val="1E40AF"/>
+              </a:buClr>
+              <a:buFont typeface="Arial"/>
+              <a:buChar char="•"/>
+            </a:pPr>
+            <a:r>
+              <a:rPr sz="2400">
+                <a:solidFill>
+                  <a:srgbClr val="1E293B"/>
+                </a:solidFill>
+                <a:latin typeface="Calibri"/>
+              </a:rPr>
+              <a:t>Phân tích nét đặc sắc về hình thức: cốt truyện, nhân vật, chi tiết kì ảo, lời kể.</a:t>
+            </a:r>
+          </a:p>
+          <a:p>
+            <a:pPr algn="l" marL="365760" indent="-365760">
+              <a:spcAft>
+                <a:spcPts val="800"/>
+              </a:spcAft>
+              <a:buClr>
+                <a:srgbClr val="1E40AF"/>
+              </a:buClr>
+              <a:buFont typeface="Arial"/>
+              <a:buChar char="•"/>
+            </a:pPr>
+            <a:r>
+              <a:rPr sz="2400">
+                <a:solidFill>
+                  <a:srgbClr val="1E293B"/>
+                </a:solidFill>
+                <a:latin typeface="Calibri"/>
+              </a:rPr>
+              <a:t>Đánh giá giá trị tác phẩm; lí lẽ và bằng chứng thuyết phục.</a:t>
+            </a:r>
+          </a:p>
+        </p:txBody>
+      </p:sp>
+    </p:spTree>
+  </p:cSld>
+  <p:clrMapOvr>
+    <a:masterClrMapping/>
+  </p:clrMapOvr>
+</p:sld>
+</file>
+
+<file path=ppt/slides/slide38.xml><?xml version="1.0" encoding="utf-8"?>
+<p:sld xmlns:a="http://schemas.openxmlformats.org/drawingml/2006/main" xmlns:p="http://schemas.openxmlformats.org/presentationml/2006/main" xmlns:r="http://schemas.openxmlformats.org/officeDocument/2006/relationships">
+  <p:cSld>
+    <p:bg>
+      <p:bgPr>
+        <a:solidFill>
+          <a:srgbClr val="FFFFFF"/>
+        </a:solidFill>
+        <a:effectLst/>
+      </p:bgPr>
+    </p:bg>
+    <p:spTree>
+      <p:nvGrpSpPr>
+        <p:cNvPr id="1" name=""/>
+        <p:cNvGrpSpPr/>
+        <p:nvPr/>
+      </p:nvGrpSpPr>
+      <p:grpSpPr/>
+      <p:sp>
+        <p:nvSpPr>
+          <p:cNvPr id="2" name="Rectangle 1"/>
+          <p:cNvSpPr/>
+          <p:nvPr/>
+        </p:nvSpPr>
+        <p:spPr>
+          <a:xfrm>
+            <a:off x="457200" y="384048"/>
+            <a:ext cx="109728" cy="658368"/>
+          </a:xfrm>
+          <a:prstGeom prst="rect">
+            <a:avLst/>
+          </a:prstGeom>
+          <a:solidFill>
+            <a:srgbClr val="1E40AF"/>
+          </a:solidFill>
+          <a:ln>
+            <a:noFill/>
+          </a:ln>
+          <a:effectLst/>
+        </p:spPr>
+        <p:style>
+          <a:lnRef idx="1">
+            <a:schemeClr val="accent1"/>
+          </a:lnRef>
+          <a:fillRef idx="3">
+            <a:schemeClr val="accent1"/>
+          </a:fillRef>
+          <a:effectRef idx="2">
+            <a:schemeClr val="accent1"/>
+          </a:effectRef>
+          <a:fontRef idx="minor">
+            <a:schemeClr val="lt1"/>
+          </a:fontRef>
+        </p:style>
+        <p:txBody>
+          <a:bodyPr rtlCol="0" anchor="ctr"/>
+          <a:lstStyle/>
+          <a:p>
+            <a:pPr algn="ctr"/>
+          </a:p>
+        </p:txBody>
+      </p:sp>
+      <p:sp>
+        <p:nvSpPr>
+          <p:cNvPr id="3" name="Rounded Rectangle 2"/>
+          <p:cNvSpPr/>
+          <p:nvPr/>
+        </p:nvSpPr>
+        <p:spPr>
+          <a:xfrm>
+            <a:off x="10097719" y="457200"/>
+            <a:ext cx="1545336" cy="457200"/>
+          </a:xfrm>
+          <a:prstGeom prst="roundRect">
+            <a:avLst/>
+          </a:prstGeom>
+          <a:solidFill>
+            <a:srgbClr val="166534"/>
+          </a:solidFill>
+          <a:ln>
+            <a:noFill/>
+          </a:ln>
+          <a:effectLst/>
+        </p:spPr>
+        <p:style>
+          <a:lnRef idx="1">
+            <a:schemeClr val="accent1"/>
+          </a:lnRef>
+          <a:fillRef idx="3">
+            <a:schemeClr val="accent1"/>
+          </a:fillRef>
+          <a:effectRef idx="2">
+            <a:schemeClr val="accent1"/>
+          </a:effectRef>
+          <a:fontRef idx="minor">
+            <a:schemeClr val="lt1"/>
+          </a:fontRef>
+        </p:style>
+        <p:txBody>
+          <a:bodyPr rtlCol="0" anchor="ctr" wrap="none" tIns="0" bIns="0"/>
+          <a:lstStyle/>
+          <a:p>
+            <a:pPr algn="ctr"/>
+            <a:r>
+              <a:rPr sz="1400" b="1">
+                <a:solidFill>
+                  <a:srgbClr val="FFFFFF"/>
+                </a:solidFill>
+                <a:latin typeface="Arial"/>
+              </a:rPr>
+              <a:t>CỦNG CỐ</a:t>
+            </a:r>
+          </a:p>
+        </p:txBody>
+      </p:sp>
+      <p:sp>
+        <p:nvSpPr>
+          <p:cNvPr id="4" name="TextBox 3"/>
+          <p:cNvSpPr txBox="1"/>
+          <p:nvPr/>
+        </p:nvSpPr>
+        <p:spPr>
+          <a:xfrm>
+            <a:off x="731520" y="274320"/>
+            <a:ext cx="9427464" cy="868680"/>
+          </a:xfrm>
+          <a:prstGeom prst="rect">
+            <a:avLst/>
+          </a:prstGeom>
+          <a:noFill/>
+        </p:spPr>
+        <p:txBody>
+          <a:bodyPr wrap="square" anchor="ctr">
+            <a:spAutoFit/>
+          </a:bodyPr>
+          <a:lstStyle/>
+          <a:p>
+            <a:r>
+              <a:rPr sz="3600" b="1">
+                <a:solidFill>
+                  <a:srgbClr val="1E40AF"/>
+                </a:solidFill>
+                <a:latin typeface="Arial"/>
+              </a:rPr>
+              <a:t>SƠ ĐỒ TƯ DUY</a:t>
+            </a:r>
+          </a:p>
+        </p:txBody>
+      </p:sp>
+      <p:sp>
+        <p:nvSpPr>
+          <p:cNvPr id="5" name="Rectangle 4"/>
+          <p:cNvSpPr/>
+          <p:nvPr/>
+        </p:nvSpPr>
+        <p:spPr>
+          <a:xfrm>
+            <a:off x="457200" y="1207008"/>
+            <a:ext cx="11274552" cy="22000"/>
+          </a:xfrm>
+          <a:prstGeom prst="rect">
+            <a:avLst/>
+          </a:prstGeom>
+          <a:solidFill>
+            <a:srgbClr val="E2E8F0"/>
+          </a:solidFill>
+          <a:ln>
+            <a:noFill/>
+          </a:ln>
+          <a:effectLst/>
+        </p:spPr>
+        <p:style>
+          <a:lnRef idx="1">
+            <a:schemeClr val="accent1"/>
+          </a:lnRef>
+          <a:fillRef idx="3">
+            <a:schemeClr val="accent1"/>
+          </a:fillRef>
+          <a:effectRef idx="2">
+            <a:schemeClr val="accent1"/>
+          </a:effectRef>
+          <a:fontRef idx="minor">
+            <a:schemeClr val="lt1"/>
+          </a:fontRef>
+        </p:style>
+        <p:txBody>
+          <a:bodyPr rtlCol="0" anchor="ctr"/>
+          <a:lstStyle/>
+          <a:p>
+            <a:pPr algn="ctr"/>
+          </a:p>
+        </p:txBody>
+      </p:sp>
+      <p:sp>
+        <p:nvSpPr>
+          <p:cNvPr id="6" name="TextBox 5"/>
+          <p:cNvSpPr txBox="1"/>
+          <p:nvPr/>
+        </p:nvSpPr>
+        <p:spPr>
+          <a:xfrm>
+            <a:off x="457200" y="6355080"/>
+            <a:ext cx="11274552" cy="365760"/>
+          </a:xfrm>
+          <a:prstGeom prst="rect">
+            <a:avLst/>
+          </a:prstGeom>
+          <a:noFill/>
+        </p:spPr>
+        <p:txBody>
+          <a:bodyPr wrap="none">
+            <a:spAutoFit/>
+          </a:bodyPr>
+          <a:lstStyle/>
+          <a:p>
+            <a:pPr algn="r"/>
+            <a:r>
+              <a:rPr sz="1200">
+                <a:solidFill>
+                  <a:srgbClr val="64748B"/>
+                </a:solidFill>
+                <a:latin typeface="Calibri"/>
+              </a:rPr>
+              <a:t>Ngữ văn 10 · Bài 1: Sức Hấp Dẫn Của Truyện Kể          38</a:t>
+            </a:r>
+          </a:p>
+        </p:txBody>
+      </p:sp>
+      <p:pic>
+        <p:nvPicPr>
+          <p:cNvPr id="7" name="Picture 6" descr="SoDoTuDuy_NGUVAN10_Bai1_SucHapDanCuaTruyenKe_T1-11.png"/>
+          <p:cNvPicPr>
+            <a:picLocks noChangeAspect="1"/>
+          </p:cNvPicPr>
+          <p:nvPr/>
+        </p:nvPicPr>
+        <p:blipFill>
+          <a:blip r:embed="rId2"/>
+          <a:stretch>
+            <a:fillRect/>
+          </a:stretch>
+        </p:blipFill>
+        <p:spPr>
+          <a:xfrm>
+            <a:off x="1788855" y="1371600"/>
+            <a:ext cx="8675250" cy="4846320"/>
+          </a:xfrm>
+          <a:prstGeom prst="rect">
+            <a:avLst/>
+          </a:prstGeom>
+        </p:spPr>
+      </p:pic>
+    </p:spTree>
+  </p:cSld>
+  <p:clrMapOvr>
+    <a:masterClrMapping/>
+  </p:clrMapOvr>
+</p:sld>
+</file>
+
+<file path=ppt/slides/slide39.xml><?xml version="1.0" encoding="utf-8"?>
+<p:sld xmlns:a="http://schemas.openxmlformats.org/drawingml/2006/main" xmlns:p="http://schemas.openxmlformats.org/presentationml/2006/main" xmlns:r="http://schemas.openxmlformats.org/officeDocument/2006/relationships">
+  <p:cSld>
+    <p:bg>
+      <p:bgPr>
+        <a:solidFill>
+          <a:srgbClr val="FFFFFF"/>
+        </a:solidFill>
+        <a:effectLst/>
+      </p:bgPr>
+    </p:bg>
+    <p:spTree>
+      <p:nvGrpSpPr>
+        <p:cNvPr id="1" name=""/>
+        <p:cNvGrpSpPr/>
+        <p:nvPr/>
+      </p:nvGrpSpPr>
+      <p:grpSpPr/>
+      <p:sp>
+        <p:nvSpPr>
+          <p:cNvPr id="2" name="Rectangle 1"/>
+          <p:cNvSpPr/>
+          <p:nvPr/>
+        </p:nvSpPr>
+        <p:spPr>
+          <a:xfrm>
+            <a:off x="457200" y="384048"/>
+            <a:ext cx="109728" cy="658368"/>
+          </a:xfrm>
+          <a:prstGeom prst="rect">
+            <a:avLst/>
+          </a:prstGeom>
+          <a:solidFill>
+            <a:srgbClr val="1E40AF"/>
+          </a:solidFill>
+          <a:ln>
+            <a:noFill/>
+          </a:ln>
+          <a:effectLst/>
+        </p:spPr>
+        <p:style>
+          <a:lnRef idx="1">
+            <a:schemeClr val="accent1"/>
+          </a:lnRef>
+          <a:fillRef idx="3">
+            <a:schemeClr val="accent1"/>
+          </a:fillRef>
+          <a:effectRef idx="2">
+            <a:schemeClr val="accent1"/>
+          </a:effectRef>
+          <a:fontRef idx="minor">
+            <a:schemeClr val="lt1"/>
+          </a:fontRef>
+        </p:style>
+        <p:txBody>
+          <a:bodyPr rtlCol="0" anchor="ctr"/>
+          <a:lstStyle/>
+          <a:p>
+            <a:pPr algn="ctr"/>
+          </a:p>
+        </p:txBody>
+      </p:sp>
+      <p:sp>
+        <p:nvSpPr>
+          <p:cNvPr id="3" name="Rounded Rectangle 2"/>
+          <p:cNvSpPr/>
+          <p:nvPr/>
+        </p:nvSpPr>
+        <p:spPr>
+          <a:xfrm>
+            <a:off x="10097719" y="457200"/>
+            <a:ext cx="1545336" cy="457200"/>
+          </a:xfrm>
+          <a:prstGeom prst="roundRect">
+            <a:avLst/>
+          </a:prstGeom>
+          <a:solidFill>
+            <a:srgbClr val="991B1B"/>
+          </a:solidFill>
+          <a:ln>
+            <a:noFill/>
+          </a:ln>
+          <a:effectLst/>
+        </p:spPr>
+        <p:style>
+          <a:lnRef idx="1">
+            <a:schemeClr val="accent1"/>
+          </a:lnRef>
+          <a:fillRef idx="3">
+            <a:schemeClr val="accent1"/>
+          </a:fillRef>
+          <a:effectRef idx="2">
+            <a:schemeClr val="accent1"/>
+          </a:effectRef>
+          <a:fontRef idx="minor">
+            <a:schemeClr val="lt1"/>
+          </a:fontRef>
+        </p:style>
+        <p:txBody>
+          <a:bodyPr rtlCol="0" anchor="ctr" wrap="none" tIns="0" bIns="0"/>
+          <a:lstStyle/>
+          <a:p>
+            <a:pPr algn="ctr"/>
+            <a:r>
+              <a:rPr sz="1400" b="1">
+                <a:solidFill>
+                  <a:srgbClr val="FFFFFF"/>
+                </a:solidFill>
+                <a:latin typeface="Arial"/>
+              </a:rPr>
+              <a:t>CỦNG CỐ</a:t>
+            </a:r>
+          </a:p>
+        </p:txBody>
+      </p:sp>
+      <p:sp>
+        <p:nvSpPr>
+          <p:cNvPr id="4" name="TextBox 3"/>
+          <p:cNvSpPr txBox="1"/>
+          <p:nvPr/>
+        </p:nvSpPr>
+        <p:spPr>
+          <a:xfrm>
+            <a:off x="731520" y="274320"/>
+            <a:ext cx="9427464" cy="868680"/>
+          </a:xfrm>
+          <a:prstGeom prst="rect">
+            <a:avLst/>
+          </a:prstGeom>
+          <a:noFill/>
+        </p:spPr>
+        <p:txBody>
+          <a:bodyPr wrap="square" anchor="ctr">
+            <a:spAutoFit/>
+          </a:bodyPr>
+          <a:lstStyle/>
+          <a:p>
+            <a:r>
+              <a:rPr sz="3600" b="1">
+                <a:solidFill>
+                  <a:srgbClr val="1E40AF"/>
+                </a:solidFill>
+                <a:latin typeface="Arial"/>
+              </a:rPr>
+              <a:t>BÀI TẬP CỦA BẠN</a:t>
+            </a:r>
+          </a:p>
+        </p:txBody>
+      </p:sp>
+      <p:sp>
+        <p:nvSpPr>
+          <p:cNvPr id="5" name="Rectangle 4"/>
+          <p:cNvSpPr/>
+          <p:nvPr/>
+        </p:nvSpPr>
+        <p:spPr>
+          <a:xfrm>
+            <a:off x="457200" y="1207008"/>
+            <a:ext cx="11274552" cy="22000"/>
+          </a:xfrm>
+          <a:prstGeom prst="rect">
+            <a:avLst/>
+          </a:prstGeom>
+          <a:solidFill>
+            <a:srgbClr val="E2E8F0"/>
+          </a:solidFill>
+          <a:ln>
+            <a:noFill/>
+          </a:ln>
+          <a:effectLst/>
+        </p:spPr>
+        <p:style>
+          <a:lnRef idx="1">
+            <a:schemeClr val="accent1"/>
+          </a:lnRef>
+          <a:fillRef idx="3">
+            <a:schemeClr val="accent1"/>
+          </a:fillRef>
+          <a:effectRef idx="2">
+            <a:schemeClr val="accent1"/>
+          </a:effectRef>
+          <a:fontRef idx="minor">
+            <a:schemeClr val="lt1"/>
+          </a:fontRef>
+        </p:style>
+        <p:txBody>
+          <a:bodyPr rtlCol="0" anchor="ctr"/>
+          <a:lstStyle/>
+          <a:p>
+            <a:pPr algn="ctr"/>
+          </a:p>
+        </p:txBody>
+      </p:sp>
+      <p:sp>
+        <p:nvSpPr>
+          <p:cNvPr id="6" name="TextBox 5"/>
+          <p:cNvSpPr txBox="1"/>
+          <p:nvPr/>
+        </p:nvSpPr>
+        <p:spPr>
+          <a:xfrm>
+            <a:off x="457200" y="6355080"/>
+            <a:ext cx="11274552" cy="365760"/>
+          </a:xfrm>
+          <a:prstGeom prst="rect">
+            <a:avLst/>
+          </a:prstGeom>
+          <a:noFill/>
+        </p:spPr>
+        <p:txBody>
+          <a:bodyPr wrap="none">
+            <a:spAutoFit/>
+          </a:bodyPr>
+          <a:lstStyle/>
+          <a:p>
+            <a:pPr algn="r"/>
+            <a:r>
+              <a:rPr sz="1200">
+                <a:solidFill>
+                  <a:srgbClr val="64748B"/>
+                </a:solidFill>
+                <a:latin typeface="Calibri"/>
+              </a:rPr>
+              <a:t>Ngữ văn 10 · Bài 1: Sức Hấp Dẫn Của Truyện Kể          39</a:t>
             </a:r>
           </a:p>
         </p:txBody>
@@ -14627,14 +16388,14 @@
         </p:nvSpPr>
         <p:spPr>
           <a:xfrm>
-            <a:off x="10097719" y="457200"/>
-            <a:ext cx="1545336" cy="457200"/>
+            <a:off x="10408615" y="457200"/>
+            <a:ext cx="1234440" cy="457200"/>
           </a:xfrm>
           <a:prstGeom prst="roundRect">
             <a:avLst/>
           </a:prstGeom>
           <a:solidFill>
-            <a:srgbClr val="166534"/>
+            <a:srgbClr val="991B1B"/>
           </a:solidFill>
           <a:ln>
             <a:noFill/>
@@ -14667,7 +16428,7 @@
                 </a:solidFill>
                 <a:latin typeface="Arial"/>
               </a:rPr>
-              <a:t>GHI NHỚ</a:t>
+              <a:t>VIDEO</a:t>
             </a:r>
           </a:p>
         </p:txBody>
@@ -14681,7 +16442,7 @@
         <p:spPr>
           <a:xfrm>
             <a:off x="731520" y="274320"/>
-            <a:ext cx="9427464" cy="868680"/>
+            <a:ext cx="9738360" cy="868680"/>
           </a:xfrm>
           <a:prstGeom prst="rect">
             <a:avLst/>
@@ -14701,7 +16462,7 @@
                 </a:solidFill>
                 <a:latin typeface="Arial"/>
               </a:rPr>
-              <a:t>THẦN THOẠI</a:t>
+              <a:t>VIDEO THAM KHẢO</a:t>
             </a:r>
           </a:p>
         </p:txBody>
@@ -14785,16 +16546,40 @@
           </a:p>
         </p:txBody>
       </p:sp>
-      <p:sp>
-        <p:nvSpPr>
-          <p:cNvPr id="7" name="TextBox 6"/>
+      <p:pic>
+        <p:nvPicPr>
+          <p:cNvPr id="7" name="Picture 6" descr="QR_video_fTcd5BwvYEs.png"/>
+          <p:cNvPicPr>
+            <a:picLocks noChangeAspect="1"/>
+          </p:cNvPicPr>
+          <p:nvPr/>
+        </p:nvPicPr>
+        <p:blipFill>
+          <a:blip r:embed="rId2"/>
+          <a:stretch>
+            <a:fillRect/>
+          </a:stretch>
+        </p:blipFill>
+        <p:spPr>
+          <a:xfrm>
+            <a:off x="8412480" y="1554480"/>
+            <a:ext cx="3108960" cy="3108960"/>
+          </a:xfrm>
+          <a:prstGeom prst="rect">
+            <a:avLst/>
+          </a:prstGeom>
+        </p:spPr>
+      </p:pic>
+      <p:sp>
+        <p:nvSpPr>
+          <p:cNvPr id="8" name="TextBox 7"/>
           <p:cNvSpPr txBox="1"/>
           <p:nvPr/>
         </p:nvSpPr>
         <p:spPr>
           <a:xfrm>
-            <a:off x="731520" y="1463040"/>
-            <a:ext cx="10789920" cy="4754880"/>
+            <a:off x="731520" y="1554480"/>
+            <a:ext cx="7498079" cy="4206240"/>
           </a:xfrm>
           <a:prstGeom prst="rect">
             <a:avLst/>
@@ -14806,6 +16591,38 @@
             <a:spAutoFit/>
           </a:bodyPr>
           <a:lstStyle/>
+          <a:p>
+            <a:pPr algn="l">
+              <a:spcAft>
+                <a:spcPts val="800"/>
+              </a:spcAft>
+            </a:pPr>
+            <a:r>
+              <a:rPr sz="2600" b="1">
+                <a:solidFill>
+                  <a:srgbClr val="1E293B"/>
+                </a:solidFill>
+                <a:latin typeface="Calibri"/>
+              </a:rPr>
+              <a:t>🎬 Nữ Oa vá trời – Truyện thần thoại Trung Quốc</a:t>
+            </a:r>
+          </a:p>
+          <a:p>
+            <a:pPr algn="l">
+              <a:spcAft>
+                <a:spcPts val="800"/>
+              </a:spcAft>
+            </a:pPr>
+            <a:r>
+              <a:rPr sz="2000">
+                <a:solidFill>
+                  <a:srgbClr val="64748B"/>
+                </a:solidFill>
+                <a:latin typeface="Calibri"/>
+              </a:rPr>
+              <a:t>Kênh: Thế giới cổ tích</a:t>
+            </a:r>
+          </a:p>
           <a:p>
             <a:pPr algn="l" marL="365760" indent="-365760">
               <a:spcAft>
@@ -14818,85 +16635,30 @@
               <a:buChar char="•"/>
             </a:pPr>
             <a:r>
-              <a:rPr sz="2400" b="1">
+              <a:rPr sz="2000">
                 <a:solidFill>
                   <a:srgbClr val="1E293B"/>
                 </a:solidFill>
                 <a:latin typeface="Calibri"/>
               </a:rPr>
-              <a:t>Thần thoại</a:t>
-            </a:r>
-            <a:r>
-              <a:rPr sz="2400">
-                <a:solidFill>
-                  <a:srgbClr val="1E293B"/>
-                </a:solidFill>
-                <a:latin typeface="Calibri"/>
-              </a:rPr>
-              <a:t>: truyện kể xa xưa nhất, kể về các vị thần, thể hiện quan niệm về vũ trụ và khát vọng chinh phục tự nhiên.</a:t>
-            </a:r>
-          </a:p>
-          <a:p>
-            <a:pPr algn="l" marL="365760" indent="-365760">
+              <a:t>Hoạt động Mở đầu (văn bản 1–3)</a:t>
+            </a:r>
+          </a:p>
+          <a:p>
+            <a:pPr algn="l">
               <a:spcAft>
                 <a:spcPts val="800"/>
               </a:spcAft>
-              <a:buClr>
-                <a:srgbClr val="1E40AF"/>
-              </a:buClr>
-              <a:buFont typeface="Arial"/>
-              <a:buChar char="•"/>
             </a:pPr>
             <a:r>
-              <a:rPr sz="2400">
-                <a:solidFill>
-                  <a:srgbClr val="1E293B"/>
+              <a:rPr sz="1600">
+                <a:solidFill>
+                  <a:srgbClr val="64748B"/>
                 </a:solidFill>
                 <a:latin typeface="Calibri"/>
-              </a:rPr>
-              <a:t>Thời gian phiếm chỉ, ước lệ; không gian vũ trụ nhiều cõi.</a:t>
-            </a:r>
-          </a:p>
-          <a:p>
-            <a:pPr algn="l" marL="365760" indent="-365760">
-              <a:spcAft>
-                <a:spcPts val="800"/>
-              </a:spcAft>
-              <a:buClr>
-                <a:srgbClr val="1E40AF"/>
-              </a:buClr>
-              <a:buFont typeface="Arial"/>
-              <a:buChar char="•"/>
-            </a:pPr>
-            <a:r>
-              <a:rPr sz="2400">
-                <a:solidFill>
-                  <a:srgbClr val="1E293B"/>
-                </a:solidFill>
-                <a:latin typeface="Calibri"/>
-              </a:rPr>
-              <a:t>Nhân vật thần có hình dạng khổng lồ, năng lực siêu nhiên; chức năng lí giải tự nhiên.</a:t>
-            </a:r>
-          </a:p>
-          <a:p>
-            <a:pPr algn="l" marL="365760" indent="-365760">
-              <a:spcAft>
-                <a:spcPts val="800"/>
-              </a:spcAft>
-              <a:buClr>
-                <a:srgbClr val="1E40AF"/>
-              </a:buClr>
-              <a:buFont typeface="Arial"/>
-              <a:buChar char="•"/>
-            </a:pPr>
-            <a:r>
-              <a:rPr sz="2400">
-                <a:solidFill>
-                  <a:srgbClr val="1E293B"/>
-                </a:solidFill>
-                <a:latin typeface="Calibri"/>
-              </a:rPr>
-              <a:t>Thủ pháp cường điệu, phóng đại; lối tư duy hồn nhiên, trí tưởng tượng bay bổng.</a:t>
+                <a:hlinkClick r:id="rId3"/>
+              </a:rPr>
+              <a:t>https://www.youtube.com/watch?v=fTcd5BwvYEs</a:t>
             </a:r>
           </a:p>
         </p:txBody>
@@ -14979,14 +16741,14 @@
         </p:nvSpPr>
         <p:spPr>
           <a:xfrm>
-            <a:off x="10253167" y="457200"/>
-            <a:ext cx="1389888" cy="457200"/>
+            <a:off x="10097719" y="457200"/>
+            <a:ext cx="1545336" cy="457200"/>
           </a:xfrm>
           <a:prstGeom prst="roundRect">
             <a:avLst/>
           </a:prstGeom>
           <a:solidFill>
-            <a:srgbClr val="1E40AF"/>
+            <a:srgbClr val="166534"/>
           </a:solidFill>
           <a:ln>
             <a:noFill/>
@@ -15019,7 +16781,7 @@
                 </a:solidFill>
                 <a:latin typeface="Arial"/>
               </a:rPr>
-              <a:t>ĐỀ BÀI</a:t>
+              <a:t>GHI NHỚ</a:t>
             </a:r>
           </a:p>
         </p:txBody>
@@ -15033,7 +16795,7 @@
         <p:spPr>
           <a:xfrm>
             <a:off x="731520" y="274320"/>
-            <a:ext cx="9582912" cy="868680"/>
+            <a:ext cx="9427464" cy="868680"/>
           </a:xfrm>
           <a:prstGeom prst="rect">
             <a:avLst/>
@@ -15053,7 +16815,7 @@
                 </a:solidFill>
                 <a:latin typeface="Arial"/>
               </a:rPr>
-              <a:t>THẦN TRỤ TRỜI</a:t>
+              <a:t>THẦN THOẠI</a:t>
             </a:r>
           </a:p>
         </p:txBody>
@@ -15146,7 +16908,7 @@
         <p:spPr>
           <a:xfrm>
             <a:off x="731520" y="1463040"/>
-            <a:ext cx="10789920" cy="3566160"/>
+            <a:ext cx="10789920" cy="4754880"/>
           </a:xfrm>
           <a:prstGeom prst="rect">
             <a:avLst/>
@@ -15159,106 +16921,96 @@
           </a:bodyPr>
           <a:lstStyle/>
           <a:p>
-            <a:pPr algn="l">
+            <a:pPr algn="l" marL="365760" indent="-365760">
               <a:spcAft>
                 <a:spcPts val="800"/>
               </a:spcAft>
+              <a:buClr>
+                <a:srgbClr val="1E40AF"/>
+              </a:buClr>
+              <a:buFont typeface="Arial"/>
+              <a:buChar char="•"/>
             </a:pPr>
             <a:r>
-              <a:rPr sz="2600" b="1">
+              <a:rPr sz="2400" b="1">
                 <a:solidFill>
                   <a:srgbClr val="1E293B"/>
                 </a:solidFill>
                 <a:latin typeface="Calibri"/>
               </a:rPr>
-              <a:t>Thần Trụ Trời được miêu tả như thế nào? Thần đã làm gì để tạo lập trời đất?</a:t>
-            </a:r>
-          </a:p>
-        </p:txBody>
-      </p:sp>
-      <p:sp>
-        <p:nvSpPr>
-          <p:cNvPr id="8" name="Rounded Rectangle 7"/>
-          <p:cNvSpPr/>
-          <p:nvPr/>
-        </p:nvSpPr>
-        <p:spPr>
-          <a:xfrm>
-            <a:off x="731520" y="5120640"/>
-            <a:ext cx="10789920" cy="693420"/>
-          </a:xfrm>
-          <a:prstGeom prst="roundRect">
-            <a:avLst>
-              <a:gd name="adj" fmla="val 8000"/>
-            </a:avLst>
-          </a:prstGeom>
-          <a:solidFill>
-            <a:srgbClr val="EFF4FF"/>
-          </a:solidFill>
-          <a:ln w="19050">
-            <a:solidFill>
-              <a:srgbClr val="1E40AF"/>
-            </a:solidFill>
-          </a:ln>
-          <a:effectLst/>
-        </p:spPr>
-        <p:style>
-          <a:lnRef idx="1">
-            <a:schemeClr val="accent1"/>
-          </a:lnRef>
-          <a:fillRef idx="3">
-            <a:schemeClr val="accent1"/>
-          </a:fillRef>
-          <a:effectRef idx="2">
-            <a:schemeClr val="accent1"/>
-          </a:effectRef>
-          <a:fontRef idx="minor">
-            <a:schemeClr val="lt1"/>
-          </a:fontRef>
-        </p:style>
-        <p:txBody>
-          <a:bodyPr rtlCol="0" anchor="ctr"/>
-          <a:lstStyle/>
-          <a:p>
-            <a:pPr algn="ctr"/>
-          </a:p>
-        </p:txBody>
-      </p:sp>
-      <p:sp>
-        <p:nvSpPr>
-          <p:cNvPr id="9" name="TextBox 8"/>
-          <p:cNvSpPr txBox="1"/>
-          <p:nvPr/>
-        </p:nvSpPr>
-        <p:spPr>
-          <a:xfrm>
-            <a:off x="914400" y="5120640"/>
-            <a:ext cx="10424160" cy="693420"/>
-          </a:xfrm>
-          <a:prstGeom prst="rect">
-            <a:avLst/>
-          </a:prstGeom>
-          <a:noFill/>
-        </p:spPr>
-        <p:txBody>
-          <a:bodyPr wrap="square" anchor="ctr" lIns="45720" rIns="45720">
-            <a:spAutoFit/>
-          </a:bodyPr>
-          <a:lstStyle/>
-          <a:p>
-            <a:pPr algn="l">
+              <a:t>Thần thoại</a:t>
+            </a:r>
+            <a:r>
+              <a:rPr sz="2400">
+                <a:solidFill>
+                  <a:srgbClr val="1E293B"/>
+                </a:solidFill>
+                <a:latin typeface="Calibri"/>
+              </a:rPr>
+              <a:t>: truyện kể xa xưa nhất, kể về các vị thần, thể hiện quan niệm về vũ trụ và khát vọng chinh phục tự nhiên.</a:t>
+            </a:r>
+          </a:p>
+          <a:p>
+            <a:pPr algn="l" marL="365760" indent="-365760">
               <a:spcAft>
-                <a:spcPts val="400"/>
+                <a:spcPts val="800"/>
               </a:spcAft>
+              <a:buClr>
+                <a:srgbClr val="1E40AF"/>
+              </a:buClr>
+              <a:buFont typeface="Arial"/>
+              <a:buChar char="•"/>
             </a:pPr>
             <a:r>
-              <a:rPr sz="2200" b="1">
-                <a:solidFill>
-                  <a:srgbClr val="1E40AF"/>
+              <a:rPr sz="2400">
+                <a:solidFill>
+                  <a:srgbClr val="1E293B"/>
                 </a:solidFill>
                 <a:latin typeface="Calibri"/>
               </a:rPr>
-              <a:t>💡 Chú ý hình dạng và công việc của thần.</a:t>
+              <a:t>Thời gian phiếm chỉ, ước lệ; không gian vũ trụ nhiều cõi.</a:t>
+            </a:r>
+          </a:p>
+          <a:p>
+            <a:pPr algn="l" marL="365760" indent="-365760">
+              <a:spcAft>
+                <a:spcPts val="800"/>
+              </a:spcAft>
+              <a:buClr>
+                <a:srgbClr val="1E40AF"/>
+              </a:buClr>
+              <a:buFont typeface="Arial"/>
+              <a:buChar char="•"/>
+            </a:pPr>
+            <a:r>
+              <a:rPr sz="2400">
+                <a:solidFill>
+                  <a:srgbClr val="1E293B"/>
+                </a:solidFill>
+                <a:latin typeface="Calibri"/>
+              </a:rPr>
+              <a:t>Nhân vật thần có hình dạng khổng lồ, năng lực siêu nhiên; chức năng lí giải tự nhiên.</a:t>
+            </a:r>
+          </a:p>
+          <a:p>
+            <a:pPr algn="l" marL="365760" indent="-365760">
+              <a:spcAft>
+                <a:spcPts val="800"/>
+              </a:spcAft>
+              <a:buClr>
+                <a:srgbClr val="1E40AF"/>
+              </a:buClr>
+              <a:buFont typeface="Arial"/>
+              <a:buChar char="•"/>
+            </a:pPr>
+            <a:r>
+              <a:rPr sz="2400">
+                <a:solidFill>
+                  <a:srgbClr val="1E293B"/>
+                </a:solidFill>
+                <a:latin typeface="Calibri"/>
+              </a:rPr>
+              <a:t>Thủ pháp cường điệu, phóng đại; lối tư duy hồn nhiên, trí tưởng tượng bay bổng.</a:t>
             </a:r>
           </a:p>
         </p:txBody>
@@ -15341,8 +17093,8 @@
         </p:nvSpPr>
         <p:spPr>
           <a:xfrm>
-            <a:off x="9942271" y="457200"/>
-            <a:ext cx="1700784" cy="457200"/>
+            <a:off x="10408615" y="457200"/>
+            <a:ext cx="1234440" cy="457200"/>
           </a:xfrm>
           <a:prstGeom prst="roundRect">
             <a:avLst/>
@@ -15381,7 +17133,7 @@
                 </a:solidFill>
                 <a:latin typeface="Arial"/>
               </a:rPr>
-              <a:t>LỜI GIẢI</a:t>
+              <a:t>VIDEO</a:t>
             </a:r>
           </a:p>
         </p:txBody>
@@ -15395,7 +17147,7 @@
         <p:spPr>
           <a:xfrm>
             <a:off x="731520" y="274320"/>
-            <a:ext cx="9272016" cy="868680"/>
+            <a:ext cx="9738360" cy="868680"/>
           </a:xfrm>
           <a:prstGeom prst="rect">
             <a:avLst/>
@@ -15415,7 +17167,7 @@
                 </a:solidFill>
                 <a:latin typeface="Arial"/>
               </a:rPr>
-              <a:t>THẦN TRỤ TRỜI</a:t>
+              <a:t>VIDEO THAM KHẢO</a:t>
             </a:r>
           </a:p>
         </p:txBody>
@@ -15499,16 +17251,40 @@
           </a:p>
         </p:txBody>
       </p:sp>
-      <p:sp>
-        <p:nvSpPr>
-          <p:cNvPr id="7" name="TextBox 6"/>
+      <p:pic>
+        <p:nvPicPr>
+          <p:cNvPr id="7" name="Picture 6" descr="QR_video_uldNwX0oGCA.png"/>
+          <p:cNvPicPr>
+            <a:picLocks noChangeAspect="1"/>
+          </p:cNvPicPr>
+          <p:nvPr/>
+        </p:nvPicPr>
+        <p:blipFill>
+          <a:blip r:embed="rId2"/>
+          <a:stretch>
+            <a:fillRect/>
+          </a:stretch>
+        </p:blipFill>
+        <p:spPr>
+          <a:xfrm>
+            <a:off x="8412480" y="1554480"/>
+            <a:ext cx="3108960" cy="3108960"/>
+          </a:xfrm>
+          <a:prstGeom prst="rect">
+            <a:avLst/>
+          </a:prstGeom>
+        </p:spPr>
+      </p:pic>
+      <p:sp>
+        <p:nvSpPr>
+          <p:cNvPr id="8" name="TextBox 7"/>
           <p:cNvSpPr txBox="1"/>
           <p:nvPr/>
         </p:nvSpPr>
         <p:spPr>
           <a:xfrm>
-            <a:off x="731520" y="1463040"/>
-            <a:ext cx="10789920" cy="3474720"/>
+            <a:off x="731520" y="1554480"/>
+            <a:ext cx="7498079" cy="4206240"/>
           </a:xfrm>
           <a:prstGeom prst="rect">
             <a:avLst/>
@@ -15520,6 +17296,38 @@
             <a:spAutoFit/>
           </a:bodyPr>
           <a:lstStyle/>
+          <a:p>
+            <a:pPr algn="l">
+              <a:spcAft>
+                <a:spcPts val="800"/>
+              </a:spcAft>
+            </a:pPr>
+            <a:r>
+              <a:rPr sz="2600" b="1">
+                <a:solidFill>
+                  <a:srgbClr val="1E293B"/>
+                </a:solidFill>
+                <a:latin typeface="Calibri"/>
+              </a:rPr>
+              <a:t>🎬 Thần Trụ Trời – Truyện thần thoại Việt Nam</a:t>
+            </a:r>
+          </a:p>
+          <a:p>
+            <a:pPr algn="l">
+              <a:spcAft>
+                <a:spcPts val="800"/>
+              </a:spcAft>
+            </a:pPr>
+            <a:r>
+              <a:rPr sz="2000">
+                <a:solidFill>
+                  <a:srgbClr val="64748B"/>
+                </a:solidFill>
+                <a:latin typeface="Calibri"/>
+              </a:rPr>
+              <a:t>Kênh: Thế giới cổ tích</a:t>
+            </a:r>
+          </a:p>
           <a:p>
             <a:pPr algn="l" marL="365760" indent="-365760">
               <a:spcAft>
@@ -15532,142 +17340,30 @@
               <a:buChar char="•"/>
             </a:pPr>
             <a:r>
-              <a:rPr sz="2300">
+              <a:rPr sz="2000">
                 <a:solidFill>
                   <a:srgbClr val="1E293B"/>
                 </a:solidFill>
                 <a:latin typeface="Calibri"/>
               </a:rPr>
-              <a:t>Thân thể to lớn, vóc dáng kì vĩ.</a:t>
-            </a:r>
-          </a:p>
-          <a:p>
-            <a:pPr algn="l" marL="365760" indent="-365760">
+              <a:t>Khám phá văn bản Thần Trụ Trời</a:t>
+            </a:r>
+          </a:p>
+          <a:p>
+            <a:pPr algn="l">
               <a:spcAft>
                 <a:spcPts val="800"/>
               </a:spcAft>
-              <a:buClr>
-                <a:srgbClr val="1E40AF"/>
-              </a:buClr>
-              <a:buFont typeface="Arial"/>
-              <a:buChar char="•"/>
             </a:pPr>
             <a:r>
-              <a:rPr sz="2300">
-                <a:solidFill>
-                  <a:srgbClr val="1E293B"/>
+              <a:rPr sz="1600">
+                <a:solidFill>
+                  <a:srgbClr val="64748B"/>
                 </a:solidFill>
                 <a:latin typeface="Calibri"/>
-              </a:rPr>
-              <a:t>Dùng đầu đội trời, đào đất, đá đắp cột chống trời.</a:t>
-            </a:r>
-          </a:p>
-          <a:p>
-            <a:pPr algn="l" marL="365760" indent="-365760">
-              <a:spcAft>
-                <a:spcPts val="800"/>
-              </a:spcAft>
-              <a:buClr>
-                <a:srgbClr val="1E40AF"/>
-              </a:buClr>
-              <a:buFont typeface="Arial"/>
-              <a:buChar char="•"/>
-            </a:pPr>
-            <a:r>
-              <a:rPr sz="2300">
-                <a:solidFill>
-                  <a:srgbClr val="1E293B"/>
-                </a:solidFill>
-                <a:latin typeface="Calibri"/>
-              </a:rPr>
-              <a:t>Phá cột, ném đá, đất khắp nơi → núi, đảo, cồn đồi, cao nguyên; chỗ đào thành biển.</a:t>
-            </a:r>
-          </a:p>
-        </p:txBody>
-      </p:sp>
-      <p:sp>
-        <p:nvSpPr>
-          <p:cNvPr id="8" name="Rounded Rectangle 7"/>
-          <p:cNvSpPr/>
-          <p:nvPr/>
-        </p:nvSpPr>
-        <p:spPr>
-          <a:xfrm>
-            <a:off x="731520" y="5074920"/>
-            <a:ext cx="10789920" cy="731520"/>
-          </a:xfrm>
-          <a:prstGeom prst="roundRect">
-            <a:avLst>
-              <a:gd name="adj" fmla="val 8000"/>
-            </a:avLst>
-          </a:prstGeom>
-          <a:solidFill>
-            <a:srgbClr val="FEF2F2"/>
-          </a:solidFill>
-          <a:ln w="19050">
-            <a:solidFill>
-              <a:srgbClr val="991B1B"/>
-            </a:solidFill>
-          </a:ln>
-          <a:effectLst/>
-        </p:spPr>
-        <p:style>
-          <a:lnRef idx="1">
-            <a:schemeClr val="accent1"/>
-          </a:lnRef>
-          <a:fillRef idx="3">
-            <a:schemeClr val="accent1"/>
-          </a:fillRef>
-          <a:effectRef idx="2">
-            <a:schemeClr val="accent1"/>
-          </a:effectRef>
-          <a:fontRef idx="minor">
-            <a:schemeClr val="lt1"/>
-          </a:fontRef>
-        </p:style>
-        <p:txBody>
-          <a:bodyPr rtlCol="0" anchor="ctr"/>
-          <a:lstStyle/>
-          <a:p>
-            <a:pPr algn="ctr"/>
-          </a:p>
-        </p:txBody>
-      </p:sp>
-      <p:sp>
-        <p:nvSpPr>
-          <p:cNvPr id="9" name="TextBox 8"/>
-          <p:cNvSpPr txBox="1"/>
-          <p:nvPr/>
-        </p:nvSpPr>
-        <p:spPr>
-          <a:xfrm>
-            <a:off x="914400" y="5074920"/>
-            <a:ext cx="10424160" cy="731520"/>
-          </a:xfrm>
-          <a:prstGeom prst="rect">
-            <a:avLst/>
-          </a:prstGeom>
-          <a:noFill/>
-        </p:spPr>
-        <p:txBody>
-          <a:bodyPr wrap="square" anchor="ctr" lIns="45720" rIns="45720">
-            <a:spAutoFit/>
-          </a:bodyPr>
-          <a:lstStyle/>
-          <a:p>
-            <a:pPr algn="l">
-              <a:spcAft>
-                <a:spcPts val="400"/>
-              </a:spcAft>
-            </a:pPr>
-            <a:r>
-              <a:rPr sz="2400" b="1">
-                <a:solidFill>
-                  <a:srgbClr val="991B1B"/>
-                </a:solidFill>
-                <a:latin typeface="Calibri"/>
-              </a:rPr>
-              <a:t>Lí giải nguồn gốc trời đất, núi sông, biển cả.</a:t>
+                <a:hlinkClick r:id="rId3"/>
+              </a:rPr>
+              <a:t>https://www.youtube.com/watch?v=uldNwX0oGCA</a:t>
             </a:r>
           </a:p>
         </p:txBody>
@@ -15824,7 +17520,7 @@
                 </a:solidFill>
                 <a:latin typeface="Arial"/>
               </a:rPr>
-              <a:t>THẦN SÉT VÀ THẦN GIÓ</a:t>
+              <a:t>THẦN TRỤ TRỜI</a:t>
             </a:r>
           </a:p>
         </p:txBody>
@@ -15942,7 +17638,7 @@
                 </a:solidFill>
                 <a:latin typeface="Calibri"/>
               </a:rPr>
-              <a:t>Hình dạng, tính khí, công việc của thần Sét và thần Gió có gì đặc biệt? Các chi tiết ấy lí giải hiện tượng nào?</a:t>
+              <a:t>Thần Trụ Trời được miêu tả như thế nào? Thần đã làm gì để tạo lập trời đất?</a:t>
             </a:r>
           </a:p>
         </p:txBody>
@@ -16029,7 +17725,7 @@
                 </a:solidFill>
                 <a:latin typeface="Calibri"/>
               </a:rPr>
-              <a:t>💡 Liên hệ đặc điểm của sấm sét, gió bão.</a:t>
+              <a:t>💡 Chú ý hình dạng và công việc của thần.</a:t>
             </a:r>
           </a:p>
         </p:txBody>
@@ -16186,7 +17882,7 @@
                 </a:solidFill>
                 <a:latin typeface="Arial"/>
               </a:rPr>
-              <a:t>THẦN SÉT VÀ THẦN GIÓ</a:t>
+              <a:t>THẦN TRỤ TRỜI</a:t>
             </a:r>
           </a:p>
         </p:txBody>
@@ -16309,7 +18005,7 @@
                 </a:solidFill>
                 <a:latin typeface="Calibri"/>
               </a:rPr>
-              <a:t>Thần Sét: mặt mũi nanh ác, nóng nảy; lưỡi búa đá; thi hành luật pháp ở trần gian.</a:t>
+              <a:t>Thân thể to lớn, vóc dáng kì vĩ.</a:t>
             </a:r>
           </a:p>
           <a:p>
@@ -16330,7 +18026,7 @@
                 </a:solidFill>
                 <a:latin typeface="Calibri"/>
               </a:rPr>
-              <a:t>Thần Gió: không có đầu, quạt màu nhiệm; tạo gió bão; con thần Gió hoá cây ngải gió.</a:t>
+              <a:t>Dùng đầu đội trời, đào đất, đá đắp cột chống trời.</a:t>
             </a:r>
           </a:p>
           <a:p>
@@ -16351,7 +18047,7 @@
                 </a:solidFill>
                 <a:latin typeface="Calibri"/>
               </a:rPr>
-              <a:t>Lí giải sấm sét, gió bão, tập tục bắt chước tiếng gà, kinh nghiệm dùng lá ngải.</a:t>
+              <a:t>Phá cột, ném đá, đất khắp nơi → núi, đảo, cồn đồi, cao nguyên; chỗ đào thành biển.</a:t>
             </a:r>
           </a:p>
         </p:txBody>
@@ -16365,7 +18061,7 @@
         <p:spPr>
           <a:xfrm>
             <a:off x="731520" y="5074920"/>
-            <a:ext cx="10789920" cy="1188720"/>
+            <a:ext cx="10789920" cy="731520"/>
           </a:xfrm>
           <a:prstGeom prst="roundRect">
             <a:avLst>
@@ -16413,7 +18109,7 @@
         <p:spPr>
           <a:xfrm>
             <a:off x="914400" y="5074920"/>
-            <a:ext cx="10424160" cy="1188720"/>
+            <a:ext cx="10424160" cy="731520"/>
           </a:xfrm>
           <a:prstGeom prst="rect">
             <a:avLst/>
@@ -16438,7 +18134,7 @@
                 </a:solidFill>
                 <a:latin typeface="Calibri"/>
               </a:rPr>
-              <a:t>Nhân hoá tự nhiên thành các vị thần – thế giới quan “vạn vật hữu linh”.</a:t>
+              <a:t>Lí giải nguồn gốc trời đất, núi sông, biển cả.</a:t>
             </a:r>
           </a:p>
         </p:txBody>

--- a/mon/ngu_van/slide/lop10/Slide_NGUVAN10_Bai1_SucHapDanCuaTruyenKe_T1-11.pptx
+++ b/mon/ngu_van/slide/lop10/Slide_NGUVAN10_Bai1_SucHapDanCuaTruyenKe_T1-11.pptx
@@ -41,9 +41,6 @@
     <p:sldId id="289" r:id="rId41"/>
     <p:sldId id="290" r:id="rId42"/>
     <p:sldId id="291" r:id="rId43"/>
-    <p:sldId id="292" r:id="rId44"/>
-    <p:sldId id="293" r:id="rId45"/>
-    <p:sldId id="294" r:id="rId46"/>
   </p:sldIdLst>
   <p:sldSz cx="12191695" cy="6858000" type="screen4x3"/>
   <p:notesSz cx="6858000" cy="9144000"/>
@@ -610,7 +607,7 @@
           <a:lstStyle/>
           <a:p>
             <a:r>
-              <a:t>Slide LỜI GIẢI – GV chốt sau khi HS trình bày. </a:t>
+              <a:t>Slide ĐỀ BÀI – cho HS suy nghĩ, thảo luận (không chiếu lời giải). </a:t>
             </a:r>
           </a:p>
         </p:txBody>
@@ -680,7 +677,7 @@
           <a:lstStyle/>
           <a:p>
             <a:r>
-              <a:t>Gợi Chuyện người con gái Nam Xương; dẫn vào truyện truyền kì.</a:t>
+              <a:t>Slide LỜI GIẢI – GV chốt sau khi HS trình bày. </a:t>
             </a:r>
           </a:p>
         </p:txBody>
@@ -750,7 +747,7 @@
           <a:lstStyle/>
           <a:p>
             <a:r>
-              <a:t>Bấm vào đường link hoặc quét mã QR để mở video (cần Internet). Video do học sinh chuyển thể; GV xem trước, chọn đoạn phù hợp.</a:t>
+              <a:t>Slide ĐỀ BÀI – cho HS suy nghĩ, thảo luận (không chiếu lời giải). </a:t>
             </a:r>
           </a:p>
         </p:txBody>
@@ -820,7 +817,7 @@
           <a:lstStyle/>
           <a:p>
             <a:r>
-              <a:t>Slide ĐỀ BÀI – cho HS suy nghĩ, thảo luận (không chiếu lời giải). </a:t>
+              <a:t>Slide LỜI GIẢI – GV chốt sau khi HS trình bày. </a:t>
             </a:r>
           </a:p>
         </p:txBody>
@@ -890,7 +887,7 @@
           <a:lstStyle/>
           <a:p>
             <a:r>
-              <a:t>Slide LỜI GIẢI – GV chốt sau khi HS trình bày. </a:t>
+              <a:t>Bấm vào đường link hoặc quét mã QR để mở video (cần Internet). </a:t>
             </a:r>
           </a:p>
         </p:txBody>
@@ -1450,7 +1447,7 @@
           <a:lstStyle/>
           <a:p>
             <a:r>
-              <a:t>Bấm vào đường link hoặc quét mã QR để mở video (cần Internet). Phim ngắn học sinh dựng; GV xem trước, chiếu đoạn cảnh cho chữ.</a:t>
+              <a:t>Slide ĐỀ BÀI – cho HS suy nghĩ, thảo luận (không chiếu lời giải). </a:t>
             </a:r>
           </a:p>
         </p:txBody>
@@ -1520,7 +1517,7 @@
           <a:lstStyle/>
           <a:p>
             <a:r>
-              <a:t>Slide ĐỀ BÀI – cho HS suy nghĩ, thảo luận (không chiếu lời giải). </a:t>
+              <a:t>Slide LỜI GIẢI – GV chốt sau khi HS trình bày. </a:t>
             </a:r>
           </a:p>
         </p:txBody>
@@ -1590,7 +1587,7 @@
           <a:lstStyle/>
           <a:p>
             <a:r>
-              <a:t>Slide LỜI GIẢI – GV chốt sau khi HS trình bày. </a:t>
+              <a:t>Slide ĐỀ BÀI – cho HS suy nghĩ, thảo luận (không chiếu lời giải). </a:t>
             </a:r>
           </a:p>
         </p:txBody>
@@ -1660,216 +1657,6 @@
           <a:lstStyle/>
           <a:p>
             <a:r>
-              <a:t>Slide ĐỀ BÀI – cho HS suy nghĩ, thảo luận (không chiếu lời giải). </a:t>
-            </a:r>
-          </a:p>
-        </p:txBody>
-      </p:sp>
-      <p:sp>
-        <p:nvSpPr>
-          <p:cNvPr id="4" name="Slide Number Placeholder 3"/>
-          <p:cNvSpPr>
-            <a:spLocks noGrp="1"/>
-          </p:cNvSpPr>
-          <p:nvPr>
-            <p:ph type="sldNum" idx="5" sz="quarter"/>
-          </p:nvPr>
-        </p:nvSpPr>
-        <p:spPr/>
-      </p:sp>
-    </p:spTree>
-  </p:cSld>
-  <p:clrMapOvr>
-    <a:masterClrMapping/>
-  </p:clrMapOvr>
-</p:notes>
-</file>
-
-<file path=ppt/notesSlides/notesSlide25.xml><?xml version="1.0" encoding="utf-8"?>
-<p:notes xmlns:a="http://schemas.openxmlformats.org/drawingml/2006/main" xmlns:p="http://schemas.openxmlformats.org/presentationml/2006/main" xmlns:r="http://schemas.openxmlformats.org/officeDocument/2006/relationships">
-  <p:cSld>
-    <p:spTree>
-      <p:nvGrpSpPr>
-        <p:cNvPr id="1" name=""/>
-        <p:cNvGrpSpPr/>
-        <p:nvPr/>
-      </p:nvGrpSpPr>
-      <p:grpSpPr>
-        <a:xfrm>
-          <a:off x="0" y="0"/>
-          <a:ext cx="0" cy="0"/>
-          <a:chOff x="0" y="0"/>
-          <a:chExt cx="0" cy="0"/>
-        </a:xfrm>
-      </p:grpSpPr>
-      <p:sp>
-        <p:nvSpPr>
-          <p:cNvPr id="2" name="Slide Image Placeholder 1"/>
-          <p:cNvSpPr>
-            <a:spLocks noGrp="1"/>
-          </p:cNvSpPr>
-          <p:nvPr>
-            <p:ph type="sldImg" idx="2"/>
-          </p:nvPr>
-        </p:nvSpPr>
-        <p:spPr/>
-      </p:sp>
-      <p:sp>
-        <p:nvSpPr>
-          <p:cNvPr id="3" name="Notes Placeholder 2"/>
-          <p:cNvSpPr>
-            <a:spLocks noGrp="1"/>
-          </p:cNvSpPr>
-          <p:nvPr>
-            <p:ph type="body" idx="3" sz="quarter"/>
-          </p:nvPr>
-        </p:nvSpPr>
-        <p:spPr/>
-        <p:txBody>
-          <a:bodyPr/>
-          <a:lstStyle/>
-          <a:p>
-            <a:r>
-              <a:t>Slide LỜI GIẢI – GV chốt sau khi HS trình bày. </a:t>
-            </a:r>
-          </a:p>
-        </p:txBody>
-      </p:sp>
-      <p:sp>
-        <p:nvSpPr>
-          <p:cNvPr id="4" name="Slide Number Placeholder 3"/>
-          <p:cNvSpPr>
-            <a:spLocks noGrp="1"/>
-          </p:cNvSpPr>
-          <p:nvPr>
-            <p:ph type="sldNum" idx="5" sz="quarter"/>
-          </p:nvPr>
-        </p:nvSpPr>
-        <p:spPr/>
-      </p:sp>
-    </p:spTree>
-  </p:cSld>
-  <p:clrMapOvr>
-    <a:masterClrMapping/>
-  </p:clrMapOvr>
-</p:notes>
-</file>
-
-<file path=ppt/notesSlides/notesSlide26.xml><?xml version="1.0" encoding="utf-8"?>
-<p:notes xmlns:a="http://schemas.openxmlformats.org/drawingml/2006/main" xmlns:p="http://schemas.openxmlformats.org/presentationml/2006/main" xmlns:r="http://schemas.openxmlformats.org/officeDocument/2006/relationships">
-  <p:cSld>
-    <p:spTree>
-      <p:nvGrpSpPr>
-        <p:cNvPr id="1" name=""/>
-        <p:cNvGrpSpPr/>
-        <p:nvPr/>
-      </p:nvGrpSpPr>
-      <p:grpSpPr>
-        <a:xfrm>
-          <a:off x="0" y="0"/>
-          <a:ext cx="0" cy="0"/>
-          <a:chOff x="0" y="0"/>
-          <a:chExt cx="0" cy="0"/>
-        </a:xfrm>
-      </p:grpSpPr>
-      <p:sp>
-        <p:nvSpPr>
-          <p:cNvPr id="2" name="Slide Image Placeholder 1"/>
-          <p:cNvSpPr>
-            <a:spLocks noGrp="1"/>
-          </p:cNvSpPr>
-          <p:nvPr>
-            <p:ph type="sldImg" idx="2"/>
-          </p:nvPr>
-        </p:nvSpPr>
-        <p:spPr/>
-      </p:sp>
-      <p:sp>
-        <p:nvSpPr>
-          <p:cNvPr id="3" name="Notes Placeholder 2"/>
-          <p:cNvSpPr>
-            <a:spLocks noGrp="1"/>
-          </p:cNvSpPr>
-          <p:nvPr>
-            <p:ph type="body" idx="3" sz="quarter"/>
-          </p:nvPr>
-        </p:nvSpPr>
-        <p:spPr/>
-        <p:txBody>
-          <a:bodyPr/>
-          <a:lstStyle/>
-          <a:p>
-            <a:r>
-              <a:t>Slide ĐỀ BÀI – cho HS suy nghĩ, thảo luận (không chiếu lời giải). </a:t>
-            </a:r>
-          </a:p>
-        </p:txBody>
-      </p:sp>
-      <p:sp>
-        <p:nvSpPr>
-          <p:cNvPr id="4" name="Slide Number Placeholder 3"/>
-          <p:cNvSpPr>
-            <a:spLocks noGrp="1"/>
-          </p:cNvSpPr>
-          <p:nvPr>
-            <p:ph type="sldNum" idx="5" sz="quarter"/>
-          </p:nvPr>
-        </p:nvSpPr>
-        <p:spPr/>
-      </p:sp>
-    </p:spTree>
-  </p:cSld>
-  <p:clrMapOvr>
-    <a:masterClrMapping/>
-  </p:clrMapOvr>
-</p:notes>
-</file>
-
-<file path=ppt/notesSlides/notesSlide27.xml><?xml version="1.0" encoding="utf-8"?>
-<p:notes xmlns:a="http://schemas.openxmlformats.org/drawingml/2006/main" xmlns:p="http://schemas.openxmlformats.org/presentationml/2006/main" xmlns:r="http://schemas.openxmlformats.org/officeDocument/2006/relationships">
-  <p:cSld>
-    <p:spTree>
-      <p:nvGrpSpPr>
-        <p:cNvPr id="1" name=""/>
-        <p:cNvGrpSpPr/>
-        <p:nvPr/>
-      </p:nvGrpSpPr>
-      <p:grpSpPr>
-        <a:xfrm>
-          <a:off x="0" y="0"/>
-          <a:ext cx="0" cy="0"/>
-          <a:chOff x="0" y="0"/>
-          <a:chExt cx="0" cy="0"/>
-        </a:xfrm>
-      </p:grpSpPr>
-      <p:sp>
-        <p:nvSpPr>
-          <p:cNvPr id="2" name="Slide Image Placeholder 1"/>
-          <p:cNvSpPr>
-            <a:spLocks noGrp="1"/>
-          </p:cNvSpPr>
-          <p:nvPr>
-            <p:ph type="sldImg" idx="2"/>
-          </p:nvPr>
-        </p:nvSpPr>
-        <p:spPr/>
-      </p:sp>
-      <p:sp>
-        <p:nvSpPr>
-          <p:cNvPr id="3" name="Notes Placeholder 2"/>
-          <p:cNvSpPr>
-            <a:spLocks noGrp="1"/>
-          </p:cNvSpPr>
-          <p:nvPr>
-            <p:ph type="body" idx="3" sz="quarter"/>
-          </p:nvPr>
-        </p:nvSpPr>
-        <p:spPr/>
-        <p:txBody>
-          <a:bodyPr/>
-          <a:lstStyle/>
-          <a:p>
-            <a:r>
               <a:t>Slide LỜI GIẢI – GV chốt sau khi HS trình bày. </a:t>
             </a:r>
           </a:p>
@@ -1940,7 +1727,7 @@
           <a:lstStyle/>
           <a:p>
             <a:r>
-              <a:t>Bấm vào đường link hoặc quét mã QR để mở video (cần Internet). </a:t>
+              <a:t>Slide ĐỀ BÀI – cho HS suy nghĩ, thảo luận (không chiếu lời giải). </a:t>
             </a:r>
           </a:p>
         </p:txBody>
@@ -2010,7 +1797,7 @@
           <a:lstStyle/>
           <a:p>
             <a:r>
-              <a:t>Bấm vào đường link hoặc quét mã QR để mở video (cần Internet). </a:t>
+              <a:t>Slide LỜI GIẢI – GV chốt sau khi HS trình bày. </a:t>
             </a:r>
           </a:p>
         </p:txBody>
@@ -2360,7 +2147,7 @@
           <a:lstStyle/>
           <a:p>
             <a:r>
-              <a:t>Slide ĐỀ BÀI – cho HS suy nghĩ, thảo luận (không chiếu lời giải). </a:t>
+              <a:t>Gợi Chuyện người con gái Nam Xương; dẫn vào truyện truyền kì.</a:t>
             </a:r>
           </a:p>
         </p:txBody>
@@ -5664,7 +5451,7 @@
                 </a:solidFill>
                 <a:latin typeface="Arial"/>
               </a:rPr>
-              <a:t>THẦN SÉT VÀ THẦN GIÓ</a:t>
+              <a:t>KHÁT VỌNG CỦA NGƯỜI XƯA</a:t>
             </a:r>
           </a:p>
         </p:txBody>
@@ -5782,7 +5569,7 @@
                 </a:solidFill>
                 <a:latin typeface="Calibri"/>
               </a:rPr>
-              <a:t>Hình dạng, tính khí, công việc của thần Sét và thần Gió có gì đặc biệt? Các chi tiết ấy lí giải hiện tượng nào?</a:t>
+              <a:t>Qua chùm truyện, người xưa thể hiện quan niệm, nhận thức và khát vọng gì về thế giới tự nhiên?</a:t>
             </a:r>
           </a:p>
         </p:txBody>
@@ -5869,7 +5656,7 @@
                 </a:solidFill>
                 <a:latin typeface="Calibri"/>
               </a:rPr>
-              <a:t>💡 Liên hệ đặc điểm của sấm sét, gió bão.</a:t>
+              <a:t>💡 Vì sao các vị thần đều vĩ đại, phi thường?</a:t>
             </a:r>
           </a:p>
         </p:txBody>
@@ -6026,7 +5813,7 @@
                 </a:solidFill>
                 <a:latin typeface="Arial"/>
               </a:rPr>
-              <a:t>THẦN SÉT VÀ THẦN GIÓ</a:t>
+              <a:t>KHÁT VỌNG CỦA NGƯỜI XƯA</a:t>
             </a:r>
           </a:p>
         </p:txBody>
@@ -6149,7 +5936,7 @@
                 </a:solidFill>
                 <a:latin typeface="Calibri"/>
               </a:rPr>
-              <a:t>Thần Sét: mặt mũi nanh ác, nóng nảy; lưỡi búa đá; thi hành luật pháp ở trần gian.</a:t>
+              <a:t>Tự nhiên bí ẩn → tạo các vị thần để lí giải.</a:t>
             </a:r>
           </a:p>
           <a:p>
@@ -6170,7 +5957,7 @@
                 </a:solidFill>
                 <a:latin typeface="Calibri"/>
               </a:rPr>
-              <a:t>Thần Gió: không có đầu, quạt màu nhiệm; tạo gió bão; con thần Gió hoá cây ngải gió.</a:t>
+              <a:t>Gửi gắm khát vọng khám phá, chinh phục tự nhiên.</a:t>
             </a:r>
           </a:p>
           <a:p>
@@ -6191,7 +5978,7 @@
                 </a:solidFill>
                 <a:latin typeface="Calibri"/>
               </a:rPr>
-              <a:t>Lí giải sấm sét, gió bão, tập tục bắt chước tiếng gà, kinh nghiệm dùng lá ngải.</a:t>
+              <a:t>Thái độ tôn kính, ngưỡng mộ, niềm tin.</a:t>
             </a:r>
           </a:p>
         </p:txBody>
@@ -6205,7 +5992,7 @@
         <p:spPr>
           <a:xfrm>
             <a:off x="731520" y="5074920"/>
-            <a:ext cx="10789920" cy="1188720"/>
+            <a:ext cx="10789920" cy="731520"/>
           </a:xfrm>
           <a:prstGeom prst="roundRect">
             <a:avLst>
@@ -6253,7 +6040,7 @@
         <p:spPr>
           <a:xfrm>
             <a:off x="914400" y="5074920"/>
-            <a:ext cx="10424160" cy="1188720"/>
+            <a:ext cx="10424160" cy="731520"/>
           </a:xfrm>
           <a:prstGeom prst="rect">
             <a:avLst/>
@@ -6278,7 +6065,7 @@
                 </a:solidFill>
                 <a:latin typeface="Calibri"/>
               </a:rPr>
-              <a:t>Nhân hoá tự nhiên thành các vị thần – thế giới quan “vạn vật hữu linh”.</a:t>
+              <a:t>Thần thoại – “vẻ đẹp một đi không trở lại”.</a:t>
             </a:r>
           </a:p>
         </p:txBody>
@@ -6297,7 +6084,7 @@
     <p:bg>
       <p:bgPr>
         <a:solidFill>
-          <a:srgbClr val="FFFFFF"/>
+          <a:srgbClr val="F8F9FA"/>
         </a:solidFill>
         <a:effectLst/>
       </p:bgPr>
@@ -6317,14 +6104,14 @@
         </p:nvSpPr>
         <p:spPr>
           <a:xfrm>
-            <a:off x="457200" y="384048"/>
-            <a:ext cx="109728" cy="658368"/>
+            <a:off x="548640" y="2926080"/>
+            <a:ext cx="164592" cy="1005840"/>
           </a:xfrm>
           <a:prstGeom prst="rect">
             <a:avLst/>
           </a:prstGeom>
           <a:solidFill>
-            <a:srgbClr val="1E40AF"/>
+            <a:srgbClr val="991B1B"/>
           </a:solidFill>
           <a:ln>
             <a:noFill/>
@@ -6355,67 +6142,14 @@
       </p:sp>
       <p:sp>
         <p:nvSpPr>
-          <p:cNvPr id="3" name="Rounded Rectangle 2"/>
-          <p:cNvSpPr/>
-          <p:nvPr/>
-        </p:nvSpPr>
-        <p:spPr>
-          <a:xfrm>
-            <a:off x="10253167" y="457200"/>
-            <a:ext cx="1389888" cy="457200"/>
-          </a:xfrm>
-          <a:prstGeom prst="roundRect">
-            <a:avLst/>
-          </a:prstGeom>
-          <a:solidFill>
-            <a:srgbClr val="1E40AF"/>
-          </a:solidFill>
-          <a:ln>
-            <a:noFill/>
-          </a:ln>
-          <a:effectLst/>
-        </p:spPr>
-        <p:style>
-          <a:lnRef idx="1">
-            <a:schemeClr val="accent1"/>
-          </a:lnRef>
-          <a:fillRef idx="3">
-            <a:schemeClr val="accent1"/>
-          </a:fillRef>
-          <a:effectRef idx="2">
-            <a:schemeClr val="accent1"/>
-          </a:effectRef>
-          <a:fontRef idx="minor">
-            <a:schemeClr val="lt1"/>
-          </a:fontRef>
-        </p:style>
-        <p:txBody>
-          <a:bodyPr rtlCol="0" anchor="ctr" wrap="none" tIns="0" bIns="0"/>
-          <a:lstStyle/>
-          <a:p>
-            <a:pPr algn="ctr"/>
-            <a:r>
-              <a:rPr sz="1400" b="1">
-                <a:solidFill>
-                  <a:srgbClr val="FFFFFF"/>
-                </a:solidFill>
-                <a:latin typeface="Arial"/>
-              </a:rPr>
-              <a:t>ĐỀ BÀI</a:t>
-            </a:r>
-          </a:p>
-        </p:txBody>
-      </p:sp>
-      <p:sp>
-        <p:nvSpPr>
-          <p:cNvPr id="4" name="TextBox 3"/>
+          <p:cNvPr id="3" name="TextBox 2"/>
           <p:cNvSpPr txBox="1"/>
           <p:nvPr/>
         </p:nvSpPr>
         <p:spPr>
           <a:xfrm>
-            <a:off x="731520" y="274320"/>
-            <a:ext cx="9582912" cy="868680"/>
+            <a:off x="914400" y="2743200"/>
+            <a:ext cx="10515600" cy="1371600"/>
           </a:xfrm>
           <a:prstGeom prst="rect">
             <a:avLst/>
@@ -6423,120 +6157,7 @@
           <a:noFill/>
         </p:spPr>
         <p:txBody>
-          <a:bodyPr wrap="square" anchor="ctr">
-            <a:spAutoFit/>
-          </a:bodyPr>
-          <a:lstStyle/>
-          <a:p>
-            <a:r>
-              <a:rPr sz="3600" b="1">
-                <a:solidFill>
-                  <a:srgbClr val="1E40AF"/>
-                </a:solidFill>
-                <a:latin typeface="Arial"/>
-              </a:rPr>
-              <a:t>KHÁT VỌNG CỦA NGƯỜI XƯA</a:t>
-            </a:r>
-          </a:p>
-        </p:txBody>
-      </p:sp>
-      <p:sp>
-        <p:nvSpPr>
-          <p:cNvPr id="5" name="Rectangle 4"/>
-          <p:cNvSpPr/>
-          <p:nvPr/>
-        </p:nvSpPr>
-        <p:spPr>
-          <a:xfrm>
-            <a:off x="457200" y="1207008"/>
-            <a:ext cx="11274552" cy="22000"/>
-          </a:xfrm>
-          <a:prstGeom prst="rect">
-            <a:avLst/>
-          </a:prstGeom>
-          <a:solidFill>
-            <a:srgbClr val="E2E8F0"/>
-          </a:solidFill>
-          <a:ln>
-            <a:noFill/>
-          </a:ln>
-          <a:effectLst/>
-        </p:spPr>
-        <p:style>
-          <a:lnRef idx="1">
-            <a:schemeClr val="accent1"/>
-          </a:lnRef>
-          <a:fillRef idx="3">
-            <a:schemeClr val="accent1"/>
-          </a:fillRef>
-          <a:effectRef idx="2">
-            <a:schemeClr val="accent1"/>
-          </a:effectRef>
-          <a:fontRef idx="minor">
-            <a:schemeClr val="lt1"/>
-          </a:fontRef>
-        </p:style>
-        <p:txBody>
-          <a:bodyPr rtlCol="0" anchor="ctr"/>
-          <a:lstStyle/>
-          <a:p>
-            <a:pPr algn="ctr"/>
-          </a:p>
-        </p:txBody>
-      </p:sp>
-      <p:sp>
-        <p:nvSpPr>
-          <p:cNvPr id="6" name="TextBox 5"/>
-          <p:cNvSpPr txBox="1"/>
-          <p:nvPr/>
-        </p:nvSpPr>
-        <p:spPr>
-          <a:xfrm>
-            <a:off x="457200" y="6355080"/>
-            <a:ext cx="11274552" cy="365760"/>
-          </a:xfrm>
-          <a:prstGeom prst="rect">
-            <a:avLst/>
-          </a:prstGeom>
-          <a:noFill/>
-        </p:spPr>
-        <p:txBody>
-          <a:bodyPr wrap="none">
-            <a:spAutoFit/>
-          </a:bodyPr>
-          <a:lstStyle/>
-          <a:p>
-            <a:pPr algn="r"/>
-            <a:r>
-              <a:rPr sz="1200">
-                <a:solidFill>
-                  <a:srgbClr val="64748B"/>
-                </a:solidFill>
-                <a:latin typeface="Calibri"/>
-              </a:rPr>
-              <a:t>Ngữ văn 10 · Bài 1: Sức Hấp Dẫn Của Truyện Kể          12</a:t>
-            </a:r>
-          </a:p>
-        </p:txBody>
-      </p:sp>
-      <p:sp>
-        <p:nvSpPr>
-          <p:cNvPr id="7" name="TextBox 6"/>
-          <p:cNvSpPr txBox="1"/>
-          <p:nvPr/>
-        </p:nvSpPr>
-        <p:spPr>
-          <a:xfrm>
-            <a:off x="731520" y="1463040"/>
-            <a:ext cx="10789920" cy="3566160"/>
-          </a:xfrm>
-          <a:prstGeom prst="rect">
-            <a:avLst/>
-          </a:prstGeom>
-          <a:noFill/>
-        </p:spPr>
-        <p:txBody>
-          <a:bodyPr wrap="square" anchor="t" lIns="45720" rIns="45720">
+          <a:bodyPr wrap="square" anchor="ctr" lIns="45720" rIns="45720">
             <a:spAutoFit/>
           </a:bodyPr>
           <a:lstStyle/>
@@ -6547,100 +6168,13 @@
               </a:spcAft>
             </a:pPr>
             <a:r>
-              <a:rPr sz="2600" b="1">
-                <a:solidFill>
-                  <a:srgbClr val="1E293B"/>
+              <a:rPr sz="3600" b="1">
+                <a:solidFill>
+                  <a:srgbClr val="1E40AF"/>
                 </a:solidFill>
                 <a:latin typeface="Calibri"/>
               </a:rPr>
-              <a:t>Qua chùm truyện, người xưa thể hiện quan niệm, nhận thức và khát vọng gì về thế giới tự nhiên?</a:t>
-            </a:r>
-          </a:p>
-        </p:txBody>
-      </p:sp>
-      <p:sp>
-        <p:nvSpPr>
-          <p:cNvPr id="8" name="Rounded Rectangle 7"/>
-          <p:cNvSpPr/>
-          <p:nvPr/>
-        </p:nvSpPr>
-        <p:spPr>
-          <a:xfrm>
-            <a:off x="731520" y="5120640"/>
-            <a:ext cx="10789920" cy="693420"/>
-          </a:xfrm>
-          <a:prstGeom prst="roundRect">
-            <a:avLst>
-              <a:gd name="adj" fmla="val 8000"/>
-            </a:avLst>
-          </a:prstGeom>
-          <a:solidFill>
-            <a:srgbClr val="EFF4FF"/>
-          </a:solidFill>
-          <a:ln w="19050">
-            <a:solidFill>
-              <a:srgbClr val="1E40AF"/>
-            </a:solidFill>
-          </a:ln>
-          <a:effectLst/>
-        </p:spPr>
-        <p:style>
-          <a:lnRef idx="1">
-            <a:schemeClr val="accent1"/>
-          </a:lnRef>
-          <a:fillRef idx="3">
-            <a:schemeClr val="accent1"/>
-          </a:fillRef>
-          <a:effectRef idx="2">
-            <a:schemeClr val="accent1"/>
-          </a:effectRef>
-          <a:fontRef idx="minor">
-            <a:schemeClr val="lt1"/>
-          </a:fontRef>
-        </p:style>
-        <p:txBody>
-          <a:bodyPr rtlCol="0" anchor="ctr"/>
-          <a:lstStyle/>
-          <a:p>
-            <a:pPr algn="ctr"/>
-          </a:p>
-        </p:txBody>
-      </p:sp>
-      <p:sp>
-        <p:nvSpPr>
-          <p:cNvPr id="9" name="TextBox 8"/>
-          <p:cNvSpPr txBox="1"/>
-          <p:nvPr/>
-        </p:nvSpPr>
-        <p:spPr>
-          <a:xfrm>
-            <a:off x="914400" y="5120640"/>
-            <a:ext cx="10424160" cy="693420"/>
-          </a:xfrm>
-          <a:prstGeom prst="rect">
-            <a:avLst/>
-          </a:prstGeom>
-          <a:noFill/>
-        </p:spPr>
-        <p:txBody>
-          <a:bodyPr wrap="square" anchor="ctr" lIns="45720" rIns="45720">
-            <a:spAutoFit/>
-          </a:bodyPr>
-          <a:lstStyle/>
-          <a:p>
-            <a:pPr algn="l">
-              <a:spcAft>
-                <a:spcPts val="400"/>
-              </a:spcAft>
-            </a:pPr>
-            <a:r>
-              <a:rPr sz="2200" b="1">
-                <a:solidFill>
-                  <a:srgbClr val="1E40AF"/>
-                </a:solidFill>
-                <a:latin typeface="Calibri"/>
-              </a:rPr>
-              <a:t>💡 Vì sao các vị thần đều vĩ đại, phi thường?</a:t>
+              <a:t>TIẾT 3 – 4: CHUYỆN CHỨC PHÁN SỰ ĐỀN TẢN VIÊN (Nguyễn Dữ)</a:t>
             </a:r>
           </a:p>
         </p:txBody>
@@ -6723,14 +6257,14 @@
         </p:nvSpPr>
         <p:spPr>
           <a:xfrm>
-            <a:off x="9942271" y="457200"/>
-            <a:ext cx="1700784" cy="457200"/>
+            <a:off x="9786823" y="457200"/>
+            <a:ext cx="1856232" cy="457200"/>
           </a:xfrm>
           <a:prstGeom prst="roundRect">
             <a:avLst/>
           </a:prstGeom>
           <a:solidFill>
-            <a:srgbClr val="991B1B"/>
+            <a:srgbClr val="1E40AF"/>
           </a:solidFill>
           <a:ln>
             <a:noFill/>
@@ -6763,7 +6297,7 @@
                 </a:solidFill>
                 <a:latin typeface="Arial"/>
               </a:rPr>
-              <a:t>LỜI GIẢI</a:t>
+              <a:t>KHỞI ĐỘNG</a:t>
             </a:r>
           </a:p>
         </p:txBody>
@@ -6777,7 +6311,7 @@
         <p:spPr>
           <a:xfrm>
             <a:off x="731520" y="274320"/>
-            <a:ext cx="9272016" cy="868680"/>
+            <a:ext cx="9116568" cy="868680"/>
           </a:xfrm>
           <a:prstGeom prst="rect">
             <a:avLst/>
@@ -6797,7 +6331,7 @@
                 </a:solidFill>
                 <a:latin typeface="Arial"/>
               </a:rPr>
-              <a:t>KHÁT VỌNG CỦA NGƯỜI XƯA</a:t>
+              <a:t>KHỞI ĐỘNG</a:t>
             </a:r>
           </a:p>
         </p:txBody>
@@ -6890,7 +6424,7 @@
         <p:spPr>
           <a:xfrm>
             <a:off x="731520" y="1463040"/>
-            <a:ext cx="10789920" cy="3474720"/>
+            <a:ext cx="10789920" cy="4572000"/>
           </a:xfrm>
           <a:prstGeom prst="rect">
             <a:avLst/>
@@ -6903,153 +6437,35 @@
           </a:bodyPr>
           <a:lstStyle/>
           <a:p>
-            <a:pPr algn="l" marL="365760" indent="-365760">
+            <a:pPr algn="l">
               <a:spcAft>
                 <a:spcPts val="800"/>
               </a:spcAft>
-              <a:buClr>
-                <a:srgbClr val="1E40AF"/>
-              </a:buClr>
-              <a:buFont typeface="Arial"/>
-              <a:buChar char="•"/>
             </a:pPr>
             <a:r>
-              <a:rPr sz="2300">
+              <a:rPr sz="2600" b="1">
                 <a:solidFill>
                   <a:srgbClr val="1E293B"/>
                 </a:solidFill>
                 <a:latin typeface="Calibri"/>
               </a:rPr>
-              <a:t>Tự nhiên bí ẩn → tạo các vị thần để lí giải.</a:t>
-            </a:r>
-          </a:p>
-          <a:p>
-            <a:pPr algn="l" marL="365760" indent="-365760">
+              <a:t>Hình ảnh gợi em nhớ đến tác phẩm nào của Nguyễn Dữ đã học ở THCS?</a:t>
+            </a:r>
+          </a:p>
+          <a:p>
+            <a:pPr algn="l">
               <a:spcAft>
                 <a:spcPts val="800"/>
               </a:spcAft>
-              <a:buClr>
-                <a:srgbClr val="1E40AF"/>
-              </a:buClr>
-              <a:buFont typeface="Arial"/>
-              <a:buChar char="•"/>
             </a:pPr>
             <a:r>
-              <a:rPr sz="2300">
+              <a:rPr sz="2600" b="1">
                 <a:solidFill>
                   <a:srgbClr val="1E293B"/>
                 </a:solidFill>
                 <a:latin typeface="Calibri"/>
               </a:rPr>
-              <a:t>Gửi gắm khát vọng khám phá, chinh phục tự nhiên.</a:t>
-            </a:r>
-          </a:p>
-          <a:p>
-            <a:pPr algn="l" marL="365760" indent="-365760">
-              <a:spcAft>
-                <a:spcPts val="800"/>
-              </a:spcAft>
-              <a:buClr>
-                <a:srgbClr val="1E40AF"/>
-              </a:buClr>
-              <a:buFont typeface="Arial"/>
-              <a:buChar char="•"/>
-            </a:pPr>
-            <a:r>
-              <a:rPr sz="2300">
-                <a:solidFill>
-                  <a:srgbClr val="1E293B"/>
-                </a:solidFill>
-                <a:latin typeface="Calibri"/>
-              </a:rPr>
-              <a:t>Thái độ tôn kính, ngưỡng mộ, niềm tin.</a:t>
-            </a:r>
-          </a:p>
-        </p:txBody>
-      </p:sp>
-      <p:sp>
-        <p:nvSpPr>
-          <p:cNvPr id="8" name="Rounded Rectangle 7"/>
-          <p:cNvSpPr/>
-          <p:nvPr/>
-        </p:nvSpPr>
-        <p:spPr>
-          <a:xfrm>
-            <a:off x="731520" y="5074920"/>
-            <a:ext cx="10789920" cy="731520"/>
-          </a:xfrm>
-          <a:prstGeom prst="roundRect">
-            <a:avLst>
-              <a:gd name="adj" fmla="val 8000"/>
-            </a:avLst>
-          </a:prstGeom>
-          <a:solidFill>
-            <a:srgbClr val="FEF2F2"/>
-          </a:solidFill>
-          <a:ln w="19050">
-            <a:solidFill>
-              <a:srgbClr val="991B1B"/>
-            </a:solidFill>
-          </a:ln>
-          <a:effectLst/>
-        </p:spPr>
-        <p:style>
-          <a:lnRef idx="1">
-            <a:schemeClr val="accent1"/>
-          </a:lnRef>
-          <a:fillRef idx="3">
-            <a:schemeClr val="accent1"/>
-          </a:fillRef>
-          <a:effectRef idx="2">
-            <a:schemeClr val="accent1"/>
-          </a:effectRef>
-          <a:fontRef idx="minor">
-            <a:schemeClr val="lt1"/>
-          </a:fontRef>
-        </p:style>
-        <p:txBody>
-          <a:bodyPr rtlCol="0" anchor="ctr"/>
-          <a:lstStyle/>
-          <a:p>
-            <a:pPr algn="ctr"/>
-          </a:p>
-        </p:txBody>
-      </p:sp>
-      <p:sp>
-        <p:nvSpPr>
-          <p:cNvPr id="9" name="TextBox 8"/>
-          <p:cNvSpPr txBox="1"/>
-          <p:nvPr/>
-        </p:nvSpPr>
-        <p:spPr>
-          <a:xfrm>
-            <a:off x="914400" y="5074920"/>
-            <a:ext cx="10424160" cy="731520"/>
-          </a:xfrm>
-          <a:prstGeom prst="rect">
-            <a:avLst/>
-          </a:prstGeom>
-          <a:noFill/>
-        </p:spPr>
-        <p:txBody>
-          <a:bodyPr wrap="square" anchor="ctr" lIns="45720" rIns="45720">
-            <a:spAutoFit/>
-          </a:bodyPr>
-          <a:lstStyle/>
-          <a:p>
-            <a:pPr algn="l">
-              <a:spcAft>
-                <a:spcPts val="400"/>
-              </a:spcAft>
-            </a:pPr>
-            <a:r>
-              <a:rPr sz="2400" b="1">
-                <a:solidFill>
-                  <a:srgbClr val="991B1B"/>
-                </a:solidFill>
-                <a:latin typeface="Calibri"/>
-              </a:rPr>
-              <a:t>Thần thoại – “vẻ đẹp một đi không trở lại”.</a:t>
+              <a:t>Trong tác phẩm ấy có chi tiết kì ảo nào?</a:t>
             </a:r>
           </a:p>
         </p:txBody>
@@ -7068,7 +6484,7 @@
     <p:bg>
       <p:bgPr>
         <a:solidFill>
-          <a:srgbClr val="F8F9FA"/>
+          <a:srgbClr val="FFFFFF"/>
         </a:solidFill>
         <a:effectLst/>
       </p:bgPr>
@@ -7088,14 +6504,14 @@
         </p:nvSpPr>
         <p:spPr>
           <a:xfrm>
-            <a:off x="548640" y="2926080"/>
-            <a:ext cx="164592" cy="1005840"/>
+            <a:off x="457200" y="384048"/>
+            <a:ext cx="109728" cy="658368"/>
           </a:xfrm>
           <a:prstGeom prst="rect">
             <a:avLst/>
           </a:prstGeom>
           <a:solidFill>
-            <a:srgbClr val="991B1B"/>
+            <a:srgbClr val="1E40AF"/>
           </a:solidFill>
           <a:ln>
             <a:noFill/>
@@ -7126,14 +6542,67 @@
       </p:sp>
       <p:sp>
         <p:nvSpPr>
-          <p:cNvPr id="3" name="TextBox 2"/>
+          <p:cNvPr id="3" name="Rounded Rectangle 2"/>
+          <p:cNvSpPr/>
+          <p:nvPr/>
+        </p:nvSpPr>
+        <p:spPr>
+          <a:xfrm>
+            <a:off x="10097719" y="457200"/>
+            <a:ext cx="1545336" cy="457200"/>
+          </a:xfrm>
+          <a:prstGeom prst="roundRect">
+            <a:avLst/>
+          </a:prstGeom>
+          <a:solidFill>
+            <a:srgbClr val="166534"/>
+          </a:solidFill>
+          <a:ln>
+            <a:noFill/>
+          </a:ln>
+          <a:effectLst/>
+        </p:spPr>
+        <p:style>
+          <a:lnRef idx="1">
+            <a:schemeClr val="accent1"/>
+          </a:lnRef>
+          <a:fillRef idx="3">
+            <a:schemeClr val="accent1"/>
+          </a:fillRef>
+          <a:effectRef idx="2">
+            <a:schemeClr val="accent1"/>
+          </a:effectRef>
+          <a:fontRef idx="minor">
+            <a:schemeClr val="lt1"/>
+          </a:fontRef>
+        </p:style>
+        <p:txBody>
+          <a:bodyPr rtlCol="0" anchor="ctr" wrap="none" tIns="0" bIns="0"/>
+          <a:lstStyle/>
+          <a:p>
+            <a:pPr algn="ctr"/>
+            <a:r>
+              <a:rPr sz="1400" b="1">
+                <a:solidFill>
+                  <a:srgbClr val="FFFFFF"/>
+                </a:solidFill>
+                <a:latin typeface="Arial"/>
+              </a:rPr>
+              <a:t>GHI NHỚ</a:t>
+            </a:r>
+          </a:p>
+        </p:txBody>
+      </p:sp>
+      <p:sp>
+        <p:nvSpPr>
+          <p:cNvPr id="4" name="TextBox 3"/>
           <p:cNvSpPr txBox="1"/>
           <p:nvPr/>
         </p:nvSpPr>
         <p:spPr>
           <a:xfrm>
-            <a:off x="914400" y="2743200"/>
-            <a:ext cx="10515600" cy="1371600"/>
+            <a:off x="731520" y="274320"/>
+            <a:ext cx="9427464" cy="868680"/>
           </a:xfrm>
           <a:prstGeom prst="rect">
             <a:avLst/>
@@ -7141,24 +6610,184 @@
           <a:noFill/>
         </p:spPr>
         <p:txBody>
-          <a:bodyPr wrap="square" anchor="ctr" lIns="45720" rIns="45720">
+          <a:bodyPr wrap="square" anchor="ctr">
             <a:spAutoFit/>
           </a:bodyPr>
           <a:lstStyle/>
           <a:p>
-            <a:pPr algn="l">
+            <a:r>
+              <a:rPr sz="3600" b="1">
+                <a:solidFill>
+                  <a:srgbClr val="1E40AF"/>
+                </a:solidFill>
+                <a:latin typeface="Arial"/>
+              </a:rPr>
+              <a:t>TRUYỆN TRUYỀN KÌ</a:t>
+            </a:r>
+          </a:p>
+        </p:txBody>
+      </p:sp>
+      <p:sp>
+        <p:nvSpPr>
+          <p:cNvPr id="5" name="Rectangle 4"/>
+          <p:cNvSpPr/>
+          <p:nvPr/>
+        </p:nvSpPr>
+        <p:spPr>
+          <a:xfrm>
+            <a:off x="457200" y="1207008"/>
+            <a:ext cx="11274552" cy="22000"/>
+          </a:xfrm>
+          <a:prstGeom prst="rect">
+            <a:avLst/>
+          </a:prstGeom>
+          <a:solidFill>
+            <a:srgbClr val="E2E8F0"/>
+          </a:solidFill>
+          <a:ln>
+            <a:noFill/>
+          </a:ln>
+          <a:effectLst/>
+        </p:spPr>
+        <p:style>
+          <a:lnRef idx="1">
+            <a:schemeClr val="accent1"/>
+          </a:lnRef>
+          <a:fillRef idx="3">
+            <a:schemeClr val="accent1"/>
+          </a:fillRef>
+          <a:effectRef idx="2">
+            <a:schemeClr val="accent1"/>
+          </a:effectRef>
+          <a:fontRef idx="minor">
+            <a:schemeClr val="lt1"/>
+          </a:fontRef>
+        </p:style>
+        <p:txBody>
+          <a:bodyPr rtlCol="0" anchor="ctr"/>
+          <a:lstStyle/>
+          <a:p>
+            <a:pPr algn="ctr"/>
+          </a:p>
+        </p:txBody>
+      </p:sp>
+      <p:sp>
+        <p:nvSpPr>
+          <p:cNvPr id="6" name="TextBox 5"/>
+          <p:cNvSpPr txBox="1"/>
+          <p:nvPr/>
+        </p:nvSpPr>
+        <p:spPr>
+          <a:xfrm>
+            <a:off x="457200" y="6355080"/>
+            <a:ext cx="11274552" cy="365760"/>
+          </a:xfrm>
+          <a:prstGeom prst="rect">
+            <a:avLst/>
+          </a:prstGeom>
+          <a:noFill/>
+        </p:spPr>
+        <p:txBody>
+          <a:bodyPr wrap="none">
+            <a:spAutoFit/>
+          </a:bodyPr>
+          <a:lstStyle/>
+          <a:p>
+            <a:pPr algn="r"/>
+            <a:r>
+              <a:rPr sz="1200">
+                <a:solidFill>
+                  <a:srgbClr val="64748B"/>
+                </a:solidFill>
+                <a:latin typeface="Calibri"/>
+              </a:rPr>
+              <a:t>Ngữ văn 10 · Bài 1: Sức Hấp Dẫn Của Truyện Kể          14</a:t>
+            </a:r>
+          </a:p>
+        </p:txBody>
+      </p:sp>
+      <p:sp>
+        <p:nvSpPr>
+          <p:cNvPr id="7" name="TextBox 6"/>
+          <p:cNvSpPr txBox="1"/>
+          <p:nvPr/>
+        </p:nvSpPr>
+        <p:spPr>
+          <a:xfrm>
+            <a:off x="731520" y="1463040"/>
+            <a:ext cx="10789920" cy="4754880"/>
+          </a:xfrm>
+          <a:prstGeom prst="rect">
+            <a:avLst/>
+          </a:prstGeom>
+          <a:noFill/>
+        </p:spPr>
+        <p:txBody>
+          <a:bodyPr wrap="square" anchor="t" lIns="45720" rIns="45720">
+            <a:spAutoFit/>
+          </a:bodyPr>
+          <a:lstStyle/>
+          <a:p>
+            <a:pPr algn="l" marL="365760" indent="-365760">
               <a:spcAft>
                 <a:spcPts val="800"/>
               </a:spcAft>
+              <a:buClr>
+                <a:srgbClr val="1E40AF"/>
+              </a:buClr>
+              <a:buFont typeface="Arial"/>
+              <a:buChar char="•"/>
             </a:pPr>
             <a:r>
-              <a:rPr sz="3600" b="1">
-                <a:solidFill>
-                  <a:srgbClr val="1E40AF"/>
+              <a:rPr sz="2400">
+                <a:solidFill>
+                  <a:srgbClr val="1E293B"/>
                 </a:solidFill>
                 <a:latin typeface="Calibri"/>
               </a:rPr>
-              <a:t>TIẾT 3 – 4: CHUYỆN CHỨC PHÁN SỰ ĐỀN TẢN VIÊN (Nguyễn Dữ)</a:t>
+              <a:t>Thể văn xuôi tự sự thời trung đại, phản ánh hiện thực qua yếu tố hoang đường, kì ảo.</a:t>
+            </a:r>
+          </a:p>
+          <a:p>
+            <a:pPr algn="l" marL="365760" indent="-365760">
+              <a:spcAft>
+                <a:spcPts val="800"/>
+              </a:spcAft>
+              <a:buClr>
+                <a:srgbClr val="1E40AF"/>
+              </a:buClr>
+              <a:buFont typeface="Arial"/>
+              <a:buChar char="•"/>
+            </a:pPr>
+            <a:r>
+              <a:rPr sz="2400">
+                <a:solidFill>
+                  <a:srgbClr val="1E293B"/>
+                </a:solidFill>
+                <a:latin typeface="Calibri"/>
+              </a:rPr>
+              <a:t>Thế giới người và cõi âm có sự giao thoa.</a:t>
+            </a:r>
+          </a:p>
+          <a:p>
+            <a:pPr algn="l" marL="365760" indent="-365760">
+              <a:spcAft>
+                <a:spcPts val="800"/>
+              </a:spcAft>
+              <a:buClr>
+                <a:srgbClr val="1E40AF"/>
+              </a:buClr>
+              <a:buFont typeface="Arial"/>
+              <a:buChar char="•"/>
+            </a:pPr>
+            <a:r>
+              <a:rPr sz="2400">
+                <a:solidFill>
+                  <a:srgbClr val="1E293B"/>
+                </a:solidFill>
+                <a:latin typeface="Calibri"/>
+              </a:rPr>
+              <a:t>Nguyễn Dữ (thế kỉ XVI), học trò Nguyễn Bỉnh Khiêm; tác phẩm Truyền kì mạn lục – “thiên cổ kì bút”.</a:t>
             </a:r>
           </a:p>
         </p:txBody>
@@ -7241,8 +6870,8 @@
         </p:nvSpPr>
         <p:spPr>
           <a:xfrm>
-            <a:off x="9786823" y="457200"/>
-            <a:ext cx="1856232" cy="457200"/>
+            <a:off x="10253167" y="457200"/>
+            <a:ext cx="1389888" cy="457200"/>
           </a:xfrm>
           <a:prstGeom prst="roundRect">
             <a:avLst/>
@@ -7281,7 +6910,7 @@
                 </a:solidFill>
                 <a:latin typeface="Arial"/>
               </a:rPr>
-              <a:t>KHỞI ĐỘNG</a:t>
+              <a:t>ĐỀ BÀI</a:t>
             </a:r>
           </a:p>
         </p:txBody>
@@ -7295,7 +6924,7 @@
         <p:spPr>
           <a:xfrm>
             <a:off x="731520" y="274320"/>
-            <a:ext cx="9116568" cy="868680"/>
+            <a:ext cx="9582912" cy="868680"/>
           </a:xfrm>
           <a:prstGeom prst="rect">
             <a:avLst/>
@@ -7315,7 +6944,7 @@
                 </a:solidFill>
                 <a:latin typeface="Arial"/>
               </a:rPr>
-              <a:t>KHỞI ĐỘNG</a:t>
+              <a:t>NHÂN VẬT NGÔ TỬ VĂN</a:t>
             </a:r>
           </a:p>
         </p:txBody>
@@ -7408,7 +7037,7 @@
         <p:spPr>
           <a:xfrm>
             <a:off x="731520" y="1463040"/>
-            <a:ext cx="10789920" cy="4572000"/>
+            <a:ext cx="10789920" cy="3566160"/>
           </a:xfrm>
           <a:prstGeom prst="rect">
             <a:avLst/>
@@ -7433,23 +7062,94 @@
                 </a:solidFill>
                 <a:latin typeface="Calibri"/>
               </a:rPr>
-              <a:t>Hình ảnh gợi em nhớ đến tác phẩm nào của Nguyễn Dữ đã học ở THCS?</a:t>
-            </a:r>
-          </a:p>
+              <a:t>Đoạn mở đầu giới thiệu và nhấn mạnh nét tính cách nào ở Tử Văn? Tính cách ấy được khắc hoạ qua những chi tiết nào?</a:t>
+            </a:r>
+          </a:p>
+        </p:txBody>
+      </p:sp>
+      <p:sp>
+        <p:nvSpPr>
+          <p:cNvPr id="8" name="Rounded Rectangle 7"/>
+          <p:cNvSpPr/>
+          <p:nvPr/>
+        </p:nvSpPr>
+        <p:spPr>
+          <a:xfrm>
+            <a:off x="731520" y="5120640"/>
+            <a:ext cx="10789920" cy="693420"/>
+          </a:xfrm>
+          <a:prstGeom prst="roundRect">
+            <a:avLst>
+              <a:gd name="adj" fmla="val 8000"/>
+            </a:avLst>
+          </a:prstGeom>
+          <a:solidFill>
+            <a:srgbClr val="EFF4FF"/>
+          </a:solidFill>
+          <a:ln w="19050">
+            <a:solidFill>
+              <a:srgbClr val="1E40AF"/>
+            </a:solidFill>
+          </a:ln>
+          <a:effectLst/>
+        </p:spPr>
+        <p:style>
+          <a:lnRef idx="1">
+            <a:schemeClr val="accent1"/>
+          </a:lnRef>
+          <a:fillRef idx="3">
+            <a:schemeClr val="accent1"/>
+          </a:fillRef>
+          <a:effectRef idx="2">
+            <a:schemeClr val="accent1"/>
+          </a:effectRef>
+          <a:fontRef idx="minor">
+            <a:schemeClr val="lt1"/>
+          </a:fontRef>
+        </p:style>
+        <p:txBody>
+          <a:bodyPr rtlCol="0" anchor="ctr"/>
+          <a:lstStyle/>
+          <a:p>
+            <a:pPr algn="ctr"/>
+          </a:p>
+        </p:txBody>
+      </p:sp>
+      <p:sp>
+        <p:nvSpPr>
+          <p:cNvPr id="9" name="TextBox 8"/>
+          <p:cNvSpPr txBox="1"/>
+          <p:nvPr/>
+        </p:nvSpPr>
+        <p:spPr>
+          <a:xfrm>
+            <a:off x="914400" y="5120640"/>
+            <a:ext cx="10424160" cy="693420"/>
+          </a:xfrm>
+          <a:prstGeom prst="rect">
+            <a:avLst/>
+          </a:prstGeom>
+          <a:noFill/>
+        </p:spPr>
+        <p:txBody>
+          <a:bodyPr wrap="square" anchor="ctr" lIns="45720" rIns="45720">
+            <a:spAutoFit/>
+          </a:bodyPr>
+          <a:lstStyle/>
           <a:p>
             <a:pPr algn="l">
               <a:spcAft>
-                <a:spcPts val="800"/>
+                <a:spcPts val="400"/>
               </a:spcAft>
             </a:pPr>
             <a:r>
-              <a:rPr sz="2600" b="1">
-                <a:solidFill>
-                  <a:srgbClr val="1E293B"/>
+              <a:rPr sz="2200" b="1">
+                <a:solidFill>
+                  <a:srgbClr val="1E40AF"/>
                 </a:solidFill>
                 <a:latin typeface="Calibri"/>
               </a:rPr>
-              <a:t>Trong tác phẩm ấy có chi tiết kì ảo nào?</a:t>
+              <a:t>💡 Chú ý hành động đốt đền và thái độ trước quỷ, Diêm Vương.</a:t>
             </a:r>
           </a:p>
         </p:txBody>
@@ -7532,8 +7232,8 @@
         </p:nvSpPr>
         <p:spPr>
           <a:xfrm>
-            <a:off x="10408615" y="457200"/>
-            <a:ext cx="1234440" cy="457200"/>
+            <a:off x="9942271" y="457200"/>
+            <a:ext cx="1700784" cy="457200"/>
           </a:xfrm>
           <a:prstGeom prst="roundRect">
             <a:avLst/>
@@ -7572,7 +7272,7 @@
                 </a:solidFill>
                 <a:latin typeface="Arial"/>
               </a:rPr>
-              <a:t>VIDEO</a:t>
+              <a:t>LỜI GIẢI</a:t>
             </a:r>
           </a:p>
         </p:txBody>
@@ -7586,7 +7286,7 @@
         <p:spPr>
           <a:xfrm>
             <a:off x="731520" y="274320"/>
-            <a:ext cx="9738360" cy="868680"/>
+            <a:ext cx="9272016" cy="868680"/>
           </a:xfrm>
           <a:prstGeom prst="rect">
             <a:avLst/>
@@ -7606,7 +7306,7 @@
                 </a:solidFill>
                 <a:latin typeface="Arial"/>
               </a:rPr>
-              <a:t>VIDEO THAM KHẢO</a:t>
+              <a:t>NHÂN VẬT NGÔ TỬ VĂN</a:t>
             </a:r>
           </a:p>
         </p:txBody>
@@ -7690,40 +7390,16 @@
           </a:p>
         </p:txBody>
       </p:sp>
-      <p:pic>
-        <p:nvPicPr>
-          <p:cNvPr id="7" name="Picture 6" descr="QR_video_4lhy4C12iXg.png"/>
-          <p:cNvPicPr>
-            <a:picLocks noChangeAspect="1"/>
-          </p:cNvPicPr>
-          <p:nvPr/>
-        </p:nvPicPr>
-        <p:blipFill>
-          <a:blip r:embed="rId2"/>
-          <a:stretch>
-            <a:fillRect/>
-          </a:stretch>
-        </p:blipFill>
-        <p:spPr>
-          <a:xfrm>
-            <a:off x="8412480" y="1554480"/>
-            <a:ext cx="3108960" cy="3108960"/>
-          </a:xfrm>
-          <a:prstGeom prst="rect">
-            <a:avLst/>
-          </a:prstGeom>
-        </p:spPr>
-      </p:pic>
-      <p:sp>
-        <p:nvSpPr>
-          <p:cNvPr id="8" name="TextBox 7"/>
+      <p:sp>
+        <p:nvSpPr>
+          <p:cNvPr id="7" name="TextBox 6"/>
           <p:cNvSpPr txBox="1"/>
           <p:nvPr/>
         </p:nvSpPr>
         <p:spPr>
           <a:xfrm>
-            <a:off x="731520" y="1554480"/>
-            <a:ext cx="7498079" cy="4206240"/>
+            <a:off x="731520" y="1463040"/>
+            <a:ext cx="10789920" cy="3474720"/>
           </a:xfrm>
           <a:prstGeom prst="rect">
             <a:avLst/>
@@ -7735,38 +7411,6 @@
             <a:spAutoFit/>
           </a:bodyPr>
           <a:lstStyle/>
-          <a:p>
-            <a:pPr algn="l">
-              <a:spcAft>
-                <a:spcPts val="800"/>
-              </a:spcAft>
-            </a:pPr>
-            <a:r>
-              <a:rPr sz="2600" b="1">
-                <a:solidFill>
-                  <a:srgbClr val="1E293B"/>
-                </a:solidFill>
-                <a:latin typeface="Calibri"/>
-              </a:rPr>
-              <a:t>🎬 Chuyện chức phán sự đền Tản Viên – Chuyển thể tác phẩm văn học</a:t>
-            </a:r>
-          </a:p>
-          <a:p>
-            <a:pPr algn="l">
-              <a:spcAft>
-                <a:spcPts val="800"/>
-              </a:spcAft>
-            </a:pPr>
-            <a:r>
-              <a:rPr sz="2000">
-                <a:solidFill>
-                  <a:srgbClr val="64748B"/>
-                </a:solidFill>
-                <a:latin typeface="Calibri"/>
-              </a:rPr>
-              <a:t>Kênh: Tùng Linh</a:t>
-            </a:r>
-          </a:p>
           <a:p>
             <a:pPr algn="l" marL="365760" indent="-365760">
               <a:spcAft>
@@ -7779,30 +7423,142 @@
               <a:buChar char="•"/>
             </a:pPr>
             <a:r>
-              <a:rPr sz="2000">
+              <a:rPr sz="2300">
                 <a:solidFill>
                   <a:srgbClr val="1E293B"/>
                 </a:solidFill>
                 <a:latin typeface="Calibri"/>
               </a:rPr>
-              <a:t>Mở đầu Văn bản 4 (sản phẩm chuyển thể của học sinh – tham khảo)</a:t>
-            </a:r>
-          </a:p>
-          <a:p>
-            <a:pPr algn="l">
+              <a:t>Khảng khái, nóng nảy, thấy gian tà không chịu được.</a:t>
+            </a:r>
+          </a:p>
+          <a:p>
+            <a:pPr algn="l" marL="365760" indent="-365760">
               <a:spcAft>
                 <a:spcPts val="800"/>
               </a:spcAft>
+              <a:buClr>
+                <a:srgbClr val="1E40AF"/>
+              </a:buClr>
+              <a:buFont typeface="Arial"/>
+              <a:buChar char="•"/>
             </a:pPr>
             <a:r>
-              <a:rPr sz="1600">
-                <a:solidFill>
-                  <a:srgbClr val="64748B"/>
+              <a:rPr sz="2300">
+                <a:solidFill>
+                  <a:srgbClr val="1E293B"/>
                 </a:solidFill>
                 <a:latin typeface="Calibri"/>
-                <a:hlinkClick r:id="rId3"/>
-              </a:rPr>
-              <a:t>https://www.youtube.com/watch?v=4lhy4C12iXg</a:t>
+              </a:rPr>
+              <a:t>Đốt đền tà của hồn tên bách hộ họ Thôi.</a:t>
+            </a:r>
+          </a:p>
+          <a:p>
+            <a:pPr algn="l" marL="365760" indent="-365760">
+              <a:spcAft>
+                <a:spcPts val="800"/>
+              </a:spcAft>
+              <a:buClr>
+                <a:srgbClr val="1E40AF"/>
+              </a:buClr>
+              <a:buFont typeface="Arial"/>
+              <a:buChar char="•"/>
+            </a:pPr>
+            <a:r>
+              <a:rPr sz="2300">
+                <a:solidFill>
+                  <a:srgbClr val="1E293B"/>
+                </a:solidFill>
+                <a:latin typeface="Calibri"/>
+              </a:rPr>
+              <a:t>Cứng cỏi, không khuất phục ở phiên toà cõi âm; đấu tranh đến cùng.</a:t>
+            </a:r>
+          </a:p>
+        </p:txBody>
+      </p:sp>
+      <p:sp>
+        <p:nvSpPr>
+          <p:cNvPr id="8" name="Rounded Rectangle 7"/>
+          <p:cNvSpPr/>
+          <p:nvPr/>
+        </p:nvSpPr>
+        <p:spPr>
+          <a:xfrm>
+            <a:off x="731520" y="5074920"/>
+            <a:ext cx="10789920" cy="731520"/>
+          </a:xfrm>
+          <a:prstGeom prst="roundRect">
+            <a:avLst>
+              <a:gd name="adj" fmla="val 8000"/>
+            </a:avLst>
+          </a:prstGeom>
+          <a:solidFill>
+            <a:srgbClr val="FEF2F2"/>
+          </a:solidFill>
+          <a:ln w="19050">
+            <a:solidFill>
+              <a:srgbClr val="991B1B"/>
+            </a:solidFill>
+          </a:ln>
+          <a:effectLst/>
+        </p:spPr>
+        <p:style>
+          <a:lnRef idx="1">
+            <a:schemeClr val="accent1"/>
+          </a:lnRef>
+          <a:fillRef idx="3">
+            <a:schemeClr val="accent1"/>
+          </a:fillRef>
+          <a:effectRef idx="2">
+            <a:schemeClr val="accent1"/>
+          </a:effectRef>
+          <a:fontRef idx="minor">
+            <a:schemeClr val="lt1"/>
+          </a:fontRef>
+        </p:style>
+        <p:txBody>
+          <a:bodyPr rtlCol="0" anchor="ctr"/>
+          <a:lstStyle/>
+          <a:p>
+            <a:pPr algn="ctr"/>
+          </a:p>
+        </p:txBody>
+      </p:sp>
+      <p:sp>
+        <p:nvSpPr>
+          <p:cNvPr id="9" name="TextBox 8"/>
+          <p:cNvSpPr txBox="1"/>
+          <p:nvPr/>
+        </p:nvSpPr>
+        <p:spPr>
+          <a:xfrm>
+            <a:off x="914400" y="5074920"/>
+            <a:ext cx="10424160" cy="731520"/>
+          </a:xfrm>
+          <a:prstGeom prst="rect">
+            <a:avLst/>
+          </a:prstGeom>
+          <a:noFill/>
+        </p:spPr>
+        <p:txBody>
+          <a:bodyPr wrap="square" anchor="ctr" lIns="45720" rIns="45720">
+            <a:spAutoFit/>
+          </a:bodyPr>
+          <a:lstStyle/>
+          <a:p>
+            <a:pPr algn="l">
+              <a:spcAft>
+                <a:spcPts val="400"/>
+              </a:spcAft>
+            </a:pPr>
+            <a:r>
+              <a:rPr sz="2400" b="1">
+                <a:solidFill>
+                  <a:srgbClr val="991B1B"/>
+                </a:solidFill>
+                <a:latin typeface="Calibri"/>
+              </a:rPr>
+              <a:t>Người trí thức cương trực, dũng cảm bảo vệ công lí.</a:t>
             </a:r>
           </a:p>
         </p:txBody>
@@ -7885,14 +7641,14 @@
         </p:nvSpPr>
         <p:spPr>
           <a:xfrm>
-            <a:off x="10097719" y="457200"/>
-            <a:ext cx="1545336" cy="457200"/>
+            <a:off x="10253167" y="457200"/>
+            <a:ext cx="1389888" cy="457200"/>
           </a:xfrm>
           <a:prstGeom prst="roundRect">
             <a:avLst/>
           </a:prstGeom>
           <a:solidFill>
-            <a:srgbClr val="166534"/>
+            <a:srgbClr val="1E40AF"/>
           </a:solidFill>
           <a:ln>
             <a:noFill/>
@@ -7925,7 +7681,7 @@
                 </a:solidFill>
                 <a:latin typeface="Arial"/>
               </a:rPr>
-              <a:t>GHI NHỚ</a:t>
+              <a:t>ĐỀ BÀI</a:t>
             </a:r>
           </a:p>
         </p:txBody>
@@ -7939,7 +7695,7 @@
         <p:spPr>
           <a:xfrm>
             <a:off x="731520" y="274320"/>
-            <a:ext cx="9427464" cy="868680"/>
+            <a:ext cx="9582912" cy="868680"/>
           </a:xfrm>
           <a:prstGeom prst="rect">
             <a:avLst/>
@@ -7959,7 +7715,7 @@
                 </a:solidFill>
                 <a:latin typeface="Arial"/>
               </a:rPr>
-              <a:t>TRUYỆN TRUYỀN KÌ</a:t>
+              <a:t>YẾU TỐ KÌ ẢO VÀ CHỦ ĐỀ</a:t>
             </a:r>
           </a:p>
         </p:txBody>
@@ -8052,7 +7808,7 @@
         <p:spPr>
           <a:xfrm>
             <a:off x="731520" y="1463040"/>
-            <a:ext cx="10789920" cy="4754880"/>
+            <a:ext cx="10789920" cy="3566160"/>
           </a:xfrm>
           <a:prstGeom prst="rect">
             <a:avLst/>
@@ -8065,66 +7821,106 @@
           </a:bodyPr>
           <a:lstStyle/>
           <a:p>
-            <a:pPr algn="l" marL="365760" indent="-365760">
+            <a:pPr algn="l">
               <a:spcAft>
                 <a:spcPts val="800"/>
               </a:spcAft>
-              <a:buClr>
-                <a:srgbClr val="1E40AF"/>
-              </a:buClr>
-              <a:buFont typeface="Arial"/>
-              <a:buChar char="•"/>
             </a:pPr>
             <a:r>
-              <a:rPr sz="2400">
+              <a:rPr sz="2600" b="1">
                 <a:solidFill>
                   <a:srgbClr val="1E293B"/>
                 </a:solidFill>
                 <a:latin typeface="Calibri"/>
               </a:rPr>
-              <a:t>Thể văn xuôi tự sự thời trung đại, phản ánh hiện thực qua yếu tố hoang đường, kì ảo.</a:t>
-            </a:r>
-          </a:p>
-          <a:p>
-            <a:pPr algn="l" marL="365760" indent="-365760">
+              <a:t>Phân tích giá trị của một số yếu tố kì ảo trong truyện. Truyện gửi gắm thông điệp gì?</a:t>
+            </a:r>
+          </a:p>
+        </p:txBody>
+      </p:sp>
+      <p:sp>
+        <p:nvSpPr>
+          <p:cNvPr id="8" name="Rounded Rectangle 7"/>
+          <p:cNvSpPr/>
+          <p:nvPr/>
+        </p:nvSpPr>
+        <p:spPr>
+          <a:xfrm>
+            <a:off x="731520" y="5120640"/>
+            <a:ext cx="10789920" cy="693420"/>
+          </a:xfrm>
+          <a:prstGeom prst="roundRect">
+            <a:avLst>
+              <a:gd name="adj" fmla="val 8000"/>
+            </a:avLst>
+          </a:prstGeom>
+          <a:solidFill>
+            <a:srgbClr val="EFF4FF"/>
+          </a:solidFill>
+          <a:ln w="19050">
+            <a:solidFill>
+              <a:srgbClr val="1E40AF"/>
+            </a:solidFill>
+          </a:ln>
+          <a:effectLst/>
+        </p:spPr>
+        <p:style>
+          <a:lnRef idx="1">
+            <a:schemeClr val="accent1"/>
+          </a:lnRef>
+          <a:fillRef idx="3">
+            <a:schemeClr val="accent1"/>
+          </a:fillRef>
+          <a:effectRef idx="2">
+            <a:schemeClr val="accent1"/>
+          </a:effectRef>
+          <a:fontRef idx="minor">
+            <a:schemeClr val="lt1"/>
+          </a:fontRef>
+        </p:style>
+        <p:txBody>
+          <a:bodyPr rtlCol="0" anchor="ctr"/>
+          <a:lstStyle/>
+          <a:p>
+            <a:pPr algn="ctr"/>
+          </a:p>
+        </p:txBody>
+      </p:sp>
+      <p:sp>
+        <p:nvSpPr>
+          <p:cNvPr id="9" name="TextBox 8"/>
+          <p:cNvSpPr txBox="1"/>
+          <p:nvPr/>
+        </p:nvSpPr>
+        <p:spPr>
+          <a:xfrm>
+            <a:off x="914400" y="5120640"/>
+            <a:ext cx="10424160" cy="693420"/>
+          </a:xfrm>
+          <a:prstGeom prst="rect">
+            <a:avLst/>
+          </a:prstGeom>
+          <a:noFill/>
+        </p:spPr>
+        <p:txBody>
+          <a:bodyPr wrap="square" anchor="ctr" lIns="45720" rIns="45720">
+            <a:spAutoFit/>
+          </a:bodyPr>
+          <a:lstStyle/>
+          <a:p>
+            <a:pPr algn="l">
               <a:spcAft>
-                <a:spcPts val="800"/>
+                <a:spcPts val="400"/>
               </a:spcAft>
-              <a:buClr>
-                <a:srgbClr val="1E40AF"/>
-              </a:buClr>
-              <a:buFont typeface="Arial"/>
-              <a:buChar char="•"/>
             </a:pPr>
             <a:r>
-              <a:rPr sz="2400">
-                <a:solidFill>
-                  <a:srgbClr val="1E293B"/>
+              <a:rPr sz="2200" b="1">
+                <a:solidFill>
+                  <a:srgbClr val="1E40AF"/>
                 </a:solidFill>
                 <a:latin typeface="Calibri"/>
               </a:rPr>
-              <a:t>Thế giới người và cõi âm có sự giao thoa.</a:t>
-            </a:r>
-          </a:p>
-          <a:p>
-            <a:pPr algn="l" marL="365760" indent="-365760">
-              <a:spcAft>
-                <a:spcPts val="800"/>
-              </a:spcAft>
-              <a:buClr>
-                <a:srgbClr val="1E40AF"/>
-              </a:buClr>
-              <a:buFont typeface="Arial"/>
-              <a:buChar char="•"/>
-            </a:pPr>
-            <a:r>
-              <a:rPr sz="2400">
-                <a:solidFill>
-                  <a:srgbClr val="1E293B"/>
-                </a:solidFill>
-                <a:latin typeface="Calibri"/>
-              </a:rPr>
-              <a:t>Nguyễn Dữ (thế kỉ XVI), học trò Nguyễn Bỉnh Khiêm; tác phẩm Truyền kì mạn lục – “thiên cổ kì bút”.</a:t>
+              <a:t>💡 Cõi âm phản chiếu điều gì của cõi trần?</a:t>
             </a:r>
           </a:p>
         </p:txBody>
@@ -8207,14 +8003,14 @@
         </p:nvSpPr>
         <p:spPr>
           <a:xfrm>
-            <a:off x="10253167" y="457200"/>
-            <a:ext cx="1389888" cy="457200"/>
+            <a:off x="9942271" y="457200"/>
+            <a:ext cx="1700784" cy="457200"/>
           </a:xfrm>
           <a:prstGeom prst="roundRect">
             <a:avLst/>
           </a:prstGeom>
           <a:solidFill>
-            <a:srgbClr val="1E40AF"/>
+            <a:srgbClr val="991B1B"/>
           </a:solidFill>
           <a:ln>
             <a:noFill/>
@@ -8247,7 +8043,7 @@
                 </a:solidFill>
                 <a:latin typeface="Arial"/>
               </a:rPr>
-              <a:t>ĐỀ BÀI</a:t>
+              <a:t>LỜI GIẢI</a:t>
             </a:r>
           </a:p>
         </p:txBody>
@@ -8261,7 +8057,7 @@
         <p:spPr>
           <a:xfrm>
             <a:off x="731520" y="274320"/>
-            <a:ext cx="9582912" cy="868680"/>
+            <a:ext cx="9272016" cy="868680"/>
           </a:xfrm>
           <a:prstGeom prst="rect">
             <a:avLst/>
@@ -8281,7 +8077,7 @@
                 </a:solidFill>
                 <a:latin typeface="Arial"/>
               </a:rPr>
-              <a:t>NHÂN VẬT NGÔ TỬ VĂN</a:t>
+              <a:t>YẾU TỐ KÌ ẢO VÀ CHỦ ĐỀ</a:t>
             </a:r>
           </a:p>
         </p:txBody>
@@ -8374,7 +8170,7 @@
         <p:spPr>
           <a:xfrm>
             <a:off x="731520" y="1463040"/>
-            <a:ext cx="10789920" cy="3566160"/>
+            <a:ext cx="10789920" cy="3474720"/>
           </a:xfrm>
           <a:prstGeom prst="rect">
             <a:avLst/>
@@ -8387,19 +8183,66 @@
           </a:bodyPr>
           <a:lstStyle/>
           <a:p>
-            <a:pPr algn="l">
+            <a:pPr algn="l" marL="365760" indent="-365760">
               <a:spcAft>
                 <a:spcPts val="800"/>
               </a:spcAft>
+              <a:buClr>
+                <a:srgbClr val="1E40AF"/>
+              </a:buClr>
+              <a:buFont typeface="Arial"/>
+              <a:buChar char="•"/>
             </a:pPr>
             <a:r>
-              <a:rPr sz="2600" b="1">
+              <a:rPr sz="2300">
                 <a:solidFill>
                   <a:srgbClr val="1E293B"/>
                 </a:solidFill>
                 <a:latin typeface="Calibri"/>
               </a:rPr>
-              <a:t>Đoạn mở đầu giới thiệu và nhấn mạnh nét tính cách nào ở Tử Văn? Tính cách ấy được khắc hoạ qua những chi tiết nào?</a:t>
+              <a:t>Hồn ma tên tướng giặc, phiên toà Diêm Vương, Tử Văn làm Phán sự đền Tản Viên.</a:t>
+            </a:r>
+          </a:p>
+          <a:p>
+            <a:pPr algn="l" marL="365760" indent="-365760">
+              <a:spcAft>
+                <a:spcPts val="800"/>
+              </a:spcAft>
+              <a:buClr>
+                <a:srgbClr val="1E40AF"/>
+              </a:buClr>
+              <a:buFont typeface="Arial"/>
+              <a:buChar char="•"/>
+            </a:pPr>
+            <a:r>
+              <a:rPr sz="2300">
+                <a:solidFill>
+                  <a:srgbClr val="1E293B"/>
+                </a:solidFill>
+                <a:latin typeface="Calibri"/>
+              </a:rPr>
+              <a:t>Cõi âm phản chiếu cõi trần: tham nhũng, cường quyền, hối lộ.</a:t>
+            </a:r>
+          </a:p>
+          <a:p>
+            <a:pPr algn="l" marL="365760" indent="-365760">
+              <a:spcAft>
+                <a:spcPts val="800"/>
+              </a:spcAft>
+              <a:buClr>
+                <a:srgbClr val="1E40AF"/>
+              </a:buClr>
+              <a:buFont typeface="Arial"/>
+              <a:buChar char="•"/>
+            </a:pPr>
+            <a:r>
+              <a:rPr sz="2300">
+                <a:solidFill>
+                  <a:srgbClr val="1E293B"/>
+                </a:solidFill>
+                <a:latin typeface="Calibri"/>
+              </a:rPr>
+              <a:t>Chính nghĩa thắng gian tà; ca ngợi người dám đấu tranh.</a:t>
             </a:r>
           </a:p>
         </p:txBody>
@@ -8412,8 +8255,8 @@
         </p:nvSpPr>
         <p:spPr>
           <a:xfrm>
-            <a:off x="731520" y="5120640"/>
-            <a:ext cx="10789920" cy="693420"/>
+            <a:off x="731520" y="5074920"/>
+            <a:ext cx="10789920" cy="731520"/>
           </a:xfrm>
           <a:prstGeom prst="roundRect">
             <a:avLst>
@@ -8421,11 +8264,11 @@
             </a:avLst>
           </a:prstGeom>
           <a:solidFill>
-            <a:srgbClr val="EFF4FF"/>
+            <a:srgbClr val="FEF2F2"/>
           </a:solidFill>
           <a:ln w="19050">
             <a:solidFill>
-              <a:srgbClr val="1E40AF"/>
+              <a:srgbClr val="991B1B"/>
             </a:solidFill>
           </a:ln>
           <a:effectLst/>
@@ -8460,8 +8303,8 @@
         </p:nvSpPr>
         <p:spPr>
           <a:xfrm>
-            <a:off x="914400" y="5120640"/>
-            <a:ext cx="10424160" cy="693420"/>
+            <a:off x="914400" y="5074920"/>
+            <a:ext cx="10424160" cy="731520"/>
           </a:xfrm>
           <a:prstGeom prst="rect">
             <a:avLst/>
@@ -8480,13 +8323,13 @@
               </a:spcAft>
             </a:pPr>
             <a:r>
-              <a:rPr sz="2200" b="1">
-                <a:solidFill>
-                  <a:srgbClr val="1E40AF"/>
+              <a:rPr sz="2400" b="1">
+                <a:solidFill>
+                  <a:srgbClr val="991B1B"/>
                 </a:solidFill>
                 <a:latin typeface="Calibri"/>
               </a:rPr>
-              <a:t>💡 Chú ý hành động đốt đền và thái độ trước quỷ, Diêm Vương.</a:t>
+              <a:t>Giáo dục liêm chính: dũng cảm chống cái sai, cái ác.</a:t>
             </a:r>
           </a:p>
         </p:txBody>
@@ -8505,7 +8348,7 @@
     <p:bg>
       <p:bgPr>
         <a:solidFill>
-          <a:srgbClr val="FFFFFF"/>
+          <a:srgbClr val="F8F9FA"/>
         </a:solidFill>
         <a:effectLst/>
       </p:bgPr>
@@ -8525,54 +8368,10 @@
         </p:nvSpPr>
         <p:spPr>
           <a:xfrm>
-            <a:off x="457200" y="384048"/>
-            <a:ext cx="109728" cy="658368"/>
-          </a:xfrm>
-          <a:prstGeom prst="rect">
-            <a:avLst/>
-          </a:prstGeom>
-          <a:solidFill>
-            <a:srgbClr val="1E40AF"/>
-          </a:solidFill>
-          <a:ln>
-            <a:noFill/>
-          </a:ln>
-          <a:effectLst/>
-        </p:spPr>
-        <p:style>
-          <a:lnRef idx="1">
-            <a:schemeClr val="accent1"/>
-          </a:lnRef>
-          <a:fillRef idx="3">
-            <a:schemeClr val="accent1"/>
-          </a:fillRef>
-          <a:effectRef idx="2">
-            <a:schemeClr val="accent1"/>
-          </a:effectRef>
-          <a:fontRef idx="minor">
-            <a:schemeClr val="lt1"/>
-          </a:fontRef>
-        </p:style>
-        <p:txBody>
-          <a:bodyPr rtlCol="0" anchor="ctr"/>
-          <a:lstStyle/>
-          <a:p>
-            <a:pPr algn="ctr"/>
-          </a:p>
-        </p:txBody>
-      </p:sp>
-      <p:sp>
-        <p:nvSpPr>
-          <p:cNvPr id="3" name="Rounded Rectangle 2"/>
-          <p:cNvSpPr/>
-          <p:nvPr/>
-        </p:nvSpPr>
-        <p:spPr>
-          <a:xfrm>
-            <a:off x="9942271" y="457200"/>
-            <a:ext cx="1700784" cy="457200"/>
-          </a:xfrm>
-          <a:prstGeom prst="roundRect">
+            <a:off x="548640" y="2926080"/>
+            <a:ext cx="164592" cy="1005840"/>
+          </a:xfrm>
+          <a:prstGeom prst="rect">
             <a:avLst/>
           </a:prstGeom>
           <a:solidFill>
@@ -8598,32 +8397,23 @@
           </a:fontRef>
         </p:style>
         <p:txBody>
-          <a:bodyPr rtlCol="0" anchor="ctr" wrap="none" tIns="0" bIns="0"/>
+          <a:bodyPr rtlCol="0" anchor="ctr"/>
           <a:lstStyle/>
           <a:p>
             <a:pPr algn="ctr"/>
-            <a:r>
-              <a:rPr sz="1400" b="1">
-                <a:solidFill>
-                  <a:srgbClr val="FFFFFF"/>
-                </a:solidFill>
-                <a:latin typeface="Arial"/>
-              </a:rPr>
-              <a:t>LỜI GIẢI</a:t>
-            </a:r>
-          </a:p>
-        </p:txBody>
-      </p:sp>
-      <p:sp>
-        <p:nvSpPr>
-          <p:cNvPr id="4" name="TextBox 3"/>
+          </a:p>
+        </p:txBody>
+      </p:sp>
+      <p:sp>
+        <p:nvSpPr>
+          <p:cNvPr id="3" name="TextBox 2"/>
           <p:cNvSpPr txBox="1"/>
           <p:nvPr/>
         </p:nvSpPr>
         <p:spPr>
           <a:xfrm>
-            <a:off x="731520" y="274320"/>
-            <a:ext cx="9272016" cy="868680"/>
+            <a:off x="914400" y="2743200"/>
+            <a:ext cx="10515600" cy="1371600"/>
           </a:xfrm>
           <a:prstGeom prst="rect">
             <a:avLst/>
@@ -8631,271 +8421,24 @@
           <a:noFill/>
         </p:spPr>
         <p:txBody>
-          <a:bodyPr wrap="square" anchor="ctr">
+          <a:bodyPr wrap="square" anchor="ctr" lIns="45720" rIns="45720">
             <a:spAutoFit/>
           </a:bodyPr>
           <a:lstStyle/>
           <a:p>
-            <a:r>
-              <a:rPr sz="3600" b="1">
-                <a:solidFill>
-                  <a:srgbClr val="1E40AF"/>
-                </a:solidFill>
-                <a:latin typeface="Arial"/>
-              </a:rPr>
-              <a:t>NHÂN VẬT NGÔ TỬ VĂN</a:t>
-            </a:r>
-          </a:p>
-        </p:txBody>
-      </p:sp>
-      <p:sp>
-        <p:nvSpPr>
-          <p:cNvPr id="5" name="Rectangle 4"/>
-          <p:cNvSpPr/>
-          <p:nvPr/>
-        </p:nvSpPr>
-        <p:spPr>
-          <a:xfrm>
-            <a:off x="457200" y="1207008"/>
-            <a:ext cx="11274552" cy="22000"/>
-          </a:xfrm>
-          <a:prstGeom prst="rect">
-            <a:avLst/>
-          </a:prstGeom>
-          <a:solidFill>
-            <a:srgbClr val="E2E8F0"/>
-          </a:solidFill>
-          <a:ln>
-            <a:noFill/>
-          </a:ln>
-          <a:effectLst/>
-        </p:spPr>
-        <p:style>
-          <a:lnRef idx="1">
-            <a:schemeClr val="accent1"/>
-          </a:lnRef>
-          <a:fillRef idx="3">
-            <a:schemeClr val="accent1"/>
-          </a:fillRef>
-          <a:effectRef idx="2">
-            <a:schemeClr val="accent1"/>
-          </a:effectRef>
-          <a:fontRef idx="minor">
-            <a:schemeClr val="lt1"/>
-          </a:fontRef>
-        </p:style>
-        <p:txBody>
-          <a:bodyPr rtlCol="0" anchor="ctr"/>
-          <a:lstStyle/>
-          <a:p>
-            <a:pPr algn="ctr"/>
-          </a:p>
-        </p:txBody>
-      </p:sp>
-      <p:sp>
-        <p:nvSpPr>
-          <p:cNvPr id="6" name="TextBox 5"/>
-          <p:cNvSpPr txBox="1"/>
-          <p:nvPr/>
-        </p:nvSpPr>
-        <p:spPr>
-          <a:xfrm>
-            <a:off x="457200" y="6355080"/>
-            <a:ext cx="11274552" cy="365760"/>
-          </a:xfrm>
-          <a:prstGeom prst="rect">
-            <a:avLst/>
-          </a:prstGeom>
-          <a:noFill/>
-        </p:spPr>
-        <p:txBody>
-          <a:bodyPr wrap="none">
-            <a:spAutoFit/>
-          </a:bodyPr>
-          <a:lstStyle/>
-          <a:p>
-            <a:pPr algn="r"/>
-            <a:r>
-              <a:rPr sz="1200">
-                <a:solidFill>
-                  <a:srgbClr val="64748B"/>
-                </a:solidFill>
-                <a:latin typeface="Calibri"/>
-              </a:rPr>
-              <a:t>Ngữ văn 10 · Bài 1: Sức Hấp Dẫn Của Truyện Kể          19</a:t>
-            </a:r>
-          </a:p>
-        </p:txBody>
-      </p:sp>
-      <p:sp>
-        <p:nvSpPr>
-          <p:cNvPr id="7" name="TextBox 6"/>
-          <p:cNvSpPr txBox="1"/>
-          <p:nvPr/>
-        </p:nvSpPr>
-        <p:spPr>
-          <a:xfrm>
-            <a:off x="731520" y="1463040"/>
-            <a:ext cx="10789920" cy="3474720"/>
-          </a:xfrm>
-          <a:prstGeom prst="rect">
-            <a:avLst/>
-          </a:prstGeom>
-          <a:noFill/>
-        </p:spPr>
-        <p:txBody>
-          <a:bodyPr wrap="square" anchor="t" lIns="45720" rIns="45720">
-            <a:spAutoFit/>
-          </a:bodyPr>
-          <a:lstStyle/>
-          <a:p>
-            <a:pPr algn="l" marL="365760" indent="-365760">
+            <a:pPr algn="l">
               <a:spcAft>
                 <a:spcPts val="800"/>
               </a:spcAft>
-              <a:buClr>
-                <a:srgbClr val="1E40AF"/>
-              </a:buClr>
-              <a:buFont typeface="Arial"/>
-              <a:buChar char="•"/>
             </a:pPr>
             <a:r>
-              <a:rPr sz="2300">
-                <a:solidFill>
-                  <a:srgbClr val="1E293B"/>
+              <a:rPr sz="3600" b="1">
+                <a:solidFill>
+                  <a:srgbClr val="1E40AF"/>
                 </a:solidFill>
                 <a:latin typeface="Calibri"/>
               </a:rPr>
-              <a:t>Khảng khái, nóng nảy, thấy gian tà không chịu được.</a:t>
-            </a:r>
-          </a:p>
-          <a:p>
-            <a:pPr algn="l" marL="365760" indent="-365760">
-              <a:spcAft>
-                <a:spcPts val="800"/>
-              </a:spcAft>
-              <a:buClr>
-                <a:srgbClr val="1E40AF"/>
-              </a:buClr>
-              <a:buFont typeface="Arial"/>
-              <a:buChar char="•"/>
-            </a:pPr>
-            <a:r>
-              <a:rPr sz="2300">
-                <a:solidFill>
-                  <a:srgbClr val="1E293B"/>
-                </a:solidFill>
-                <a:latin typeface="Calibri"/>
-              </a:rPr>
-              <a:t>Đốt đền tà của hồn tên bách hộ họ Thôi.</a:t>
-            </a:r>
-          </a:p>
-          <a:p>
-            <a:pPr algn="l" marL="365760" indent="-365760">
-              <a:spcAft>
-                <a:spcPts val="800"/>
-              </a:spcAft>
-              <a:buClr>
-                <a:srgbClr val="1E40AF"/>
-              </a:buClr>
-              <a:buFont typeface="Arial"/>
-              <a:buChar char="•"/>
-            </a:pPr>
-            <a:r>
-              <a:rPr sz="2300">
-                <a:solidFill>
-                  <a:srgbClr val="1E293B"/>
-                </a:solidFill>
-                <a:latin typeface="Calibri"/>
-              </a:rPr>
-              <a:t>Cứng cỏi, không khuất phục ở phiên toà cõi âm; đấu tranh đến cùng.</a:t>
-            </a:r>
-          </a:p>
-        </p:txBody>
-      </p:sp>
-      <p:sp>
-        <p:nvSpPr>
-          <p:cNvPr id="8" name="Rounded Rectangle 7"/>
-          <p:cNvSpPr/>
-          <p:nvPr/>
-        </p:nvSpPr>
-        <p:spPr>
-          <a:xfrm>
-            <a:off x="731520" y="5074920"/>
-            <a:ext cx="10789920" cy="731520"/>
-          </a:xfrm>
-          <a:prstGeom prst="roundRect">
-            <a:avLst>
-              <a:gd name="adj" fmla="val 8000"/>
-            </a:avLst>
-          </a:prstGeom>
-          <a:solidFill>
-            <a:srgbClr val="FEF2F2"/>
-          </a:solidFill>
-          <a:ln w="19050">
-            <a:solidFill>
-              <a:srgbClr val="991B1B"/>
-            </a:solidFill>
-          </a:ln>
-          <a:effectLst/>
-        </p:spPr>
-        <p:style>
-          <a:lnRef idx="1">
-            <a:schemeClr val="accent1"/>
-          </a:lnRef>
-          <a:fillRef idx="3">
-            <a:schemeClr val="accent1"/>
-          </a:fillRef>
-          <a:effectRef idx="2">
-            <a:schemeClr val="accent1"/>
-          </a:effectRef>
-          <a:fontRef idx="minor">
-            <a:schemeClr val="lt1"/>
-          </a:fontRef>
-        </p:style>
-        <p:txBody>
-          <a:bodyPr rtlCol="0" anchor="ctr"/>
-          <a:lstStyle/>
-          <a:p>
-            <a:pPr algn="ctr"/>
-          </a:p>
-        </p:txBody>
-      </p:sp>
-      <p:sp>
-        <p:nvSpPr>
-          <p:cNvPr id="9" name="TextBox 8"/>
-          <p:cNvSpPr txBox="1"/>
-          <p:nvPr/>
-        </p:nvSpPr>
-        <p:spPr>
-          <a:xfrm>
-            <a:off x="914400" y="5074920"/>
-            <a:ext cx="10424160" cy="731520"/>
-          </a:xfrm>
-          <a:prstGeom prst="rect">
-            <a:avLst/>
-          </a:prstGeom>
-          <a:noFill/>
-        </p:spPr>
-        <p:txBody>
-          <a:bodyPr wrap="square" anchor="ctr" lIns="45720" rIns="45720">
-            <a:spAutoFit/>
-          </a:bodyPr>
-          <a:lstStyle/>
-          <a:p>
-            <a:pPr algn="l">
-              <a:spcAft>
-                <a:spcPts val="400"/>
-              </a:spcAft>
-            </a:pPr>
-            <a:r>
-              <a:rPr sz="2400" b="1">
-                <a:solidFill>
-                  <a:srgbClr val="991B1B"/>
-                </a:solidFill>
-                <a:latin typeface="Calibri"/>
-              </a:rPr>
-              <a:t>Người trí thức cương trực, dũng cảm bảo vệ công lí.</a:t>
+              <a:t>TIẾT 5 – 7: CHỮ NGƯỜI TỬ TÙ (Nguyễn Tuân)</a:t>
             </a:r>
           </a:p>
         </p:txBody>
@@ -9363,14 +8906,14 @@
         </p:nvSpPr>
         <p:spPr>
           <a:xfrm>
-            <a:off x="10253167" y="457200"/>
-            <a:ext cx="1389888" cy="457200"/>
+            <a:off x="10408615" y="457200"/>
+            <a:ext cx="1234440" cy="457200"/>
           </a:xfrm>
           <a:prstGeom prst="roundRect">
             <a:avLst/>
           </a:prstGeom>
           <a:solidFill>
-            <a:srgbClr val="1E40AF"/>
+            <a:srgbClr val="991B1B"/>
           </a:solidFill>
           <a:ln>
             <a:noFill/>
@@ -9403,7 +8946,7 @@
                 </a:solidFill>
                 <a:latin typeface="Arial"/>
               </a:rPr>
-              <a:t>ĐỀ BÀI</a:t>
+              <a:t>VIDEO</a:t>
             </a:r>
           </a:p>
         </p:txBody>
@@ -9417,7 +8960,7 @@
         <p:spPr>
           <a:xfrm>
             <a:off x="731520" y="274320"/>
-            <a:ext cx="9582912" cy="868680"/>
+            <a:ext cx="9738360" cy="868680"/>
           </a:xfrm>
           <a:prstGeom prst="rect">
             <a:avLst/>
@@ -9437,7 +8980,7 @@
                 </a:solidFill>
                 <a:latin typeface="Arial"/>
               </a:rPr>
-              <a:t>YẾU TỐ KÌ ẢO VÀ CHỦ ĐỀ</a:t>
+              <a:t>VIDEO THAM KHẢO</a:t>
             </a:r>
           </a:p>
         </p:txBody>
@@ -9521,16 +9064,40 @@
           </a:p>
         </p:txBody>
       </p:sp>
-      <p:sp>
-        <p:nvSpPr>
-          <p:cNvPr id="7" name="TextBox 6"/>
+      <p:pic>
+        <p:nvPicPr>
+          <p:cNvPr id="7" name="Picture 6" descr="QR_video_4NCoNS5K028.png"/>
+          <p:cNvPicPr>
+            <a:picLocks noChangeAspect="1"/>
+          </p:cNvPicPr>
+          <p:nvPr/>
+        </p:nvPicPr>
+        <p:blipFill>
+          <a:blip r:embed="rId2"/>
+          <a:stretch>
+            <a:fillRect/>
+          </a:stretch>
+        </p:blipFill>
+        <p:spPr>
+          <a:xfrm>
+            <a:off x="8412480" y="1554480"/>
+            <a:ext cx="3108960" cy="3108960"/>
+          </a:xfrm>
+          <a:prstGeom prst="rect">
+            <a:avLst/>
+          </a:prstGeom>
+        </p:spPr>
+      </p:pic>
+      <p:sp>
+        <p:nvSpPr>
+          <p:cNvPr id="8" name="TextBox 7"/>
           <p:cNvSpPr txBox="1"/>
           <p:nvPr/>
         </p:nvSpPr>
         <p:spPr>
           <a:xfrm>
-            <a:off x="731520" y="1463040"/>
-            <a:ext cx="10789920" cy="3566160"/>
+            <a:off x="731520" y="1554480"/>
+            <a:ext cx="7498079" cy="4206240"/>
           </a:xfrm>
           <a:prstGeom prst="rect">
             <a:avLst/>
@@ -9555,94 +9122,61 @@
                 </a:solidFill>
                 <a:latin typeface="Calibri"/>
               </a:rPr>
-              <a:t>Phân tích giá trị của một số yếu tố kì ảo trong truyện. Truyện gửi gắm thông điệp gì?</a:t>
-            </a:r>
-          </a:p>
-        </p:txBody>
-      </p:sp>
-      <p:sp>
-        <p:nvSpPr>
-          <p:cNvPr id="8" name="Rounded Rectangle 7"/>
-          <p:cNvSpPr/>
-          <p:nvPr/>
-        </p:nvSpPr>
-        <p:spPr>
-          <a:xfrm>
-            <a:off x="731520" y="5120640"/>
-            <a:ext cx="10789920" cy="693420"/>
-          </a:xfrm>
-          <a:prstGeom prst="roundRect">
-            <a:avLst>
-              <a:gd name="adj" fmla="val 8000"/>
-            </a:avLst>
-          </a:prstGeom>
-          <a:solidFill>
-            <a:srgbClr val="EFF4FF"/>
-          </a:solidFill>
-          <a:ln w="19050">
-            <a:solidFill>
-              <a:srgbClr val="1E40AF"/>
-            </a:solidFill>
-          </a:ln>
-          <a:effectLst/>
-        </p:spPr>
-        <p:style>
-          <a:lnRef idx="1">
-            <a:schemeClr val="accent1"/>
-          </a:lnRef>
-          <a:fillRef idx="3">
-            <a:schemeClr val="accent1"/>
-          </a:fillRef>
-          <a:effectRef idx="2">
-            <a:schemeClr val="accent1"/>
-          </a:effectRef>
-          <a:fontRef idx="minor">
-            <a:schemeClr val="lt1"/>
-          </a:fontRef>
-        </p:style>
-        <p:txBody>
-          <a:bodyPr rtlCol="0" anchor="ctr"/>
-          <a:lstStyle/>
-          <a:p>
-            <a:pPr algn="ctr"/>
-          </a:p>
-        </p:txBody>
-      </p:sp>
-      <p:sp>
-        <p:nvSpPr>
-          <p:cNvPr id="9" name="TextBox 8"/>
-          <p:cNvSpPr txBox="1"/>
-          <p:nvPr/>
-        </p:nvSpPr>
-        <p:spPr>
-          <a:xfrm>
-            <a:off x="914400" y="5120640"/>
-            <a:ext cx="10424160" cy="693420"/>
-          </a:xfrm>
-          <a:prstGeom prst="rect">
-            <a:avLst/>
-          </a:prstGeom>
-          <a:noFill/>
-        </p:spPr>
-        <p:txBody>
-          <a:bodyPr wrap="square" anchor="ctr" lIns="45720" rIns="45720">
-            <a:spAutoFit/>
-          </a:bodyPr>
-          <a:lstStyle/>
+              <a:t>🎬 Nhà văn Nguyễn Tuân – Bậc thầy về tùy bút</a:t>
+            </a:r>
+          </a:p>
           <a:p>
             <a:pPr algn="l">
               <a:spcAft>
-                <a:spcPts val="400"/>
+                <a:spcPts val="800"/>
               </a:spcAft>
             </a:pPr>
             <a:r>
-              <a:rPr sz="2200" b="1">
-                <a:solidFill>
-                  <a:srgbClr val="1E40AF"/>
+              <a:rPr sz="2000">
+                <a:solidFill>
+                  <a:srgbClr val="64748B"/>
                 </a:solidFill>
                 <a:latin typeface="Calibri"/>
               </a:rPr>
-              <a:t>💡 Cõi âm phản chiếu điều gì của cõi trần?</a:t>
+              <a:t>Kênh: Báo Nhân Dân</a:t>
+            </a:r>
+          </a:p>
+          <a:p>
+            <a:pPr algn="l" marL="365760" indent="-365760">
+              <a:spcAft>
+                <a:spcPts val="800"/>
+              </a:spcAft>
+              <a:buClr>
+                <a:srgbClr val="1E40AF"/>
+              </a:buClr>
+              <a:buFont typeface="Arial"/>
+              <a:buChar char="•"/>
+            </a:pPr>
+            <a:r>
+              <a:rPr sz="2000">
+                <a:solidFill>
+                  <a:srgbClr val="1E293B"/>
+                </a:solidFill>
+                <a:latin typeface="Calibri"/>
+              </a:rPr>
+              <a:t>Tìm hiểu tác giả Nguyễn Tuân (Văn bản 5)</a:t>
+            </a:r>
+          </a:p>
+          <a:p>
+            <a:pPr algn="l">
+              <a:spcAft>
+                <a:spcPts val="800"/>
+              </a:spcAft>
+            </a:pPr>
+            <a:r>
+              <a:rPr sz="1600">
+                <a:solidFill>
+                  <a:srgbClr val="64748B"/>
+                </a:solidFill>
+                <a:latin typeface="Calibri"/>
+                <a:hlinkClick r:id="rId3"/>
+              </a:rPr>
+              <a:t>https://www.youtube.com/watch?v=4NCoNS5K028</a:t>
             </a:r>
           </a:p>
         </p:txBody>
@@ -9725,14 +9259,14 @@
         </p:nvSpPr>
         <p:spPr>
           <a:xfrm>
-            <a:off x="9942271" y="457200"/>
-            <a:ext cx="1700784" cy="457200"/>
+            <a:off x="10097719" y="457200"/>
+            <a:ext cx="1545336" cy="457200"/>
           </a:xfrm>
           <a:prstGeom prst="roundRect">
             <a:avLst/>
           </a:prstGeom>
           <a:solidFill>
-            <a:srgbClr val="991B1B"/>
+            <a:srgbClr val="166534"/>
           </a:solidFill>
           <a:ln>
             <a:noFill/>
@@ -9765,7 +9299,7 @@
                 </a:solidFill>
                 <a:latin typeface="Arial"/>
               </a:rPr>
-              <a:t>LỜI GIẢI</a:t>
+              <a:t>GHI NHỚ</a:t>
             </a:r>
           </a:p>
         </p:txBody>
@@ -9779,7 +9313,7 @@
         <p:spPr>
           <a:xfrm>
             <a:off x="731520" y="274320"/>
-            <a:ext cx="9272016" cy="868680"/>
+            <a:ext cx="9427464" cy="868680"/>
           </a:xfrm>
           <a:prstGeom prst="rect">
             <a:avLst/>
@@ -9799,7 +9333,7 @@
                 </a:solidFill>
                 <a:latin typeface="Arial"/>
               </a:rPr>
-              <a:t>YẾU TỐ KÌ ẢO VÀ CHỦ ĐỀ</a:t>
+              <a:t>TÁC GIẢ NGUYỄN TUÂN</a:t>
             </a:r>
           </a:p>
         </p:txBody>
@@ -9892,7 +9426,7 @@
         <p:spPr>
           <a:xfrm>
             <a:off x="731520" y="1463040"/>
-            <a:ext cx="10789920" cy="3474720"/>
+            <a:ext cx="10789920" cy="4754880"/>
           </a:xfrm>
           <a:prstGeom prst="rect">
             <a:avLst/>
@@ -9916,13 +9450,13 @@
               <a:buChar char="•"/>
             </a:pPr>
             <a:r>
-              <a:rPr sz="2300">
+              <a:rPr sz="2400">
                 <a:solidFill>
                   <a:srgbClr val="1E293B"/>
                 </a:solidFill>
                 <a:latin typeface="Calibri"/>
               </a:rPr>
-              <a:t>Hồn ma tên tướng giặc, phiên toà Diêm Vương, Tử Văn làm Phán sự đền Tản Viên.</a:t>
+              <a:t>Nguyễn Tuân (1910 – 1987), quê Hà Nội; sở trường truyện ngắn, tuỳ bút.</a:t>
             </a:r>
           </a:p>
           <a:p>
@@ -9937,13 +9471,13 @@
               <a:buChar char="•"/>
             </a:pPr>
             <a:r>
-              <a:rPr sz="2300">
+              <a:rPr sz="2400">
                 <a:solidFill>
                   <a:srgbClr val="1E293B"/>
                 </a:solidFill>
                 <a:latin typeface="Calibri"/>
               </a:rPr>
-              <a:t>Cõi âm phản chiếu cõi trần: tham nhũng, cường quyền, hối lộ.</a:t>
+              <a:t>Phong cách tài hoa, uyên bác; suốt đời đi tìm và tôn vinh cái đẹp.</a:t>
             </a:r>
           </a:p>
           <a:p>
@@ -9958,100 +9492,13 @@
               <a:buChar char="•"/>
             </a:pPr>
             <a:r>
-              <a:rPr sz="2300">
+              <a:rPr sz="2400">
                 <a:solidFill>
                   <a:srgbClr val="1E293B"/>
                 </a:solidFill>
                 <a:latin typeface="Calibri"/>
               </a:rPr>
-              <a:t>Chính nghĩa thắng gian tà; ca ngợi người dám đấu tranh.</a:t>
-            </a:r>
-          </a:p>
-        </p:txBody>
-      </p:sp>
-      <p:sp>
-        <p:nvSpPr>
-          <p:cNvPr id="8" name="Rounded Rectangle 7"/>
-          <p:cNvSpPr/>
-          <p:nvPr/>
-        </p:nvSpPr>
-        <p:spPr>
-          <a:xfrm>
-            <a:off x="731520" y="5074920"/>
-            <a:ext cx="10789920" cy="731520"/>
-          </a:xfrm>
-          <a:prstGeom prst="roundRect">
-            <a:avLst>
-              <a:gd name="adj" fmla="val 8000"/>
-            </a:avLst>
-          </a:prstGeom>
-          <a:solidFill>
-            <a:srgbClr val="FEF2F2"/>
-          </a:solidFill>
-          <a:ln w="19050">
-            <a:solidFill>
-              <a:srgbClr val="991B1B"/>
-            </a:solidFill>
-          </a:ln>
-          <a:effectLst/>
-        </p:spPr>
-        <p:style>
-          <a:lnRef idx="1">
-            <a:schemeClr val="accent1"/>
-          </a:lnRef>
-          <a:fillRef idx="3">
-            <a:schemeClr val="accent1"/>
-          </a:fillRef>
-          <a:effectRef idx="2">
-            <a:schemeClr val="accent1"/>
-          </a:effectRef>
-          <a:fontRef idx="minor">
-            <a:schemeClr val="lt1"/>
-          </a:fontRef>
-        </p:style>
-        <p:txBody>
-          <a:bodyPr rtlCol="0" anchor="ctr"/>
-          <a:lstStyle/>
-          <a:p>
-            <a:pPr algn="ctr"/>
-          </a:p>
-        </p:txBody>
-      </p:sp>
-      <p:sp>
-        <p:nvSpPr>
-          <p:cNvPr id="9" name="TextBox 8"/>
-          <p:cNvSpPr txBox="1"/>
-          <p:nvPr/>
-        </p:nvSpPr>
-        <p:spPr>
-          <a:xfrm>
-            <a:off x="914400" y="5074920"/>
-            <a:ext cx="10424160" cy="731520"/>
-          </a:xfrm>
-          <a:prstGeom prst="rect">
-            <a:avLst/>
-          </a:prstGeom>
-          <a:noFill/>
-        </p:spPr>
-        <p:txBody>
-          <a:bodyPr wrap="square" anchor="ctr" lIns="45720" rIns="45720">
-            <a:spAutoFit/>
-          </a:bodyPr>
-          <a:lstStyle/>
-          <a:p>
-            <a:pPr algn="l">
-              <a:spcAft>
-                <a:spcPts val="400"/>
-              </a:spcAft>
-            </a:pPr>
-            <a:r>
-              <a:rPr sz="2400" b="1">
-                <a:solidFill>
-                  <a:srgbClr val="991B1B"/>
-                </a:solidFill>
-                <a:latin typeface="Calibri"/>
-              </a:rPr>
-              <a:t>Giáo dục liêm chính: dũng cảm chống cái sai, cái ác.</a:t>
+              <a:t>Chữ người tử tù in trong tập Vang bóng một thời (1940).</a:t>
             </a:r>
           </a:p>
         </p:txBody>
@@ -10070,7 +9517,7 @@
     <p:bg>
       <p:bgPr>
         <a:solidFill>
-          <a:srgbClr val="F8F9FA"/>
+          <a:srgbClr val="FFFFFF"/>
         </a:solidFill>
         <a:effectLst/>
       </p:bgPr>
@@ -10090,14 +9537,14 @@
         </p:nvSpPr>
         <p:spPr>
           <a:xfrm>
-            <a:off x="548640" y="2926080"/>
-            <a:ext cx="164592" cy="1005840"/>
+            <a:off x="457200" y="384048"/>
+            <a:ext cx="109728" cy="658368"/>
           </a:xfrm>
           <a:prstGeom prst="rect">
             <a:avLst/>
           </a:prstGeom>
           <a:solidFill>
-            <a:srgbClr val="991B1B"/>
+            <a:srgbClr val="1E40AF"/>
           </a:solidFill>
           <a:ln>
             <a:noFill/>
@@ -10128,14 +9575,67 @@
       </p:sp>
       <p:sp>
         <p:nvSpPr>
-          <p:cNvPr id="3" name="TextBox 2"/>
+          <p:cNvPr id="3" name="Rounded Rectangle 2"/>
+          <p:cNvSpPr/>
+          <p:nvPr/>
+        </p:nvSpPr>
+        <p:spPr>
+          <a:xfrm>
+            <a:off x="10253167" y="457200"/>
+            <a:ext cx="1389888" cy="457200"/>
+          </a:xfrm>
+          <a:prstGeom prst="roundRect">
+            <a:avLst/>
+          </a:prstGeom>
+          <a:solidFill>
+            <a:srgbClr val="1E40AF"/>
+          </a:solidFill>
+          <a:ln>
+            <a:noFill/>
+          </a:ln>
+          <a:effectLst/>
+        </p:spPr>
+        <p:style>
+          <a:lnRef idx="1">
+            <a:schemeClr val="accent1"/>
+          </a:lnRef>
+          <a:fillRef idx="3">
+            <a:schemeClr val="accent1"/>
+          </a:fillRef>
+          <a:effectRef idx="2">
+            <a:schemeClr val="accent1"/>
+          </a:effectRef>
+          <a:fontRef idx="minor">
+            <a:schemeClr val="lt1"/>
+          </a:fontRef>
+        </p:style>
+        <p:txBody>
+          <a:bodyPr rtlCol="0" anchor="ctr" wrap="none" tIns="0" bIns="0"/>
+          <a:lstStyle/>
+          <a:p>
+            <a:pPr algn="ctr"/>
+            <a:r>
+              <a:rPr sz="1400" b="1">
+                <a:solidFill>
+                  <a:srgbClr val="FFFFFF"/>
+                </a:solidFill>
+                <a:latin typeface="Arial"/>
+              </a:rPr>
+              <a:t>ĐỀ BÀI</a:t>
+            </a:r>
+          </a:p>
+        </p:txBody>
+      </p:sp>
+      <p:sp>
+        <p:nvSpPr>
+          <p:cNvPr id="4" name="TextBox 3"/>
           <p:cNvSpPr txBox="1"/>
           <p:nvPr/>
         </p:nvSpPr>
         <p:spPr>
           <a:xfrm>
-            <a:off x="914400" y="2743200"/>
-            <a:ext cx="10515600" cy="1371600"/>
+            <a:off x="731520" y="274320"/>
+            <a:ext cx="9582912" cy="868680"/>
           </a:xfrm>
           <a:prstGeom prst="rect">
             <a:avLst/>
@@ -10143,7 +9643,120 @@
           <a:noFill/>
         </p:spPr>
         <p:txBody>
-          <a:bodyPr wrap="square" anchor="ctr" lIns="45720" rIns="45720">
+          <a:bodyPr wrap="square" anchor="ctr">
+            <a:spAutoFit/>
+          </a:bodyPr>
+          <a:lstStyle/>
+          <a:p>
+            <a:r>
+              <a:rPr sz="3600" b="1">
+                <a:solidFill>
+                  <a:srgbClr val="1E40AF"/>
+                </a:solidFill>
+                <a:latin typeface="Arial"/>
+              </a:rPr>
+              <a:t>NHÂN VẬT HUẤN CAO</a:t>
+            </a:r>
+          </a:p>
+        </p:txBody>
+      </p:sp>
+      <p:sp>
+        <p:nvSpPr>
+          <p:cNvPr id="5" name="Rectangle 4"/>
+          <p:cNvSpPr/>
+          <p:nvPr/>
+        </p:nvSpPr>
+        <p:spPr>
+          <a:xfrm>
+            <a:off x="457200" y="1207008"/>
+            <a:ext cx="11274552" cy="22000"/>
+          </a:xfrm>
+          <a:prstGeom prst="rect">
+            <a:avLst/>
+          </a:prstGeom>
+          <a:solidFill>
+            <a:srgbClr val="E2E8F0"/>
+          </a:solidFill>
+          <a:ln>
+            <a:noFill/>
+          </a:ln>
+          <a:effectLst/>
+        </p:spPr>
+        <p:style>
+          <a:lnRef idx="1">
+            <a:schemeClr val="accent1"/>
+          </a:lnRef>
+          <a:fillRef idx="3">
+            <a:schemeClr val="accent1"/>
+          </a:fillRef>
+          <a:effectRef idx="2">
+            <a:schemeClr val="accent1"/>
+          </a:effectRef>
+          <a:fontRef idx="minor">
+            <a:schemeClr val="lt1"/>
+          </a:fontRef>
+        </p:style>
+        <p:txBody>
+          <a:bodyPr rtlCol="0" anchor="ctr"/>
+          <a:lstStyle/>
+          <a:p>
+            <a:pPr algn="ctr"/>
+          </a:p>
+        </p:txBody>
+      </p:sp>
+      <p:sp>
+        <p:nvSpPr>
+          <p:cNvPr id="6" name="TextBox 5"/>
+          <p:cNvSpPr txBox="1"/>
+          <p:nvPr/>
+        </p:nvSpPr>
+        <p:spPr>
+          <a:xfrm>
+            <a:off x="457200" y="6355080"/>
+            <a:ext cx="11274552" cy="365760"/>
+          </a:xfrm>
+          <a:prstGeom prst="rect">
+            <a:avLst/>
+          </a:prstGeom>
+          <a:noFill/>
+        </p:spPr>
+        <p:txBody>
+          <a:bodyPr wrap="none">
+            <a:spAutoFit/>
+          </a:bodyPr>
+          <a:lstStyle/>
+          <a:p>
+            <a:pPr algn="r"/>
+            <a:r>
+              <a:rPr sz="1200">
+                <a:solidFill>
+                  <a:srgbClr val="64748B"/>
+                </a:solidFill>
+                <a:latin typeface="Calibri"/>
+              </a:rPr>
+              <a:t>Ngữ văn 10 · Bài 1: Sức Hấp Dẫn Của Truyện Kể          22</a:t>
+            </a:r>
+          </a:p>
+        </p:txBody>
+      </p:sp>
+      <p:sp>
+        <p:nvSpPr>
+          <p:cNvPr id="7" name="TextBox 6"/>
+          <p:cNvSpPr txBox="1"/>
+          <p:nvPr/>
+        </p:nvSpPr>
+        <p:spPr>
+          <a:xfrm>
+            <a:off x="731520" y="1463040"/>
+            <a:ext cx="10789920" cy="3566160"/>
+          </a:xfrm>
+          <a:prstGeom prst="rect">
+            <a:avLst/>
+          </a:prstGeom>
+          <a:noFill/>
+        </p:spPr>
+        <p:txBody>
+          <a:bodyPr wrap="square" anchor="t" lIns="45720" rIns="45720">
             <a:spAutoFit/>
           </a:bodyPr>
           <a:lstStyle/>
@@ -10154,13 +9767,100 @@
               </a:spcAft>
             </a:pPr>
             <a:r>
-              <a:rPr sz="3600" b="1">
+              <a:rPr sz="2600" b="1">
+                <a:solidFill>
+                  <a:srgbClr val="1E293B"/>
+                </a:solidFill>
+                <a:latin typeface="Calibri"/>
+              </a:rPr>
+              <a:t>Nhân vật Huấn Cao được khắc hoạ với những vẻ đẹp nào?</a:t>
+            </a:r>
+          </a:p>
+        </p:txBody>
+      </p:sp>
+      <p:sp>
+        <p:nvSpPr>
+          <p:cNvPr id="8" name="Rounded Rectangle 7"/>
+          <p:cNvSpPr/>
+          <p:nvPr/>
+        </p:nvSpPr>
+        <p:spPr>
+          <a:xfrm>
+            <a:off x="731520" y="5120640"/>
+            <a:ext cx="10789920" cy="693420"/>
+          </a:xfrm>
+          <a:prstGeom prst="roundRect">
+            <a:avLst>
+              <a:gd name="adj" fmla="val 8000"/>
+            </a:avLst>
+          </a:prstGeom>
+          <a:solidFill>
+            <a:srgbClr val="EFF4FF"/>
+          </a:solidFill>
+          <a:ln w="19050">
+            <a:solidFill>
+              <a:srgbClr val="1E40AF"/>
+            </a:solidFill>
+          </a:ln>
+          <a:effectLst/>
+        </p:spPr>
+        <p:style>
+          <a:lnRef idx="1">
+            <a:schemeClr val="accent1"/>
+          </a:lnRef>
+          <a:fillRef idx="3">
+            <a:schemeClr val="accent1"/>
+          </a:fillRef>
+          <a:effectRef idx="2">
+            <a:schemeClr val="accent1"/>
+          </a:effectRef>
+          <a:fontRef idx="minor">
+            <a:schemeClr val="lt1"/>
+          </a:fontRef>
+        </p:style>
+        <p:txBody>
+          <a:bodyPr rtlCol="0" anchor="ctr"/>
+          <a:lstStyle/>
+          <a:p>
+            <a:pPr algn="ctr"/>
+          </a:p>
+        </p:txBody>
+      </p:sp>
+      <p:sp>
+        <p:nvSpPr>
+          <p:cNvPr id="9" name="TextBox 8"/>
+          <p:cNvSpPr txBox="1"/>
+          <p:nvPr/>
+        </p:nvSpPr>
+        <p:spPr>
+          <a:xfrm>
+            <a:off x="914400" y="5120640"/>
+            <a:ext cx="10424160" cy="693420"/>
+          </a:xfrm>
+          <a:prstGeom prst="rect">
+            <a:avLst/>
+          </a:prstGeom>
+          <a:noFill/>
+        </p:spPr>
+        <p:txBody>
+          <a:bodyPr wrap="square" anchor="ctr" lIns="45720" rIns="45720">
+            <a:spAutoFit/>
+          </a:bodyPr>
+          <a:lstStyle/>
+          <a:p>
+            <a:pPr algn="l">
+              <a:spcAft>
+                <a:spcPts val="400"/>
+              </a:spcAft>
+            </a:pPr>
+            <a:r>
+              <a:rPr sz="2200" b="1">
                 <a:solidFill>
                   <a:srgbClr val="1E40AF"/>
                 </a:solidFill>
                 <a:latin typeface="Calibri"/>
               </a:rPr>
-              <a:t>TIẾT 5 – 7: CHỮ NGƯỜI TỬ TÙ (Nguyễn Tuân)</a:t>
+              <a:t>💡 Tài hoa – khí phách – thiên lương.</a:t>
             </a:r>
           </a:p>
         </p:txBody>
@@ -10243,14 +9943,14 @@
         </p:nvSpPr>
         <p:spPr>
           <a:xfrm>
-            <a:off x="10097719" y="457200"/>
-            <a:ext cx="1545336" cy="457200"/>
+            <a:off x="9942271" y="457200"/>
+            <a:ext cx="1700784" cy="457200"/>
           </a:xfrm>
           <a:prstGeom prst="roundRect">
             <a:avLst/>
           </a:prstGeom>
           <a:solidFill>
-            <a:srgbClr val="166534"/>
+            <a:srgbClr val="991B1B"/>
           </a:solidFill>
           <a:ln>
             <a:noFill/>
@@ -10283,7 +9983,7 @@
                 </a:solidFill>
                 <a:latin typeface="Arial"/>
               </a:rPr>
-              <a:t>GHI NHỚ</a:t>
+              <a:t>LỜI GIẢI</a:t>
             </a:r>
           </a:p>
         </p:txBody>
@@ -10297,7 +9997,7 @@
         <p:spPr>
           <a:xfrm>
             <a:off x="731520" y="274320"/>
-            <a:ext cx="9427464" cy="868680"/>
+            <a:ext cx="9272016" cy="868680"/>
           </a:xfrm>
           <a:prstGeom prst="rect">
             <a:avLst/>
@@ -10317,7 +10017,7 @@
                 </a:solidFill>
                 <a:latin typeface="Arial"/>
               </a:rPr>
-              <a:t>TÁC GIẢ NGUYỄN TUÂN</a:t>
+              <a:t>NHÂN VẬT HUẤN CAO</a:t>
             </a:r>
           </a:p>
         </p:txBody>
@@ -10410,7 +10110,7 @@
         <p:spPr>
           <a:xfrm>
             <a:off x="731520" y="1463040"/>
-            <a:ext cx="10789920" cy="4754880"/>
+            <a:ext cx="10789920" cy="3474720"/>
           </a:xfrm>
           <a:prstGeom prst="rect">
             <a:avLst/>
@@ -10434,13 +10134,13 @@
               <a:buChar char="•"/>
             </a:pPr>
             <a:r>
-              <a:rPr sz="2400">
+              <a:rPr sz="2300">
                 <a:solidFill>
                   <a:srgbClr val="1E293B"/>
                 </a:solidFill>
                 <a:latin typeface="Calibri"/>
               </a:rPr>
-              <a:t>Nguyễn Tuân (1910 – 1987), quê Hà Nội; sở trường truyện ngắn, tuỳ bút.</a:t>
+              <a:t>Tài viết chữ đẹp nổi tiếng.</a:t>
             </a:r>
           </a:p>
           <a:p>
@@ -10455,13 +10155,13 @@
               <a:buChar char="•"/>
             </a:pPr>
             <a:r>
-              <a:rPr sz="2400">
+              <a:rPr sz="2300">
                 <a:solidFill>
                   <a:srgbClr val="1E293B"/>
                 </a:solidFill>
                 <a:latin typeface="Calibri"/>
               </a:rPr>
-              <a:t>Phong cách tài hoa, uyên bác; suốt đời đi tìm và tôn vinh cái đẹp.</a:t>
+              <a:t>Khí phách hiên ngang: dỡ gông, thản nhiên trước cái chết.</a:t>
             </a:r>
           </a:p>
           <a:p>
@@ -10476,13 +10176,100 @@
               <a:buChar char="•"/>
             </a:pPr>
             <a:r>
-              <a:rPr sz="2400">
+              <a:rPr sz="2300">
                 <a:solidFill>
                   <a:srgbClr val="1E293B"/>
                 </a:solidFill>
                 <a:latin typeface="Calibri"/>
               </a:rPr>
-              <a:t>Chữ người tử tù in trong tập Vang bóng một thời (1940).</a:t>
+              <a:t>Thiên lương trong sáng: chỉ cho chữ người biết quý cái đẹp.</a:t>
+            </a:r>
+          </a:p>
+        </p:txBody>
+      </p:sp>
+      <p:sp>
+        <p:nvSpPr>
+          <p:cNvPr id="8" name="Rounded Rectangle 7"/>
+          <p:cNvSpPr/>
+          <p:nvPr/>
+        </p:nvSpPr>
+        <p:spPr>
+          <a:xfrm>
+            <a:off x="731520" y="5074920"/>
+            <a:ext cx="10789920" cy="731520"/>
+          </a:xfrm>
+          <a:prstGeom prst="roundRect">
+            <a:avLst>
+              <a:gd name="adj" fmla="val 8000"/>
+            </a:avLst>
+          </a:prstGeom>
+          <a:solidFill>
+            <a:srgbClr val="FEF2F2"/>
+          </a:solidFill>
+          <a:ln w="19050">
+            <a:solidFill>
+              <a:srgbClr val="991B1B"/>
+            </a:solidFill>
+          </a:ln>
+          <a:effectLst/>
+        </p:spPr>
+        <p:style>
+          <a:lnRef idx="1">
+            <a:schemeClr val="accent1"/>
+          </a:lnRef>
+          <a:fillRef idx="3">
+            <a:schemeClr val="accent1"/>
+          </a:fillRef>
+          <a:effectRef idx="2">
+            <a:schemeClr val="accent1"/>
+          </a:effectRef>
+          <a:fontRef idx="minor">
+            <a:schemeClr val="lt1"/>
+          </a:fontRef>
+        </p:style>
+        <p:txBody>
+          <a:bodyPr rtlCol="0" anchor="ctr"/>
+          <a:lstStyle/>
+          <a:p>
+            <a:pPr algn="ctr"/>
+          </a:p>
+        </p:txBody>
+      </p:sp>
+      <p:sp>
+        <p:nvSpPr>
+          <p:cNvPr id="9" name="TextBox 8"/>
+          <p:cNvSpPr txBox="1"/>
+          <p:nvPr/>
+        </p:nvSpPr>
+        <p:spPr>
+          <a:xfrm>
+            <a:off x="914400" y="5074920"/>
+            <a:ext cx="10424160" cy="731520"/>
+          </a:xfrm>
+          <a:prstGeom prst="rect">
+            <a:avLst/>
+          </a:prstGeom>
+          <a:noFill/>
+        </p:spPr>
+        <p:txBody>
+          <a:bodyPr wrap="square" anchor="ctr" lIns="45720" rIns="45720">
+            <a:spAutoFit/>
+          </a:bodyPr>
+          <a:lstStyle/>
+          <a:p>
+            <a:pPr algn="l">
+              <a:spcAft>
+                <a:spcPts val="400"/>
+              </a:spcAft>
+            </a:pPr>
+            <a:r>
+              <a:rPr sz="2400" b="1">
+                <a:solidFill>
+                  <a:srgbClr val="991B1B"/>
+                </a:solidFill>
+                <a:latin typeface="Calibri"/>
+              </a:rPr>
+              <a:t>Hình tượng con người tài hoa, khí phách, thiên lương.</a:t>
             </a:r>
           </a:p>
         </p:txBody>
@@ -10639,7 +10426,7 @@
                 </a:solidFill>
                 <a:latin typeface="Arial"/>
               </a:rPr>
-              <a:t>NHÂN VẬT HUẤN CAO</a:t>
+              <a:t>NHÂN VẬT QUẢN NGỤC</a:t>
             </a:r>
           </a:p>
         </p:txBody>
@@ -10757,7 +10544,7 @@
                 </a:solidFill>
                 <a:latin typeface="Calibri"/>
               </a:rPr>
-              <a:t>Nhân vật Huấn Cao được khắc hoạ với những vẻ đẹp nào?</a:t>
+              <a:t>Vì sao nói quản ngục là “một thanh âm trong trẻo chen vào giữa bản đàn mà nhạc luật đều hỗn loạn xô bồ”?</a:t>
             </a:r>
           </a:p>
         </p:txBody>
@@ -10844,7 +10631,7 @@
                 </a:solidFill>
                 <a:latin typeface="Calibri"/>
               </a:rPr>
-              <a:t>💡 Tài hoa – khí phách – thiên lương.</a:t>
+              <a:t>💡 Quản ngục làm nghề gì, nhưng tâm hồn ra sao?</a:t>
             </a:r>
           </a:p>
         </p:txBody>
@@ -11001,7 +10788,7 @@
                 </a:solidFill>
                 <a:latin typeface="Arial"/>
               </a:rPr>
-              <a:t>NHÂN VẬT HUẤN CAO</a:t>
+              <a:t>NHÂN VẬT QUẢN NGỤC</a:t>
             </a:r>
           </a:p>
         </p:txBody>
@@ -11124,7 +10911,7 @@
                 </a:solidFill>
                 <a:latin typeface="Calibri"/>
               </a:rPr>
-              <a:t>Tài viết chữ đẹp nổi tiếng.</a:t>
+              <a:t>Sống giữa nhà ngục tàn bạo nhưng giữ thiên lương.</a:t>
             </a:r>
           </a:p>
           <a:p>
@@ -11145,7 +10932,7 @@
                 </a:solidFill>
                 <a:latin typeface="Calibri"/>
               </a:rPr>
-              <a:t>Khí phách hiên ngang: dỡ gông, thản nhiên trước cái chết.</a:t>
+              <a:t>Biệt nhỡn liên tài, kính trọng Huấn Cao, liều mình xin chữ.</a:t>
             </a:r>
           </a:p>
           <a:p>
@@ -11166,7 +10953,7 @@
                 </a:solidFill>
                 <a:latin typeface="Calibri"/>
               </a:rPr>
-              <a:t>Thiên lương trong sáng: chỉ cho chữ người biết quý cái đẹp.</a:t>
+              <a:t>Biết quý cái đẹp, cái thiện.</a:t>
             </a:r>
           </a:p>
         </p:txBody>
@@ -11253,7 +11040,7 @@
                 </a:solidFill>
                 <a:latin typeface="Calibri"/>
               </a:rPr>
-              <a:t>Hình tượng con người tài hoa, khí phách, thiên lương.</a:t>
+              <a:t>Cái đẹp có thể nảy nở ngay nơi tăm tối.</a:t>
             </a:r>
           </a:p>
         </p:txBody>
@@ -11410,7 +11197,7 @@
                 </a:solidFill>
                 <a:latin typeface="Arial"/>
               </a:rPr>
-              <a:t>NHÂN VẬT QUẢN NGỤC</a:t>
+              <a:t>CẢNH CHO CHỮ</a:t>
             </a:r>
           </a:p>
         </p:txBody>
@@ -11528,7 +11315,7 @@
                 </a:solidFill>
                 <a:latin typeface="Calibri"/>
               </a:rPr>
-              <a:t>Vì sao nói quản ngục là “một thanh âm trong trẻo chen vào giữa bản đàn mà nhạc luật đều hỗn loạn xô bồ”?</a:t>
+              <a:t>Vì sao cảnh cho chữ được xem là “cảnh tượng xưa nay chưa từng có”?</a:t>
             </a:r>
           </a:p>
         </p:txBody>
@@ -11615,7 +11402,7 @@
                 </a:solidFill>
                 <a:latin typeface="Calibri"/>
               </a:rPr>
-              <a:t>💡 Quản ngục làm nghề gì, nhưng tâm hồn ra sao?</a:t>
+              <a:t>💡 Chú ý không gian, tư thế các nhân vật.</a:t>
             </a:r>
           </a:p>
         </p:txBody>
@@ -11772,7 +11559,7 @@
                 </a:solidFill>
                 <a:latin typeface="Arial"/>
               </a:rPr>
-              <a:t>NHÂN VẬT QUẢN NGỤC</a:t>
+              <a:t>CẢNH CHO CHỮ</a:t>
             </a:r>
           </a:p>
         </p:txBody>
@@ -11895,7 +11682,7 @@
                 </a:solidFill>
                 <a:latin typeface="Calibri"/>
               </a:rPr>
-              <a:t>Sống giữa nhà ngục tàn bạo nhưng giữ thiên lương.</a:t>
+              <a:t>Diễn ra trong nhà ngục tối tăm, bẩn thỉu.</a:t>
             </a:r>
           </a:p>
           <a:p>
@@ -11916,7 +11703,7 @@
                 </a:solidFill>
                 <a:latin typeface="Calibri"/>
               </a:rPr>
-              <a:t>Biệt nhỡn liên tài, kính trọng Huấn Cao, liều mình xin chữ.</a:t>
+              <a:t>Tử tù đường hoàng cho chữ; quản ngục khúm núm nhận chữ – trật tự đảo ngược.</a:t>
             </a:r>
           </a:p>
           <a:p>
@@ -11937,7 +11724,7 @@
                 </a:solidFill>
                 <a:latin typeface="Calibri"/>
               </a:rPr>
-              <a:t>Biết quý cái đẹp, cái thiện.</a:t>
+              <a:t>Lời khuyên: giữ thiên lương, tránh xa chốn ô uế.</a:t>
             </a:r>
           </a:p>
         </p:txBody>
@@ -12024,7 +11811,7 @@
                 </a:solidFill>
                 <a:latin typeface="Calibri"/>
               </a:rPr>
-              <a:t>Cái đẹp có thể nảy nở ngay nơi tăm tối.</a:t>
+              <a:t>Cái đẹp, cái thiện chiến thắng cái xấu, cái ác.</a:t>
             </a:r>
           </a:p>
         </p:txBody>
@@ -12043,7 +11830,7 @@
     <p:bg>
       <p:bgPr>
         <a:solidFill>
-          <a:srgbClr val="FFFFFF"/>
+          <a:srgbClr val="F8F9FA"/>
         </a:solidFill>
         <a:effectLst/>
       </p:bgPr>
@@ -12063,54 +11850,10 @@
         </p:nvSpPr>
         <p:spPr>
           <a:xfrm>
-            <a:off x="457200" y="384048"/>
-            <a:ext cx="109728" cy="658368"/>
-          </a:xfrm>
-          <a:prstGeom prst="rect">
-            <a:avLst/>
-          </a:prstGeom>
-          <a:solidFill>
-            <a:srgbClr val="1E40AF"/>
-          </a:solidFill>
-          <a:ln>
-            <a:noFill/>
-          </a:ln>
-          <a:effectLst/>
-        </p:spPr>
-        <p:style>
-          <a:lnRef idx="1">
-            <a:schemeClr val="accent1"/>
-          </a:lnRef>
-          <a:fillRef idx="3">
-            <a:schemeClr val="accent1"/>
-          </a:fillRef>
-          <a:effectRef idx="2">
-            <a:schemeClr val="accent1"/>
-          </a:effectRef>
-          <a:fontRef idx="minor">
-            <a:schemeClr val="lt1"/>
-          </a:fontRef>
-        </p:style>
-        <p:txBody>
-          <a:bodyPr rtlCol="0" anchor="ctr"/>
-          <a:lstStyle/>
-          <a:p>
-            <a:pPr algn="ctr"/>
-          </a:p>
-        </p:txBody>
-      </p:sp>
-      <p:sp>
-        <p:nvSpPr>
-          <p:cNvPr id="3" name="Rounded Rectangle 2"/>
-          <p:cNvSpPr/>
-          <p:nvPr/>
-        </p:nvSpPr>
-        <p:spPr>
-          <a:xfrm>
-            <a:off x="10408615" y="457200"/>
-            <a:ext cx="1234440" cy="457200"/>
-          </a:xfrm>
-          <a:prstGeom prst="roundRect">
+            <a:off x="548640" y="2926080"/>
+            <a:ext cx="164592" cy="1005840"/>
+          </a:xfrm>
+          <a:prstGeom prst="rect">
             <a:avLst/>
           </a:prstGeom>
           <a:solidFill>
@@ -12136,32 +11879,23 @@
           </a:fontRef>
         </p:style>
         <p:txBody>
-          <a:bodyPr rtlCol="0" anchor="ctr" wrap="none" tIns="0" bIns="0"/>
+          <a:bodyPr rtlCol="0" anchor="ctr"/>
           <a:lstStyle/>
           <a:p>
             <a:pPr algn="ctr"/>
-            <a:r>
-              <a:rPr sz="1400" b="1">
-                <a:solidFill>
-                  <a:srgbClr val="FFFFFF"/>
-                </a:solidFill>
-                <a:latin typeface="Arial"/>
-              </a:rPr>
-              <a:t>VIDEO</a:t>
-            </a:r>
-          </a:p>
-        </p:txBody>
-      </p:sp>
-      <p:sp>
-        <p:nvSpPr>
-          <p:cNvPr id="4" name="TextBox 3"/>
+          </a:p>
+        </p:txBody>
+      </p:sp>
+      <p:sp>
+        <p:nvSpPr>
+          <p:cNvPr id="3" name="TextBox 2"/>
           <p:cNvSpPr txBox="1"/>
           <p:nvPr/>
         </p:nvSpPr>
         <p:spPr>
           <a:xfrm>
-            <a:off x="731520" y="274320"/>
-            <a:ext cx="9738360" cy="868680"/>
+            <a:off x="914400" y="2743200"/>
+            <a:ext cx="10515600" cy="1371600"/>
           </a:xfrm>
           <a:prstGeom prst="rect">
             <a:avLst/>
@@ -12169,144 +11903,7 @@
           <a:noFill/>
         </p:spPr>
         <p:txBody>
-          <a:bodyPr wrap="square" anchor="ctr">
-            <a:spAutoFit/>
-          </a:bodyPr>
-          <a:lstStyle/>
-          <a:p>
-            <a:r>
-              <a:rPr sz="3600" b="1">
-                <a:solidFill>
-                  <a:srgbClr val="1E40AF"/>
-                </a:solidFill>
-                <a:latin typeface="Arial"/>
-              </a:rPr>
-              <a:t>VIDEO THAM KHẢO</a:t>
-            </a:r>
-          </a:p>
-        </p:txBody>
-      </p:sp>
-      <p:sp>
-        <p:nvSpPr>
-          <p:cNvPr id="5" name="Rectangle 4"/>
-          <p:cNvSpPr/>
-          <p:nvPr/>
-        </p:nvSpPr>
-        <p:spPr>
-          <a:xfrm>
-            <a:off x="457200" y="1207008"/>
-            <a:ext cx="11274552" cy="22000"/>
-          </a:xfrm>
-          <a:prstGeom prst="rect">
-            <a:avLst/>
-          </a:prstGeom>
-          <a:solidFill>
-            <a:srgbClr val="E2E8F0"/>
-          </a:solidFill>
-          <a:ln>
-            <a:noFill/>
-          </a:ln>
-          <a:effectLst/>
-        </p:spPr>
-        <p:style>
-          <a:lnRef idx="1">
-            <a:schemeClr val="accent1"/>
-          </a:lnRef>
-          <a:fillRef idx="3">
-            <a:schemeClr val="accent1"/>
-          </a:fillRef>
-          <a:effectRef idx="2">
-            <a:schemeClr val="accent1"/>
-          </a:effectRef>
-          <a:fontRef idx="minor">
-            <a:schemeClr val="lt1"/>
-          </a:fontRef>
-        </p:style>
-        <p:txBody>
-          <a:bodyPr rtlCol="0" anchor="ctr"/>
-          <a:lstStyle/>
-          <a:p>
-            <a:pPr algn="ctr"/>
-          </a:p>
-        </p:txBody>
-      </p:sp>
-      <p:sp>
-        <p:nvSpPr>
-          <p:cNvPr id="6" name="TextBox 5"/>
-          <p:cNvSpPr txBox="1"/>
-          <p:nvPr/>
-        </p:nvSpPr>
-        <p:spPr>
-          <a:xfrm>
-            <a:off x="457200" y="6355080"/>
-            <a:ext cx="11274552" cy="365760"/>
-          </a:xfrm>
-          <a:prstGeom prst="rect">
-            <a:avLst/>
-          </a:prstGeom>
-          <a:noFill/>
-        </p:spPr>
-        <p:txBody>
-          <a:bodyPr wrap="none">
-            <a:spAutoFit/>
-          </a:bodyPr>
-          <a:lstStyle/>
-          <a:p>
-            <a:pPr algn="r"/>
-            <a:r>
-              <a:rPr sz="1200">
-                <a:solidFill>
-                  <a:srgbClr val="64748B"/>
-                </a:solidFill>
-                <a:latin typeface="Calibri"/>
-              </a:rPr>
-              <a:t>Ngữ văn 10 · Bài 1: Sức Hấp Dẫn Của Truyện Kể          28</a:t>
-            </a:r>
-          </a:p>
-        </p:txBody>
-      </p:sp>
-      <p:pic>
-        <p:nvPicPr>
-          <p:cNvPr id="7" name="Picture 6" descr="QR_video_c0y19m_qMqg.png"/>
-          <p:cNvPicPr>
-            <a:picLocks noChangeAspect="1"/>
-          </p:cNvPicPr>
-          <p:nvPr/>
-        </p:nvPicPr>
-        <p:blipFill>
-          <a:blip r:embed="rId2"/>
-          <a:stretch>
-            <a:fillRect/>
-          </a:stretch>
-        </p:blipFill>
-        <p:spPr>
-          <a:xfrm>
-            <a:off x="8412480" y="1554480"/>
-            <a:ext cx="3108960" cy="3108960"/>
-          </a:xfrm>
-          <a:prstGeom prst="rect">
-            <a:avLst/>
-          </a:prstGeom>
-        </p:spPr>
-      </p:pic>
-      <p:sp>
-        <p:nvSpPr>
-          <p:cNvPr id="8" name="TextBox 7"/>
-          <p:cNvSpPr txBox="1"/>
-          <p:nvPr/>
-        </p:nvSpPr>
-        <p:spPr>
-          <a:xfrm>
-            <a:off x="731520" y="1554480"/>
-            <a:ext cx="7498079" cy="4206240"/>
-          </a:xfrm>
-          <a:prstGeom prst="rect">
-            <a:avLst/>
-          </a:prstGeom>
-          <a:noFill/>
-        </p:spPr>
-        <p:txBody>
-          <a:bodyPr wrap="square" anchor="t" lIns="45720" rIns="45720">
+          <a:bodyPr wrap="square" anchor="ctr" lIns="45720" rIns="45720">
             <a:spAutoFit/>
           </a:bodyPr>
           <a:lstStyle/>
@@ -12317,67 +11914,13 @@
               </a:spcAft>
             </a:pPr>
             <a:r>
-              <a:rPr sz="2600" b="1">
-                <a:solidFill>
-                  <a:srgbClr val="1E293B"/>
+              <a:rPr sz="3600" b="1">
+                <a:solidFill>
+                  <a:srgbClr val="1E40AF"/>
                 </a:solidFill>
                 <a:latin typeface="Calibri"/>
               </a:rPr>
-              <a:t>🎬 [Phim ngắn] Chữ người tử tù</a:t>
-            </a:r>
-          </a:p>
-          <a:p>
-            <a:pPr algn="l">
-              <a:spcAft>
-                <a:spcPts val="800"/>
-              </a:spcAft>
-            </a:pPr>
-            <a:r>
-              <a:rPr sz="2000">
-                <a:solidFill>
-                  <a:srgbClr val="64748B"/>
-                </a:solidFill>
-                <a:latin typeface="Calibri"/>
-              </a:rPr>
-              <a:t>Kênh: Alex Victor</a:t>
-            </a:r>
-          </a:p>
-          <a:p>
-            <a:pPr algn="l" marL="365760" indent="-365760">
-              <a:spcAft>
-                <a:spcPts val="800"/>
-              </a:spcAft>
-              <a:buClr>
-                <a:srgbClr val="1E40AF"/>
-              </a:buClr>
-              <a:buFont typeface="Arial"/>
-              <a:buChar char="•"/>
-            </a:pPr>
-            <a:r>
-              <a:rPr sz="2000">
-                <a:solidFill>
-                  <a:srgbClr val="1E293B"/>
-                </a:solidFill>
-                <a:latin typeface="Calibri"/>
-              </a:rPr>
-              <a:t>Phân tích cảnh cho chữ (phim ngắn do học sinh dựng – tham khảo)</a:t>
-            </a:r>
-          </a:p>
-          <a:p>
-            <a:pPr algn="l">
-              <a:spcAft>
-                <a:spcPts val="800"/>
-              </a:spcAft>
-            </a:pPr>
-            <a:r>
-              <a:rPr sz="1600">
-                <a:solidFill>
-                  <a:srgbClr val="64748B"/>
-                </a:solidFill>
-                <a:latin typeface="Calibri"/>
-                <a:hlinkClick r:id="rId3"/>
-              </a:rPr>
-              <a:t>https://www.youtube.com/watch?v=c0y19m_qMqg</a:t>
+              <a:t>TIẾT 8: THỰC HÀNH TIẾNG VIỆT – TỪ HÁN VIỆT</a:t>
             </a:r>
           </a:p>
         </p:txBody>
@@ -12534,7 +12077,7 @@
                 </a:solidFill>
                 <a:latin typeface="Arial"/>
               </a:rPr>
-              <a:t>CẢNH CHO CHỮ</a:t>
+              <a:t>NGHĨA CỦA TỪ HÁN VIỆT</a:t>
             </a:r>
           </a:p>
         </p:txBody>
@@ -12652,7 +12195,7 @@
                 </a:solidFill>
                 <a:latin typeface="Calibri"/>
               </a:rPr>
-              <a:t>Vì sao cảnh cho chữ được xem là “cảnh tượng xưa nay chưa từng có”?</a:t>
+              <a:t>Giải nghĩa các từ: tiên triều, hàn sĩ, khoan dung, hiếu sinh (Chuyện chức Phán sự đền Tản Viên).</a:t>
             </a:r>
           </a:p>
         </p:txBody>
@@ -12739,7 +12282,7 @@
                 </a:solidFill>
                 <a:latin typeface="Calibri"/>
               </a:rPr>
-              <a:t>💡 Chú ý không gian, tư thế các nhân vật.</a:t>
+              <a:t>💡 Tách nghĩa từng yếu tố Hán Việt.</a:t>
             </a:r>
           </a:p>
         </p:txBody>
@@ -13005,7 +12548,7 @@
                 </a:solidFill>
                 <a:latin typeface="Arial"/>
               </a:rPr>
-              <a:t>CẢNH CHO CHỮ</a:t>
+              <a:t>NGHĨA CỦA TỪ HÁN VIỆT</a:t>
             </a:r>
           </a:p>
         </p:txBody>
@@ -13128,7 +12671,7 @@
                 </a:solidFill>
                 <a:latin typeface="Calibri"/>
               </a:rPr>
-              <a:t>Diễn ra trong nhà ngục tối tăm, bẩn thỉu.</a:t>
+              <a:t>Tiên triều: triều vua trước.</a:t>
             </a:r>
           </a:p>
           <a:p>
@@ -13149,7 +12692,7 @@
                 </a:solidFill>
                 <a:latin typeface="Calibri"/>
               </a:rPr>
-              <a:t>Tử tù đường hoàng cho chữ; quản ngục khúm núm nhận chữ – trật tự đảo ngược.</a:t>
+              <a:t>Hàn sĩ: học trò nghèo.</a:t>
             </a:r>
           </a:p>
           <a:p>
@@ -13170,7 +12713,28 @@
                 </a:solidFill>
                 <a:latin typeface="Calibri"/>
               </a:rPr>
-              <a:t>Lời khuyên: giữ thiên lương, tránh xa chốn ô uế.</a:t>
+              <a:t>Khoan dung: rộng lượng tha thứ.</a:t>
+            </a:r>
+          </a:p>
+          <a:p>
+            <a:pPr algn="l" marL="365760" indent="-365760">
+              <a:spcAft>
+                <a:spcPts val="800"/>
+              </a:spcAft>
+              <a:buClr>
+                <a:srgbClr val="1E40AF"/>
+              </a:buClr>
+              <a:buFont typeface="Arial"/>
+              <a:buChar char="•"/>
+            </a:pPr>
+            <a:r>
+              <a:rPr sz="2300">
+                <a:solidFill>
+                  <a:srgbClr val="1E293B"/>
+                </a:solidFill>
+                <a:latin typeface="Calibri"/>
+              </a:rPr>
+              <a:t>Hiếu sinh: quý trọng sự sống.</a:t>
             </a:r>
           </a:p>
         </p:txBody>
@@ -13257,7 +12821,7 @@
                 </a:solidFill>
                 <a:latin typeface="Calibri"/>
               </a:rPr>
-              <a:t>Cái đẹp, cái thiện chiến thắng cái xấu, cái ác.</a:t>
+              <a:t>Dùng từ Hán Việt đúng nghĩa, đúng sắc thái.</a:t>
             </a:r>
           </a:p>
         </p:txBody>
@@ -13276,7 +12840,7 @@
     <p:bg>
       <p:bgPr>
         <a:solidFill>
-          <a:srgbClr val="F8F9FA"/>
+          <a:srgbClr val="FFFFFF"/>
         </a:solidFill>
         <a:effectLst/>
       </p:bgPr>
@@ -13296,14 +12860,14 @@
         </p:nvSpPr>
         <p:spPr>
           <a:xfrm>
-            <a:off x="548640" y="2926080"/>
-            <a:ext cx="164592" cy="1005840"/>
+            <a:off x="457200" y="384048"/>
+            <a:ext cx="109728" cy="658368"/>
           </a:xfrm>
           <a:prstGeom prst="rect">
             <a:avLst/>
           </a:prstGeom>
           <a:solidFill>
-            <a:srgbClr val="991B1B"/>
+            <a:srgbClr val="1E40AF"/>
           </a:solidFill>
           <a:ln>
             <a:noFill/>
@@ -13334,14 +12898,67 @@
       </p:sp>
       <p:sp>
         <p:nvSpPr>
-          <p:cNvPr id="3" name="TextBox 2"/>
+          <p:cNvPr id="3" name="Rounded Rectangle 2"/>
+          <p:cNvSpPr/>
+          <p:nvPr/>
+        </p:nvSpPr>
+        <p:spPr>
+          <a:xfrm>
+            <a:off x="10253167" y="457200"/>
+            <a:ext cx="1389888" cy="457200"/>
+          </a:xfrm>
+          <a:prstGeom prst="roundRect">
+            <a:avLst/>
+          </a:prstGeom>
+          <a:solidFill>
+            <a:srgbClr val="1E40AF"/>
+          </a:solidFill>
+          <a:ln>
+            <a:noFill/>
+          </a:ln>
+          <a:effectLst/>
+        </p:spPr>
+        <p:style>
+          <a:lnRef idx="1">
+            <a:schemeClr val="accent1"/>
+          </a:lnRef>
+          <a:fillRef idx="3">
+            <a:schemeClr val="accent1"/>
+          </a:fillRef>
+          <a:effectRef idx="2">
+            <a:schemeClr val="accent1"/>
+          </a:effectRef>
+          <a:fontRef idx="minor">
+            <a:schemeClr val="lt1"/>
+          </a:fontRef>
+        </p:style>
+        <p:txBody>
+          <a:bodyPr rtlCol="0" anchor="ctr" wrap="none" tIns="0" bIns="0"/>
+          <a:lstStyle/>
+          <a:p>
+            <a:pPr algn="ctr"/>
+            <a:r>
+              <a:rPr sz="1400" b="1">
+                <a:solidFill>
+                  <a:srgbClr val="FFFFFF"/>
+                </a:solidFill>
+                <a:latin typeface="Arial"/>
+              </a:rPr>
+              <a:t>ĐỀ BÀI</a:t>
+            </a:r>
+          </a:p>
+        </p:txBody>
+      </p:sp>
+      <p:sp>
+        <p:nvSpPr>
+          <p:cNvPr id="4" name="TextBox 3"/>
           <p:cNvSpPr txBox="1"/>
           <p:nvPr/>
         </p:nvSpPr>
         <p:spPr>
           <a:xfrm>
-            <a:off x="914400" y="2743200"/>
-            <a:ext cx="10515600" cy="1371600"/>
+            <a:off x="731520" y="274320"/>
+            <a:ext cx="9582912" cy="868680"/>
           </a:xfrm>
           <a:prstGeom prst="rect">
             <a:avLst/>
@@ -13349,7 +12966,120 @@
           <a:noFill/>
         </p:spPr>
         <p:txBody>
-          <a:bodyPr wrap="square" anchor="ctr" lIns="45720" rIns="45720">
+          <a:bodyPr wrap="square" anchor="ctr">
+            <a:spAutoFit/>
+          </a:bodyPr>
+          <a:lstStyle/>
+          <a:p>
+            <a:r>
+              <a:rPr sz="3600" b="1">
+                <a:solidFill>
+                  <a:srgbClr val="1E40AF"/>
+                </a:solidFill>
+                <a:latin typeface="Arial"/>
+              </a:rPr>
+              <a:t>SỬA LỖI DÙNG TỪ HÁN VIỆT</a:t>
+            </a:r>
+          </a:p>
+        </p:txBody>
+      </p:sp>
+      <p:sp>
+        <p:nvSpPr>
+          <p:cNvPr id="5" name="Rectangle 4"/>
+          <p:cNvSpPr/>
+          <p:nvPr/>
+        </p:nvSpPr>
+        <p:spPr>
+          <a:xfrm>
+            <a:off x="457200" y="1207008"/>
+            <a:ext cx="11274552" cy="22000"/>
+          </a:xfrm>
+          <a:prstGeom prst="rect">
+            <a:avLst/>
+          </a:prstGeom>
+          <a:solidFill>
+            <a:srgbClr val="E2E8F0"/>
+          </a:solidFill>
+          <a:ln>
+            <a:noFill/>
+          </a:ln>
+          <a:effectLst/>
+        </p:spPr>
+        <p:style>
+          <a:lnRef idx="1">
+            <a:schemeClr val="accent1"/>
+          </a:lnRef>
+          <a:fillRef idx="3">
+            <a:schemeClr val="accent1"/>
+          </a:fillRef>
+          <a:effectRef idx="2">
+            <a:schemeClr val="accent1"/>
+          </a:effectRef>
+          <a:fontRef idx="minor">
+            <a:schemeClr val="lt1"/>
+          </a:fontRef>
+        </p:style>
+        <p:txBody>
+          <a:bodyPr rtlCol="0" anchor="ctr"/>
+          <a:lstStyle/>
+          <a:p>
+            <a:pPr algn="ctr"/>
+          </a:p>
+        </p:txBody>
+      </p:sp>
+      <p:sp>
+        <p:nvSpPr>
+          <p:cNvPr id="6" name="TextBox 5"/>
+          <p:cNvSpPr txBox="1"/>
+          <p:nvPr/>
+        </p:nvSpPr>
+        <p:spPr>
+          <a:xfrm>
+            <a:off x="457200" y="6355080"/>
+            <a:ext cx="11274552" cy="365760"/>
+          </a:xfrm>
+          <a:prstGeom prst="rect">
+            <a:avLst/>
+          </a:prstGeom>
+          <a:noFill/>
+        </p:spPr>
+        <p:txBody>
+          <a:bodyPr wrap="none">
+            <a:spAutoFit/>
+          </a:bodyPr>
+          <a:lstStyle/>
+          <a:p>
+            <a:pPr algn="r"/>
+            <a:r>
+              <a:rPr sz="1200">
+                <a:solidFill>
+                  <a:srgbClr val="64748B"/>
+                </a:solidFill>
+                <a:latin typeface="Calibri"/>
+              </a:rPr>
+              <a:t>Ngữ văn 10 · Bài 1: Sức Hấp Dẫn Của Truyện Kể          31</a:t>
+            </a:r>
+          </a:p>
+        </p:txBody>
+      </p:sp>
+      <p:sp>
+        <p:nvSpPr>
+          <p:cNvPr id="7" name="TextBox 6"/>
+          <p:cNvSpPr txBox="1"/>
+          <p:nvPr/>
+        </p:nvSpPr>
+        <p:spPr>
+          <a:xfrm>
+            <a:off x="731520" y="1463040"/>
+            <a:ext cx="10789920" cy="3566160"/>
+          </a:xfrm>
+          <a:prstGeom prst="rect">
+            <a:avLst/>
+          </a:prstGeom>
+          <a:noFill/>
+        </p:spPr>
+        <p:txBody>
+          <a:bodyPr wrap="square" anchor="t" lIns="45720" rIns="45720">
             <a:spAutoFit/>
           </a:bodyPr>
           <a:lstStyle/>
@@ -13360,13 +13090,100 @@
               </a:spcAft>
             </a:pPr>
             <a:r>
-              <a:rPr sz="3600" b="1">
+              <a:rPr sz="2600" b="1">
+                <a:solidFill>
+                  <a:srgbClr val="1E293B"/>
+                </a:solidFill>
+                <a:latin typeface="Calibri"/>
+              </a:rPr>
+              <a:t>Tìm và sửa lỗi dùng từ: “Anh ấy luôn bàng quang trước việc chung.”; “Tiếng Anh là yếu điểm của em.”</a:t>
+            </a:r>
+          </a:p>
+        </p:txBody>
+      </p:sp>
+      <p:sp>
+        <p:nvSpPr>
+          <p:cNvPr id="8" name="Rounded Rectangle 7"/>
+          <p:cNvSpPr/>
+          <p:nvPr/>
+        </p:nvSpPr>
+        <p:spPr>
+          <a:xfrm>
+            <a:off x="731520" y="5120640"/>
+            <a:ext cx="10789920" cy="693420"/>
+          </a:xfrm>
+          <a:prstGeom prst="roundRect">
+            <a:avLst>
+              <a:gd name="adj" fmla="val 8000"/>
+            </a:avLst>
+          </a:prstGeom>
+          <a:solidFill>
+            <a:srgbClr val="EFF4FF"/>
+          </a:solidFill>
+          <a:ln w="19050">
+            <a:solidFill>
+              <a:srgbClr val="1E40AF"/>
+            </a:solidFill>
+          </a:ln>
+          <a:effectLst/>
+        </p:spPr>
+        <p:style>
+          <a:lnRef idx="1">
+            <a:schemeClr val="accent1"/>
+          </a:lnRef>
+          <a:fillRef idx="3">
+            <a:schemeClr val="accent1"/>
+          </a:fillRef>
+          <a:effectRef idx="2">
+            <a:schemeClr val="accent1"/>
+          </a:effectRef>
+          <a:fontRef idx="minor">
+            <a:schemeClr val="lt1"/>
+          </a:fontRef>
+        </p:style>
+        <p:txBody>
+          <a:bodyPr rtlCol="0" anchor="ctr"/>
+          <a:lstStyle/>
+          <a:p>
+            <a:pPr algn="ctr"/>
+          </a:p>
+        </p:txBody>
+      </p:sp>
+      <p:sp>
+        <p:nvSpPr>
+          <p:cNvPr id="9" name="TextBox 8"/>
+          <p:cNvSpPr txBox="1"/>
+          <p:nvPr/>
+        </p:nvSpPr>
+        <p:spPr>
+          <a:xfrm>
+            <a:off x="914400" y="5120640"/>
+            <a:ext cx="10424160" cy="693420"/>
+          </a:xfrm>
+          <a:prstGeom prst="rect">
+            <a:avLst/>
+          </a:prstGeom>
+          <a:noFill/>
+        </p:spPr>
+        <p:txBody>
+          <a:bodyPr wrap="square" anchor="ctr" lIns="45720" rIns="45720">
+            <a:spAutoFit/>
+          </a:bodyPr>
+          <a:lstStyle/>
+          <a:p>
+            <a:pPr algn="l">
+              <a:spcAft>
+                <a:spcPts val="400"/>
+              </a:spcAft>
+            </a:pPr>
+            <a:r>
+              <a:rPr sz="2200" b="1">
                 <a:solidFill>
                   <a:srgbClr val="1E40AF"/>
                 </a:solidFill>
                 <a:latin typeface="Calibri"/>
               </a:rPr>
-              <a:t>TIẾT 8: THỰC HÀNH TIẾNG VIỆT – TỪ HÁN VIỆT</a:t>
+              <a:t>💡 Chú ý các từ gần âm.</a:t>
             </a:r>
           </a:p>
         </p:txBody>
@@ -13449,14 +13266,14 @@
         </p:nvSpPr>
         <p:spPr>
           <a:xfrm>
-            <a:off x="10253167" y="457200"/>
-            <a:ext cx="1389888" cy="457200"/>
+            <a:off x="9942271" y="457200"/>
+            <a:ext cx="1700784" cy="457200"/>
           </a:xfrm>
           <a:prstGeom prst="roundRect">
             <a:avLst/>
           </a:prstGeom>
           <a:solidFill>
-            <a:srgbClr val="1E40AF"/>
+            <a:srgbClr val="991B1B"/>
           </a:solidFill>
           <a:ln>
             <a:noFill/>
@@ -13489,7 +13306,7 @@
                 </a:solidFill>
                 <a:latin typeface="Arial"/>
               </a:rPr>
-              <a:t>ĐỀ BÀI</a:t>
+              <a:t>LỜI GIẢI</a:t>
             </a:r>
           </a:p>
         </p:txBody>
@@ -13503,7 +13320,7 @@
         <p:spPr>
           <a:xfrm>
             <a:off x="731520" y="274320"/>
-            <a:ext cx="9582912" cy="868680"/>
+            <a:ext cx="9272016" cy="868680"/>
           </a:xfrm>
           <a:prstGeom prst="rect">
             <a:avLst/>
@@ -13523,7 +13340,7 @@
                 </a:solidFill>
                 <a:latin typeface="Arial"/>
               </a:rPr>
-              <a:t>NGHĨA CỦA TỪ HÁN VIỆT</a:t>
+              <a:t>SỬA LỖI DÙNG TỪ HÁN VIỆT</a:t>
             </a:r>
           </a:p>
         </p:txBody>
@@ -13616,7 +13433,7 @@
         <p:spPr>
           <a:xfrm>
             <a:off x="731520" y="1463040"/>
-            <a:ext cx="10789920" cy="3566160"/>
+            <a:ext cx="10789920" cy="3474720"/>
           </a:xfrm>
           <a:prstGeom prst="rect">
             <a:avLst/>
@@ -13629,19 +13446,45 @@
           </a:bodyPr>
           <a:lstStyle/>
           <a:p>
-            <a:pPr algn="l">
+            <a:pPr algn="l" marL="365760" indent="-365760">
               <a:spcAft>
                 <a:spcPts val="800"/>
               </a:spcAft>
+              <a:buClr>
+                <a:srgbClr val="1E40AF"/>
+              </a:buClr>
+              <a:buFont typeface="Arial"/>
+              <a:buChar char="•"/>
             </a:pPr>
             <a:r>
-              <a:rPr sz="2600" b="1">
+              <a:rPr sz="2300">
                 <a:solidFill>
                   <a:srgbClr val="1E293B"/>
                 </a:solidFill>
                 <a:latin typeface="Calibri"/>
               </a:rPr>
-              <a:t>Giải nghĩa các từ: tiên triều, hàn sĩ, khoan dung, hiếu sinh (Chuyện chức Phán sự đền Tản Viên).</a:t>
+              <a:t>“bàng quang” → “bàng quan” (thờ ơ, đứng ngoài).</a:t>
+            </a:r>
+          </a:p>
+          <a:p>
+            <a:pPr algn="l" marL="365760" indent="-365760">
+              <a:spcAft>
+                <a:spcPts val="800"/>
+              </a:spcAft>
+              <a:buClr>
+                <a:srgbClr val="1E40AF"/>
+              </a:buClr>
+              <a:buFont typeface="Arial"/>
+              <a:buChar char="•"/>
+            </a:pPr>
+            <a:r>
+              <a:rPr sz="2300">
+                <a:solidFill>
+                  <a:srgbClr val="1E293B"/>
+                </a:solidFill>
+                <a:latin typeface="Calibri"/>
+              </a:rPr>
+              <a:t>“yếu điểm” (điểm quan trọng) → “điểm yếu”.</a:t>
             </a:r>
           </a:p>
         </p:txBody>
@@ -13654,8 +13497,8 @@
         </p:nvSpPr>
         <p:spPr>
           <a:xfrm>
-            <a:off x="731520" y="5120640"/>
-            <a:ext cx="10789920" cy="693420"/>
+            <a:off x="731520" y="5074920"/>
+            <a:ext cx="10789920" cy="731520"/>
           </a:xfrm>
           <a:prstGeom prst="roundRect">
             <a:avLst>
@@ -13663,11 +13506,11 @@
             </a:avLst>
           </a:prstGeom>
           <a:solidFill>
-            <a:srgbClr val="EFF4FF"/>
+            <a:srgbClr val="FEF2F2"/>
           </a:solidFill>
           <a:ln w="19050">
             <a:solidFill>
-              <a:srgbClr val="1E40AF"/>
+              <a:srgbClr val="991B1B"/>
             </a:solidFill>
           </a:ln>
           <a:effectLst/>
@@ -13702,8 +13545,8 @@
         </p:nvSpPr>
         <p:spPr>
           <a:xfrm>
-            <a:off x="914400" y="5120640"/>
-            <a:ext cx="10424160" cy="693420"/>
+            <a:off x="914400" y="5074920"/>
+            <a:ext cx="10424160" cy="731520"/>
           </a:xfrm>
           <a:prstGeom prst="rect">
             <a:avLst/>
@@ -13722,13 +13565,13 @@
               </a:spcAft>
             </a:pPr>
             <a:r>
-              <a:rPr sz="2200" b="1">
-                <a:solidFill>
-                  <a:srgbClr val="1E40AF"/>
+              <a:rPr sz="2400" b="1">
+                <a:solidFill>
+                  <a:srgbClr val="991B1B"/>
                 </a:solidFill>
                 <a:latin typeface="Calibri"/>
               </a:rPr>
-              <a:t>💡 Tách nghĩa từng yếu tố Hán Việt.</a:t>
+              <a:t>Hiểu đúng nghĩa từng yếu tố để tránh lỗi.</a:t>
             </a:r>
           </a:p>
         </p:txBody>
@@ -13747,7 +13590,7 @@
     <p:bg>
       <p:bgPr>
         <a:solidFill>
-          <a:srgbClr val="FFFFFF"/>
+          <a:srgbClr val="F8F9FA"/>
         </a:solidFill>
         <a:effectLst/>
       </p:bgPr>
@@ -13767,54 +13610,10 @@
         </p:nvSpPr>
         <p:spPr>
           <a:xfrm>
-            <a:off x="457200" y="384048"/>
-            <a:ext cx="109728" cy="658368"/>
-          </a:xfrm>
-          <a:prstGeom prst="rect">
-            <a:avLst/>
-          </a:prstGeom>
-          <a:solidFill>
-            <a:srgbClr val="1E40AF"/>
-          </a:solidFill>
-          <a:ln>
-            <a:noFill/>
-          </a:ln>
-          <a:effectLst/>
-        </p:spPr>
-        <p:style>
-          <a:lnRef idx="1">
-            <a:schemeClr val="accent1"/>
-          </a:lnRef>
-          <a:fillRef idx="3">
-            <a:schemeClr val="accent1"/>
-          </a:fillRef>
-          <a:effectRef idx="2">
-            <a:schemeClr val="accent1"/>
-          </a:effectRef>
-          <a:fontRef idx="minor">
-            <a:schemeClr val="lt1"/>
-          </a:fontRef>
-        </p:style>
-        <p:txBody>
-          <a:bodyPr rtlCol="0" anchor="ctr"/>
-          <a:lstStyle/>
-          <a:p>
-            <a:pPr algn="ctr"/>
-          </a:p>
-        </p:txBody>
-      </p:sp>
-      <p:sp>
-        <p:nvSpPr>
-          <p:cNvPr id="3" name="Rounded Rectangle 2"/>
-          <p:cNvSpPr/>
-          <p:nvPr/>
-        </p:nvSpPr>
-        <p:spPr>
-          <a:xfrm>
-            <a:off x="9942271" y="457200"/>
-            <a:ext cx="1700784" cy="457200"/>
-          </a:xfrm>
-          <a:prstGeom prst="roundRect">
+            <a:off x="548640" y="2926080"/>
+            <a:ext cx="164592" cy="1005840"/>
+          </a:xfrm>
+          <a:prstGeom prst="rect">
             <a:avLst/>
           </a:prstGeom>
           <a:solidFill>
@@ -13840,32 +13639,23 @@
           </a:fontRef>
         </p:style>
         <p:txBody>
-          <a:bodyPr rtlCol="0" anchor="ctr" wrap="none" tIns="0" bIns="0"/>
+          <a:bodyPr rtlCol="0" anchor="ctr"/>
           <a:lstStyle/>
           <a:p>
             <a:pPr algn="ctr"/>
-            <a:r>
-              <a:rPr sz="1400" b="1">
-                <a:solidFill>
-                  <a:srgbClr val="FFFFFF"/>
-                </a:solidFill>
-                <a:latin typeface="Arial"/>
-              </a:rPr>
-              <a:t>LỜI GIẢI</a:t>
-            </a:r>
-          </a:p>
-        </p:txBody>
-      </p:sp>
-      <p:sp>
-        <p:nvSpPr>
-          <p:cNvPr id="4" name="TextBox 3"/>
+          </a:p>
+        </p:txBody>
+      </p:sp>
+      <p:sp>
+        <p:nvSpPr>
+          <p:cNvPr id="3" name="TextBox 2"/>
           <p:cNvSpPr txBox="1"/>
           <p:nvPr/>
         </p:nvSpPr>
         <p:spPr>
           <a:xfrm>
-            <a:off x="731520" y="274320"/>
-            <a:ext cx="9272016" cy="868680"/>
+            <a:off x="914400" y="2743200"/>
+            <a:ext cx="10515600" cy="1371600"/>
           </a:xfrm>
           <a:prstGeom prst="rect">
             <a:avLst/>
@@ -13873,292 +13663,24 @@
           <a:noFill/>
         </p:spPr>
         <p:txBody>
-          <a:bodyPr wrap="square" anchor="ctr">
+          <a:bodyPr wrap="square" anchor="ctr" lIns="45720" rIns="45720">
             <a:spAutoFit/>
           </a:bodyPr>
           <a:lstStyle/>
           <a:p>
-            <a:r>
-              <a:rPr sz="3600" b="1">
-                <a:solidFill>
-                  <a:srgbClr val="1E40AF"/>
-                </a:solidFill>
-                <a:latin typeface="Arial"/>
-              </a:rPr>
-              <a:t>NGHĨA CỦA TỪ HÁN VIỆT</a:t>
-            </a:r>
-          </a:p>
-        </p:txBody>
-      </p:sp>
-      <p:sp>
-        <p:nvSpPr>
-          <p:cNvPr id="5" name="Rectangle 4"/>
-          <p:cNvSpPr/>
-          <p:nvPr/>
-        </p:nvSpPr>
-        <p:spPr>
-          <a:xfrm>
-            <a:off x="457200" y="1207008"/>
-            <a:ext cx="11274552" cy="22000"/>
-          </a:xfrm>
-          <a:prstGeom prst="rect">
-            <a:avLst/>
-          </a:prstGeom>
-          <a:solidFill>
-            <a:srgbClr val="E2E8F0"/>
-          </a:solidFill>
-          <a:ln>
-            <a:noFill/>
-          </a:ln>
-          <a:effectLst/>
-        </p:spPr>
-        <p:style>
-          <a:lnRef idx="1">
-            <a:schemeClr val="accent1"/>
-          </a:lnRef>
-          <a:fillRef idx="3">
-            <a:schemeClr val="accent1"/>
-          </a:fillRef>
-          <a:effectRef idx="2">
-            <a:schemeClr val="accent1"/>
-          </a:effectRef>
-          <a:fontRef idx="minor">
-            <a:schemeClr val="lt1"/>
-          </a:fontRef>
-        </p:style>
-        <p:txBody>
-          <a:bodyPr rtlCol="0" anchor="ctr"/>
-          <a:lstStyle/>
-          <a:p>
-            <a:pPr algn="ctr"/>
-          </a:p>
-        </p:txBody>
-      </p:sp>
-      <p:sp>
-        <p:nvSpPr>
-          <p:cNvPr id="6" name="TextBox 5"/>
-          <p:cNvSpPr txBox="1"/>
-          <p:nvPr/>
-        </p:nvSpPr>
-        <p:spPr>
-          <a:xfrm>
-            <a:off x="457200" y="6355080"/>
-            <a:ext cx="11274552" cy="365760"/>
-          </a:xfrm>
-          <a:prstGeom prst="rect">
-            <a:avLst/>
-          </a:prstGeom>
-          <a:noFill/>
-        </p:spPr>
-        <p:txBody>
-          <a:bodyPr wrap="none">
-            <a:spAutoFit/>
-          </a:bodyPr>
-          <a:lstStyle/>
-          <a:p>
-            <a:pPr algn="r"/>
-            <a:r>
-              <a:rPr sz="1200">
-                <a:solidFill>
-                  <a:srgbClr val="64748B"/>
-                </a:solidFill>
-                <a:latin typeface="Calibri"/>
-              </a:rPr>
-              <a:t>Ngữ văn 10 · Bài 1: Sức Hấp Dẫn Của Truyện Kể          33</a:t>
-            </a:r>
-          </a:p>
-        </p:txBody>
-      </p:sp>
-      <p:sp>
-        <p:nvSpPr>
-          <p:cNvPr id="7" name="TextBox 6"/>
-          <p:cNvSpPr txBox="1"/>
-          <p:nvPr/>
-        </p:nvSpPr>
-        <p:spPr>
-          <a:xfrm>
-            <a:off x="731520" y="1463040"/>
-            <a:ext cx="10789920" cy="3474720"/>
-          </a:xfrm>
-          <a:prstGeom prst="rect">
-            <a:avLst/>
-          </a:prstGeom>
-          <a:noFill/>
-        </p:spPr>
-        <p:txBody>
-          <a:bodyPr wrap="square" anchor="t" lIns="45720" rIns="45720">
-            <a:spAutoFit/>
-          </a:bodyPr>
-          <a:lstStyle/>
-          <a:p>
-            <a:pPr algn="l" marL="365760" indent="-365760">
+            <a:pPr algn="l">
               <a:spcAft>
                 <a:spcPts val="800"/>
               </a:spcAft>
-              <a:buClr>
-                <a:srgbClr val="1E40AF"/>
-              </a:buClr>
-              <a:buFont typeface="Arial"/>
-              <a:buChar char="•"/>
             </a:pPr>
             <a:r>
-              <a:rPr sz="2300">
-                <a:solidFill>
-                  <a:srgbClr val="1E293B"/>
+              <a:rPr sz="3600" b="1">
+                <a:solidFill>
+                  <a:srgbClr val="1E40AF"/>
                 </a:solidFill>
                 <a:latin typeface="Calibri"/>
               </a:rPr>
-              <a:t>Tiên triều: triều vua trước.</a:t>
-            </a:r>
-          </a:p>
-          <a:p>
-            <a:pPr algn="l" marL="365760" indent="-365760">
-              <a:spcAft>
-                <a:spcPts val="800"/>
-              </a:spcAft>
-              <a:buClr>
-                <a:srgbClr val="1E40AF"/>
-              </a:buClr>
-              <a:buFont typeface="Arial"/>
-              <a:buChar char="•"/>
-            </a:pPr>
-            <a:r>
-              <a:rPr sz="2300">
-                <a:solidFill>
-                  <a:srgbClr val="1E293B"/>
-                </a:solidFill>
-                <a:latin typeface="Calibri"/>
-              </a:rPr>
-              <a:t>Hàn sĩ: học trò nghèo.</a:t>
-            </a:r>
-          </a:p>
-          <a:p>
-            <a:pPr algn="l" marL="365760" indent="-365760">
-              <a:spcAft>
-                <a:spcPts val="800"/>
-              </a:spcAft>
-              <a:buClr>
-                <a:srgbClr val="1E40AF"/>
-              </a:buClr>
-              <a:buFont typeface="Arial"/>
-              <a:buChar char="•"/>
-            </a:pPr>
-            <a:r>
-              <a:rPr sz="2300">
-                <a:solidFill>
-                  <a:srgbClr val="1E293B"/>
-                </a:solidFill>
-                <a:latin typeface="Calibri"/>
-              </a:rPr>
-              <a:t>Khoan dung: rộng lượng tha thứ.</a:t>
-            </a:r>
-          </a:p>
-          <a:p>
-            <a:pPr algn="l" marL="365760" indent="-365760">
-              <a:spcAft>
-                <a:spcPts val="800"/>
-              </a:spcAft>
-              <a:buClr>
-                <a:srgbClr val="1E40AF"/>
-              </a:buClr>
-              <a:buFont typeface="Arial"/>
-              <a:buChar char="•"/>
-            </a:pPr>
-            <a:r>
-              <a:rPr sz="2300">
-                <a:solidFill>
-                  <a:srgbClr val="1E293B"/>
-                </a:solidFill>
-                <a:latin typeface="Calibri"/>
-              </a:rPr>
-              <a:t>Hiếu sinh: quý trọng sự sống.</a:t>
-            </a:r>
-          </a:p>
-        </p:txBody>
-      </p:sp>
-      <p:sp>
-        <p:nvSpPr>
-          <p:cNvPr id="8" name="Rounded Rectangle 7"/>
-          <p:cNvSpPr/>
-          <p:nvPr/>
-        </p:nvSpPr>
-        <p:spPr>
-          <a:xfrm>
-            <a:off x="731520" y="5074920"/>
-            <a:ext cx="10789920" cy="731520"/>
-          </a:xfrm>
-          <a:prstGeom prst="roundRect">
-            <a:avLst>
-              <a:gd name="adj" fmla="val 8000"/>
-            </a:avLst>
-          </a:prstGeom>
-          <a:solidFill>
-            <a:srgbClr val="FEF2F2"/>
-          </a:solidFill>
-          <a:ln w="19050">
-            <a:solidFill>
-              <a:srgbClr val="991B1B"/>
-            </a:solidFill>
-          </a:ln>
-          <a:effectLst/>
-        </p:spPr>
-        <p:style>
-          <a:lnRef idx="1">
-            <a:schemeClr val="accent1"/>
-          </a:lnRef>
-          <a:fillRef idx="3">
-            <a:schemeClr val="accent1"/>
-          </a:fillRef>
-          <a:effectRef idx="2">
-            <a:schemeClr val="accent1"/>
-          </a:effectRef>
-          <a:fontRef idx="minor">
-            <a:schemeClr val="lt1"/>
-          </a:fontRef>
-        </p:style>
-        <p:txBody>
-          <a:bodyPr rtlCol="0" anchor="ctr"/>
-          <a:lstStyle/>
-          <a:p>
-            <a:pPr algn="ctr"/>
-          </a:p>
-        </p:txBody>
-      </p:sp>
-      <p:sp>
-        <p:nvSpPr>
-          <p:cNvPr id="9" name="TextBox 8"/>
-          <p:cNvSpPr txBox="1"/>
-          <p:nvPr/>
-        </p:nvSpPr>
-        <p:spPr>
-          <a:xfrm>
-            <a:off x="914400" y="5074920"/>
-            <a:ext cx="10424160" cy="731520"/>
-          </a:xfrm>
-          <a:prstGeom prst="rect">
-            <a:avLst/>
-          </a:prstGeom>
-          <a:noFill/>
-        </p:spPr>
-        <p:txBody>
-          <a:bodyPr wrap="square" anchor="ctr" lIns="45720" rIns="45720">
-            <a:spAutoFit/>
-          </a:bodyPr>
-          <a:lstStyle/>
-          <a:p>
-            <a:pPr algn="l">
-              <a:spcAft>
-                <a:spcPts val="400"/>
-              </a:spcAft>
-            </a:pPr>
-            <a:r>
-              <a:rPr sz="2400" b="1">
-                <a:solidFill>
-                  <a:srgbClr val="991B1B"/>
-                </a:solidFill>
-                <a:latin typeface="Calibri"/>
-              </a:rPr>
-              <a:t>Dùng từ Hán Việt đúng nghĩa, đúng sắc thái.</a:t>
+              <a:t>TIẾT 9 – 11: VIẾT – NÓI VÀ NGHE</a:t>
             </a:r>
           </a:p>
         </p:txBody>
@@ -14241,14 +13763,14 @@
         </p:nvSpPr>
         <p:spPr>
           <a:xfrm>
-            <a:off x="10253167" y="457200"/>
-            <a:ext cx="1389888" cy="457200"/>
+            <a:off x="10097719" y="457200"/>
+            <a:ext cx="1545336" cy="457200"/>
           </a:xfrm>
           <a:prstGeom prst="roundRect">
             <a:avLst/>
           </a:prstGeom>
           <a:solidFill>
-            <a:srgbClr val="1E40AF"/>
+            <a:srgbClr val="166534"/>
           </a:solidFill>
           <a:ln>
             <a:noFill/>
@@ -14281,7 +13803,7 @@
                 </a:solidFill>
                 <a:latin typeface="Arial"/>
               </a:rPr>
-              <a:t>ĐỀ BÀI</a:t>
+              <a:t>GHI NHỚ</a:t>
             </a:r>
           </a:p>
         </p:txBody>
@@ -14295,7 +13817,7 @@
         <p:spPr>
           <a:xfrm>
             <a:off x="731520" y="274320"/>
-            <a:ext cx="9582912" cy="868680"/>
+            <a:ext cx="9427464" cy="868680"/>
           </a:xfrm>
           <a:prstGeom prst="rect">
             <a:avLst/>
@@ -14315,7 +13837,7 @@
                 </a:solidFill>
                 <a:latin typeface="Arial"/>
               </a:rPr>
-              <a:t>SỬA LỖI DÙNG TỪ HÁN VIỆT</a:t>
+              <a:t>VIẾT BÀI NGHỊ LUẬN PHÂN TÍCH TRUYỆN</a:t>
             </a:r>
           </a:p>
         </p:txBody>
@@ -14408,7 +13930,7 @@
         <p:spPr>
           <a:xfrm>
             <a:off x="731520" y="1463040"/>
-            <a:ext cx="10789920" cy="3566160"/>
+            <a:ext cx="10789920" cy="4754880"/>
           </a:xfrm>
           <a:prstGeom prst="rect">
             <a:avLst/>
@@ -14421,106 +13943,87 @@
           </a:bodyPr>
           <a:lstStyle/>
           <a:p>
-            <a:pPr algn="l">
+            <a:pPr algn="l" marL="365760" indent="-365760">
               <a:spcAft>
                 <a:spcPts val="800"/>
               </a:spcAft>
+              <a:buClr>
+                <a:srgbClr val="1E40AF"/>
+              </a:buClr>
+              <a:buFont typeface="Arial"/>
+              <a:buChar char="•"/>
             </a:pPr>
             <a:r>
-              <a:rPr sz="2600" b="1">
+              <a:rPr sz="2400">
                 <a:solidFill>
                   <a:srgbClr val="1E293B"/>
                 </a:solidFill>
                 <a:latin typeface="Calibri"/>
               </a:rPr>
-              <a:t>Tìm và sửa lỗi dùng từ: “Anh ấy luôn bàng quang trước việc chung.”; “Tiếng Anh là yếu điểm của em.”</a:t>
-            </a:r>
-          </a:p>
-        </p:txBody>
-      </p:sp>
-      <p:sp>
-        <p:nvSpPr>
-          <p:cNvPr id="8" name="Rounded Rectangle 7"/>
-          <p:cNvSpPr/>
-          <p:nvPr/>
-        </p:nvSpPr>
-        <p:spPr>
-          <a:xfrm>
-            <a:off x="731520" y="5120640"/>
-            <a:ext cx="10789920" cy="693420"/>
-          </a:xfrm>
-          <a:prstGeom prst="roundRect">
-            <a:avLst>
-              <a:gd name="adj" fmla="val 8000"/>
-            </a:avLst>
-          </a:prstGeom>
-          <a:solidFill>
-            <a:srgbClr val="EFF4FF"/>
-          </a:solidFill>
-          <a:ln w="19050">
-            <a:solidFill>
-              <a:srgbClr val="1E40AF"/>
-            </a:solidFill>
-          </a:ln>
-          <a:effectLst/>
-        </p:spPr>
-        <p:style>
-          <a:lnRef idx="1">
-            <a:schemeClr val="accent1"/>
-          </a:lnRef>
-          <a:fillRef idx="3">
-            <a:schemeClr val="accent1"/>
-          </a:fillRef>
-          <a:effectRef idx="2">
-            <a:schemeClr val="accent1"/>
-          </a:effectRef>
-          <a:fontRef idx="minor">
-            <a:schemeClr val="lt1"/>
-          </a:fontRef>
-        </p:style>
-        <p:txBody>
-          <a:bodyPr rtlCol="0" anchor="ctr"/>
-          <a:lstStyle/>
-          <a:p>
-            <a:pPr algn="ctr"/>
-          </a:p>
-        </p:txBody>
-      </p:sp>
-      <p:sp>
-        <p:nvSpPr>
-          <p:cNvPr id="9" name="TextBox 8"/>
-          <p:cNvSpPr txBox="1"/>
-          <p:nvPr/>
-        </p:nvSpPr>
-        <p:spPr>
-          <a:xfrm>
-            <a:off x="914400" y="5120640"/>
-            <a:ext cx="10424160" cy="693420"/>
-          </a:xfrm>
-          <a:prstGeom prst="rect">
-            <a:avLst/>
-          </a:prstGeom>
-          <a:noFill/>
-        </p:spPr>
-        <p:txBody>
-          <a:bodyPr wrap="square" anchor="ctr" lIns="45720" rIns="45720">
-            <a:spAutoFit/>
-          </a:bodyPr>
-          <a:lstStyle/>
-          <a:p>
-            <a:pPr algn="l">
+              <a:t>Giới thiệu tác phẩm, nêu chủ đề và nét đặc sắc nghệ thuật sẽ phân tích.</a:t>
+            </a:r>
+          </a:p>
+          <a:p>
+            <a:pPr algn="l" marL="365760" indent="-365760">
               <a:spcAft>
-                <a:spcPts val="400"/>
+                <a:spcPts val="800"/>
               </a:spcAft>
+              <a:buClr>
+                <a:srgbClr val="1E40AF"/>
+              </a:buClr>
+              <a:buFont typeface="Arial"/>
+              <a:buChar char="•"/>
             </a:pPr>
             <a:r>
-              <a:rPr sz="2200" b="1">
-                <a:solidFill>
-                  <a:srgbClr val="1E40AF"/>
+              <a:rPr sz="2400">
+                <a:solidFill>
+                  <a:srgbClr val="1E293B"/>
                 </a:solidFill>
                 <a:latin typeface="Calibri"/>
               </a:rPr>
-              <a:t>💡 Chú ý các từ gần âm.</a:t>
+              <a:t>Phân tích chủ đề: căn cứ xác định (nhan đề, nhân vật, chi tiết).</a:t>
+            </a:r>
+          </a:p>
+          <a:p>
+            <a:pPr algn="l" marL="365760" indent="-365760">
+              <a:spcAft>
+                <a:spcPts val="800"/>
+              </a:spcAft>
+              <a:buClr>
+                <a:srgbClr val="1E40AF"/>
+              </a:buClr>
+              <a:buFont typeface="Arial"/>
+              <a:buChar char="•"/>
+            </a:pPr>
+            <a:r>
+              <a:rPr sz="2400">
+                <a:solidFill>
+                  <a:srgbClr val="1E293B"/>
+                </a:solidFill>
+                <a:latin typeface="Calibri"/>
+              </a:rPr>
+              <a:t>Phân tích nét đặc sắc về hình thức: cốt truyện, nhân vật, chi tiết kì ảo, lời kể.</a:t>
+            </a:r>
+          </a:p>
+          <a:p>
+            <a:pPr algn="l" marL="365760" indent="-365760">
+              <a:spcAft>
+                <a:spcPts val="800"/>
+              </a:spcAft>
+              <a:buClr>
+                <a:srgbClr val="1E40AF"/>
+              </a:buClr>
+              <a:buFont typeface="Arial"/>
+              <a:buChar char="•"/>
+            </a:pPr>
+            <a:r>
+              <a:rPr sz="2400">
+                <a:solidFill>
+                  <a:srgbClr val="1E293B"/>
+                </a:solidFill>
+                <a:latin typeface="Calibri"/>
+              </a:rPr>
+              <a:t>Đánh giá giá trị tác phẩm; lí lẽ và bằng chứng thuyết phục.</a:t>
             </a:r>
           </a:p>
         </p:txBody>
@@ -14603,14 +14106,14 @@
         </p:nvSpPr>
         <p:spPr>
           <a:xfrm>
-            <a:off x="9942271" y="457200"/>
-            <a:ext cx="1700784" cy="457200"/>
+            <a:off x="10097719" y="457200"/>
+            <a:ext cx="1545336" cy="457200"/>
           </a:xfrm>
           <a:prstGeom prst="roundRect">
             <a:avLst/>
           </a:prstGeom>
           <a:solidFill>
-            <a:srgbClr val="991B1B"/>
+            <a:srgbClr val="166534"/>
           </a:solidFill>
           <a:ln>
             <a:noFill/>
@@ -14643,7 +14146,7 @@
                 </a:solidFill>
                 <a:latin typeface="Arial"/>
               </a:rPr>
-              <a:t>LỜI GIẢI</a:t>
+              <a:t>CỦNG CỐ</a:t>
             </a:r>
           </a:p>
         </p:txBody>
@@ -14657,7 +14160,7 @@
         <p:spPr>
           <a:xfrm>
             <a:off x="731520" y="274320"/>
-            <a:ext cx="9272016" cy="868680"/>
+            <a:ext cx="9427464" cy="868680"/>
           </a:xfrm>
           <a:prstGeom prst="rect">
             <a:avLst/>
@@ -14677,7 +14180,7 @@
                 </a:solidFill>
                 <a:latin typeface="Arial"/>
               </a:rPr>
-              <a:t>SỬA LỖI DÙNG TỪ HÁN VIỆT</a:t>
+              <a:t>SƠ ĐỒ TƯ DUY</a:t>
             </a:r>
           </a:p>
         </p:txBody>
@@ -14761,158 +14264,30 @@
           </a:p>
         </p:txBody>
       </p:sp>
-      <p:sp>
-        <p:nvSpPr>
-          <p:cNvPr id="7" name="TextBox 6"/>
-          <p:cNvSpPr txBox="1"/>
-          <p:nvPr/>
-        </p:nvSpPr>
-        <p:spPr>
-          <a:xfrm>
-            <a:off x="731520" y="1463040"/>
-            <a:ext cx="10789920" cy="3474720"/>
-          </a:xfrm>
-          <a:prstGeom prst="rect">
-            <a:avLst/>
-          </a:prstGeom>
-          <a:noFill/>
-        </p:spPr>
-        <p:txBody>
-          <a:bodyPr wrap="square" anchor="t" lIns="45720" rIns="45720">
-            <a:spAutoFit/>
-          </a:bodyPr>
-          <a:lstStyle/>
-          <a:p>
-            <a:pPr algn="l" marL="365760" indent="-365760">
-              <a:spcAft>
-                <a:spcPts val="800"/>
-              </a:spcAft>
-              <a:buClr>
-                <a:srgbClr val="1E40AF"/>
-              </a:buClr>
-              <a:buFont typeface="Arial"/>
-              <a:buChar char="•"/>
-            </a:pPr>
-            <a:r>
-              <a:rPr sz="2300">
-                <a:solidFill>
-                  <a:srgbClr val="1E293B"/>
-                </a:solidFill>
-                <a:latin typeface="Calibri"/>
-              </a:rPr>
-              <a:t>“bàng quang” → “bàng quan” (thờ ơ, đứng ngoài).</a:t>
-            </a:r>
-          </a:p>
-          <a:p>
-            <a:pPr algn="l" marL="365760" indent="-365760">
-              <a:spcAft>
-                <a:spcPts val="800"/>
-              </a:spcAft>
-              <a:buClr>
-                <a:srgbClr val="1E40AF"/>
-              </a:buClr>
-              <a:buFont typeface="Arial"/>
-              <a:buChar char="•"/>
-            </a:pPr>
-            <a:r>
-              <a:rPr sz="2300">
-                <a:solidFill>
-                  <a:srgbClr val="1E293B"/>
-                </a:solidFill>
-                <a:latin typeface="Calibri"/>
-              </a:rPr>
-              <a:t>“yếu điểm” (điểm quan trọng) → “điểm yếu”.</a:t>
-            </a:r>
-          </a:p>
-        </p:txBody>
-      </p:sp>
-      <p:sp>
-        <p:nvSpPr>
-          <p:cNvPr id="8" name="Rounded Rectangle 7"/>
-          <p:cNvSpPr/>
-          <p:nvPr/>
-        </p:nvSpPr>
-        <p:spPr>
-          <a:xfrm>
-            <a:off x="731520" y="5074920"/>
-            <a:ext cx="10789920" cy="731520"/>
-          </a:xfrm>
-          <a:prstGeom prst="roundRect">
-            <a:avLst>
-              <a:gd name="adj" fmla="val 8000"/>
-            </a:avLst>
-          </a:prstGeom>
-          <a:solidFill>
-            <a:srgbClr val="FEF2F2"/>
-          </a:solidFill>
-          <a:ln w="19050">
-            <a:solidFill>
-              <a:srgbClr val="991B1B"/>
-            </a:solidFill>
-          </a:ln>
-          <a:effectLst/>
-        </p:spPr>
-        <p:style>
-          <a:lnRef idx="1">
-            <a:schemeClr val="accent1"/>
-          </a:lnRef>
-          <a:fillRef idx="3">
-            <a:schemeClr val="accent1"/>
-          </a:fillRef>
-          <a:effectRef idx="2">
-            <a:schemeClr val="accent1"/>
-          </a:effectRef>
-          <a:fontRef idx="minor">
-            <a:schemeClr val="lt1"/>
-          </a:fontRef>
-        </p:style>
-        <p:txBody>
-          <a:bodyPr rtlCol="0" anchor="ctr"/>
-          <a:lstStyle/>
-          <a:p>
-            <a:pPr algn="ctr"/>
-          </a:p>
-        </p:txBody>
-      </p:sp>
-      <p:sp>
-        <p:nvSpPr>
-          <p:cNvPr id="9" name="TextBox 8"/>
-          <p:cNvSpPr txBox="1"/>
-          <p:nvPr/>
-        </p:nvSpPr>
-        <p:spPr>
-          <a:xfrm>
-            <a:off x="914400" y="5074920"/>
-            <a:ext cx="10424160" cy="731520"/>
-          </a:xfrm>
-          <a:prstGeom prst="rect">
-            <a:avLst/>
-          </a:prstGeom>
-          <a:noFill/>
-        </p:spPr>
-        <p:txBody>
-          <a:bodyPr wrap="square" anchor="ctr" lIns="45720" rIns="45720">
-            <a:spAutoFit/>
-          </a:bodyPr>
-          <a:lstStyle/>
-          <a:p>
-            <a:pPr algn="l">
-              <a:spcAft>
-                <a:spcPts val="400"/>
-              </a:spcAft>
-            </a:pPr>
-            <a:r>
-              <a:rPr sz="2400" b="1">
-                <a:solidFill>
-                  <a:srgbClr val="991B1B"/>
-                </a:solidFill>
-                <a:latin typeface="Calibri"/>
-              </a:rPr>
-              <a:t>Hiểu đúng nghĩa từng yếu tố để tránh lỗi.</a:t>
-            </a:r>
-          </a:p>
-        </p:txBody>
-      </p:sp>
+      <p:pic>
+        <p:nvPicPr>
+          <p:cNvPr id="7" name="Picture 6" descr="SoDoTuDuy_NGUVAN10_Bai1_SucHapDanCuaTruyenKe_T1-11.png"/>
+          <p:cNvPicPr>
+            <a:picLocks noChangeAspect="1"/>
+          </p:cNvPicPr>
+          <p:nvPr/>
+        </p:nvPicPr>
+        <p:blipFill>
+          <a:blip r:embed="rId2"/>
+          <a:stretch>
+            <a:fillRect/>
+          </a:stretch>
+        </p:blipFill>
+        <p:spPr>
+          <a:xfrm>
+            <a:off x="1788855" y="1371600"/>
+            <a:ext cx="8675250" cy="4846320"/>
+          </a:xfrm>
+          <a:prstGeom prst="rect">
+            <a:avLst/>
+          </a:prstGeom>
+        </p:spPr>
+      </p:pic>
     </p:spTree>
   </p:cSld>
   <p:clrMapOvr>
@@ -14922,115 +14297,6 @@
 </file>
 
 <file path=ppt/slides/slide36.xml><?xml version="1.0" encoding="utf-8"?>
-<p:sld xmlns:a="http://schemas.openxmlformats.org/drawingml/2006/main" xmlns:p="http://schemas.openxmlformats.org/presentationml/2006/main" xmlns:r="http://schemas.openxmlformats.org/officeDocument/2006/relationships">
-  <p:cSld>
-    <p:bg>
-      <p:bgPr>
-        <a:solidFill>
-          <a:srgbClr val="F8F9FA"/>
-        </a:solidFill>
-        <a:effectLst/>
-      </p:bgPr>
-    </p:bg>
-    <p:spTree>
-      <p:nvGrpSpPr>
-        <p:cNvPr id="1" name=""/>
-        <p:cNvGrpSpPr/>
-        <p:nvPr/>
-      </p:nvGrpSpPr>
-      <p:grpSpPr/>
-      <p:sp>
-        <p:nvSpPr>
-          <p:cNvPr id="2" name="Rectangle 1"/>
-          <p:cNvSpPr/>
-          <p:nvPr/>
-        </p:nvSpPr>
-        <p:spPr>
-          <a:xfrm>
-            <a:off x="548640" y="2926080"/>
-            <a:ext cx="164592" cy="1005840"/>
-          </a:xfrm>
-          <a:prstGeom prst="rect">
-            <a:avLst/>
-          </a:prstGeom>
-          <a:solidFill>
-            <a:srgbClr val="991B1B"/>
-          </a:solidFill>
-          <a:ln>
-            <a:noFill/>
-          </a:ln>
-          <a:effectLst/>
-        </p:spPr>
-        <p:style>
-          <a:lnRef idx="1">
-            <a:schemeClr val="accent1"/>
-          </a:lnRef>
-          <a:fillRef idx="3">
-            <a:schemeClr val="accent1"/>
-          </a:fillRef>
-          <a:effectRef idx="2">
-            <a:schemeClr val="accent1"/>
-          </a:effectRef>
-          <a:fontRef idx="minor">
-            <a:schemeClr val="lt1"/>
-          </a:fontRef>
-        </p:style>
-        <p:txBody>
-          <a:bodyPr rtlCol="0" anchor="ctr"/>
-          <a:lstStyle/>
-          <a:p>
-            <a:pPr algn="ctr"/>
-          </a:p>
-        </p:txBody>
-      </p:sp>
-      <p:sp>
-        <p:nvSpPr>
-          <p:cNvPr id="3" name="TextBox 2"/>
-          <p:cNvSpPr txBox="1"/>
-          <p:nvPr/>
-        </p:nvSpPr>
-        <p:spPr>
-          <a:xfrm>
-            <a:off x="914400" y="2743200"/>
-            <a:ext cx="10515600" cy="1371600"/>
-          </a:xfrm>
-          <a:prstGeom prst="rect">
-            <a:avLst/>
-          </a:prstGeom>
-          <a:noFill/>
-        </p:spPr>
-        <p:txBody>
-          <a:bodyPr wrap="square" anchor="ctr" lIns="45720" rIns="45720">
-            <a:spAutoFit/>
-          </a:bodyPr>
-          <a:lstStyle/>
-          <a:p>
-            <a:pPr algn="l">
-              <a:spcAft>
-                <a:spcPts val="800"/>
-              </a:spcAft>
-            </a:pPr>
-            <a:r>
-              <a:rPr sz="3600" b="1">
-                <a:solidFill>
-                  <a:srgbClr val="1E40AF"/>
-                </a:solidFill>
-                <a:latin typeface="Calibri"/>
-              </a:rPr>
-              <a:t>TIẾT 9 – 11: VIẾT – NÓI VÀ NGHE</a:t>
-            </a:r>
-          </a:p>
-        </p:txBody>
-      </p:sp>
-    </p:spTree>
-  </p:cSld>
-  <p:clrMapOvr>
-    <a:masterClrMapping/>
-  </p:clrMapOvr>
-</p:sld>
-</file>
-
-<file path=ppt/slides/slide37.xml><?xml version="1.0" encoding="utf-8"?>
 <p:sld xmlns:a="http://schemas.openxmlformats.org/drawingml/2006/main" xmlns:p="http://schemas.openxmlformats.org/presentationml/2006/main" xmlns:r="http://schemas.openxmlformats.org/officeDocument/2006/relationships">
   <p:cSld>
     <p:bg>
@@ -15107,7 +14373,7 @@
             <a:avLst/>
           </a:prstGeom>
           <a:solidFill>
-            <a:srgbClr val="166534"/>
+            <a:srgbClr val="991B1B"/>
           </a:solidFill>
           <a:ln>
             <a:noFill/>
@@ -15140,7 +14406,7 @@
                 </a:solidFill>
                 <a:latin typeface="Arial"/>
               </a:rPr>
-              <a:t>GHI NHỚ</a:t>
+              <a:t>CỦNG CỐ</a:t>
             </a:r>
           </a:p>
         </p:txBody>
@@ -15174,7 +14440,7 @@
                 </a:solidFill>
                 <a:latin typeface="Arial"/>
               </a:rPr>
-              <a:t>VIẾT BÀI NGHỊ LUẬN PHÂN TÍCH TRUYỆN</a:t>
+              <a:t>BÀI TẬP CỦA BẠN</a:t>
             </a:r>
           </a:p>
         </p:txBody>
@@ -15253,610 +14519,7 @@
                 </a:solidFill>
                 <a:latin typeface="Calibri"/>
               </a:rPr>
-              <a:t>Ngữ văn 10 · Bài 1: Sức Hấp Dẫn Của Truyện Kể          37</a:t>
-            </a:r>
-          </a:p>
-        </p:txBody>
-      </p:sp>
-      <p:sp>
-        <p:nvSpPr>
-          <p:cNvPr id="7" name="TextBox 6"/>
-          <p:cNvSpPr txBox="1"/>
-          <p:nvPr/>
-        </p:nvSpPr>
-        <p:spPr>
-          <a:xfrm>
-            <a:off x="731520" y="1463040"/>
-            <a:ext cx="10789920" cy="4754880"/>
-          </a:xfrm>
-          <a:prstGeom prst="rect">
-            <a:avLst/>
-          </a:prstGeom>
-          <a:noFill/>
-        </p:spPr>
-        <p:txBody>
-          <a:bodyPr wrap="square" anchor="t" lIns="45720" rIns="45720">
-            <a:spAutoFit/>
-          </a:bodyPr>
-          <a:lstStyle/>
-          <a:p>
-            <a:pPr algn="l" marL="365760" indent="-365760">
-              <a:spcAft>
-                <a:spcPts val="800"/>
-              </a:spcAft>
-              <a:buClr>
-                <a:srgbClr val="1E40AF"/>
-              </a:buClr>
-              <a:buFont typeface="Arial"/>
-              <a:buChar char="•"/>
-            </a:pPr>
-            <a:r>
-              <a:rPr sz="2400">
-                <a:solidFill>
-                  <a:srgbClr val="1E293B"/>
-                </a:solidFill>
-                <a:latin typeface="Calibri"/>
-              </a:rPr>
-              <a:t>Giới thiệu tác phẩm, nêu chủ đề và nét đặc sắc nghệ thuật sẽ phân tích.</a:t>
-            </a:r>
-          </a:p>
-          <a:p>
-            <a:pPr algn="l" marL="365760" indent="-365760">
-              <a:spcAft>
-                <a:spcPts val="800"/>
-              </a:spcAft>
-              <a:buClr>
-                <a:srgbClr val="1E40AF"/>
-              </a:buClr>
-              <a:buFont typeface="Arial"/>
-              <a:buChar char="•"/>
-            </a:pPr>
-            <a:r>
-              <a:rPr sz="2400">
-                <a:solidFill>
-                  <a:srgbClr val="1E293B"/>
-                </a:solidFill>
-                <a:latin typeface="Calibri"/>
-              </a:rPr>
-              <a:t>Phân tích chủ đề: căn cứ xác định (nhan đề, nhân vật, chi tiết).</a:t>
-            </a:r>
-          </a:p>
-          <a:p>
-            <a:pPr algn="l" marL="365760" indent="-365760">
-              <a:spcAft>
-                <a:spcPts val="800"/>
-              </a:spcAft>
-              <a:buClr>
-                <a:srgbClr val="1E40AF"/>
-              </a:buClr>
-              <a:buFont typeface="Arial"/>
-              <a:buChar char="•"/>
-            </a:pPr>
-            <a:r>
-              <a:rPr sz="2400">
-                <a:solidFill>
-                  <a:srgbClr val="1E293B"/>
-                </a:solidFill>
-                <a:latin typeface="Calibri"/>
-              </a:rPr>
-              <a:t>Phân tích nét đặc sắc về hình thức: cốt truyện, nhân vật, chi tiết kì ảo, lời kể.</a:t>
-            </a:r>
-          </a:p>
-          <a:p>
-            <a:pPr algn="l" marL="365760" indent="-365760">
-              <a:spcAft>
-                <a:spcPts val="800"/>
-              </a:spcAft>
-              <a:buClr>
-                <a:srgbClr val="1E40AF"/>
-              </a:buClr>
-              <a:buFont typeface="Arial"/>
-              <a:buChar char="•"/>
-            </a:pPr>
-            <a:r>
-              <a:rPr sz="2400">
-                <a:solidFill>
-                  <a:srgbClr val="1E293B"/>
-                </a:solidFill>
-                <a:latin typeface="Calibri"/>
-              </a:rPr>
-              <a:t>Đánh giá giá trị tác phẩm; lí lẽ và bằng chứng thuyết phục.</a:t>
-            </a:r>
-          </a:p>
-        </p:txBody>
-      </p:sp>
-    </p:spTree>
-  </p:cSld>
-  <p:clrMapOvr>
-    <a:masterClrMapping/>
-  </p:clrMapOvr>
-</p:sld>
-</file>
-
-<file path=ppt/slides/slide38.xml><?xml version="1.0" encoding="utf-8"?>
-<p:sld xmlns:a="http://schemas.openxmlformats.org/drawingml/2006/main" xmlns:p="http://schemas.openxmlformats.org/presentationml/2006/main" xmlns:r="http://schemas.openxmlformats.org/officeDocument/2006/relationships">
-  <p:cSld>
-    <p:bg>
-      <p:bgPr>
-        <a:solidFill>
-          <a:srgbClr val="FFFFFF"/>
-        </a:solidFill>
-        <a:effectLst/>
-      </p:bgPr>
-    </p:bg>
-    <p:spTree>
-      <p:nvGrpSpPr>
-        <p:cNvPr id="1" name=""/>
-        <p:cNvGrpSpPr/>
-        <p:nvPr/>
-      </p:nvGrpSpPr>
-      <p:grpSpPr/>
-      <p:sp>
-        <p:nvSpPr>
-          <p:cNvPr id="2" name="Rectangle 1"/>
-          <p:cNvSpPr/>
-          <p:nvPr/>
-        </p:nvSpPr>
-        <p:spPr>
-          <a:xfrm>
-            <a:off x="457200" y="384048"/>
-            <a:ext cx="109728" cy="658368"/>
-          </a:xfrm>
-          <a:prstGeom prst="rect">
-            <a:avLst/>
-          </a:prstGeom>
-          <a:solidFill>
-            <a:srgbClr val="1E40AF"/>
-          </a:solidFill>
-          <a:ln>
-            <a:noFill/>
-          </a:ln>
-          <a:effectLst/>
-        </p:spPr>
-        <p:style>
-          <a:lnRef idx="1">
-            <a:schemeClr val="accent1"/>
-          </a:lnRef>
-          <a:fillRef idx="3">
-            <a:schemeClr val="accent1"/>
-          </a:fillRef>
-          <a:effectRef idx="2">
-            <a:schemeClr val="accent1"/>
-          </a:effectRef>
-          <a:fontRef idx="minor">
-            <a:schemeClr val="lt1"/>
-          </a:fontRef>
-        </p:style>
-        <p:txBody>
-          <a:bodyPr rtlCol="0" anchor="ctr"/>
-          <a:lstStyle/>
-          <a:p>
-            <a:pPr algn="ctr"/>
-          </a:p>
-        </p:txBody>
-      </p:sp>
-      <p:sp>
-        <p:nvSpPr>
-          <p:cNvPr id="3" name="Rounded Rectangle 2"/>
-          <p:cNvSpPr/>
-          <p:nvPr/>
-        </p:nvSpPr>
-        <p:spPr>
-          <a:xfrm>
-            <a:off x="10097719" y="457200"/>
-            <a:ext cx="1545336" cy="457200"/>
-          </a:xfrm>
-          <a:prstGeom prst="roundRect">
-            <a:avLst/>
-          </a:prstGeom>
-          <a:solidFill>
-            <a:srgbClr val="166534"/>
-          </a:solidFill>
-          <a:ln>
-            <a:noFill/>
-          </a:ln>
-          <a:effectLst/>
-        </p:spPr>
-        <p:style>
-          <a:lnRef idx="1">
-            <a:schemeClr val="accent1"/>
-          </a:lnRef>
-          <a:fillRef idx="3">
-            <a:schemeClr val="accent1"/>
-          </a:fillRef>
-          <a:effectRef idx="2">
-            <a:schemeClr val="accent1"/>
-          </a:effectRef>
-          <a:fontRef idx="minor">
-            <a:schemeClr val="lt1"/>
-          </a:fontRef>
-        </p:style>
-        <p:txBody>
-          <a:bodyPr rtlCol="0" anchor="ctr" wrap="none" tIns="0" bIns="0"/>
-          <a:lstStyle/>
-          <a:p>
-            <a:pPr algn="ctr"/>
-            <a:r>
-              <a:rPr sz="1400" b="1">
-                <a:solidFill>
-                  <a:srgbClr val="FFFFFF"/>
-                </a:solidFill>
-                <a:latin typeface="Arial"/>
-              </a:rPr>
-              <a:t>CỦNG CỐ</a:t>
-            </a:r>
-          </a:p>
-        </p:txBody>
-      </p:sp>
-      <p:sp>
-        <p:nvSpPr>
-          <p:cNvPr id="4" name="TextBox 3"/>
-          <p:cNvSpPr txBox="1"/>
-          <p:nvPr/>
-        </p:nvSpPr>
-        <p:spPr>
-          <a:xfrm>
-            <a:off x="731520" y="274320"/>
-            <a:ext cx="9427464" cy="868680"/>
-          </a:xfrm>
-          <a:prstGeom prst="rect">
-            <a:avLst/>
-          </a:prstGeom>
-          <a:noFill/>
-        </p:spPr>
-        <p:txBody>
-          <a:bodyPr wrap="square" anchor="ctr">
-            <a:spAutoFit/>
-          </a:bodyPr>
-          <a:lstStyle/>
-          <a:p>
-            <a:r>
-              <a:rPr sz="3600" b="1">
-                <a:solidFill>
-                  <a:srgbClr val="1E40AF"/>
-                </a:solidFill>
-                <a:latin typeface="Arial"/>
-              </a:rPr>
-              <a:t>SƠ ĐỒ TƯ DUY</a:t>
-            </a:r>
-          </a:p>
-        </p:txBody>
-      </p:sp>
-      <p:sp>
-        <p:nvSpPr>
-          <p:cNvPr id="5" name="Rectangle 4"/>
-          <p:cNvSpPr/>
-          <p:nvPr/>
-        </p:nvSpPr>
-        <p:spPr>
-          <a:xfrm>
-            <a:off x="457200" y="1207008"/>
-            <a:ext cx="11274552" cy="22000"/>
-          </a:xfrm>
-          <a:prstGeom prst="rect">
-            <a:avLst/>
-          </a:prstGeom>
-          <a:solidFill>
-            <a:srgbClr val="E2E8F0"/>
-          </a:solidFill>
-          <a:ln>
-            <a:noFill/>
-          </a:ln>
-          <a:effectLst/>
-        </p:spPr>
-        <p:style>
-          <a:lnRef idx="1">
-            <a:schemeClr val="accent1"/>
-          </a:lnRef>
-          <a:fillRef idx="3">
-            <a:schemeClr val="accent1"/>
-          </a:fillRef>
-          <a:effectRef idx="2">
-            <a:schemeClr val="accent1"/>
-          </a:effectRef>
-          <a:fontRef idx="minor">
-            <a:schemeClr val="lt1"/>
-          </a:fontRef>
-        </p:style>
-        <p:txBody>
-          <a:bodyPr rtlCol="0" anchor="ctr"/>
-          <a:lstStyle/>
-          <a:p>
-            <a:pPr algn="ctr"/>
-          </a:p>
-        </p:txBody>
-      </p:sp>
-      <p:sp>
-        <p:nvSpPr>
-          <p:cNvPr id="6" name="TextBox 5"/>
-          <p:cNvSpPr txBox="1"/>
-          <p:nvPr/>
-        </p:nvSpPr>
-        <p:spPr>
-          <a:xfrm>
-            <a:off x="457200" y="6355080"/>
-            <a:ext cx="11274552" cy="365760"/>
-          </a:xfrm>
-          <a:prstGeom prst="rect">
-            <a:avLst/>
-          </a:prstGeom>
-          <a:noFill/>
-        </p:spPr>
-        <p:txBody>
-          <a:bodyPr wrap="none">
-            <a:spAutoFit/>
-          </a:bodyPr>
-          <a:lstStyle/>
-          <a:p>
-            <a:pPr algn="r"/>
-            <a:r>
-              <a:rPr sz="1200">
-                <a:solidFill>
-                  <a:srgbClr val="64748B"/>
-                </a:solidFill>
-                <a:latin typeface="Calibri"/>
-              </a:rPr>
-              <a:t>Ngữ văn 10 · Bài 1: Sức Hấp Dẫn Của Truyện Kể          38</a:t>
-            </a:r>
-          </a:p>
-        </p:txBody>
-      </p:sp>
-      <p:pic>
-        <p:nvPicPr>
-          <p:cNvPr id="7" name="Picture 6" descr="SoDoTuDuy_NGUVAN10_Bai1_SucHapDanCuaTruyenKe_T1-11.png"/>
-          <p:cNvPicPr>
-            <a:picLocks noChangeAspect="1"/>
-          </p:cNvPicPr>
-          <p:nvPr/>
-        </p:nvPicPr>
-        <p:blipFill>
-          <a:blip r:embed="rId2"/>
-          <a:stretch>
-            <a:fillRect/>
-          </a:stretch>
-        </p:blipFill>
-        <p:spPr>
-          <a:xfrm>
-            <a:off x="1788855" y="1371600"/>
-            <a:ext cx="8675250" cy="4846320"/>
-          </a:xfrm>
-          <a:prstGeom prst="rect">
-            <a:avLst/>
-          </a:prstGeom>
-        </p:spPr>
-      </p:pic>
-    </p:spTree>
-  </p:cSld>
-  <p:clrMapOvr>
-    <a:masterClrMapping/>
-  </p:clrMapOvr>
-</p:sld>
-</file>
-
-<file path=ppt/slides/slide39.xml><?xml version="1.0" encoding="utf-8"?>
-<p:sld xmlns:a="http://schemas.openxmlformats.org/drawingml/2006/main" xmlns:p="http://schemas.openxmlformats.org/presentationml/2006/main" xmlns:r="http://schemas.openxmlformats.org/officeDocument/2006/relationships">
-  <p:cSld>
-    <p:bg>
-      <p:bgPr>
-        <a:solidFill>
-          <a:srgbClr val="FFFFFF"/>
-        </a:solidFill>
-        <a:effectLst/>
-      </p:bgPr>
-    </p:bg>
-    <p:spTree>
-      <p:nvGrpSpPr>
-        <p:cNvPr id="1" name=""/>
-        <p:cNvGrpSpPr/>
-        <p:nvPr/>
-      </p:nvGrpSpPr>
-      <p:grpSpPr/>
-      <p:sp>
-        <p:nvSpPr>
-          <p:cNvPr id="2" name="Rectangle 1"/>
-          <p:cNvSpPr/>
-          <p:nvPr/>
-        </p:nvSpPr>
-        <p:spPr>
-          <a:xfrm>
-            <a:off x="457200" y="384048"/>
-            <a:ext cx="109728" cy="658368"/>
-          </a:xfrm>
-          <a:prstGeom prst="rect">
-            <a:avLst/>
-          </a:prstGeom>
-          <a:solidFill>
-            <a:srgbClr val="1E40AF"/>
-          </a:solidFill>
-          <a:ln>
-            <a:noFill/>
-          </a:ln>
-          <a:effectLst/>
-        </p:spPr>
-        <p:style>
-          <a:lnRef idx="1">
-            <a:schemeClr val="accent1"/>
-          </a:lnRef>
-          <a:fillRef idx="3">
-            <a:schemeClr val="accent1"/>
-          </a:fillRef>
-          <a:effectRef idx="2">
-            <a:schemeClr val="accent1"/>
-          </a:effectRef>
-          <a:fontRef idx="minor">
-            <a:schemeClr val="lt1"/>
-          </a:fontRef>
-        </p:style>
-        <p:txBody>
-          <a:bodyPr rtlCol="0" anchor="ctr"/>
-          <a:lstStyle/>
-          <a:p>
-            <a:pPr algn="ctr"/>
-          </a:p>
-        </p:txBody>
-      </p:sp>
-      <p:sp>
-        <p:nvSpPr>
-          <p:cNvPr id="3" name="Rounded Rectangle 2"/>
-          <p:cNvSpPr/>
-          <p:nvPr/>
-        </p:nvSpPr>
-        <p:spPr>
-          <a:xfrm>
-            <a:off x="10097719" y="457200"/>
-            <a:ext cx="1545336" cy="457200"/>
-          </a:xfrm>
-          <a:prstGeom prst="roundRect">
-            <a:avLst/>
-          </a:prstGeom>
-          <a:solidFill>
-            <a:srgbClr val="991B1B"/>
-          </a:solidFill>
-          <a:ln>
-            <a:noFill/>
-          </a:ln>
-          <a:effectLst/>
-        </p:spPr>
-        <p:style>
-          <a:lnRef idx="1">
-            <a:schemeClr val="accent1"/>
-          </a:lnRef>
-          <a:fillRef idx="3">
-            <a:schemeClr val="accent1"/>
-          </a:fillRef>
-          <a:effectRef idx="2">
-            <a:schemeClr val="accent1"/>
-          </a:effectRef>
-          <a:fontRef idx="minor">
-            <a:schemeClr val="lt1"/>
-          </a:fontRef>
-        </p:style>
-        <p:txBody>
-          <a:bodyPr rtlCol="0" anchor="ctr" wrap="none" tIns="0" bIns="0"/>
-          <a:lstStyle/>
-          <a:p>
-            <a:pPr algn="ctr"/>
-            <a:r>
-              <a:rPr sz="1400" b="1">
-                <a:solidFill>
-                  <a:srgbClr val="FFFFFF"/>
-                </a:solidFill>
-                <a:latin typeface="Arial"/>
-              </a:rPr>
-              <a:t>CỦNG CỐ</a:t>
-            </a:r>
-          </a:p>
-        </p:txBody>
-      </p:sp>
-      <p:sp>
-        <p:nvSpPr>
-          <p:cNvPr id="4" name="TextBox 3"/>
-          <p:cNvSpPr txBox="1"/>
-          <p:nvPr/>
-        </p:nvSpPr>
-        <p:spPr>
-          <a:xfrm>
-            <a:off x="731520" y="274320"/>
-            <a:ext cx="9427464" cy="868680"/>
-          </a:xfrm>
-          <a:prstGeom prst="rect">
-            <a:avLst/>
-          </a:prstGeom>
-          <a:noFill/>
-        </p:spPr>
-        <p:txBody>
-          <a:bodyPr wrap="square" anchor="ctr">
-            <a:spAutoFit/>
-          </a:bodyPr>
-          <a:lstStyle/>
-          <a:p>
-            <a:r>
-              <a:rPr sz="3600" b="1">
-                <a:solidFill>
-                  <a:srgbClr val="1E40AF"/>
-                </a:solidFill>
-                <a:latin typeface="Arial"/>
-              </a:rPr>
-              <a:t>BÀI TẬP CỦA BẠN</a:t>
-            </a:r>
-          </a:p>
-        </p:txBody>
-      </p:sp>
-      <p:sp>
-        <p:nvSpPr>
-          <p:cNvPr id="5" name="Rectangle 4"/>
-          <p:cNvSpPr/>
-          <p:nvPr/>
-        </p:nvSpPr>
-        <p:spPr>
-          <a:xfrm>
-            <a:off x="457200" y="1207008"/>
-            <a:ext cx="11274552" cy="22000"/>
-          </a:xfrm>
-          <a:prstGeom prst="rect">
-            <a:avLst/>
-          </a:prstGeom>
-          <a:solidFill>
-            <a:srgbClr val="E2E8F0"/>
-          </a:solidFill>
-          <a:ln>
-            <a:noFill/>
-          </a:ln>
-          <a:effectLst/>
-        </p:spPr>
-        <p:style>
-          <a:lnRef idx="1">
-            <a:schemeClr val="accent1"/>
-          </a:lnRef>
-          <a:fillRef idx="3">
-            <a:schemeClr val="accent1"/>
-          </a:fillRef>
-          <a:effectRef idx="2">
-            <a:schemeClr val="accent1"/>
-          </a:effectRef>
-          <a:fontRef idx="minor">
-            <a:schemeClr val="lt1"/>
-          </a:fontRef>
-        </p:style>
-        <p:txBody>
-          <a:bodyPr rtlCol="0" anchor="ctr"/>
-          <a:lstStyle/>
-          <a:p>
-            <a:pPr algn="ctr"/>
-          </a:p>
-        </p:txBody>
-      </p:sp>
-      <p:sp>
-        <p:nvSpPr>
-          <p:cNvPr id="6" name="TextBox 5"/>
-          <p:cNvSpPr txBox="1"/>
-          <p:nvPr/>
-        </p:nvSpPr>
-        <p:spPr>
-          <a:xfrm>
-            <a:off x="457200" y="6355080"/>
-            <a:ext cx="11274552" cy="365760"/>
-          </a:xfrm>
-          <a:prstGeom prst="rect">
-            <a:avLst/>
-          </a:prstGeom>
-          <a:noFill/>
-        </p:spPr>
-        <p:txBody>
-          <a:bodyPr wrap="none">
-            <a:spAutoFit/>
-          </a:bodyPr>
-          <a:lstStyle/>
-          <a:p>
-            <a:pPr algn="r"/>
-            <a:r>
-              <a:rPr sz="1200">
-                <a:solidFill>
-                  <a:srgbClr val="64748B"/>
-                </a:solidFill>
-                <a:latin typeface="Calibri"/>
-              </a:rPr>
-              <a:t>Ngữ văn 10 · Bài 1: Sức Hấp Dẫn Của Truyện Kể          39</a:t>
+              <a:t>Ngữ văn 10 · Bài 1: Sức Hấp Dẫn Của Truyện Kể          36</a:t>
             </a:r>
           </a:p>
         </p:txBody>
@@ -16388,14 +15051,14 @@
         </p:nvSpPr>
         <p:spPr>
           <a:xfrm>
-            <a:off x="10408615" y="457200"/>
-            <a:ext cx="1234440" cy="457200"/>
+            <a:off x="10097719" y="457200"/>
+            <a:ext cx="1545336" cy="457200"/>
           </a:xfrm>
           <a:prstGeom prst="roundRect">
             <a:avLst/>
           </a:prstGeom>
           <a:solidFill>
-            <a:srgbClr val="991B1B"/>
+            <a:srgbClr val="166534"/>
           </a:solidFill>
           <a:ln>
             <a:noFill/>
@@ -16428,7 +15091,7 @@
                 </a:solidFill>
                 <a:latin typeface="Arial"/>
               </a:rPr>
-              <a:t>VIDEO</a:t>
+              <a:t>GHI NHỚ</a:t>
             </a:r>
           </a:p>
         </p:txBody>
@@ -16442,7 +15105,7 @@
         <p:spPr>
           <a:xfrm>
             <a:off x="731520" y="274320"/>
-            <a:ext cx="9738360" cy="868680"/>
+            <a:ext cx="9427464" cy="868680"/>
           </a:xfrm>
           <a:prstGeom prst="rect">
             <a:avLst/>
@@ -16462,7 +15125,7 @@
                 </a:solidFill>
                 <a:latin typeface="Arial"/>
               </a:rPr>
-              <a:t>VIDEO THAM KHẢO</a:t>
+              <a:t>THẦN THOẠI</a:t>
             </a:r>
           </a:p>
         </p:txBody>
@@ -16546,40 +15209,16 @@
           </a:p>
         </p:txBody>
       </p:sp>
-      <p:pic>
-        <p:nvPicPr>
-          <p:cNvPr id="7" name="Picture 6" descr="QR_video_fTcd5BwvYEs.png"/>
-          <p:cNvPicPr>
-            <a:picLocks noChangeAspect="1"/>
-          </p:cNvPicPr>
-          <p:nvPr/>
-        </p:nvPicPr>
-        <p:blipFill>
-          <a:blip r:embed="rId2"/>
-          <a:stretch>
-            <a:fillRect/>
-          </a:stretch>
-        </p:blipFill>
-        <p:spPr>
-          <a:xfrm>
-            <a:off x="8412480" y="1554480"/>
-            <a:ext cx="3108960" cy="3108960"/>
-          </a:xfrm>
-          <a:prstGeom prst="rect">
-            <a:avLst/>
-          </a:prstGeom>
-        </p:spPr>
-      </p:pic>
-      <p:sp>
-        <p:nvSpPr>
-          <p:cNvPr id="8" name="TextBox 7"/>
+      <p:sp>
+        <p:nvSpPr>
+          <p:cNvPr id="7" name="TextBox 6"/>
           <p:cNvSpPr txBox="1"/>
           <p:nvPr/>
         </p:nvSpPr>
         <p:spPr>
           <a:xfrm>
-            <a:off x="731520" y="1554480"/>
-            <a:ext cx="7498079" cy="4206240"/>
+            <a:off x="731520" y="1463040"/>
+            <a:ext cx="10789920" cy="4754880"/>
           </a:xfrm>
           <a:prstGeom prst="rect">
             <a:avLst/>
@@ -16591,38 +15230,6 @@
             <a:spAutoFit/>
           </a:bodyPr>
           <a:lstStyle/>
-          <a:p>
-            <a:pPr algn="l">
-              <a:spcAft>
-                <a:spcPts val="800"/>
-              </a:spcAft>
-            </a:pPr>
-            <a:r>
-              <a:rPr sz="2600" b="1">
-                <a:solidFill>
-                  <a:srgbClr val="1E293B"/>
-                </a:solidFill>
-                <a:latin typeface="Calibri"/>
-              </a:rPr>
-              <a:t>🎬 Nữ Oa vá trời – Truyện thần thoại Trung Quốc</a:t>
-            </a:r>
-          </a:p>
-          <a:p>
-            <a:pPr algn="l">
-              <a:spcAft>
-                <a:spcPts val="800"/>
-              </a:spcAft>
-            </a:pPr>
-            <a:r>
-              <a:rPr sz="2000">
-                <a:solidFill>
-                  <a:srgbClr val="64748B"/>
-                </a:solidFill>
-                <a:latin typeface="Calibri"/>
-              </a:rPr>
-              <a:t>Kênh: Thế giới cổ tích</a:t>
-            </a:r>
-          </a:p>
           <a:p>
             <a:pPr algn="l" marL="365760" indent="-365760">
               <a:spcAft>
@@ -16635,30 +15242,85 @@
               <a:buChar char="•"/>
             </a:pPr>
             <a:r>
-              <a:rPr sz="2000">
+              <a:rPr sz="2400" b="1">
                 <a:solidFill>
                   <a:srgbClr val="1E293B"/>
                 </a:solidFill>
                 <a:latin typeface="Calibri"/>
               </a:rPr>
-              <a:t>Hoạt động Mở đầu (văn bản 1–3)</a:t>
-            </a:r>
-          </a:p>
-          <a:p>
-            <a:pPr algn="l">
+              <a:t>Thần thoại</a:t>
+            </a:r>
+            <a:r>
+              <a:rPr sz="2400">
+                <a:solidFill>
+                  <a:srgbClr val="1E293B"/>
+                </a:solidFill>
+                <a:latin typeface="Calibri"/>
+              </a:rPr>
+              <a:t>: truyện kể xa xưa nhất, kể về các vị thần, thể hiện quan niệm về vũ trụ và khát vọng chinh phục tự nhiên.</a:t>
+            </a:r>
+          </a:p>
+          <a:p>
+            <a:pPr algn="l" marL="365760" indent="-365760">
               <a:spcAft>
                 <a:spcPts val="800"/>
               </a:spcAft>
+              <a:buClr>
+                <a:srgbClr val="1E40AF"/>
+              </a:buClr>
+              <a:buFont typeface="Arial"/>
+              <a:buChar char="•"/>
             </a:pPr>
             <a:r>
-              <a:rPr sz="1600">
-                <a:solidFill>
-                  <a:srgbClr val="64748B"/>
+              <a:rPr sz="2400">
+                <a:solidFill>
+                  <a:srgbClr val="1E293B"/>
                 </a:solidFill>
                 <a:latin typeface="Calibri"/>
-                <a:hlinkClick r:id="rId3"/>
-              </a:rPr>
-              <a:t>https://www.youtube.com/watch?v=fTcd5BwvYEs</a:t>
+              </a:rPr>
+              <a:t>Thời gian phiếm chỉ, ước lệ; không gian vũ trụ nhiều cõi.</a:t>
+            </a:r>
+          </a:p>
+          <a:p>
+            <a:pPr algn="l" marL="365760" indent="-365760">
+              <a:spcAft>
+                <a:spcPts val="800"/>
+              </a:spcAft>
+              <a:buClr>
+                <a:srgbClr val="1E40AF"/>
+              </a:buClr>
+              <a:buFont typeface="Arial"/>
+              <a:buChar char="•"/>
+            </a:pPr>
+            <a:r>
+              <a:rPr sz="2400">
+                <a:solidFill>
+                  <a:srgbClr val="1E293B"/>
+                </a:solidFill>
+                <a:latin typeface="Calibri"/>
+              </a:rPr>
+              <a:t>Nhân vật thần có hình dạng khổng lồ, năng lực siêu nhiên; chức năng lí giải tự nhiên.</a:t>
+            </a:r>
+          </a:p>
+          <a:p>
+            <a:pPr algn="l" marL="365760" indent="-365760">
+              <a:spcAft>
+                <a:spcPts val="800"/>
+              </a:spcAft>
+              <a:buClr>
+                <a:srgbClr val="1E40AF"/>
+              </a:buClr>
+              <a:buFont typeface="Arial"/>
+              <a:buChar char="•"/>
+            </a:pPr>
+            <a:r>
+              <a:rPr sz="2400">
+                <a:solidFill>
+                  <a:srgbClr val="1E293B"/>
+                </a:solidFill>
+                <a:latin typeface="Calibri"/>
+              </a:rPr>
+              <a:t>Thủ pháp cường điệu, phóng đại; lối tư duy hồn nhiên, trí tưởng tượng bay bổng.</a:t>
             </a:r>
           </a:p>
         </p:txBody>
@@ -16741,14 +15403,14 @@
         </p:nvSpPr>
         <p:spPr>
           <a:xfrm>
-            <a:off x="10097719" y="457200"/>
-            <a:ext cx="1545336" cy="457200"/>
+            <a:off x="10253167" y="457200"/>
+            <a:ext cx="1389888" cy="457200"/>
           </a:xfrm>
           <a:prstGeom prst="roundRect">
             <a:avLst/>
           </a:prstGeom>
           <a:solidFill>
-            <a:srgbClr val="166534"/>
+            <a:srgbClr val="1E40AF"/>
           </a:solidFill>
           <a:ln>
             <a:noFill/>
@@ -16781,7 +15443,7 @@
                 </a:solidFill>
                 <a:latin typeface="Arial"/>
               </a:rPr>
-              <a:t>GHI NHỚ</a:t>
+              <a:t>ĐỀ BÀI</a:t>
             </a:r>
           </a:p>
         </p:txBody>
@@ -16795,7 +15457,7 @@
         <p:spPr>
           <a:xfrm>
             <a:off x="731520" y="274320"/>
-            <a:ext cx="9427464" cy="868680"/>
+            <a:ext cx="9582912" cy="868680"/>
           </a:xfrm>
           <a:prstGeom prst="rect">
             <a:avLst/>
@@ -16815,7 +15477,7 @@
                 </a:solidFill>
                 <a:latin typeface="Arial"/>
               </a:rPr>
-              <a:t>THẦN THOẠI</a:t>
+              <a:t>THẦN TRỤ TRỜI</a:t>
             </a:r>
           </a:p>
         </p:txBody>
@@ -16908,7 +15570,7 @@
         <p:spPr>
           <a:xfrm>
             <a:off x="731520" y="1463040"/>
-            <a:ext cx="10789920" cy="4754880"/>
+            <a:ext cx="10789920" cy="3566160"/>
           </a:xfrm>
           <a:prstGeom prst="rect">
             <a:avLst/>
@@ -16921,96 +15583,106 @@
           </a:bodyPr>
           <a:lstStyle/>
           <a:p>
-            <a:pPr algn="l" marL="365760" indent="-365760">
+            <a:pPr algn="l">
               <a:spcAft>
                 <a:spcPts val="800"/>
               </a:spcAft>
-              <a:buClr>
-                <a:srgbClr val="1E40AF"/>
-              </a:buClr>
-              <a:buFont typeface="Arial"/>
-              <a:buChar char="•"/>
             </a:pPr>
             <a:r>
-              <a:rPr sz="2400" b="1">
+              <a:rPr sz="2600" b="1">
                 <a:solidFill>
                   <a:srgbClr val="1E293B"/>
                 </a:solidFill>
                 <a:latin typeface="Calibri"/>
               </a:rPr>
-              <a:t>Thần thoại</a:t>
-            </a:r>
-            <a:r>
-              <a:rPr sz="2400">
-                <a:solidFill>
-                  <a:srgbClr val="1E293B"/>
+              <a:t>Thần Trụ Trời được miêu tả như thế nào? Thần đã làm gì để tạo lập trời đất?</a:t>
+            </a:r>
+          </a:p>
+        </p:txBody>
+      </p:sp>
+      <p:sp>
+        <p:nvSpPr>
+          <p:cNvPr id="8" name="Rounded Rectangle 7"/>
+          <p:cNvSpPr/>
+          <p:nvPr/>
+        </p:nvSpPr>
+        <p:spPr>
+          <a:xfrm>
+            <a:off x="731520" y="5120640"/>
+            <a:ext cx="10789920" cy="693420"/>
+          </a:xfrm>
+          <a:prstGeom prst="roundRect">
+            <a:avLst>
+              <a:gd name="adj" fmla="val 8000"/>
+            </a:avLst>
+          </a:prstGeom>
+          <a:solidFill>
+            <a:srgbClr val="EFF4FF"/>
+          </a:solidFill>
+          <a:ln w="19050">
+            <a:solidFill>
+              <a:srgbClr val="1E40AF"/>
+            </a:solidFill>
+          </a:ln>
+          <a:effectLst/>
+        </p:spPr>
+        <p:style>
+          <a:lnRef idx="1">
+            <a:schemeClr val="accent1"/>
+          </a:lnRef>
+          <a:fillRef idx="3">
+            <a:schemeClr val="accent1"/>
+          </a:fillRef>
+          <a:effectRef idx="2">
+            <a:schemeClr val="accent1"/>
+          </a:effectRef>
+          <a:fontRef idx="minor">
+            <a:schemeClr val="lt1"/>
+          </a:fontRef>
+        </p:style>
+        <p:txBody>
+          <a:bodyPr rtlCol="0" anchor="ctr"/>
+          <a:lstStyle/>
+          <a:p>
+            <a:pPr algn="ctr"/>
+          </a:p>
+        </p:txBody>
+      </p:sp>
+      <p:sp>
+        <p:nvSpPr>
+          <p:cNvPr id="9" name="TextBox 8"/>
+          <p:cNvSpPr txBox="1"/>
+          <p:nvPr/>
+        </p:nvSpPr>
+        <p:spPr>
+          <a:xfrm>
+            <a:off x="914400" y="5120640"/>
+            <a:ext cx="10424160" cy="693420"/>
+          </a:xfrm>
+          <a:prstGeom prst="rect">
+            <a:avLst/>
+          </a:prstGeom>
+          <a:noFill/>
+        </p:spPr>
+        <p:txBody>
+          <a:bodyPr wrap="square" anchor="ctr" lIns="45720" rIns="45720">
+            <a:spAutoFit/>
+          </a:bodyPr>
+          <a:lstStyle/>
+          <a:p>
+            <a:pPr algn="l">
+              <a:spcAft>
+                <a:spcPts val="400"/>
+              </a:spcAft>
+            </a:pPr>
+            <a:r>
+              <a:rPr sz="2200" b="1">
+                <a:solidFill>
+                  <a:srgbClr val="1E40AF"/>
                 </a:solidFill>
                 <a:latin typeface="Calibri"/>
               </a:rPr>
-              <a:t>: truyện kể xa xưa nhất, kể về các vị thần, thể hiện quan niệm về vũ trụ và khát vọng chinh phục tự nhiên.</a:t>
-            </a:r>
-          </a:p>
-          <a:p>
-            <a:pPr algn="l" marL="365760" indent="-365760">
-              <a:spcAft>
-                <a:spcPts val="800"/>
-              </a:spcAft>
-              <a:buClr>
-                <a:srgbClr val="1E40AF"/>
-              </a:buClr>
-              <a:buFont typeface="Arial"/>
-              <a:buChar char="•"/>
-            </a:pPr>
-            <a:r>
-              <a:rPr sz="2400">
-                <a:solidFill>
-                  <a:srgbClr val="1E293B"/>
-                </a:solidFill>
-                <a:latin typeface="Calibri"/>
-              </a:rPr>
-              <a:t>Thời gian phiếm chỉ, ước lệ; không gian vũ trụ nhiều cõi.</a:t>
-            </a:r>
-          </a:p>
-          <a:p>
-            <a:pPr algn="l" marL="365760" indent="-365760">
-              <a:spcAft>
-                <a:spcPts val="800"/>
-              </a:spcAft>
-              <a:buClr>
-                <a:srgbClr val="1E40AF"/>
-              </a:buClr>
-              <a:buFont typeface="Arial"/>
-              <a:buChar char="•"/>
-            </a:pPr>
-            <a:r>
-              <a:rPr sz="2400">
-                <a:solidFill>
-                  <a:srgbClr val="1E293B"/>
-                </a:solidFill>
-                <a:latin typeface="Calibri"/>
-              </a:rPr>
-              <a:t>Nhân vật thần có hình dạng khổng lồ, năng lực siêu nhiên; chức năng lí giải tự nhiên.</a:t>
-            </a:r>
-          </a:p>
-          <a:p>
-            <a:pPr algn="l" marL="365760" indent="-365760">
-              <a:spcAft>
-                <a:spcPts val="800"/>
-              </a:spcAft>
-              <a:buClr>
-                <a:srgbClr val="1E40AF"/>
-              </a:buClr>
-              <a:buFont typeface="Arial"/>
-              <a:buChar char="•"/>
-            </a:pPr>
-            <a:r>
-              <a:rPr sz="2400">
-                <a:solidFill>
-                  <a:srgbClr val="1E293B"/>
-                </a:solidFill>
-                <a:latin typeface="Calibri"/>
-              </a:rPr>
-              <a:t>Thủ pháp cường điệu, phóng đại; lối tư duy hồn nhiên, trí tưởng tượng bay bổng.</a:t>
+              <a:t>💡 Chú ý hình dạng và công việc của thần.</a:t>
             </a:r>
           </a:p>
         </p:txBody>
@@ -17093,8 +15765,8 @@
         </p:nvSpPr>
         <p:spPr>
           <a:xfrm>
-            <a:off x="10408615" y="457200"/>
-            <a:ext cx="1234440" cy="457200"/>
+            <a:off x="9942271" y="457200"/>
+            <a:ext cx="1700784" cy="457200"/>
           </a:xfrm>
           <a:prstGeom prst="roundRect">
             <a:avLst/>
@@ -17133,7 +15805,7 @@
                 </a:solidFill>
                 <a:latin typeface="Arial"/>
               </a:rPr>
-              <a:t>VIDEO</a:t>
+              <a:t>LỜI GIẢI</a:t>
             </a:r>
           </a:p>
         </p:txBody>
@@ -17147,7 +15819,7 @@
         <p:spPr>
           <a:xfrm>
             <a:off x="731520" y="274320"/>
-            <a:ext cx="9738360" cy="868680"/>
+            <a:ext cx="9272016" cy="868680"/>
           </a:xfrm>
           <a:prstGeom prst="rect">
             <a:avLst/>
@@ -17167,7 +15839,7 @@
                 </a:solidFill>
                 <a:latin typeface="Arial"/>
               </a:rPr>
-              <a:t>VIDEO THAM KHẢO</a:t>
+              <a:t>THẦN TRỤ TRỜI</a:t>
             </a:r>
           </a:p>
         </p:txBody>
@@ -17251,40 +15923,16 @@
           </a:p>
         </p:txBody>
       </p:sp>
-      <p:pic>
-        <p:nvPicPr>
-          <p:cNvPr id="7" name="Picture 6" descr="QR_video_uldNwX0oGCA.png"/>
-          <p:cNvPicPr>
-            <a:picLocks noChangeAspect="1"/>
-          </p:cNvPicPr>
-          <p:nvPr/>
-        </p:nvPicPr>
-        <p:blipFill>
-          <a:blip r:embed="rId2"/>
-          <a:stretch>
-            <a:fillRect/>
-          </a:stretch>
-        </p:blipFill>
-        <p:spPr>
-          <a:xfrm>
-            <a:off x="8412480" y="1554480"/>
-            <a:ext cx="3108960" cy="3108960"/>
-          </a:xfrm>
-          <a:prstGeom prst="rect">
-            <a:avLst/>
-          </a:prstGeom>
-        </p:spPr>
-      </p:pic>
-      <p:sp>
-        <p:nvSpPr>
-          <p:cNvPr id="8" name="TextBox 7"/>
+      <p:sp>
+        <p:nvSpPr>
+          <p:cNvPr id="7" name="TextBox 6"/>
           <p:cNvSpPr txBox="1"/>
           <p:nvPr/>
         </p:nvSpPr>
         <p:spPr>
           <a:xfrm>
-            <a:off x="731520" y="1554480"/>
-            <a:ext cx="7498079" cy="4206240"/>
+            <a:off x="731520" y="1463040"/>
+            <a:ext cx="10789920" cy="3474720"/>
           </a:xfrm>
           <a:prstGeom prst="rect">
             <a:avLst/>
@@ -17296,38 +15944,6 @@
             <a:spAutoFit/>
           </a:bodyPr>
           <a:lstStyle/>
-          <a:p>
-            <a:pPr algn="l">
-              <a:spcAft>
-                <a:spcPts val="800"/>
-              </a:spcAft>
-            </a:pPr>
-            <a:r>
-              <a:rPr sz="2600" b="1">
-                <a:solidFill>
-                  <a:srgbClr val="1E293B"/>
-                </a:solidFill>
-                <a:latin typeface="Calibri"/>
-              </a:rPr>
-              <a:t>🎬 Thần Trụ Trời – Truyện thần thoại Việt Nam</a:t>
-            </a:r>
-          </a:p>
-          <a:p>
-            <a:pPr algn="l">
-              <a:spcAft>
-                <a:spcPts val="800"/>
-              </a:spcAft>
-            </a:pPr>
-            <a:r>
-              <a:rPr sz="2000">
-                <a:solidFill>
-                  <a:srgbClr val="64748B"/>
-                </a:solidFill>
-                <a:latin typeface="Calibri"/>
-              </a:rPr>
-              <a:t>Kênh: Thế giới cổ tích</a:t>
-            </a:r>
-          </a:p>
           <a:p>
             <a:pPr algn="l" marL="365760" indent="-365760">
               <a:spcAft>
@@ -17340,30 +15956,142 @@
               <a:buChar char="•"/>
             </a:pPr>
             <a:r>
-              <a:rPr sz="2000">
+              <a:rPr sz="2300">
                 <a:solidFill>
                   <a:srgbClr val="1E293B"/>
                 </a:solidFill>
                 <a:latin typeface="Calibri"/>
               </a:rPr>
-              <a:t>Khám phá văn bản Thần Trụ Trời</a:t>
-            </a:r>
-          </a:p>
-          <a:p>
-            <a:pPr algn="l">
+              <a:t>Thân thể to lớn, vóc dáng kì vĩ.</a:t>
+            </a:r>
+          </a:p>
+          <a:p>
+            <a:pPr algn="l" marL="365760" indent="-365760">
               <a:spcAft>
                 <a:spcPts val="800"/>
               </a:spcAft>
+              <a:buClr>
+                <a:srgbClr val="1E40AF"/>
+              </a:buClr>
+              <a:buFont typeface="Arial"/>
+              <a:buChar char="•"/>
             </a:pPr>
             <a:r>
-              <a:rPr sz="1600">
-                <a:solidFill>
-                  <a:srgbClr val="64748B"/>
+              <a:rPr sz="2300">
+                <a:solidFill>
+                  <a:srgbClr val="1E293B"/>
                 </a:solidFill>
                 <a:latin typeface="Calibri"/>
-                <a:hlinkClick r:id="rId3"/>
-              </a:rPr>
-              <a:t>https://www.youtube.com/watch?v=uldNwX0oGCA</a:t>
+              </a:rPr>
+              <a:t>Dùng đầu đội trời, đào đất, đá đắp cột chống trời.</a:t>
+            </a:r>
+          </a:p>
+          <a:p>
+            <a:pPr algn="l" marL="365760" indent="-365760">
+              <a:spcAft>
+                <a:spcPts val="800"/>
+              </a:spcAft>
+              <a:buClr>
+                <a:srgbClr val="1E40AF"/>
+              </a:buClr>
+              <a:buFont typeface="Arial"/>
+              <a:buChar char="•"/>
+            </a:pPr>
+            <a:r>
+              <a:rPr sz="2300">
+                <a:solidFill>
+                  <a:srgbClr val="1E293B"/>
+                </a:solidFill>
+                <a:latin typeface="Calibri"/>
+              </a:rPr>
+              <a:t>Phá cột, ném đá, đất khắp nơi → núi, đảo, cồn đồi, cao nguyên; chỗ đào thành biển.</a:t>
+            </a:r>
+          </a:p>
+        </p:txBody>
+      </p:sp>
+      <p:sp>
+        <p:nvSpPr>
+          <p:cNvPr id="8" name="Rounded Rectangle 7"/>
+          <p:cNvSpPr/>
+          <p:nvPr/>
+        </p:nvSpPr>
+        <p:spPr>
+          <a:xfrm>
+            <a:off x="731520" y="5074920"/>
+            <a:ext cx="10789920" cy="731520"/>
+          </a:xfrm>
+          <a:prstGeom prst="roundRect">
+            <a:avLst>
+              <a:gd name="adj" fmla="val 8000"/>
+            </a:avLst>
+          </a:prstGeom>
+          <a:solidFill>
+            <a:srgbClr val="FEF2F2"/>
+          </a:solidFill>
+          <a:ln w="19050">
+            <a:solidFill>
+              <a:srgbClr val="991B1B"/>
+            </a:solidFill>
+          </a:ln>
+          <a:effectLst/>
+        </p:spPr>
+        <p:style>
+          <a:lnRef idx="1">
+            <a:schemeClr val="accent1"/>
+          </a:lnRef>
+          <a:fillRef idx="3">
+            <a:schemeClr val="accent1"/>
+          </a:fillRef>
+          <a:effectRef idx="2">
+            <a:schemeClr val="accent1"/>
+          </a:effectRef>
+          <a:fontRef idx="minor">
+            <a:schemeClr val="lt1"/>
+          </a:fontRef>
+        </p:style>
+        <p:txBody>
+          <a:bodyPr rtlCol="0" anchor="ctr"/>
+          <a:lstStyle/>
+          <a:p>
+            <a:pPr algn="ctr"/>
+          </a:p>
+        </p:txBody>
+      </p:sp>
+      <p:sp>
+        <p:nvSpPr>
+          <p:cNvPr id="9" name="TextBox 8"/>
+          <p:cNvSpPr txBox="1"/>
+          <p:nvPr/>
+        </p:nvSpPr>
+        <p:spPr>
+          <a:xfrm>
+            <a:off x="914400" y="5074920"/>
+            <a:ext cx="10424160" cy="731520"/>
+          </a:xfrm>
+          <a:prstGeom prst="rect">
+            <a:avLst/>
+          </a:prstGeom>
+          <a:noFill/>
+        </p:spPr>
+        <p:txBody>
+          <a:bodyPr wrap="square" anchor="ctr" lIns="45720" rIns="45720">
+            <a:spAutoFit/>
+          </a:bodyPr>
+          <a:lstStyle/>
+          <a:p>
+            <a:pPr algn="l">
+              <a:spcAft>
+                <a:spcPts val="400"/>
+              </a:spcAft>
+            </a:pPr>
+            <a:r>
+              <a:rPr sz="2400" b="1">
+                <a:solidFill>
+                  <a:srgbClr val="991B1B"/>
+                </a:solidFill>
+                <a:latin typeface="Calibri"/>
+              </a:rPr>
+              <a:t>Lí giải nguồn gốc trời đất, núi sông, biển cả.</a:t>
             </a:r>
           </a:p>
         </p:txBody>
@@ -17520,7 +16248,7 @@
                 </a:solidFill>
                 <a:latin typeface="Arial"/>
               </a:rPr>
-              <a:t>THẦN TRỤ TRỜI</a:t>
+              <a:t>THẦN SÉT VÀ THẦN GIÓ</a:t>
             </a:r>
           </a:p>
         </p:txBody>
@@ -17638,7 +16366,7 @@
                 </a:solidFill>
                 <a:latin typeface="Calibri"/>
               </a:rPr>
-              <a:t>Thần Trụ Trời được miêu tả như thế nào? Thần đã làm gì để tạo lập trời đất?</a:t>
+              <a:t>Hình dạng, tính khí, công việc của thần Sét và thần Gió có gì đặc biệt? Các chi tiết ấy lí giải hiện tượng nào?</a:t>
             </a:r>
           </a:p>
         </p:txBody>
@@ -17725,7 +16453,7 @@
                 </a:solidFill>
                 <a:latin typeface="Calibri"/>
               </a:rPr>
-              <a:t>💡 Chú ý hình dạng và công việc của thần.</a:t>
+              <a:t>💡 Liên hệ đặc điểm của sấm sét, gió bão.</a:t>
             </a:r>
           </a:p>
         </p:txBody>
@@ -17882,7 +16610,7 @@
                 </a:solidFill>
                 <a:latin typeface="Arial"/>
               </a:rPr>
-              <a:t>THẦN TRỤ TRỜI</a:t>
+              <a:t>THẦN SÉT VÀ THẦN GIÓ</a:t>
             </a:r>
           </a:p>
         </p:txBody>
@@ -18005,7 +16733,7 @@
                 </a:solidFill>
                 <a:latin typeface="Calibri"/>
               </a:rPr>
-              <a:t>Thân thể to lớn, vóc dáng kì vĩ.</a:t>
+              <a:t>Thần Sét: mặt mũi nanh ác, nóng nảy; lưỡi búa đá; thi hành luật pháp ở trần gian.</a:t>
             </a:r>
           </a:p>
           <a:p>
@@ -18026,7 +16754,7 @@
                 </a:solidFill>
                 <a:latin typeface="Calibri"/>
               </a:rPr>
-              <a:t>Dùng đầu đội trời, đào đất, đá đắp cột chống trời.</a:t>
+              <a:t>Thần Gió: không có đầu, quạt màu nhiệm; tạo gió bão; con thần Gió hoá cây ngải gió.</a:t>
             </a:r>
           </a:p>
           <a:p>
@@ -18047,7 +16775,7 @@
                 </a:solidFill>
                 <a:latin typeface="Calibri"/>
               </a:rPr>
-              <a:t>Phá cột, ném đá, đất khắp nơi → núi, đảo, cồn đồi, cao nguyên; chỗ đào thành biển.</a:t>
+              <a:t>Lí giải sấm sét, gió bão, tập tục bắt chước tiếng gà, kinh nghiệm dùng lá ngải.</a:t>
             </a:r>
           </a:p>
         </p:txBody>
@@ -18061,7 +16789,7 @@
         <p:spPr>
           <a:xfrm>
             <a:off x="731520" y="5074920"/>
-            <a:ext cx="10789920" cy="731520"/>
+            <a:ext cx="10789920" cy="1188720"/>
           </a:xfrm>
           <a:prstGeom prst="roundRect">
             <a:avLst>
@@ -18109,7 +16837,7 @@
         <p:spPr>
           <a:xfrm>
             <a:off x="914400" y="5074920"/>
-            <a:ext cx="10424160" cy="731520"/>
+            <a:ext cx="10424160" cy="1188720"/>
           </a:xfrm>
           <a:prstGeom prst="rect">
             <a:avLst/>
@@ -18134,7 +16862,7 @@
                 </a:solidFill>
                 <a:latin typeface="Calibri"/>
               </a:rPr>
-              <a:t>Lí giải nguồn gốc trời đất, núi sông, biển cả.</a:t>
+              <a:t>Nhân hoá tự nhiên thành các vị thần – thế giới quan “vạn vật hữu linh”.</a:t>
             </a:r>
           </a:p>
         </p:txBody>

--- a/mon/ngu_van/slide/lop10/Slide_NGUVAN10_Bai1_SucHapDanCuaTruyenKe_T1-11.pptx
+++ b/mon/ngu_van/slide/lop10/Slide_NGUVAN10_Bai1_SucHapDanCuaTruyenKe_T1-11.pptx
@@ -5294,7 +5294,7 @@
                 </a:solidFill>
                 <a:latin typeface="Calibri"/>
               </a:rPr>
-              <a:t>Trường THPT Vĩnh Thạnh – Tổ Ngữ văn – Tiếng Anh</a:t>
+              <a:t>Trường THPT – Tổ Ngữ văn – Tiếng Anh</a:t>
             </a:r>
           </a:p>
         </p:txBody>
@@ -14056,103 +14056,6 @@
       <p:grpSpPr/>
       <p:sp>
         <p:nvSpPr>
-          <p:cNvPr id="2" name="Rectangle 1"/>
-          <p:cNvSpPr/>
-          <p:nvPr/>
-        </p:nvSpPr>
-        <p:spPr>
-          <a:xfrm>
-            <a:off x="457200" y="384048"/>
-            <a:ext cx="109728" cy="658368"/>
-          </a:xfrm>
-          <a:prstGeom prst="rect">
-            <a:avLst/>
-          </a:prstGeom>
-          <a:solidFill>
-            <a:srgbClr val="1E40AF"/>
-          </a:solidFill>
-          <a:ln>
-            <a:noFill/>
-          </a:ln>
-          <a:effectLst/>
-        </p:spPr>
-        <p:style>
-          <a:lnRef idx="1">
-            <a:schemeClr val="accent1"/>
-          </a:lnRef>
-          <a:fillRef idx="3">
-            <a:schemeClr val="accent1"/>
-          </a:fillRef>
-          <a:effectRef idx="2">
-            <a:schemeClr val="accent1"/>
-          </a:effectRef>
-          <a:fontRef idx="minor">
-            <a:schemeClr val="lt1"/>
-          </a:fontRef>
-        </p:style>
-        <p:txBody>
-          <a:bodyPr rtlCol="0" anchor="ctr"/>
-          <a:lstStyle/>
-          <a:p>
-            <a:pPr algn="ctr"/>
-          </a:p>
-        </p:txBody>
-      </p:sp>
-      <p:sp>
-        <p:nvSpPr>
-          <p:cNvPr id="3" name="Rounded Rectangle 2"/>
-          <p:cNvSpPr/>
-          <p:nvPr/>
-        </p:nvSpPr>
-        <p:spPr>
-          <a:xfrm>
-            <a:off x="10097719" y="457200"/>
-            <a:ext cx="1545336" cy="457200"/>
-          </a:xfrm>
-          <a:prstGeom prst="roundRect">
-            <a:avLst/>
-          </a:prstGeom>
-          <a:solidFill>
-            <a:srgbClr val="166534"/>
-          </a:solidFill>
-          <a:ln>
-            <a:noFill/>
-          </a:ln>
-          <a:effectLst/>
-        </p:spPr>
-        <p:style>
-          <a:lnRef idx="1">
-            <a:schemeClr val="accent1"/>
-          </a:lnRef>
-          <a:fillRef idx="3">
-            <a:schemeClr val="accent1"/>
-          </a:fillRef>
-          <a:effectRef idx="2">
-            <a:schemeClr val="accent1"/>
-          </a:effectRef>
-          <a:fontRef idx="minor">
-            <a:schemeClr val="lt1"/>
-          </a:fontRef>
-        </p:style>
-        <p:txBody>
-          <a:bodyPr rtlCol="0" anchor="ctr" wrap="none" tIns="0" bIns="0"/>
-          <a:lstStyle/>
-          <a:p>
-            <a:pPr algn="ctr"/>
-            <a:r>
-              <a:rPr sz="1400" b="1">
-                <a:solidFill>
-                  <a:srgbClr val="FFFFFF"/>
-                </a:solidFill>
-                <a:latin typeface="Arial"/>
-              </a:rPr>
-              <a:t>CỦNG CỐ</a:t>
-            </a:r>
-          </a:p>
-        </p:txBody>
-      </p:sp>
-      <p:sp>
-        <p:nvSpPr>
           <p:cNvPr id="4" name="TextBox 3"/>
           <p:cNvSpPr txBox="1"/>
           <p:nvPr/>
@@ -14264,30 +14167,2037 @@
           </a:p>
         </p:txBody>
       </p:sp>
-      <p:pic>
-        <p:nvPicPr>
-          <p:cNvPr id="7" name="Picture 6" descr="SoDoTuDuy_NGUVAN10_Bai1_SucHapDanCuaTruyenKe_T1-11.png"/>
-          <p:cNvPicPr>
-            <a:picLocks noChangeAspect="1"/>
-          </p:cNvPicPr>
-          <p:nvPr/>
-        </p:nvPicPr>
-        <p:blipFill>
-          <a:blip r:embed="rId2"/>
-          <a:stretch>
-            <a:fillRect/>
-          </a:stretch>
-        </p:blipFill>
-        <p:spPr>
-          <a:xfrm>
-            <a:off x="1788855" y="1371600"/>
-            <a:ext cx="8675250" cy="4846320"/>
-          </a:xfrm>
-          <a:prstGeom prst="rect">
-            <a:avLst/>
-          </a:prstGeom>
-        </p:spPr>
-      </p:pic>
+      <p:cxnSp>
+        <p:nvCxnSpPr>
+          <p:cNvPr id="7" name="Connector 6"/>
+          <p:cNvCxnSpPr/>
+          <p:nvPr/>
+        </p:nvCxnSpPr>
+        <p:spPr>
+          <a:xfrm flipH="1" flipV="1">
+            <a:off x="4338888" y="2670962"/>
+            <a:ext cx="1688379" cy="1283818"/>
+          </a:xfrm>
+          <a:prstGeom prst="line">
+            <a:avLst/>
+          </a:prstGeom>
+          <a:ln w="44450">
+            <a:solidFill>
+              <a:srgbClr val="548235"/>
+            </a:solidFill>
+          </a:ln>
+        </p:spPr>
+        <p:style>
+          <a:lnRef idx="2">
+            <a:schemeClr val="accent1"/>
+          </a:lnRef>
+          <a:fillRef idx="0">
+            <a:schemeClr val="accent1"/>
+          </a:fillRef>
+          <a:effectRef idx="1">
+            <a:schemeClr val="accent1"/>
+          </a:effectRef>
+          <a:fontRef idx="minor">
+            <a:schemeClr val="tx1"/>
+          </a:fontRef>
+        </p:style>
+      </p:cxnSp>
+      <p:cxnSp>
+        <p:nvCxnSpPr>
+          <p:cNvPr id="8" name="Connector 7"/>
+          <p:cNvCxnSpPr/>
+          <p:nvPr/>
+        </p:nvCxnSpPr>
+        <p:spPr>
+          <a:xfrm flipH="1" flipV="1">
+            <a:off x="2827515" y="1931116"/>
+            <a:ext cx="1511373" cy="739846"/>
+          </a:xfrm>
+          <a:prstGeom prst="line">
+            <a:avLst/>
+          </a:prstGeom>
+          <a:ln w="15875">
+            <a:solidFill>
+              <a:srgbClr val="548235"/>
+            </a:solidFill>
+          </a:ln>
+        </p:spPr>
+        <p:style>
+          <a:lnRef idx="2">
+            <a:schemeClr val="accent1"/>
+          </a:lnRef>
+          <a:fillRef idx="0">
+            <a:schemeClr val="accent1"/>
+          </a:fillRef>
+          <a:effectRef idx="1">
+            <a:schemeClr val="accent1"/>
+          </a:effectRef>
+          <a:fontRef idx="minor">
+            <a:schemeClr val="tx1"/>
+          </a:fontRef>
+        </p:style>
+      </p:cxnSp>
+      <p:sp>
+        <p:nvSpPr>
+          <p:cNvPr id="9" name="Rounded Rectangle 8"/>
+          <p:cNvSpPr/>
+          <p:nvPr/>
+        </p:nvSpPr>
+        <p:spPr>
+          <a:xfrm>
+            <a:off x="785126" y="1654804"/>
+            <a:ext cx="2042389" cy="552622"/>
+          </a:xfrm>
+          <a:prstGeom prst="roundRect">
+            <a:avLst>
+              <a:gd name="adj" fmla="val 50000"/>
+            </a:avLst>
+          </a:prstGeom>
+          <a:solidFill>
+            <a:srgbClr val="EDF5E8"/>
+          </a:solidFill>
+          <a:ln w="15875">
+            <a:solidFill>
+              <a:srgbClr val="548235"/>
+            </a:solidFill>
+          </a:ln>
+          <a:effectLst/>
+        </p:spPr>
+        <p:style>
+          <a:lnRef idx="1">
+            <a:schemeClr val="accent1"/>
+          </a:lnRef>
+          <a:fillRef idx="3">
+            <a:schemeClr val="accent1"/>
+          </a:fillRef>
+          <a:effectRef idx="2">
+            <a:schemeClr val="accent1"/>
+          </a:effectRef>
+          <a:fontRef idx="minor">
+            <a:schemeClr val="lt1"/>
+          </a:fontRef>
+        </p:style>
+        <p:txBody>
+          <a:bodyPr rtlCol="0" anchor="ctr" wrap="none" lIns="64000" rIns="64000" tIns="25400" bIns="25400"/>
+          <a:lstStyle/>
+          <a:p>
+            <a:pPr algn="ctr"/>
+            <a:r>
+              <a:rPr sz="1300" b="1">
+                <a:solidFill>
+                  <a:srgbClr val="8B0000"/>
+                </a:solidFill>
+                <a:latin typeface="Calibri"/>
+              </a:rPr>
+              <a:t>Thần Trụ Trời, Sét,</a:t>
+            </a:r>
+          </a:p>
+          <a:p>
+            <a:pPr algn="ctr"/>
+            <a:r>
+              <a:rPr sz="1300" b="1">
+                <a:solidFill>
+                  <a:srgbClr val="8B0000"/>
+                </a:solidFill>
+                <a:latin typeface="Calibri"/>
+              </a:rPr>
+              <a:t>Gió</a:t>
+            </a:r>
+          </a:p>
+        </p:txBody>
+      </p:sp>
+      <p:cxnSp>
+        <p:nvCxnSpPr>
+          <p:cNvPr id="10" name="Connector 9"/>
+          <p:cNvCxnSpPr/>
+          <p:nvPr/>
+        </p:nvCxnSpPr>
+        <p:spPr>
+          <a:xfrm flipH="1" flipV="1">
+            <a:off x="2764777" y="2457917"/>
+            <a:ext cx="1574111" cy="213045"/>
+          </a:xfrm>
+          <a:prstGeom prst="line">
+            <a:avLst/>
+          </a:prstGeom>
+          <a:ln w="15875">
+            <a:solidFill>
+              <a:srgbClr val="548235"/>
+            </a:solidFill>
+          </a:ln>
+        </p:spPr>
+        <p:style>
+          <a:lnRef idx="2">
+            <a:schemeClr val="accent1"/>
+          </a:lnRef>
+          <a:fillRef idx="0">
+            <a:schemeClr val="accent1"/>
+          </a:fillRef>
+          <a:effectRef idx="1">
+            <a:schemeClr val="accent1"/>
+          </a:effectRef>
+          <a:fontRef idx="minor">
+            <a:schemeClr val="tx1"/>
+          </a:fontRef>
+        </p:style>
+      </p:cxnSp>
+      <p:sp>
+        <p:nvSpPr>
+          <p:cNvPr id="11" name="Rounded Rectangle 10"/>
+          <p:cNvSpPr/>
+          <p:nvPr/>
+        </p:nvSpPr>
+        <p:spPr>
+          <a:xfrm>
+            <a:off x="847864" y="2282317"/>
+            <a:ext cx="1916913" cy="351200"/>
+          </a:xfrm>
+          <a:prstGeom prst="roundRect">
+            <a:avLst>
+              <a:gd name="adj" fmla="val 50000"/>
+            </a:avLst>
+          </a:prstGeom>
+          <a:solidFill>
+            <a:srgbClr val="EDF5E8"/>
+          </a:solidFill>
+          <a:ln w="15875">
+            <a:solidFill>
+              <a:srgbClr val="548235"/>
+            </a:solidFill>
+          </a:ln>
+          <a:effectLst/>
+        </p:spPr>
+        <p:style>
+          <a:lnRef idx="1">
+            <a:schemeClr val="accent1"/>
+          </a:lnRef>
+          <a:fillRef idx="3">
+            <a:schemeClr val="accent1"/>
+          </a:fillRef>
+          <a:effectRef idx="2">
+            <a:schemeClr val="accent1"/>
+          </a:effectRef>
+          <a:fontRef idx="minor">
+            <a:schemeClr val="lt1"/>
+          </a:fontRef>
+        </p:style>
+        <p:txBody>
+          <a:bodyPr rtlCol="0" anchor="ctr" wrap="none" lIns="64000" rIns="64000" tIns="25400" bIns="25400"/>
+          <a:lstStyle/>
+          <a:p>
+            <a:pPr algn="ctr"/>
+            <a:r>
+              <a:rPr sz="1300" b="0">
+                <a:solidFill>
+                  <a:srgbClr val="000000"/>
+                </a:solidFill>
+                <a:latin typeface="Calibri"/>
+              </a:rPr>
+              <a:t>Thời gian phiếm chỉ</a:t>
+            </a:r>
+          </a:p>
+        </p:txBody>
+      </p:sp>
+      <p:cxnSp>
+        <p:nvCxnSpPr>
+          <p:cNvPr id="12" name="Connector 11"/>
+          <p:cNvCxnSpPr/>
+          <p:nvPr/>
+        </p:nvCxnSpPr>
+        <p:spPr>
+          <a:xfrm flipH="1">
+            <a:off x="2635999" y="2670962"/>
+            <a:ext cx="1702889" cy="313756"/>
+          </a:xfrm>
+          <a:prstGeom prst="line">
+            <a:avLst/>
+          </a:prstGeom>
+          <a:ln w="15875">
+            <a:solidFill>
+              <a:srgbClr val="548235"/>
+            </a:solidFill>
+          </a:ln>
+        </p:spPr>
+        <p:style>
+          <a:lnRef idx="2">
+            <a:schemeClr val="accent1"/>
+          </a:lnRef>
+          <a:fillRef idx="0">
+            <a:schemeClr val="accent1"/>
+          </a:fillRef>
+          <a:effectRef idx="1">
+            <a:schemeClr val="accent1"/>
+          </a:effectRef>
+          <a:fontRef idx="minor">
+            <a:schemeClr val="tx1"/>
+          </a:fontRef>
+        </p:style>
+      </p:cxnSp>
+      <p:sp>
+        <p:nvSpPr>
+          <p:cNvPr id="13" name="Rounded Rectangle 12"/>
+          <p:cNvSpPr/>
+          <p:nvPr/>
+        </p:nvSpPr>
+        <p:spPr>
+          <a:xfrm>
+            <a:off x="976642" y="2708407"/>
+            <a:ext cx="1659357" cy="552622"/>
+          </a:xfrm>
+          <a:prstGeom prst="roundRect">
+            <a:avLst>
+              <a:gd name="adj" fmla="val 50000"/>
+            </a:avLst>
+          </a:prstGeom>
+          <a:solidFill>
+            <a:srgbClr val="EDF5E8"/>
+          </a:solidFill>
+          <a:ln w="15875">
+            <a:solidFill>
+              <a:srgbClr val="548235"/>
+            </a:solidFill>
+          </a:ln>
+          <a:effectLst/>
+        </p:spPr>
+        <p:style>
+          <a:lnRef idx="1">
+            <a:schemeClr val="accent1"/>
+          </a:lnRef>
+          <a:fillRef idx="3">
+            <a:schemeClr val="accent1"/>
+          </a:fillRef>
+          <a:effectRef idx="2">
+            <a:schemeClr val="accent1"/>
+          </a:effectRef>
+          <a:fontRef idx="minor">
+            <a:schemeClr val="lt1"/>
+          </a:fontRef>
+        </p:style>
+        <p:txBody>
+          <a:bodyPr rtlCol="0" anchor="ctr" wrap="none" lIns="64000" rIns="64000" tIns="25400" bIns="25400"/>
+          <a:lstStyle/>
+          <a:p>
+            <a:pPr algn="ctr"/>
+            <a:r>
+              <a:rPr sz="1300" b="0">
+                <a:solidFill>
+                  <a:srgbClr val="000000"/>
+                </a:solidFill>
+                <a:latin typeface="Calibri"/>
+              </a:rPr>
+              <a:t>Nhân vật thần kì</a:t>
+            </a:r>
+          </a:p>
+          <a:p>
+            <a:pPr algn="ctr"/>
+            <a:r>
+              <a:rPr sz="1300" b="0">
+                <a:solidFill>
+                  <a:srgbClr val="000000"/>
+                </a:solidFill>
+                <a:latin typeface="Calibri"/>
+              </a:rPr>
+              <a:t>vĩ</a:t>
+            </a:r>
+          </a:p>
+        </p:txBody>
+      </p:sp>
+      <p:cxnSp>
+        <p:nvCxnSpPr>
+          <p:cNvPr id="14" name="Connector 13"/>
+          <p:cNvCxnSpPr/>
+          <p:nvPr/>
+        </p:nvCxnSpPr>
+        <p:spPr>
+          <a:xfrm flipH="1">
+            <a:off x="2635999" y="2670962"/>
+            <a:ext cx="1702889" cy="840557"/>
+          </a:xfrm>
+          <a:prstGeom prst="line">
+            <a:avLst/>
+          </a:prstGeom>
+          <a:ln w="15875">
+            <a:solidFill>
+              <a:srgbClr val="548235"/>
+            </a:solidFill>
+          </a:ln>
+        </p:spPr>
+        <p:style>
+          <a:lnRef idx="2">
+            <a:schemeClr val="accent1"/>
+          </a:lnRef>
+          <a:fillRef idx="0">
+            <a:schemeClr val="accent1"/>
+          </a:fillRef>
+          <a:effectRef idx="1">
+            <a:schemeClr val="accent1"/>
+          </a:effectRef>
+          <a:fontRef idx="minor">
+            <a:schemeClr val="tx1"/>
+          </a:fontRef>
+        </p:style>
+      </p:cxnSp>
+      <p:sp>
+        <p:nvSpPr>
+          <p:cNvPr id="15" name="Rounded Rectangle 14"/>
+          <p:cNvSpPr/>
+          <p:nvPr/>
+        </p:nvSpPr>
+        <p:spPr>
+          <a:xfrm>
+            <a:off x="976642" y="3335919"/>
+            <a:ext cx="1659357" cy="351200"/>
+          </a:xfrm>
+          <a:prstGeom prst="roundRect">
+            <a:avLst>
+              <a:gd name="adj" fmla="val 50000"/>
+            </a:avLst>
+          </a:prstGeom>
+          <a:solidFill>
+            <a:srgbClr val="EDF5E8"/>
+          </a:solidFill>
+          <a:ln w="15875">
+            <a:solidFill>
+              <a:srgbClr val="548235"/>
+            </a:solidFill>
+          </a:ln>
+          <a:effectLst/>
+        </p:spPr>
+        <p:style>
+          <a:lnRef idx="1">
+            <a:schemeClr val="accent1"/>
+          </a:lnRef>
+          <a:fillRef idx="3">
+            <a:schemeClr val="accent1"/>
+          </a:fillRef>
+          <a:effectRef idx="2">
+            <a:schemeClr val="accent1"/>
+          </a:effectRef>
+          <a:fontRef idx="minor">
+            <a:schemeClr val="lt1"/>
+          </a:fontRef>
+        </p:style>
+        <p:txBody>
+          <a:bodyPr rtlCol="0" anchor="ctr" wrap="none" lIns="64000" rIns="64000" tIns="25400" bIns="25400"/>
+          <a:lstStyle/>
+          <a:p>
+            <a:pPr algn="ctr"/>
+            <a:r>
+              <a:rPr sz="1300" b="0">
+                <a:solidFill>
+                  <a:srgbClr val="000000"/>
+                </a:solidFill>
+                <a:latin typeface="Calibri"/>
+              </a:rPr>
+              <a:t>Lí giải tự nhiên</a:t>
+            </a:r>
+          </a:p>
+        </p:txBody>
+      </p:sp>
+      <p:sp>
+        <p:nvSpPr>
+          <p:cNvPr id="16" name="Oval 15"/>
+          <p:cNvSpPr/>
+          <p:nvPr/>
+        </p:nvSpPr>
+        <p:spPr>
+          <a:xfrm>
+            <a:off x="3363922" y="2427575"/>
+            <a:ext cx="1949933" cy="486773"/>
+          </a:xfrm>
+          <a:prstGeom prst="ellipse">
+            <a:avLst/>
+          </a:prstGeom>
+          <a:solidFill>
+            <a:srgbClr val="E2EFDA"/>
+          </a:solidFill>
+          <a:ln w="31750">
+            <a:solidFill>
+              <a:srgbClr val="375623"/>
+            </a:solidFill>
+          </a:ln>
+          <a:effectLst/>
+        </p:spPr>
+        <p:style>
+          <a:lnRef idx="1">
+            <a:schemeClr val="accent1"/>
+          </a:lnRef>
+          <a:fillRef idx="3">
+            <a:schemeClr val="accent1"/>
+          </a:fillRef>
+          <a:effectRef idx="2">
+            <a:schemeClr val="accent1"/>
+          </a:effectRef>
+          <a:fontRef idx="minor">
+            <a:schemeClr val="lt1"/>
+          </a:fontRef>
+        </p:style>
+        <p:txBody>
+          <a:bodyPr rtlCol="0" anchor="ctr" wrap="none" lIns="64000" rIns="64000" tIns="25400" bIns="25400"/>
+          <a:lstStyle/>
+          <a:p>
+            <a:pPr algn="ctr"/>
+            <a:r>
+              <a:rPr sz="1500" b="1">
+                <a:solidFill>
+                  <a:srgbClr val="000000"/>
+                </a:solidFill>
+                <a:latin typeface="Calibri"/>
+              </a:rPr>
+              <a:t>① Thần thoại</a:t>
+            </a:r>
+          </a:p>
+        </p:txBody>
+      </p:sp>
+      <p:cxnSp>
+        <p:nvCxnSpPr>
+          <p:cNvPr id="17" name="Connector 16"/>
+          <p:cNvCxnSpPr/>
+          <p:nvPr/>
+        </p:nvCxnSpPr>
+        <p:spPr>
+          <a:xfrm flipV="1">
+            <a:off x="6027267" y="2670962"/>
+            <a:ext cx="1688379" cy="1283818"/>
+          </a:xfrm>
+          <a:prstGeom prst="line">
+            <a:avLst/>
+          </a:prstGeom>
+          <a:ln w="44450">
+            <a:solidFill>
+              <a:srgbClr val="BF8F00"/>
+            </a:solidFill>
+          </a:ln>
+        </p:spPr>
+        <p:style>
+          <a:lnRef idx="2">
+            <a:schemeClr val="accent1"/>
+          </a:lnRef>
+          <a:fillRef idx="0">
+            <a:schemeClr val="accent1"/>
+          </a:fillRef>
+          <a:effectRef idx="1">
+            <a:schemeClr val="accent1"/>
+          </a:effectRef>
+          <a:fontRef idx="minor">
+            <a:schemeClr val="tx1"/>
+          </a:fontRef>
+        </p:style>
+      </p:cxnSp>
+      <p:cxnSp>
+        <p:nvCxnSpPr>
+          <p:cNvPr id="18" name="Connector 17"/>
+          <p:cNvCxnSpPr/>
+          <p:nvPr/>
+        </p:nvCxnSpPr>
+        <p:spPr>
+          <a:xfrm flipV="1">
+            <a:off x="7715646" y="1830405"/>
+            <a:ext cx="1511373" cy="840557"/>
+          </a:xfrm>
+          <a:prstGeom prst="line">
+            <a:avLst/>
+          </a:prstGeom>
+          <a:ln w="15875">
+            <a:solidFill>
+              <a:srgbClr val="BF8F00"/>
+            </a:solidFill>
+          </a:ln>
+        </p:spPr>
+        <p:style>
+          <a:lnRef idx="2">
+            <a:schemeClr val="accent1"/>
+          </a:lnRef>
+          <a:fillRef idx="0">
+            <a:schemeClr val="accent1"/>
+          </a:fillRef>
+          <a:effectRef idx="1">
+            <a:schemeClr val="accent1"/>
+          </a:effectRef>
+          <a:fontRef idx="minor">
+            <a:schemeClr val="tx1"/>
+          </a:fontRef>
+        </p:style>
+      </p:cxnSp>
+      <p:sp>
+        <p:nvSpPr>
+          <p:cNvPr id="19" name="Rounded Rectangle 18"/>
+          <p:cNvSpPr/>
+          <p:nvPr/>
+        </p:nvSpPr>
+        <p:spPr>
+          <a:xfrm>
+            <a:off x="9227019" y="1654804"/>
+            <a:ext cx="2042389" cy="351200"/>
+          </a:xfrm>
+          <a:prstGeom prst="roundRect">
+            <a:avLst>
+              <a:gd name="adj" fmla="val 50000"/>
+            </a:avLst>
+          </a:prstGeom>
+          <a:solidFill>
+            <a:srgbClr val="FFF8E1"/>
+          </a:solidFill>
+          <a:ln w="15875">
+            <a:solidFill>
+              <a:srgbClr val="BF8F00"/>
+            </a:solidFill>
+          </a:ln>
+          <a:effectLst/>
+        </p:spPr>
+        <p:style>
+          <a:lnRef idx="1">
+            <a:schemeClr val="accent1"/>
+          </a:lnRef>
+          <a:fillRef idx="3">
+            <a:schemeClr val="accent1"/>
+          </a:fillRef>
+          <a:effectRef idx="2">
+            <a:schemeClr val="accent1"/>
+          </a:effectRef>
+          <a:fontRef idx="minor">
+            <a:schemeClr val="lt1"/>
+          </a:fontRef>
+        </p:style>
+        <p:txBody>
+          <a:bodyPr rtlCol="0" anchor="ctr" wrap="none" lIns="64000" rIns="64000" tIns="25400" bIns="25400"/>
+          <a:lstStyle/>
+          <a:p>
+            <a:pPr algn="ctr"/>
+            <a:r>
+              <a:rPr sz="1300" b="1">
+                <a:solidFill>
+                  <a:srgbClr val="8B0000"/>
+                </a:solidFill>
+                <a:latin typeface="Calibri"/>
+              </a:rPr>
+              <a:t>Chuyện chức Phán sự</a:t>
+            </a:r>
+          </a:p>
+        </p:txBody>
+      </p:sp>
+      <p:cxnSp>
+        <p:nvCxnSpPr>
+          <p:cNvPr id="20" name="Connector 19"/>
+          <p:cNvCxnSpPr/>
+          <p:nvPr/>
+        </p:nvCxnSpPr>
+        <p:spPr>
+          <a:xfrm flipV="1">
+            <a:off x="7715646" y="2357206"/>
+            <a:ext cx="1702889" cy="313756"/>
+          </a:xfrm>
+          <a:prstGeom prst="line">
+            <a:avLst/>
+          </a:prstGeom>
+          <a:ln w="15875">
+            <a:solidFill>
+              <a:srgbClr val="BF8F00"/>
+            </a:solidFill>
+          </a:ln>
+        </p:spPr>
+        <p:style>
+          <a:lnRef idx="2">
+            <a:schemeClr val="accent1"/>
+          </a:lnRef>
+          <a:fillRef idx="0">
+            <a:schemeClr val="accent1"/>
+          </a:fillRef>
+          <a:effectRef idx="1">
+            <a:schemeClr val="accent1"/>
+          </a:effectRef>
+          <a:fontRef idx="minor">
+            <a:schemeClr val="tx1"/>
+          </a:fontRef>
+        </p:style>
+      </p:cxnSp>
+      <p:sp>
+        <p:nvSpPr>
+          <p:cNvPr id="21" name="Rounded Rectangle 20"/>
+          <p:cNvSpPr/>
+          <p:nvPr/>
+        </p:nvSpPr>
+        <p:spPr>
+          <a:xfrm>
+            <a:off x="9418535" y="2080894"/>
+            <a:ext cx="1659357" cy="552622"/>
+          </a:xfrm>
+          <a:prstGeom prst="roundRect">
+            <a:avLst>
+              <a:gd name="adj" fmla="val 50000"/>
+            </a:avLst>
+          </a:prstGeom>
+          <a:solidFill>
+            <a:srgbClr val="FFF8E1"/>
+          </a:solidFill>
+          <a:ln w="15875">
+            <a:solidFill>
+              <a:srgbClr val="BF8F00"/>
+            </a:solidFill>
+          </a:ln>
+          <a:effectLst/>
+        </p:spPr>
+        <p:style>
+          <a:lnRef idx="1">
+            <a:schemeClr val="accent1"/>
+          </a:lnRef>
+          <a:fillRef idx="3">
+            <a:schemeClr val="accent1"/>
+          </a:fillRef>
+          <a:effectRef idx="2">
+            <a:schemeClr val="accent1"/>
+          </a:effectRef>
+          <a:fontRef idx="minor">
+            <a:schemeClr val="lt1"/>
+          </a:fontRef>
+        </p:style>
+        <p:txBody>
+          <a:bodyPr rtlCol="0" anchor="ctr" wrap="none" lIns="64000" rIns="64000" tIns="25400" bIns="25400"/>
+          <a:lstStyle/>
+          <a:p>
+            <a:pPr algn="ctr"/>
+            <a:r>
+              <a:rPr sz="1300" b="0">
+                <a:solidFill>
+                  <a:srgbClr val="000000"/>
+                </a:solidFill>
+                <a:latin typeface="Calibri"/>
+              </a:rPr>
+              <a:t>Ngô Tử Văn cương</a:t>
+            </a:r>
+          </a:p>
+          <a:p>
+            <a:pPr algn="ctr"/>
+            <a:r>
+              <a:rPr sz="1300" b="0">
+                <a:solidFill>
+                  <a:srgbClr val="000000"/>
+                </a:solidFill>
+                <a:latin typeface="Calibri"/>
+              </a:rPr>
+              <a:t>trực</a:t>
+            </a:r>
+          </a:p>
+        </p:txBody>
+      </p:sp>
+      <p:cxnSp>
+        <p:nvCxnSpPr>
+          <p:cNvPr id="22" name="Connector 21"/>
+          <p:cNvCxnSpPr/>
+          <p:nvPr/>
+        </p:nvCxnSpPr>
+        <p:spPr>
+          <a:xfrm>
+            <a:off x="7715646" y="2670962"/>
+            <a:ext cx="1874593" cy="213045"/>
+          </a:xfrm>
+          <a:prstGeom prst="line">
+            <a:avLst/>
+          </a:prstGeom>
+          <a:ln w="15875">
+            <a:solidFill>
+              <a:srgbClr val="BF8F00"/>
+            </a:solidFill>
+          </a:ln>
+        </p:spPr>
+        <p:style>
+          <a:lnRef idx="2">
+            <a:schemeClr val="accent1"/>
+          </a:lnRef>
+          <a:fillRef idx="0">
+            <a:schemeClr val="accent1"/>
+          </a:fillRef>
+          <a:effectRef idx="1">
+            <a:schemeClr val="accent1"/>
+          </a:effectRef>
+          <a:fontRef idx="minor">
+            <a:schemeClr val="tx1"/>
+          </a:fontRef>
+        </p:style>
+      </p:cxnSp>
+      <p:sp>
+        <p:nvSpPr>
+          <p:cNvPr id="23" name="Rounded Rectangle 22"/>
+          <p:cNvSpPr/>
+          <p:nvPr/>
+        </p:nvSpPr>
+        <p:spPr>
+          <a:xfrm>
+            <a:off x="9590239" y="2708407"/>
+            <a:ext cx="1315949" cy="351200"/>
+          </a:xfrm>
+          <a:prstGeom prst="roundRect">
+            <a:avLst>
+              <a:gd name="adj" fmla="val 50000"/>
+            </a:avLst>
+          </a:prstGeom>
+          <a:solidFill>
+            <a:srgbClr val="FFF8E1"/>
+          </a:solidFill>
+          <a:ln w="15875">
+            <a:solidFill>
+              <a:srgbClr val="BF8F00"/>
+            </a:solidFill>
+          </a:ln>
+          <a:effectLst/>
+        </p:spPr>
+        <p:style>
+          <a:lnRef idx="1">
+            <a:schemeClr val="accent1"/>
+          </a:lnRef>
+          <a:fillRef idx="3">
+            <a:schemeClr val="accent1"/>
+          </a:fillRef>
+          <a:effectRef idx="2">
+            <a:schemeClr val="accent1"/>
+          </a:effectRef>
+          <a:fontRef idx="minor">
+            <a:schemeClr val="lt1"/>
+          </a:fontRef>
+        </p:style>
+        <p:txBody>
+          <a:bodyPr rtlCol="0" anchor="ctr" wrap="none" lIns="64000" rIns="64000" tIns="25400" bIns="25400"/>
+          <a:lstStyle/>
+          <a:p>
+            <a:pPr algn="ctr"/>
+            <a:r>
+              <a:rPr sz="1300" b="0">
+                <a:solidFill>
+                  <a:srgbClr val="000000"/>
+                </a:solidFill>
+                <a:latin typeface="Calibri"/>
+              </a:rPr>
+              <a:t>Yếu tố kì ảo</a:t>
+            </a:r>
+          </a:p>
+        </p:txBody>
+      </p:sp>
+      <p:cxnSp>
+        <p:nvCxnSpPr>
+          <p:cNvPr id="24" name="Connector 23"/>
+          <p:cNvCxnSpPr/>
+          <p:nvPr/>
+        </p:nvCxnSpPr>
+        <p:spPr>
+          <a:xfrm>
+            <a:off x="7715646" y="2670962"/>
+            <a:ext cx="1445333" cy="739846"/>
+          </a:xfrm>
+          <a:prstGeom prst="line">
+            <a:avLst/>
+          </a:prstGeom>
+          <a:ln w="15875">
+            <a:solidFill>
+              <a:srgbClr val="BF8F00"/>
+            </a:solidFill>
+          </a:ln>
+        </p:spPr>
+        <p:style>
+          <a:lnRef idx="2">
+            <a:schemeClr val="accent1"/>
+          </a:lnRef>
+          <a:fillRef idx="0">
+            <a:schemeClr val="accent1"/>
+          </a:fillRef>
+          <a:effectRef idx="1">
+            <a:schemeClr val="accent1"/>
+          </a:effectRef>
+          <a:fontRef idx="minor">
+            <a:schemeClr val="tx1"/>
+          </a:fontRef>
+        </p:style>
+      </p:cxnSp>
+      <p:sp>
+        <p:nvSpPr>
+          <p:cNvPr id="25" name="Rounded Rectangle 24"/>
+          <p:cNvSpPr/>
+          <p:nvPr/>
+        </p:nvSpPr>
+        <p:spPr>
+          <a:xfrm>
+            <a:off x="9160979" y="3134497"/>
+            <a:ext cx="2174469" cy="552622"/>
+          </a:xfrm>
+          <a:prstGeom prst="roundRect">
+            <a:avLst>
+              <a:gd name="adj" fmla="val 50000"/>
+            </a:avLst>
+          </a:prstGeom>
+          <a:solidFill>
+            <a:srgbClr val="FFF8E1"/>
+          </a:solidFill>
+          <a:ln w="15875">
+            <a:solidFill>
+              <a:srgbClr val="BF8F00"/>
+            </a:solidFill>
+          </a:ln>
+          <a:effectLst/>
+        </p:spPr>
+        <p:style>
+          <a:lnRef idx="1">
+            <a:schemeClr val="accent1"/>
+          </a:lnRef>
+          <a:fillRef idx="3">
+            <a:schemeClr val="accent1"/>
+          </a:fillRef>
+          <a:effectRef idx="2">
+            <a:schemeClr val="accent1"/>
+          </a:effectRef>
+          <a:fontRef idx="minor">
+            <a:schemeClr val="lt1"/>
+          </a:fontRef>
+        </p:style>
+        <p:txBody>
+          <a:bodyPr rtlCol="0" anchor="ctr" wrap="none" lIns="64000" rIns="64000" tIns="25400" bIns="25400"/>
+          <a:lstStyle/>
+          <a:p>
+            <a:pPr algn="ctr"/>
+            <a:r>
+              <a:rPr sz="1300" b="0">
+                <a:solidFill>
+                  <a:srgbClr val="000000"/>
+                </a:solidFill>
+                <a:latin typeface="Calibri"/>
+              </a:rPr>
+              <a:t>Chính nghĩa thắng gian</a:t>
+            </a:r>
+          </a:p>
+          <a:p>
+            <a:pPr algn="ctr"/>
+            <a:r>
+              <a:rPr sz="1300" b="0">
+                <a:solidFill>
+                  <a:srgbClr val="000000"/>
+                </a:solidFill>
+                <a:latin typeface="Calibri"/>
+              </a:rPr>
+              <a:t>tà</a:t>
+            </a:r>
+          </a:p>
+        </p:txBody>
+      </p:sp>
+      <p:sp>
+        <p:nvSpPr>
+          <p:cNvPr id="26" name="Oval 25"/>
+          <p:cNvSpPr/>
+          <p:nvPr/>
+        </p:nvSpPr>
+        <p:spPr>
+          <a:xfrm>
+            <a:off x="6810021" y="2259078"/>
+            <a:ext cx="1811249" cy="823767"/>
+          </a:xfrm>
+          <a:prstGeom prst="ellipse">
+            <a:avLst/>
+          </a:prstGeom>
+          <a:solidFill>
+            <a:srgbClr val="FFF2CC"/>
+          </a:solidFill>
+          <a:ln w="31750">
+            <a:solidFill>
+              <a:srgbClr val="BF8F00"/>
+            </a:solidFill>
+          </a:ln>
+          <a:effectLst/>
+        </p:spPr>
+        <p:style>
+          <a:lnRef idx="1">
+            <a:schemeClr val="accent1"/>
+          </a:lnRef>
+          <a:fillRef idx="3">
+            <a:schemeClr val="accent1"/>
+          </a:fillRef>
+          <a:effectRef idx="2">
+            <a:schemeClr val="accent1"/>
+          </a:effectRef>
+          <a:fontRef idx="minor">
+            <a:schemeClr val="lt1"/>
+          </a:fontRef>
+        </p:style>
+        <p:txBody>
+          <a:bodyPr rtlCol="0" anchor="ctr" wrap="none" lIns="64000" rIns="64000" tIns="25400" bIns="25400"/>
+          <a:lstStyle/>
+          <a:p>
+            <a:pPr algn="ctr"/>
+            <a:r>
+              <a:rPr sz="1500" b="1">
+                <a:solidFill>
+                  <a:srgbClr val="000000"/>
+                </a:solidFill>
+                <a:latin typeface="Calibri"/>
+              </a:rPr>
+              <a:t>② Truyền kì</a:t>
+            </a:r>
+          </a:p>
+          <a:p>
+            <a:pPr algn="ctr"/>
+            <a:r>
+              <a:rPr sz="1500" b="1">
+                <a:solidFill>
+                  <a:srgbClr val="000000"/>
+                </a:solidFill>
+                <a:latin typeface="Calibri"/>
+              </a:rPr>
+              <a:t>– Nguyễn Dữ</a:t>
+            </a:r>
+          </a:p>
+        </p:txBody>
+      </p:sp>
+      <p:cxnSp>
+        <p:nvCxnSpPr>
+          <p:cNvPr id="27" name="Connector 26"/>
+          <p:cNvCxnSpPr/>
+          <p:nvPr/>
+        </p:nvCxnSpPr>
+        <p:spPr>
+          <a:xfrm flipH="1">
+            <a:off x="4338888" y="3954780"/>
+            <a:ext cx="1688379" cy="1283817"/>
+          </a:xfrm>
+          <a:prstGeom prst="line">
+            <a:avLst/>
+          </a:prstGeom>
+          <a:ln w="44450">
+            <a:solidFill>
+              <a:srgbClr val="2F5597"/>
+            </a:solidFill>
+          </a:ln>
+        </p:spPr>
+        <p:style>
+          <a:lnRef idx="2">
+            <a:schemeClr val="accent1"/>
+          </a:lnRef>
+          <a:fillRef idx="0">
+            <a:schemeClr val="accent1"/>
+          </a:fillRef>
+          <a:effectRef idx="1">
+            <a:schemeClr val="accent1"/>
+          </a:effectRef>
+          <a:fontRef idx="minor">
+            <a:schemeClr val="tx1"/>
+          </a:fontRef>
+        </p:style>
+      </p:cxnSp>
+      <p:cxnSp>
+        <p:nvCxnSpPr>
+          <p:cNvPr id="28" name="Connector 27"/>
+          <p:cNvCxnSpPr/>
+          <p:nvPr/>
+        </p:nvCxnSpPr>
+        <p:spPr>
+          <a:xfrm flipH="1" flipV="1">
+            <a:off x="2642603" y="4498751"/>
+            <a:ext cx="1696285" cy="739846"/>
+          </a:xfrm>
+          <a:prstGeom prst="line">
+            <a:avLst/>
+          </a:prstGeom>
+          <a:ln w="15875">
+            <a:solidFill>
+              <a:srgbClr val="2F5597"/>
+            </a:solidFill>
+          </a:ln>
+        </p:spPr>
+        <p:style>
+          <a:lnRef idx="2">
+            <a:schemeClr val="accent1"/>
+          </a:lnRef>
+          <a:fillRef idx="0">
+            <a:schemeClr val="accent1"/>
+          </a:fillRef>
+          <a:effectRef idx="1">
+            <a:schemeClr val="accent1"/>
+          </a:effectRef>
+          <a:fontRef idx="minor">
+            <a:schemeClr val="tx1"/>
+          </a:fontRef>
+        </p:style>
+      </p:cxnSp>
+      <p:sp>
+        <p:nvSpPr>
+          <p:cNvPr id="29" name="Rounded Rectangle 28"/>
+          <p:cNvSpPr/>
+          <p:nvPr/>
+        </p:nvSpPr>
+        <p:spPr>
+          <a:xfrm>
+            <a:off x="970038" y="4222440"/>
+            <a:ext cx="1672565" cy="552622"/>
+          </a:xfrm>
+          <a:prstGeom prst="roundRect">
+            <a:avLst>
+              <a:gd name="adj" fmla="val 50000"/>
+            </a:avLst>
+          </a:prstGeom>
+          <a:solidFill>
+            <a:srgbClr val="E3EEF9"/>
+          </a:solidFill>
+          <a:ln w="15875">
+            <a:solidFill>
+              <a:srgbClr val="2F5597"/>
+            </a:solidFill>
+          </a:ln>
+          <a:effectLst/>
+        </p:spPr>
+        <p:style>
+          <a:lnRef idx="1">
+            <a:schemeClr val="accent1"/>
+          </a:lnRef>
+          <a:fillRef idx="3">
+            <a:schemeClr val="accent1"/>
+          </a:fillRef>
+          <a:effectRef idx="2">
+            <a:schemeClr val="accent1"/>
+          </a:effectRef>
+          <a:fontRef idx="minor">
+            <a:schemeClr val="lt1"/>
+          </a:fontRef>
+        </p:style>
+        <p:txBody>
+          <a:bodyPr rtlCol="0" anchor="ctr" wrap="none" lIns="64000" rIns="64000" tIns="25400" bIns="25400"/>
+          <a:lstStyle/>
+          <a:p>
+            <a:pPr algn="ctr"/>
+            <a:r>
+              <a:rPr sz="1300" b="1">
+                <a:solidFill>
+                  <a:srgbClr val="8B0000"/>
+                </a:solidFill>
+                <a:latin typeface="Calibri"/>
+              </a:rPr>
+              <a:t>Huấn Cao – tài,</a:t>
+            </a:r>
+          </a:p>
+          <a:p>
+            <a:pPr algn="ctr"/>
+            <a:r>
+              <a:rPr sz="1300" b="1">
+                <a:solidFill>
+                  <a:srgbClr val="8B0000"/>
+                </a:solidFill>
+                <a:latin typeface="Calibri"/>
+              </a:rPr>
+              <a:t>khí phách</a:t>
+            </a:r>
+          </a:p>
+        </p:txBody>
+      </p:sp>
+      <p:cxnSp>
+        <p:nvCxnSpPr>
+          <p:cNvPr id="30" name="Connector 29"/>
+          <p:cNvCxnSpPr/>
+          <p:nvPr/>
+        </p:nvCxnSpPr>
+        <p:spPr>
+          <a:xfrm flipH="1" flipV="1">
+            <a:off x="2678925" y="5126263"/>
+            <a:ext cx="1659963" cy="112334"/>
+          </a:xfrm>
+          <a:prstGeom prst="line">
+            <a:avLst/>
+          </a:prstGeom>
+          <a:ln w="15875">
+            <a:solidFill>
+              <a:srgbClr val="2F5597"/>
+            </a:solidFill>
+          </a:ln>
+        </p:spPr>
+        <p:style>
+          <a:lnRef idx="2">
+            <a:schemeClr val="accent1"/>
+          </a:lnRef>
+          <a:fillRef idx="0">
+            <a:schemeClr val="accent1"/>
+          </a:fillRef>
+          <a:effectRef idx="1">
+            <a:schemeClr val="accent1"/>
+          </a:effectRef>
+          <a:fontRef idx="minor">
+            <a:schemeClr val="tx1"/>
+          </a:fontRef>
+        </p:style>
+      </p:cxnSp>
+      <p:sp>
+        <p:nvSpPr>
+          <p:cNvPr id="31" name="Rounded Rectangle 30"/>
+          <p:cNvSpPr/>
+          <p:nvPr/>
+        </p:nvSpPr>
+        <p:spPr>
+          <a:xfrm>
+            <a:off x="933716" y="4849952"/>
+            <a:ext cx="1745209" cy="552622"/>
+          </a:xfrm>
+          <a:prstGeom prst="roundRect">
+            <a:avLst>
+              <a:gd name="adj" fmla="val 50000"/>
+            </a:avLst>
+          </a:prstGeom>
+          <a:solidFill>
+            <a:srgbClr val="E3EEF9"/>
+          </a:solidFill>
+          <a:ln w="15875">
+            <a:solidFill>
+              <a:srgbClr val="2F5597"/>
+            </a:solidFill>
+          </a:ln>
+          <a:effectLst/>
+        </p:spPr>
+        <p:style>
+          <a:lnRef idx="1">
+            <a:schemeClr val="accent1"/>
+          </a:lnRef>
+          <a:fillRef idx="3">
+            <a:schemeClr val="accent1"/>
+          </a:fillRef>
+          <a:effectRef idx="2">
+            <a:schemeClr val="accent1"/>
+          </a:effectRef>
+          <a:fontRef idx="minor">
+            <a:schemeClr val="lt1"/>
+          </a:fontRef>
+        </p:style>
+        <p:txBody>
+          <a:bodyPr rtlCol="0" anchor="ctr" wrap="none" lIns="64000" rIns="64000" tIns="25400" bIns="25400"/>
+          <a:lstStyle/>
+          <a:p>
+            <a:pPr algn="ctr"/>
+            <a:r>
+              <a:rPr sz="1300" b="0">
+                <a:solidFill>
+                  <a:srgbClr val="000000"/>
+                </a:solidFill>
+                <a:latin typeface="Calibri"/>
+              </a:rPr>
+              <a:t>Quản ngục – thiên</a:t>
+            </a:r>
+          </a:p>
+          <a:p>
+            <a:pPr algn="ctr"/>
+            <a:r>
+              <a:rPr sz="1300" b="0">
+                <a:solidFill>
+                  <a:srgbClr val="000000"/>
+                </a:solidFill>
+                <a:latin typeface="Calibri"/>
+              </a:rPr>
+              <a:t>lương</a:t>
+            </a:r>
+          </a:p>
+        </p:txBody>
+      </p:sp>
+      <p:cxnSp>
+        <p:nvCxnSpPr>
+          <p:cNvPr id="32" name="Connector 31"/>
+          <p:cNvCxnSpPr/>
+          <p:nvPr/>
+        </p:nvCxnSpPr>
+        <p:spPr>
+          <a:xfrm flipH="1">
+            <a:off x="2464295" y="5238597"/>
+            <a:ext cx="1874593" cy="414467"/>
+          </a:xfrm>
+          <a:prstGeom prst="line">
+            <a:avLst/>
+          </a:prstGeom>
+          <a:ln w="15875">
+            <a:solidFill>
+              <a:srgbClr val="2F5597"/>
+            </a:solidFill>
+          </a:ln>
+        </p:spPr>
+        <p:style>
+          <a:lnRef idx="2">
+            <a:schemeClr val="accent1"/>
+          </a:lnRef>
+          <a:fillRef idx="0">
+            <a:schemeClr val="accent1"/>
+          </a:fillRef>
+          <a:effectRef idx="1">
+            <a:schemeClr val="accent1"/>
+          </a:effectRef>
+          <a:fontRef idx="minor">
+            <a:schemeClr val="tx1"/>
+          </a:fontRef>
+        </p:style>
+      </p:cxnSp>
+      <p:sp>
+        <p:nvSpPr>
+          <p:cNvPr id="33" name="Rounded Rectangle 32"/>
+          <p:cNvSpPr/>
+          <p:nvPr/>
+        </p:nvSpPr>
+        <p:spPr>
+          <a:xfrm>
+            <a:off x="1148346" y="5477464"/>
+            <a:ext cx="1315949" cy="351200"/>
+          </a:xfrm>
+          <a:prstGeom prst="roundRect">
+            <a:avLst>
+              <a:gd name="adj" fmla="val 50000"/>
+            </a:avLst>
+          </a:prstGeom>
+          <a:solidFill>
+            <a:srgbClr val="E3EEF9"/>
+          </a:solidFill>
+          <a:ln w="15875">
+            <a:solidFill>
+              <a:srgbClr val="2F5597"/>
+            </a:solidFill>
+          </a:ln>
+          <a:effectLst/>
+        </p:spPr>
+        <p:style>
+          <a:lnRef idx="1">
+            <a:schemeClr val="accent1"/>
+          </a:lnRef>
+          <a:fillRef idx="3">
+            <a:schemeClr val="accent1"/>
+          </a:fillRef>
+          <a:effectRef idx="2">
+            <a:schemeClr val="accent1"/>
+          </a:effectRef>
+          <a:fontRef idx="minor">
+            <a:schemeClr val="lt1"/>
+          </a:fontRef>
+        </p:style>
+        <p:txBody>
+          <a:bodyPr rtlCol="0" anchor="ctr" wrap="none" lIns="64000" rIns="64000" tIns="25400" bIns="25400"/>
+          <a:lstStyle/>
+          <a:p>
+            <a:pPr algn="ctr"/>
+            <a:r>
+              <a:rPr sz="1300" b="0">
+                <a:solidFill>
+                  <a:srgbClr val="000000"/>
+                </a:solidFill>
+                <a:latin typeface="Calibri"/>
+              </a:rPr>
+              <a:t>Cảnh cho chữ</a:t>
+            </a:r>
+          </a:p>
+        </p:txBody>
+      </p:sp>
+      <p:cxnSp>
+        <p:nvCxnSpPr>
+          <p:cNvPr id="34" name="Connector 33"/>
+          <p:cNvCxnSpPr/>
+          <p:nvPr/>
+        </p:nvCxnSpPr>
+        <p:spPr>
+          <a:xfrm flipH="1">
+            <a:off x="2721851" y="5238597"/>
+            <a:ext cx="1617037" cy="840557"/>
+          </a:xfrm>
+          <a:prstGeom prst="line">
+            <a:avLst/>
+          </a:prstGeom>
+          <a:ln w="15875">
+            <a:solidFill>
+              <a:srgbClr val="2F5597"/>
+            </a:solidFill>
+          </a:ln>
+        </p:spPr>
+        <p:style>
+          <a:lnRef idx="2">
+            <a:schemeClr val="accent1"/>
+          </a:lnRef>
+          <a:fillRef idx="0">
+            <a:schemeClr val="accent1"/>
+          </a:fillRef>
+          <a:effectRef idx="1">
+            <a:schemeClr val="accent1"/>
+          </a:effectRef>
+          <a:fontRef idx="minor">
+            <a:schemeClr val="tx1"/>
+          </a:fontRef>
+        </p:style>
+      </p:cxnSp>
+      <p:sp>
+        <p:nvSpPr>
+          <p:cNvPr id="35" name="Rounded Rectangle 34"/>
+          <p:cNvSpPr/>
+          <p:nvPr/>
+        </p:nvSpPr>
+        <p:spPr>
+          <a:xfrm>
+            <a:off x="890790" y="5903554"/>
+            <a:ext cx="1831061" cy="351200"/>
+          </a:xfrm>
+          <a:prstGeom prst="roundRect">
+            <a:avLst>
+              <a:gd name="adj" fmla="val 50000"/>
+            </a:avLst>
+          </a:prstGeom>
+          <a:solidFill>
+            <a:srgbClr val="E3EEF9"/>
+          </a:solidFill>
+          <a:ln w="15875">
+            <a:solidFill>
+              <a:srgbClr val="2F5597"/>
+            </a:solidFill>
+          </a:ln>
+          <a:effectLst/>
+        </p:spPr>
+        <p:style>
+          <a:lnRef idx="1">
+            <a:schemeClr val="accent1"/>
+          </a:lnRef>
+          <a:fillRef idx="3">
+            <a:schemeClr val="accent1"/>
+          </a:fillRef>
+          <a:effectRef idx="2">
+            <a:schemeClr val="accent1"/>
+          </a:effectRef>
+          <a:fontRef idx="minor">
+            <a:schemeClr val="lt1"/>
+          </a:fontRef>
+        </p:style>
+        <p:txBody>
+          <a:bodyPr rtlCol="0" anchor="ctr" wrap="none" lIns="64000" rIns="64000" tIns="25400" bIns="25400"/>
+          <a:lstStyle/>
+          <a:p>
+            <a:pPr algn="ctr"/>
+            <a:r>
+              <a:rPr sz="1300" b="0">
+                <a:solidFill>
+                  <a:srgbClr val="000000"/>
+                </a:solidFill>
+                <a:latin typeface="Calibri"/>
+              </a:rPr>
+              <a:t>Cái đẹp, cái thiện</a:t>
+            </a:r>
+          </a:p>
+        </p:txBody>
+      </p:sp>
+      <p:sp>
+        <p:nvSpPr>
+          <p:cNvPr id="36" name="Oval 35"/>
+          <p:cNvSpPr/>
+          <p:nvPr/>
+        </p:nvSpPr>
+        <p:spPr>
+          <a:xfrm>
+            <a:off x="3433264" y="4826713"/>
+            <a:ext cx="1811249" cy="823767"/>
+          </a:xfrm>
+          <a:prstGeom prst="ellipse">
+            <a:avLst/>
+          </a:prstGeom>
+          <a:solidFill>
+            <a:srgbClr val="E2EFDA"/>
+          </a:solidFill>
+          <a:ln w="31750">
+            <a:solidFill>
+              <a:srgbClr val="375623"/>
+            </a:solidFill>
+          </a:ln>
+          <a:effectLst/>
+        </p:spPr>
+        <p:style>
+          <a:lnRef idx="1">
+            <a:schemeClr val="accent1"/>
+          </a:lnRef>
+          <a:fillRef idx="3">
+            <a:schemeClr val="accent1"/>
+          </a:fillRef>
+          <a:effectRef idx="2">
+            <a:schemeClr val="accent1"/>
+          </a:effectRef>
+          <a:fontRef idx="minor">
+            <a:schemeClr val="lt1"/>
+          </a:fontRef>
+        </p:style>
+        <p:txBody>
+          <a:bodyPr rtlCol="0" anchor="ctr" wrap="none" lIns="64000" rIns="64000" tIns="25400" bIns="25400"/>
+          <a:lstStyle/>
+          <a:p>
+            <a:pPr algn="ctr"/>
+            <a:r>
+              <a:rPr sz="1500" b="1">
+                <a:solidFill>
+                  <a:srgbClr val="000000"/>
+                </a:solidFill>
+                <a:latin typeface="Calibri"/>
+              </a:rPr>
+              <a:t>③ Chữ người</a:t>
+            </a:r>
+          </a:p>
+          <a:p>
+            <a:pPr algn="ctr"/>
+            <a:r>
+              <a:rPr sz="1500" b="1">
+                <a:solidFill>
+                  <a:srgbClr val="000000"/>
+                </a:solidFill>
+                <a:latin typeface="Calibri"/>
+              </a:rPr>
+              <a:t>tử tù</a:t>
+            </a:r>
+          </a:p>
+        </p:txBody>
+      </p:sp>
+      <p:cxnSp>
+        <p:nvCxnSpPr>
+          <p:cNvPr id="37" name="Connector 36"/>
+          <p:cNvCxnSpPr/>
+          <p:nvPr/>
+        </p:nvCxnSpPr>
+        <p:spPr>
+          <a:xfrm>
+            <a:off x="6027267" y="3954780"/>
+            <a:ext cx="1688379" cy="1283817"/>
+          </a:xfrm>
+          <a:prstGeom prst="line">
+            <a:avLst/>
+          </a:prstGeom>
+          <a:ln w="44450">
+            <a:solidFill>
+              <a:srgbClr val="7030A0"/>
+            </a:solidFill>
+          </a:ln>
+        </p:spPr>
+        <p:style>
+          <a:lnRef idx="2">
+            <a:schemeClr val="accent1"/>
+          </a:lnRef>
+          <a:fillRef idx="0">
+            <a:schemeClr val="accent1"/>
+          </a:fillRef>
+          <a:effectRef idx="1">
+            <a:schemeClr val="accent1"/>
+          </a:effectRef>
+          <a:fontRef idx="minor">
+            <a:schemeClr val="tx1"/>
+          </a:fontRef>
+        </p:style>
+      </p:cxnSp>
+      <p:cxnSp>
+        <p:nvCxnSpPr>
+          <p:cNvPr id="38" name="Connector 37"/>
+          <p:cNvCxnSpPr/>
+          <p:nvPr/>
+        </p:nvCxnSpPr>
+        <p:spPr>
+          <a:xfrm flipV="1">
+            <a:off x="7715646" y="4498751"/>
+            <a:ext cx="1917519" cy="739846"/>
+          </a:xfrm>
+          <a:prstGeom prst="line">
+            <a:avLst/>
+          </a:prstGeom>
+          <a:ln w="15875">
+            <a:solidFill>
+              <a:srgbClr val="7030A0"/>
+            </a:solidFill>
+          </a:ln>
+        </p:spPr>
+        <p:style>
+          <a:lnRef idx="2">
+            <a:schemeClr val="accent1"/>
+          </a:lnRef>
+          <a:fillRef idx="0">
+            <a:schemeClr val="accent1"/>
+          </a:fillRef>
+          <a:effectRef idx="1">
+            <a:schemeClr val="accent1"/>
+          </a:effectRef>
+          <a:fontRef idx="minor">
+            <a:schemeClr val="tx1"/>
+          </a:fontRef>
+        </p:style>
+      </p:cxnSp>
+      <p:sp>
+        <p:nvSpPr>
+          <p:cNvPr id="39" name="Rounded Rectangle 38"/>
+          <p:cNvSpPr/>
+          <p:nvPr/>
+        </p:nvSpPr>
+        <p:spPr>
+          <a:xfrm>
+            <a:off x="9633165" y="4323151"/>
+            <a:ext cx="1230097" cy="351200"/>
+          </a:xfrm>
+          <a:prstGeom prst="roundRect">
+            <a:avLst>
+              <a:gd name="adj" fmla="val 50000"/>
+            </a:avLst>
+          </a:prstGeom>
+          <a:solidFill>
+            <a:srgbClr val="F3E8F7"/>
+          </a:solidFill>
+          <a:ln w="15875">
+            <a:solidFill>
+              <a:srgbClr val="7030A0"/>
+            </a:solidFill>
+          </a:ln>
+          <a:effectLst/>
+        </p:spPr>
+        <p:style>
+          <a:lnRef idx="1">
+            <a:schemeClr val="accent1"/>
+          </a:lnRef>
+          <a:fillRef idx="3">
+            <a:schemeClr val="accent1"/>
+          </a:fillRef>
+          <a:effectRef idx="2">
+            <a:schemeClr val="accent1"/>
+          </a:effectRef>
+          <a:fontRef idx="minor">
+            <a:schemeClr val="lt1"/>
+          </a:fontRef>
+        </p:style>
+        <p:txBody>
+          <a:bodyPr rtlCol="0" anchor="ctr" wrap="none" lIns="64000" rIns="64000" tIns="25400" bIns="25400"/>
+          <a:lstStyle/>
+          <a:p>
+            <a:pPr algn="ctr"/>
+            <a:r>
+              <a:rPr sz="1300" b="0">
+                <a:solidFill>
+                  <a:srgbClr val="000000"/>
+                </a:solidFill>
+                <a:latin typeface="Calibri"/>
+              </a:rPr>
+              <a:t>Từ Hán Việt</a:t>
+            </a:r>
+          </a:p>
+        </p:txBody>
+      </p:sp>
+      <p:cxnSp>
+        <p:nvCxnSpPr>
+          <p:cNvPr id="40" name="Connector 39"/>
+          <p:cNvCxnSpPr/>
+          <p:nvPr/>
+        </p:nvCxnSpPr>
+        <p:spPr>
+          <a:xfrm flipV="1">
+            <a:off x="7715646" y="4924841"/>
+            <a:ext cx="1511373" cy="313756"/>
+          </a:xfrm>
+          <a:prstGeom prst="line">
+            <a:avLst/>
+          </a:prstGeom>
+          <a:ln w="15875">
+            <a:solidFill>
+              <a:srgbClr val="7030A0"/>
+            </a:solidFill>
+          </a:ln>
+        </p:spPr>
+        <p:style>
+          <a:lnRef idx="2">
+            <a:schemeClr val="accent1"/>
+          </a:lnRef>
+          <a:fillRef idx="0">
+            <a:schemeClr val="accent1"/>
+          </a:fillRef>
+          <a:effectRef idx="1">
+            <a:schemeClr val="accent1"/>
+          </a:effectRef>
+          <a:fontRef idx="minor">
+            <a:schemeClr val="tx1"/>
+          </a:fontRef>
+        </p:style>
+      </p:cxnSp>
+      <p:sp>
+        <p:nvSpPr>
+          <p:cNvPr id="41" name="Rounded Rectangle 40"/>
+          <p:cNvSpPr/>
+          <p:nvPr/>
+        </p:nvSpPr>
+        <p:spPr>
+          <a:xfrm>
+            <a:off x="9227019" y="4749241"/>
+            <a:ext cx="2042389" cy="351200"/>
+          </a:xfrm>
+          <a:prstGeom prst="roundRect">
+            <a:avLst>
+              <a:gd name="adj" fmla="val 50000"/>
+            </a:avLst>
+          </a:prstGeom>
+          <a:solidFill>
+            <a:srgbClr val="F3E8F7"/>
+          </a:solidFill>
+          <a:ln w="15875">
+            <a:solidFill>
+              <a:srgbClr val="7030A0"/>
+            </a:solidFill>
+          </a:ln>
+          <a:effectLst/>
+        </p:spPr>
+        <p:style>
+          <a:lnRef idx="1">
+            <a:schemeClr val="accent1"/>
+          </a:lnRef>
+          <a:fillRef idx="3">
+            <a:schemeClr val="accent1"/>
+          </a:fillRef>
+          <a:effectRef idx="2">
+            <a:schemeClr val="accent1"/>
+          </a:effectRef>
+          <a:fontRef idx="minor">
+            <a:schemeClr val="lt1"/>
+          </a:fontRef>
+        </p:style>
+        <p:txBody>
+          <a:bodyPr rtlCol="0" anchor="ctr" wrap="none" lIns="64000" rIns="64000" tIns="25400" bIns="25400"/>
+          <a:lstStyle/>
+          <a:p>
+            <a:pPr algn="ctr"/>
+            <a:r>
+              <a:rPr sz="1300" b="1">
+                <a:solidFill>
+                  <a:srgbClr val="8B0000"/>
+                </a:solidFill>
+                <a:latin typeface="Calibri"/>
+              </a:rPr>
+              <a:t>NL phân tích truyện</a:t>
+            </a:r>
+          </a:p>
+        </p:txBody>
+      </p:sp>
+      <p:cxnSp>
+        <p:nvCxnSpPr>
+          <p:cNvPr id="42" name="Connector 41"/>
+          <p:cNvCxnSpPr/>
+          <p:nvPr/>
+        </p:nvCxnSpPr>
+        <p:spPr>
+          <a:xfrm>
+            <a:off x="7715646" y="5238597"/>
+            <a:ext cx="1445333" cy="112334"/>
+          </a:xfrm>
+          <a:prstGeom prst="line">
+            <a:avLst/>
+          </a:prstGeom>
+          <a:ln w="15875">
+            <a:solidFill>
+              <a:srgbClr val="7030A0"/>
+            </a:solidFill>
+          </a:ln>
+        </p:spPr>
+        <p:style>
+          <a:lnRef idx="2">
+            <a:schemeClr val="accent1"/>
+          </a:lnRef>
+          <a:fillRef idx="0">
+            <a:schemeClr val="accent1"/>
+          </a:fillRef>
+          <a:effectRef idx="1">
+            <a:schemeClr val="accent1"/>
+          </a:effectRef>
+          <a:fontRef idx="minor">
+            <a:schemeClr val="tx1"/>
+          </a:fontRef>
+        </p:style>
+      </p:cxnSp>
+      <p:sp>
+        <p:nvSpPr>
+          <p:cNvPr id="43" name="Rounded Rectangle 42"/>
+          <p:cNvSpPr/>
+          <p:nvPr/>
+        </p:nvSpPr>
+        <p:spPr>
+          <a:xfrm>
+            <a:off x="9160979" y="5175331"/>
+            <a:ext cx="2174469" cy="351200"/>
+          </a:xfrm>
+          <a:prstGeom prst="roundRect">
+            <a:avLst>
+              <a:gd name="adj" fmla="val 50000"/>
+            </a:avLst>
+          </a:prstGeom>
+          <a:solidFill>
+            <a:srgbClr val="F3E8F7"/>
+          </a:solidFill>
+          <a:ln w="15875">
+            <a:solidFill>
+              <a:srgbClr val="7030A0"/>
+            </a:solidFill>
+          </a:ln>
+          <a:effectLst/>
+        </p:spPr>
+        <p:style>
+          <a:lnRef idx="1">
+            <a:schemeClr val="accent1"/>
+          </a:lnRef>
+          <a:fillRef idx="3">
+            <a:schemeClr val="accent1"/>
+          </a:fillRef>
+          <a:effectRef idx="2">
+            <a:schemeClr val="accent1"/>
+          </a:effectRef>
+          <a:fontRef idx="minor">
+            <a:schemeClr val="lt1"/>
+          </a:fontRef>
+        </p:style>
+        <p:txBody>
+          <a:bodyPr rtlCol="0" anchor="ctr" wrap="none" lIns="64000" rIns="64000" tIns="25400" bIns="25400"/>
+          <a:lstStyle/>
+          <a:p>
+            <a:pPr algn="ctr"/>
+            <a:r>
+              <a:rPr sz="1300" b="0">
+                <a:solidFill>
+                  <a:srgbClr val="000000"/>
+                </a:solidFill>
+                <a:latin typeface="Calibri"/>
+              </a:rPr>
+              <a:t>Thuyết trình về truyện</a:t>
+            </a:r>
+          </a:p>
+        </p:txBody>
+      </p:sp>
+      <p:cxnSp>
+        <p:nvCxnSpPr>
+          <p:cNvPr id="44" name="Connector 43"/>
+          <p:cNvCxnSpPr/>
+          <p:nvPr/>
+        </p:nvCxnSpPr>
+        <p:spPr>
+          <a:xfrm>
+            <a:off x="7715646" y="5238597"/>
+            <a:ext cx="1617037" cy="639135"/>
+          </a:xfrm>
+          <a:prstGeom prst="line">
+            <a:avLst/>
+          </a:prstGeom>
+          <a:ln w="15875">
+            <a:solidFill>
+              <a:srgbClr val="7030A0"/>
+            </a:solidFill>
+          </a:ln>
+        </p:spPr>
+        <p:style>
+          <a:lnRef idx="2">
+            <a:schemeClr val="accent1"/>
+          </a:lnRef>
+          <a:fillRef idx="0">
+            <a:schemeClr val="accent1"/>
+          </a:fillRef>
+          <a:effectRef idx="1">
+            <a:schemeClr val="accent1"/>
+          </a:effectRef>
+          <a:fontRef idx="minor">
+            <a:schemeClr val="tx1"/>
+          </a:fontRef>
+        </p:style>
+      </p:cxnSp>
+      <p:sp>
+        <p:nvSpPr>
+          <p:cNvPr id="45" name="Rounded Rectangle 44"/>
+          <p:cNvSpPr/>
+          <p:nvPr/>
+        </p:nvSpPr>
+        <p:spPr>
+          <a:xfrm>
+            <a:off x="9332683" y="5601421"/>
+            <a:ext cx="1831061" cy="552622"/>
+          </a:xfrm>
+          <a:prstGeom prst="roundRect">
+            <a:avLst>
+              <a:gd name="adj" fmla="val 50000"/>
+            </a:avLst>
+          </a:prstGeom>
+          <a:solidFill>
+            <a:srgbClr val="F3E8F7"/>
+          </a:solidFill>
+          <a:ln w="15875">
+            <a:solidFill>
+              <a:srgbClr val="7030A0"/>
+            </a:solidFill>
+          </a:ln>
+          <a:effectLst/>
+        </p:spPr>
+        <p:style>
+          <a:lnRef idx="1">
+            <a:schemeClr val="accent1"/>
+          </a:lnRef>
+          <a:fillRef idx="3">
+            <a:schemeClr val="accent1"/>
+          </a:fillRef>
+          <a:effectRef idx="2">
+            <a:schemeClr val="accent1"/>
+          </a:effectRef>
+          <a:fontRef idx="minor">
+            <a:schemeClr val="lt1"/>
+          </a:fontRef>
+        </p:style>
+        <p:txBody>
+          <a:bodyPr rtlCol="0" anchor="ctr" wrap="none" lIns="64000" rIns="64000" tIns="25400" bIns="25400"/>
+          <a:lstStyle/>
+          <a:p>
+            <a:pPr algn="ctr"/>
+            <a:r>
+              <a:rPr sz="1300" b="0">
+                <a:solidFill>
+                  <a:srgbClr val="000000"/>
+                </a:solidFill>
+                <a:latin typeface="Calibri"/>
+              </a:rPr>
+              <a:t>Củng cố trực tuyến</a:t>
+            </a:r>
+          </a:p>
+          <a:p>
+            <a:pPr algn="ctr"/>
+            <a:r>
+              <a:rPr sz="1300" b="0">
+                <a:solidFill>
+                  <a:srgbClr val="000000"/>
+                </a:solidFill>
+                <a:latin typeface="Calibri"/>
+              </a:rPr>
+              <a:t>(QR)</a:t>
+            </a:r>
+          </a:p>
+        </p:txBody>
+      </p:sp>
+      <p:sp>
+        <p:nvSpPr>
+          <p:cNvPr id="46" name="Oval 45"/>
+          <p:cNvSpPr/>
+          <p:nvPr/>
+        </p:nvSpPr>
+        <p:spPr>
+          <a:xfrm>
+            <a:off x="6740679" y="4658216"/>
+            <a:ext cx="1949933" cy="1160762"/>
+          </a:xfrm>
+          <a:prstGeom prst="ellipse">
+            <a:avLst/>
+          </a:prstGeom>
+          <a:solidFill>
+            <a:srgbClr val="FFF2CC"/>
+          </a:solidFill>
+          <a:ln w="31750">
+            <a:solidFill>
+              <a:srgbClr val="BF8F00"/>
+            </a:solidFill>
+          </a:ln>
+          <a:effectLst/>
+        </p:spPr>
+        <p:style>
+          <a:lnRef idx="1">
+            <a:schemeClr val="accent1"/>
+          </a:lnRef>
+          <a:fillRef idx="3">
+            <a:schemeClr val="accent1"/>
+          </a:fillRef>
+          <a:effectRef idx="2">
+            <a:schemeClr val="accent1"/>
+          </a:effectRef>
+          <a:fontRef idx="minor">
+            <a:schemeClr val="lt1"/>
+          </a:fontRef>
+        </p:style>
+        <p:txBody>
+          <a:bodyPr rtlCol="0" anchor="ctr" wrap="none" lIns="64000" rIns="64000" tIns="25400" bIns="25400"/>
+          <a:lstStyle/>
+          <a:p>
+            <a:pPr algn="ctr"/>
+            <a:r>
+              <a:rPr sz="1500" b="1">
+                <a:solidFill>
+                  <a:srgbClr val="000000"/>
+                </a:solidFill>
+                <a:latin typeface="Calibri"/>
+              </a:rPr>
+              <a:t>④ Tiếng Việt</a:t>
+            </a:r>
+          </a:p>
+          <a:p>
+            <a:pPr algn="ctr"/>
+            <a:r>
+              <a:rPr sz="1500" b="1">
+                <a:solidFill>
+                  <a:srgbClr val="000000"/>
+                </a:solidFill>
+                <a:latin typeface="Calibri"/>
+              </a:rPr>
+              <a:t>– Viết –</a:t>
+            </a:r>
+          </a:p>
+          <a:p>
+            <a:pPr algn="ctr"/>
+            <a:r>
+              <a:rPr sz="1500" b="1">
+                <a:solidFill>
+                  <a:srgbClr val="000000"/>
+                </a:solidFill>
+                <a:latin typeface="Calibri"/>
+              </a:rPr>
+              <a:t>Nói</a:t>
+            </a:r>
+          </a:p>
+        </p:txBody>
+      </p:sp>
+      <p:sp>
+        <p:nvSpPr>
+          <p:cNvPr id="47" name="Oval 46"/>
+          <p:cNvSpPr/>
+          <p:nvPr/>
+        </p:nvSpPr>
+        <p:spPr>
+          <a:xfrm>
+            <a:off x="4862765" y="3484793"/>
+            <a:ext cx="2329003" cy="939972"/>
+          </a:xfrm>
+          <a:prstGeom prst="ellipse">
+            <a:avLst/>
+          </a:prstGeom>
+          <a:solidFill>
+            <a:srgbClr val="002060"/>
+          </a:solidFill>
+          <a:ln w="25400">
+            <a:solidFill>
+              <a:srgbClr val="000B1E"/>
+            </a:solidFill>
+          </a:ln>
+          <a:effectLst/>
+        </p:spPr>
+        <p:style>
+          <a:lnRef idx="1">
+            <a:schemeClr val="accent1"/>
+          </a:lnRef>
+          <a:fillRef idx="3">
+            <a:schemeClr val="accent1"/>
+          </a:fillRef>
+          <a:effectRef idx="2">
+            <a:schemeClr val="accent1"/>
+          </a:effectRef>
+          <a:fontRef idx="minor">
+            <a:schemeClr val="lt1"/>
+          </a:fontRef>
+        </p:style>
+        <p:txBody>
+          <a:bodyPr rtlCol="0" anchor="ctr" wrap="none" lIns="64000" rIns="64000" tIns="25400" bIns="25400"/>
+          <a:lstStyle/>
+          <a:p>
+            <a:pPr algn="ctr"/>
+            <a:r>
+              <a:rPr sz="1700" b="1">
+                <a:solidFill>
+                  <a:srgbClr val="FFFFFF"/>
+                </a:solidFill>
+                <a:latin typeface="Calibri"/>
+              </a:rPr>
+              <a:t>SỨC HẤP DẪN</a:t>
+            </a:r>
+          </a:p>
+          <a:p>
+            <a:pPr algn="ctr"/>
+            <a:r>
+              <a:rPr sz="1700" b="1">
+                <a:solidFill>
+                  <a:srgbClr val="FFFFFF"/>
+                </a:solidFill>
+                <a:latin typeface="Calibri"/>
+              </a:rPr>
+              <a:t>CỦA TRUYỆN KỂ</a:t>
+            </a:r>
+          </a:p>
+        </p:txBody>
+      </p:sp>
     </p:spTree>
   </p:cSld>
   <p:clrMapOvr>
